--- a/Lectures/12-features-and-imputation.pptx
+++ b/Lectures/12-features-and-imputation.pptx
@@ -5,7 +5,7 @@
     <p:sldMasterId id="2147483648" r:id="rId1"/>
   </p:sldMasterIdLst>
   <p:notesMasterIdLst>
-    <p:notesMasterId r:id="rId46"/>
+    <p:notesMasterId r:id="rId47"/>
   </p:notesMasterIdLst>
   <p:sldIdLst>
     <p:sldId id="256" r:id="rId2"/>
@@ -14,47 +14,51 @@
     <p:sldId id="318" r:id="rId5"/>
     <p:sldId id="499" r:id="rId6"/>
     <p:sldId id="497" r:id="rId7"/>
-    <p:sldId id="282" r:id="rId8"/>
-    <p:sldId id="274" r:id="rId9"/>
-    <p:sldId id="309" r:id="rId10"/>
-    <p:sldId id="301" r:id="rId11"/>
-    <p:sldId id="303" r:id="rId12"/>
-    <p:sldId id="320" r:id="rId13"/>
-    <p:sldId id="295" r:id="rId14"/>
-    <p:sldId id="505" r:id="rId15"/>
-    <p:sldId id="503" r:id="rId16"/>
-    <p:sldId id="478" r:id="rId17"/>
-    <p:sldId id="502" r:id="rId18"/>
-    <p:sldId id="522" r:id="rId19"/>
-    <p:sldId id="524" r:id="rId20"/>
-    <p:sldId id="525" r:id="rId21"/>
-    <p:sldId id="526" r:id="rId22"/>
-    <p:sldId id="514" r:id="rId23"/>
-    <p:sldId id="541" r:id="rId24"/>
-    <p:sldId id="542" r:id="rId25"/>
-    <p:sldId id="513" r:id="rId26"/>
-    <p:sldId id="515" r:id="rId27"/>
-    <p:sldId id="300" r:id="rId28"/>
-    <p:sldId id="302" r:id="rId29"/>
-    <p:sldId id="304" r:id="rId30"/>
-    <p:sldId id="277" r:id="rId31"/>
-    <p:sldId id="278" r:id="rId32"/>
-    <p:sldId id="280" r:id="rId33"/>
-    <p:sldId id="279" r:id="rId34"/>
-    <p:sldId id="306" r:id="rId35"/>
-    <p:sldId id="310" r:id="rId36"/>
-    <p:sldId id="312" r:id="rId37"/>
-    <p:sldId id="313" r:id="rId38"/>
-    <p:sldId id="317" r:id="rId39"/>
-    <p:sldId id="314" r:id="rId40"/>
-    <p:sldId id="316" r:id="rId41"/>
-    <p:sldId id="315" r:id="rId42"/>
-    <p:sldId id="322" r:id="rId43"/>
-    <p:sldId id="473" r:id="rId44"/>
-    <p:sldId id="504" r:id="rId45"/>
+    <p:sldId id="543" r:id="rId8"/>
+    <p:sldId id="544" r:id="rId9"/>
+    <p:sldId id="282" r:id="rId10"/>
+    <p:sldId id="266" r:id="rId11"/>
+    <p:sldId id="269" r:id="rId12"/>
+    <p:sldId id="268" r:id="rId13"/>
+    <p:sldId id="301" r:id="rId14"/>
+    <p:sldId id="303" r:id="rId15"/>
+    <p:sldId id="320" r:id="rId16"/>
+    <p:sldId id="503" r:id="rId17"/>
+    <p:sldId id="478" r:id="rId18"/>
+    <p:sldId id="502" r:id="rId19"/>
+    <p:sldId id="522" r:id="rId20"/>
+    <p:sldId id="524" r:id="rId21"/>
+    <p:sldId id="525" r:id="rId22"/>
+    <p:sldId id="526" r:id="rId23"/>
+    <p:sldId id="514" r:id="rId24"/>
+    <p:sldId id="541" r:id="rId25"/>
+    <p:sldId id="542" r:id="rId26"/>
+    <p:sldId id="513" r:id="rId27"/>
+    <p:sldId id="515" r:id="rId28"/>
+    <p:sldId id="300" r:id="rId29"/>
+    <p:sldId id="302" r:id="rId30"/>
+    <p:sldId id="304" r:id="rId31"/>
+    <p:sldId id="277" r:id="rId32"/>
+    <p:sldId id="278" r:id="rId33"/>
+    <p:sldId id="280" r:id="rId34"/>
+    <p:sldId id="279" r:id="rId35"/>
+    <p:sldId id="306" r:id="rId36"/>
+    <p:sldId id="310" r:id="rId37"/>
+    <p:sldId id="312" r:id="rId38"/>
+    <p:sldId id="313" r:id="rId39"/>
+    <p:sldId id="317" r:id="rId40"/>
+    <p:sldId id="314" r:id="rId41"/>
+    <p:sldId id="316" r:id="rId42"/>
+    <p:sldId id="315" r:id="rId43"/>
+    <p:sldId id="322" r:id="rId44"/>
+    <p:sldId id="292" r:id="rId45"/>
+    <p:sldId id="293" r:id="rId46"/>
   </p:sldIdLst>
   <p:sldSz cx="12192000" cy="6858000"/>
   <p:notesSz cx="6858000" cy="9144000"/>
+  <p:custDataLst>
+    <p:tags r:id="rId48"/>
+  </p:custDataLst>
   <p:defaultTextStyle>
     <a:defPPr marR="0" lvl="0" algn="l" rtl="0">
       <a:lnSpc>
@@ -289,7 +293,7 @@
       <p15:sldGuideLst xmlns:p15="http://schemas.microsoft.com/office/powerpoint/2012/main"/>
     </p:ext>
     <p:ext uri="http://customooxmlschemas.google.com/">
-      <go:slidesCustomData xmlns="" xmlns:mc="http://schemas.openxmlformats.org/markup-compatibility/2006" xmlns:mv="urn:schemas-microsoft-com:mac:vml" xmlns:c="http://schemas.openxmlformats.org/drawingml/2006/chart" xmlns:dgm="http://schemas.openxmlformats.org/drawingml/2006/diagram" xmlns:o="urn:schemas-microsoft-com:office:office" xmlns:v="urn:schemas-microsoft-com:vml" xmlns:pvml="urn:schemas-microsoft-com:office:powerpoint" xmlns:com="http://schemas.openxmlformats.org/drawingml/2006/compatibility" xmlns:p14="http://schemas.microsoft.com/office/powerpoint/2010/main" xmlns:p15="http://schemas.microsoft.com/office/powerpoint/2012/main" xmlns:go="http://customooxmlschemas.google.com/" r:id="rId47" roundtripDataSignature="AMtx7mjFyVUGRZWio+dc9dxzYsimUxNJbg=="/>
+      <go:slidesCustomData xmlns:go="http://customooxmlschemas.google.com/" xmlns:p15="http://schemas.microsoft.com/office/powerpoint/2012/main" xmlns:p14="http://schemas.microsoft.com/office/powerpoint/2010/main" xmlns:com="http://schemas.openxmlformats.org/drawingml/2006/compatibility" xmlns:pvml="urn:schemas-microsoft-com:office:powerpoint" xmlns:v="urn:schemas-microsoft-com:vml" xmlns:o="urn:schemas-microsoft-com:office:office" xmlns:dgm="http://schemas.openxmlformats.org/drawingml/2006/diagram" xmlns:c="http://schemas.openxmlformats.org/drawingml/2006/chart" xmlns:mv="urn:schemas-microsoft-com:mac:vml" xmlns:mc="http://schemas.openxmlformats.org/markup-compatibility/2006" xmlns="" r:id="rId49" roundtripDataSignature="AMtx7mjFyVUGRZWio+dc9dxzYsimUxNJbg=="/>
     </p:ext>
   </p:extLst>
 </p:presentation>
@@ -9620,6 +9624,452 @@
 </file>
 
 <file path=ppt/notesSlides/notesSlide3.xml><?xml version="1.0" encoding="utf-8"?>
+<p:notes xmlns:a="http://schemas.openxmlformats.org/drawingml/2006/main" xmlns:r="http://schemas.openxmlformats.org/officeDocument/2006/relationships" xmlns:p="http://schemas.openxmlformats.org/presentationml/2006/main" showMasterSp="0" showMasterPhAnim="0">
+  <p:cSld>
+    <p:spTree>
+      <p:nvGrpSpPr>
+        <p:cNvPr id="1" name="Shape 258"/>
+        <p:cNvGrpSpPr/>
+        <p:nvPr/>
+      </p:nvGrpSpPr>
+      <p:grpSpPr>
+        <a:xfrm>
+          <a:off x="0" y="0"/>
+          <a:ext cx="0" cy="0"/>
+          <a:chOff x="0" y="0"/>
+          <a:chExt cx="0" cy="0"/>
+        </a:xfrm>
+      </p:grpSpPr>
+      <p:sp>
+        <p:nvSpPr>
+          <p:cNvPr id="259" name="Google Shape;259;h5b8da6dea114c37c_0_0:notes"/>
+          <p:cNvSpPr>
+            <a:spLocks noGrp="1" noRot="1" noChangeAspect="1"/>
+          </p:cNvSpPr>
+          <p:nvPr>
+            <p:ph type="sldImg" idx="2"/>
+          </p:nvPr>
+        </p:nvSpPr>
+        <p:spPr>
+          <a:xfrm>
+            <a:off x="381000" y="685800"/>
+            <a:ext cx="6096000" cy="3429000"/>
+          </a:xfrm>
+          <a:custGeom>
+            <a:avLst/>
+            <a:gdLst/>
+            <a:ahLst/>
+            <a:cxnLst/>
+            <a:rect l="l" t="t" r="r" b="b"/>
+            <a:pathLst>
+              <a:path w="120000" h="120000" extrusionOk="0">
+                <a:moveTo>
+                  <a:pt x="0" y="0"/>
+                </a:moveTo>
+                <a:lnTo>
+                  <a:pt x="120000" y="0"/>
+                </a:lnTo>
+                <a:lnTo>
+                  <a:pt x="120000" y="120000"/>
+                </a:lnTo>
+                <a:lnTo>
+                  <a:pt x="0" y="120000"/>
+                </a:lnTo>
+                <a:close/>
+              </a:path>
+            </a:pathLst>
+          </a:custGeom>
+        </p:spPr>
+      </p:sp>
+      <p:sp>
+        <p:nvSpPr>
+          <p:cNvPr id="260" name="Google Shape;260;h5b8da6dea114c37c_0_0:notes"/>
+          <p:cNvSpPr txBox="1">
+            <a:spLocks noGrp="1"/>
+          </p:cNvSpPr>
+          <p:nvPr>
+            <p:ph type="body" idx="1"/>
+          </p:nvPr>
+        </p:nvSpPr>
+        <p:spPr>
+          <a:xfrm>
+            <a:off x="685800" y="4343400"/>
+            <a:ext cx="5486400" cy="4114800"/>
+          </a:xfrm>
+          <a:prstGeom prst="rect">
+            <a:avLst/>
+          </a:prstGeom>
+        </p:spPr>
+        <p:txBody>
+          <a:bodyPr spcFirstLastPara="1" wrap="square" lIns="91425" tIns="91425" rIns="91425" bIns="91425" anchor="t" anchorCtr="0">
+            <a:noAutofit/>
+          </a:bodyPr>
+          <a:lstStyle/>
+          <a:p>
+            <a:pPr marL="0" lvl="0" indent="0" algn="l" rtl="0">
+              <a:spcBef>
+                <a:spcPts val="0"/>
+              </a:spcBef>
+              <a:spcAft>
+                <a:spcPts val="0"/>
+              </a:spcAft>
+              <a:buNone/>
+            </a:pPr>
+            <a:endParaRPr/>
+          </a:p>
+        </p:txBody>
+      </p:sp>
+    </p:spTree>
+  </p:cSld>
+  <p:clrMapOvr>
+    <a:masterClrMapping/>
+  </p:clrMapOvr>
+</p:notes>
+</file>
+
+<file path=ppt/notesSlides/notesSlide4.xml><?xml version="1.0" encoding="utf-8"?>
+<p:notes xmlns:a="http://schemas.openxmlformats.org/drawingml/2006/main" xmlns:r="http://schemas.openxmlformats.org/officeDocument/2006/relationships" xmlns:p="http://schemas.openxmlformats.org/presentationml/2006/main" showMasterSp="0" showMasterPhAnim="0">
+  <p:cSld>
+    <p:spTree>
+      <p:nvGrpSpPr>
+        <p:cNvPr id="1" name="Shape 277"/>
+        <p:cNvGrpSpPr/>
+        <p:nvPr/>
+      </p:nvGrpSpPr>
+      <p:grpSpPr>
+        <a:xfrm>
+          <a:off x="0" y="0"/>
+          <a:ext cx="0" cy="0"/>
+          <a:chOff x="0" y="0"/>
+          <a:chExt cx="0" cy="0"/>
+        </a:xfrm>
+      </p:grpSpPr>
+      <p:sp>
+        <p:nvSpPr>
+          <p:cNvPr id="278" name="Google Shape;278;g3fbf111a05e_3_135:notes"/>
+          <p:cNvSpPr>
+            <a:spLocks noGrp="1" noRot="1" noChangeAspect="1"/>
+          </p:cNvSpPr>
+          <p:nvPr>
+            <p:ph type="sldImg" idx="2"/>
+          </p:nvPr>
+        </p:nvSpPr>
+        <p:spPr>
+          <a:xfrm>
+            <a:off x="685800" y="1143000"/>
+            <a:ext cx="5486400" cy="3086100"/>
+          </a:xfrm>
+          <a:custGeom>
+            <a:avLst/>
+            <a:gdLst/>
+            <a:ahLst/>
+            <a:cxnLst/>
+            <a:rect l="l" t="t" r="r" b="b"/>
+            <a:pathLst>
+              <a:path w="120000" h="120000" extrusionOk="0">
+                <a:moveTo>
+                  <a:pt x="0" y="0"/>
+                </a:moveTo>
+                <a:lnTo>
+                  <a:pt x="120000" y="0"/>
+                </a:lnTo>
+                <a:lnTo>
+                  <a:pt x="120000" y="120000"/>
+                </a:lnTo>
+                <a:lnTo>
+                  <a:pt x="0" y="120000"/>
+                </a:lnTo>
+                <a:close/>
+              </a:path>
+            </a:pathLst>
+          </a:custGeom>
+          <a:noFill/>
+          <a:ln w="12700" cap="flat" cmpd="sng">
+            <a:solidFill>
+              <a:srgbClr val="000000"/>
+            </a:solidFill>
+            <a:prstDash val="solid"/>
+            <a:round/>
+            <a:headEnd type="none" w="sm" len="sm"/>
+            <a:tailEnd type="none" w="sm" len="sm"/>
+          </a:ln>
+        </p:spPr>
+      </p:sp>
+      <p:sp>
+        <p:nvSpPr>
+          <p:cNvPr id="279" name="Google Shape;279;g3fbf111a05e_3_135:notes"/>
+          <p:cNvSpPr txBox="1">
+            <a:spLocks noGrp="1"/>
+          </p:cNvSpPr>
+          <p:nvPr>
+            <p:ph type="body" idx="1"/>
+          </p:nvPr>
+        </p:nvSpPr>
+        <p:spPr>
+          <a:xfrm>
+            <a:off x="685800" y="4400550"/>
+            <a:ext cx="5486400" cy="3600450"/>
+          </a:xfrm>
+          <a:prstGeom prst="rect">
+            <a:avLst/>
+          </a:prstGeom>
+          <a:noFill/>
+          <a:ln>
+            <a:noFill/>
+          </a:ln>
+        </p:spPr>
+        <p:txBody>
+          <a:bodyPr spcFirstLastPara="1" wrap="square" lIns="91425" tIns="45700" rIns="91425" bIns="45700" anchor="t" anchorCtr="0">
+            <a:noAutofit/>
+          </a:bodyPr>
+          <a:lstStyle/>
+          <a:p>
+            <a:pPr marL="457200" marR="0" lvl="0" indent="-228600" algn="l" rtl="0">
+              <a:lnSpc>
+                <a:spcPct val="100000"/>
+              </a:lnSpc>
+              <a:spcBef>
+                <a:spcPts val="0"/>
+              </a:spcBef>
+              <a:spcAft>
+                <a:spcPts val="0"/>
+              </a:spcAft>
+              <a:buSzPts val="1400"/>
+              <a:buNone/>
+            </a:pPr>
+            <a:endParaRPr/>
+          </a:p>
+        </p:txBody>
+      </p:sp>
+      <p:sp>
+        <p:nvSpPr>
+          <p:cNvPr id="280" name="Google Shape;280;g3fbf111a05e_3_135:notes"/>
+          <p:cNvSpPr txBox="1">
+            <a:spLocks noGrp="1"/>
+          </p:cNvSpPr>
+          <p:nvPr>
+            <p:ph type="sldNum" idx="12"/>
+          </p:nvPr>
+        </p:nvSpPr>
+        <p:spPr>
+          <a:xfrm>
+            <a:off x="3884613" y="8685213"/>
+            <a:ext cx="2971800" cy="458787"/>
+          </a:xfrm>
+          <a:prstGeom prst="rect">
+            <a:avLst/>
+          </a:prstGeom>
+          <a:noFill/>
+          <a:ln>
+            <a:noFill/>
+          </a:ln>
+        </p:spPr>
+        <p:txBody>
+          <a:bodyPr spcFirstLastPara="1" wrap="square" lIns="91425" tIns="45700" rIns="91425" bIns="45700" anchor="b" anchorCtr="0">
+            <a:noAutofit/>
+          </a:bodyPr>
+          <a:lstStyle/>
+          <a:p>
+            <a:pPr marL="0" lvl="0" indent="0" algn="l" rtl="0">
+              <a:lnSpc>
+                <a:spcPct val="100000"/>
+              </a:lnSpc>
+              <a:spcBef>
+                <a:spcPts val="0"/>
+              </a:spcBef>
+              <a:spcAft>
+                <a:spcPts val="0"/>
+              </a:spcAft>
+              <a:buNone/>
+            </a:pPr>
+            <a:fld id="{00000000-1234-1234-1234-123412341234}" type="slidenum">
+              <a:rPr lang="en"/>
+              <a:t>11</a:t>
+            </a:fld>
+            <a:endParaRPr/>
+          </a:p>
+        </p:txBody>
+      </p:sp>
+    </p:spTree>
+  </p:cSld>
+  <p:clrMapOvr>
+    <a:masterClrMapping/>
+  </p:clrMapOvr>
+</p:notes>
+</file>
+
+<file path=ppt/notesSlides/notesSlide5.xml><?xml version="1.0" encoding="utf-8"?>
+<p:notes xmlns:a="http://schemas.openxmlformats.org/drawingml/2006/main" xmlns:r="http://schemas.openxmlformats.org/officeDocument/2006/relationships" xmlns:p="http://schemas.openxmlformats.org/presentationml/2006/main" showMasterSp="0" showMasterPhAnim="0">
+  <p:cSld>
+    <p:spTree>
+      <p:nvGrpSpPr>
+        <p:cNvPr id="1" name="Shape 270"/>
+        <p:cNvGrpSpPr/>
+        <p:nvPr/>
+      </p:nvGrpSpPr>
+      <p:grpSpPr>
+        <a:xfrm>
+          <a:off x="0" y="0"/>
+          <a:ext cx="0" cy="0"/>
+          <a:chOff x="0" y="0"/>
+          <a:chExt cx="0" cy="0"/>
+        </a:xfrm>
+      </p:grpSpPr>
+      <p:sp>
+        <p:nvSpPr>
+          <p:cNvPr id="271" name="Google Shape;271;g3fbf111a05e_3_129:notes"/>
+          <p:cNvSpPr>
+            <a:spLocks noGrp="1" noRot="1" noChangeAspect="1"/>
+          </p:cNvSpPr>
+          <p:nvPr>
+            <p:ph type="sldImg" idx="2"/>
+          </p:nvPr>
+        </p:nvSpPr>
+        <p:spPr>
+          <a:xfrm>
+            <a:off x="685800" y="1143000"/>
+            <a:ext cx="5486400" cy="3086100"/>
+          </a:xfrm>
+          <a:custGeom>
+            <a:avLst/>
+            <a:gdLst/>
+            <a:ahLst/>
+            <a:cxnLst/>
+            <a:rect l="l" t="t" r="r" b="b"/>
+            <a:pathLst>
+              <a:path w="120000" h="120000" extrusionOk="0">
+                <a:moveTo>
+                  <a:pt x="0" y="0"/>
+                </a:moveTo>
+                <a:lnTo>
+                  <a:pt x="120000" y="0"/>
+                </a:lnTo>
+                <a:lnTo>
+                  <a:pt x="120000" y="120000"/>
+                </a:lnTo>
+                <a:lnTo>
+                  <a:pt x="0" y="120000"/>
+                </a:lnTo>
+                <a:close/>
+              </a:path>
+            </a:pathLst>
+          </a:custGeom>
+          <a:noFill/>
+          <a:ln w="12700" cap="flat" cmpd="sng">
+            <a:solidFill>
+              <a:srgbClr val="000000"/>
+            </a:solidFill>
+            <a:prstDash val="solid"/>
+            <a:round/>
+            <a:headEnd type="none" w="sm" len="sm"/>
+            <a:tailEnd type="none" w="sm" len="sm"/>
+          </a:ln>
+        </p:spPr>
+      </p:sp>
+      <p:sp>
+        <p:nvSpPr>
+          <p:cNvPr id="272" name="Google Shape;272;g3fbf111a05e_3_129:notes"/>
+          <p:cNvSpPr txBox="1">
+            <a:spLocks noGrp="1"/>
+          </p:cNvSpPr>
+          <p:nvPr>
+            <p:ph type="body" idx="1"/>
+          </p:nvPr>
+        </p:nvSpPr>
+        <p:spPr>
+          <a:xfrm>
+            <a:off x="685800" y="4400550"/>
+            <a:ext cx="5486400" cy="3600450"/>
+          </a:xfrm>
+          <a:prstGeom prst="rect">
+            <a:avLst/>
+          </a:prstGeom>
+          <a:noFill/>
+          <a:ln>
+            <a:noFill/>
+          </a:ln>
+        </p:spPr>
+        <p:txBody>
+          <a:bodyPr spcFirstLastPara="1" wrap="square" lIns="91425" tIns="45700" rIns="91425" bIns="45700" anchor="t" anchorCtr="0">
+            <a:noAutofit/>
+          </a:bodyPr>
+          <a:lstStyle/>
+          <a:p>
+            <a:pPr marL="457200" marR="0" lvl="0" indent="-228600" algn="l" rtl="0">
+              <a:lnSpc>
+                <a:spcPct val="100000"/>
+              </a:lnSpc>
+              <a:spcBef>
+                <a:spcPts val="0"/>
+              </a:spcBef>
+              <a:spcAft>
+                <a:spcPts val="0"/>
+              </a:spcAft>
+              <a:buSzPts val="1400"/>
+              <a:buNone/>
+            </a:pPr>
+            <a:endParaRPr/>
+          </a:p>
+        </p:txBody>
+      </p:sp>
+      <p:sp>
+        <p:nvSpPr>
+          <p:cNvPr id="273" name="Google Shape;273;g3fbf111a05e_3_129:notes"/>
+          <p:cNvSpPr txBox="1">
+            <a:spLocks noGrp="1"/>
+          </p:cNvSpPr>
+          <p:nvPr>
+            <p:ph type="sldNum" idx="12"/>
+          </p:nvPr>
+        </p:nvSpPr>
+        <p:spPr>
+          <a:xfrm>
+            <a:off x="3884613" y="8685213"/>
+            <a:ext cx="2971800" cy="458787"/>
+          </a:xfrm>
+          <a:prstGeom prst="rect">
+            <a:avLst/>
+          </a:prstGeom>
+          <a:noFill/>
+          <a:ln>
+            <a:noFill/>
+          </a:ln>
+        </p:spPr>
+        <p:txBody>
+          <a:bodyPr spcFirstLastPara="1" wrap="square" lIns="91425" tIns="45700" rIns="91425" bIns="45700" anchor="b" anchorCtr="0">
+            <a:noAutofit/>
+          </a:bodyPr>
+          <a:lstStyle/>
+          <a:p>
+            <a:pPr marL="0" lvl="0" indent="0" algn="l" rtl="0">
+              <a:lnSpc>
+                <a:spcPct val="100000"/>
+              </a:lnSpc>
+              <a:spcBef>
+                <a:spcPts val="0"/>
+              </a:spcBef>
+              <a:spcAft>
+                <a:spcPts val="0"/>
+              </a:spcAft>
+              <a:buNone/>
+            </a:pPr>
+            <a:fld id="{00000000-1234-1234-1234-123412341234}" type="slidenum">
+              <a:rPr lang="en"/>
+              <a:t>12</a:t>
+            </a:fld>
+            <a:endParaRPr/>
+          </a:p>
+        </p:txBody>
+      </p:sp>
+    </p:spTree>
+  </p:cSld>
+  <p:clrMapOvr>
+    <a:masterClrMapping/>
+  </p:clrMapOvr>
+</p:notes>
+</file>
+
+<file path=ppt/notesSlides/notesSlide6.xml><?xml version="1.0" encoding="utf-8"?>
 <p:notes xmlns:a="http://schemas.openxmlformats.org/drawingml/2006/main" xmlns:r="http://schemas.openxmlformats.org/officeDocument/2006/relationships" xmlns:p="http://schemas.openxmlformats.org/presentationml/2006/main">
   <p:cSld>
     <p:spTree>
@@ -9663,174 +10113,6 @@
           <a:bodyPr/>
           <a:lstStyle/>
           <a:p>
-            <a:endParaRPr lang="en-US" dirty="0"/>
-          </a:p>
-        </p:txBody>
-      </p:sp>
-      <p:sp>
-        <p:nvSpPr>
-          <p:cNvPr id="4" name="Slide Number Placeholder 3"/>
-          <p:cNvSpPr>
-            <a:spLocks noGrp="1"/>
-          </p:cNvSpPr>
-          <p:nvPr>
-            <p:ph type="sldNum" sz="quarter" idx="10"/>
-          </p:nvPr>
-        </p:nvSpPr>
-        <p:spPr/>
-        <p:txBody>
-          <a:bodyPr/>
-          <a:lstStyle/>
-          <a:p>
-            <a:fld id="{87916DAE-669F-3546-9A68-DB1260F5EB98}" type="slidenum">
-              <a:rPr lang="en-US" smtClean="0"/>
-              <a:t>8</a:t>
-            </a:fld>
-            <a:endParaRPr lang="en-US"/>
-          </a:p>
-        </p:txBody>
-      </p:sp>
-    </p:spTree>
-    <p:extLst>
-      <p:ext uri="{BB962C8B-B14F-4D97-AF65-F5344CB8AC3E}">
-        <p14:creationId xmlns:p14="http://schemas.microsoft.com/office/powerpoint/2010/main" val="4228602113"/>
-      </p:ext>
-    </p:extLst>
-  </p:cSld>
-  <p:clrMapOvr>
-    <a:masterClrMapping/>
-  </p:clrMapOvr>
-</p:notes>
-</file>
-
-<file path=ppt/notesSlides/notesSlide4.xml><?xml version="1.0" encoding="utf-8"?>
-<p:notes xmlns:a="http://schemas.openxmlformats.org/drawingml/2006/main" xmlns:r="http://schemas.openxmlformats.org/officeDocument/2006/relationships" xmlns:p="http://schemas.openxmlformats.org/presentationml/2006/main">
-  <p:cSld>
-    <p:spTree>
-      <p:nvGrpSpPr>
-        <p:cNvPr id="1" name=""/>
-        <p:cNvGrpSpPr/>
-        <p:nvPr/>
-      </p:nvGrpSpPr>
-      <p:grpSpPr>
-        <a:xfrm>
-          <a:off x="0" y="0"/>
-          <a:ext cx="0" cy="0"/>
-          <a:chOff x="0" y="0"/>
-          <a:chExt cx="0" cy="0"/>
-        </a:xfrm>
-      </p:grpSpPr>
-      <p:sp>
-        <p:nvSpPr>
-          <p:cNvPr id="2" name="Slide Image Placeholder 1"/>
-          <p:cNvSpPr>
-            <a:spLocks noGrp="1" noRot="1" noChangeAspect="1"/>
-          </p:cNvSpPr>
-          <p:nvPr>
-            <p:ph type="sldImg"/>
-          </p:nvPr>
-        </p:nvSpPr>
-        <p:spPr/>
-      </p:sp>
-      <p:sp>
-        <p:nvSpPr>
-          <p:cNvPr id="3" name="Notes Placeholder 2"/>
-          <p:cNvSpPr>
-            <a:spLocks noGrp="1"/>
-          </p:cNvSpPr>
-          <p:nvPr>
-            <p:ph type="body" idx="1"/>
-          </p:nvPr>
-        </p:nvSpPr>
-        <p:spPr/>
-        <p:txBody>
-          <a:bodyPr/>
-          <a:lstStyle/>
-          <a:p>
-            <a:endParaRPr lang="en-US" dirty="0"/>
-          </a:p>
-        </p:txBody>
-      </p:sp>
-      <p:sp>
-        <p:nvSpPr>
-          <p:cNvPr id="4" name="Slide Number Placeholder 3"/>
-          <p:cNvSpPr>
-            <a:spLocks noGrp="1"/>
-          </p:cNvSpPr>
-          <p:nvPr>
-            <p:ph type="sldNum" sz="quarter" idx="10"/>
-          </p:nvPr>
-        </p:nvSpPr>
-        <p:spPr/>
-        <p:txBody>
-          <a:bodyPr/>
-          <a:lstStyle/>
-          <a:p>
-            <a:fld id="{87916DAE-669F-3546-9A68-DB1260F5EB98}" type="slidenum">
-              <a:rPr lang="en-US" smtClean="0"/>
-              <a:t>9</a:t>
-            </a:fld>
-            <a:endParaRPr lang="en-US"/>
-          </a:p>
-        </p:txBody>
-      </p:sp>
-    </p:spTree>
-    <p:extLst>
-      <p:ext uri="{BB962C8B-B14F-4D97-AF65-F5344CB8AC3E}">
-        <p14:creationId xmlns:p14="http://schemas.microsoft.com/office/powerpoint/2010/main" val="2596384143"/>
-      </p:ext>
-    </p:extLst>
-  </p:cSld>
-  <p:clrMapOvr>
-    <a:masterClrMapping/>
-  </p:clrMapOvr>
-</p:notes>
-</file>
-
-<file path=ppt/notesSlides/notesSlide5.xml><?xml version="1.0" encoding="utf-8"?>
-<p:notes xmlns:a="http://schemas.openxmlformats.org/drawingml/2006/main" xmlns:r="http://schemas.openxmlformats.org/officeDocument/2006/relationships" xmlns:p="http://schemas.openxmlformats.org/presentationml/2006/main">
-  <p:cSld>
-    <p:spTree>
-      <p:nvGrpSpPr>
-        <p:cNvPr id="1" name=""/>
-        <p:cNvGrpSpPr/>
-        <p:nvPr/>
-      </p:nvGrpSpPr>
-      <p:grpSpPr>
-        <a:xfrm>
-          <a:off x="0" y="0"/>
-          <a:ext cx="0" cy="0"/>
-          <a:chOff x="0" y="0"/>
-          <a:chExt cx="0" cy="0"/>
-        </a:xfrm>
-      </p:grpSpPr>
-      <p:sp>
-        <p:nvSpPr>
-          <p:cNvPr id="2" name="Slide Image Placeholder 1"/>
-          <p:cNvSpPr>
-            <a:spLocks noGrp="1" noRot="1" noChangeAspect="1"/>
-          </p:cNvSpPr>
-          <p:nvPr>
-            <p:ph type="sldImg"/>
-          </p:nvPr>
-        </p:nvSpPr>
-        <p:spPr/>
-      </p:sp>
-      <p:sp>
-        <p:nvSpPr>
-          <p:cNvPr id="3" name="Notes Placeholder 2"/>
-          <p:cNvSpPr>
-            <a:spLocks noGrp="1"/>
-          </p:cNvSpPr>
-          <p:nvPr>
-            <p:ph type="body" idx="1"/>
-          </p:nvPr>
-        </p:nvSpPr>
-        <p:spPr/>
-        <p:txBody>
-          <a:bodyPr/>
-          <a:lstStyle/>
-          <a:p>
             <a:r>
               <a:rPr lang="en-US" dirty="0"/>
               <a:t>Only reviewed briefly in class – should pick back up here + </a:t>
@@ -9884,7 +10166,7 @@
                 <a:cs typeface="Calibri"/>
                 <a:sym typeface="Calibri"/>
               </a:rPr>
-              <a:t>15</a:t>
+              <a:t>16</a:t>
             </a:fld>
             <a:endParaRPr lang="en-US" sz="1200" b="0" i="0" u="none" strike="noStrike" cap="none">
               <a:solidFill>
@@ -9904,6 +10186,214 @@
         <p14:creationId xmlns:p14="http://schemas.microsoft.com/office/powerpoint/2010/main" val="3414306"/>
       </p:ext>
     </p:extLst>
+  </p:cSld>
+  <p:clrMapOvr>
+    <a:masterClrMapping/>
+  </p:clrMapOvr>
+</p:notes>
+</file>
+
+<file path=ppt/notesSlides/notesSlide7.xml><?xml version="1.0" encoding="utf-8"?>
+<p:notes xmlns:a="http://schemas.openxmlformats.org/drawingml/2006/main" xmlns:r="http://schemas.openxmlformats.org/officeDocument/2006/relationships" xmlns:p="http://schemas.openxmlformats.org/presentationml/2006/main" showMasterSp="0" showMasterPhAnim="0">
+  <p:cSld>
+    <p:spTree>
+      <p:nvGrpSpPr>
+        <p:cNvPr id="1" name="Shape 444"/>
+        <p:cNvGrpSpPr/>
+        <p:nvPr/>
+      </p:nvGrpSpPr>
+      <p:grpSpPr>
+        <a:xfrm>
+          <a:off x="0" y="0"/>
+          <a:ext cx="0" cy="0"/>
+          <a:chOff x="0" y="0"/>
+          <a:chExt cx="0" cy="0"/>
+        </a:xfrm>
+      </p:grpSpPr>
+      <p:sp>
+        <p:nvSpPr>
+          <p:cNvPr id="445" name="Google Shape;445;g3fbf111a05e_3_304:notes"/>
+          <p:cNvSpPr txBox="1">
+            <a:spLocks noGrp="1"/>
+          </p:cNvSpPr>
+          <p:nvPr>
+            <p:ph type="body" idx="1"/>
+          </p:nvPr>
+        </p:nvSpPr>
+        <p:spPr>
+          <a:xfrm>
+            <a:off x="685800" y="4400550"/>
+            <a:ext cx="5486400" cy="3600450"/>
+          </a:xfrm>
+          <a:prstGeom prst="rect">
+            <a:avLst/>
+          </a:prstGeom>
+        </p:spPr>
+        <p:txBody>
+          <a:bodyPr spcFirstLastPara="1" wrap="square" lIns="91425" tIns="91425" rIns="91425" bIns="91425" anchor="t" anchorCtr="0">
+            <a:noAutofit/>
+          </a:bodyPr>
+          <a:lstStyle/>
+          <a:p>
+            <a:pPr marL="0" lvl="0" indent="0" algn="l" rtl="0">
+              <a:spcBef>
+                <a:spcPts val="0"/>
+              </a:spcBef>
+              <a:spcAft>
+                <a:spcPts val="0"/>
+              </a:spcAft>
+              <a:buNone/>
+            </a:pPr>
+            <a:endParaRPr/>
+          </a:p>
+        </p:txBody>
+      </p:sp>
+      <p:sp>
+        <p:nvSpPr>
+          <p:cNvPr id="446" name="Google Shape;446;g3fbf111a05e_3_304:notes"/>
+          <p:cNvSpPr>
+            <a:spLocks noGrp="1" noRot="1" noChangeAspect="1"/>
+          </p:cNvSpPr>
+          <p:nvPr>
+            <p:ph type="sldImg" idx="2"/>
+          </p:nvPr>
+        </p:nvSpPr>
+        <p:spPr>
+          <a:xfrm>
+            <a:off x="685800" y="1143000"/>
+            <a:ext cx="5486400" cy="3086100"/>
+          </a:xfrm>
+          <a:custGeom>
+            <a:avLst/>
+            <a:gdLst/>
+            <a:ahLst/>
+            <a:cxnLst/>
+            <a:rect l="l" t="t" r="r" b="b"/>
+            <a:pathLst>
+              <a:path w="120000" h="120000" extrusionOk="0">
+                <a:moveTo>
+                  <a:pt x="0" y="0"/>
+                </a:moveTo>
+                <a:lnTo>
+                  <a:pt x="120000" y="0"/>
+                </a:lnTo>
+                <a:lnTo>
+                  <a:pt x="120000" y="120000"/>
+                </a:lnTo>
+                <a:lnTo>
+                  <a:pt x="0" y="120000"/>
+                </a:lnTo>
+                <a:close/>
+              </a:path>
+            </a:pathLst>
+          </a:custGeom>
+        </p:spPr>
+      </p:sp>
+    </p:spTree>
+  </p:cSld>
+  <p:clrMapOvr>
+    <a:masterClrMapping/>
+  </p:clrMapOvr>
+</p:notes>
+</file>
+
+<file path=ppt/notesSlides/notesSlide8.xml><?xml version="1.0" encoding="utf-8"?>
+<p:notes xmlns:a="http://schemas.openxmlformats.org/drawingml/2006/main" xmlns:r="http://schemas.openxmlformats.org/officeDocument/2006/relationships" xmlns:p="http://schemas.openxmlformats.org/presentationml/2006/main" showMasterSp="0" showMasterPhAnim="0">
+  <p:cSld>
+    <p:spTree>
+      <p:nvGrpSpPr>
+        <p:cNvPr id="1" name="Shape 450"/>
+        <p:cNvGrpSpPr/>
+        <p:nvPr/>
+      </p:nvGrpSpPr>
+      <p:grpSpPr>
+        <a:xfrm>
+          <a:off x="0" y="0"/>
+          <a:ext cx="0" cy="0"/>
+          <a:chOff x="0" y="0"/>
+          <a:chExt cx="0" cy="0"/>
+        </a:xfrm>
+      </p:grpSpPr>
+      <p:sp>
+        <p:nvSpPr>
+          <p:cNvPr id="451" name="Google Shape;451;g3fbf111a05e_4_0:notes"/>
+          <p:cNvSpPr>
+            <a:spLocks noGrp="1" noRot="1" noChangeAspect="1"/>
+          </p:cNvSpPr>
+          <p:nvPr>
+            <p:ph type="sldImg" idx="2"/>
+          </p:nvPr>
+        </p:nvSpPr>
+        <p:spPr>
+          <a:xfrm>
+            <a:off x="381300" y="685800"/>
+            <a:ext cx="6096000" cy="3429000"/>
+          </a:xfrm>
+          <a:custGeom>
+            <a:avLst/>
+            <a:gdLst/>
+            <a:ahLst/>
+            <a:cxnLst/>
+            <a:rect l="l" t="t" r="r" b="b"/>
+            <a:pathLst>
+              <a:path w="120000" h="120000" extrusionOk="0">
+                <a:moveTo>
+                  <a:pt x="0" y="0"/>
+                </a:moveTo>
+                <a:lnTo>
+                  <a:pt x="120000" y="0"/>
+                </a:lnTo>
+                <a:lnTo>
+                  <a:pt x="120000" y="120000"/>
+                </a:lnTo>
+                <a:lnTo>
+                  <a:pt x="0" y="120000"/>
+                </a:lnTo>
+                <a:close/>
+              </a:path>
+            </a:pathLst>
+          </a:custGeom>
+        </p:spPr>
+      </p:sp>
+      <p:sp>
+        <p:nvSpPr>
+          <p:cNvPr id="452" name="Google Shape;452;g3fbf111a05e_4_0:notes"/>
+          <p:cNvSpPr txBox="1">
+            <a:spLocks noGrp="1"/>
+          </p:cNvSpPr>
+          <p:nvPr>
+            <p:ph type="body" idx="1"/>
+          </p:nvPr>
+        </p:nvSpPr>
+        <p:spPr>
+          <a:xfrm>
+            <a:off x="685800" y="4343400"/>
+            <a:ext cx="5486400" cy="4114800"/>
+          </a:xfrm>
+          <a:prstGeom prst="rect">
+            <a:avLst/>
+          </a:prstGeom>
+        </p:spPr>
+        <p:txBody>
+          <a:bodyPr spcFirstLastPara="1" wrap="square" lIns="91425" tIns="91425" rIns="91425" bIns="91425" anchor="t" anchorCtr="0">
+            <a:noAutofit/>
+          </a:bodyPr>
+          <a:lstStyle/>
+          <a:p>
+            <a:pPr marL="0" lvl="0" indent="0" algn="l" rtl="0">
+              <a:spcBef>
+                <a:spcPts val="0"/>
+              </a:spcBef>
+              <a:spcAft>
+                <a:spcPts val="0"/>
+              </a:spcAft>
+              <a:buNone/>
+            </a:pPr>
+            <a:endParaRPr/>
+          </a:p>
+        </p:txBody>
+      </p:sp>
+    </p:spTree>
   </p:cSld>
   <p:clrMapOvr>
     <a:masterClrMapping/>
@@ -15491,6 +15981,520 @@
   <p:cSld>
     <p:spTree>
       <p:nvGrpSpPr>
+        <p:cNvPr id="1" name="Shape 261"/>
+        <p:cNvGrpSpPr/>
+        <p:nvPr/>
+      </p:nvGrpSpPr>
+      <p:grpSpPr>
+        <a:xfrm>
+          <a:off x="0" y="0"/>
+          <a:ext cx="0" cy="0"/>
+          <a:chOff x="0" y="0"/>
+          <a:chExt cx="0" cy="0"/>
+        </a:xfrm>
+      </p:grpSpPr>
+      <p:sp>
+        <p:nvSpPr>
+          <p:cNvPr id="262" name="Google Shape;262;p52"/>
+          <p:cNvSpPr txBox="1">
+            <a:spLocks noGrp="1"/>
+          </p:cNvSpPr>
+          <p:nvPr>
+            <p:ph type="title"/>
+          </p:nvPr>
+        </p:nvSpPr>
+        <p:spPr>
+          <a:xfrm>
+            <a:off x="415600" y="86563"/>
+            <a:ext cx="11360800" cy="763600"/>
+          </a:xfrm>
+          <a:prstGeom prst="rect">
+            <a:avLst/>
+          </a:prstGeom>
+        </p:spPr>
+        <p:txBody>
+          <a:bodyPr spcFirstLastPara="1" wrap="square" lIns="121900" tIns="121900" rIns="121900" bIns="121900" anchor="t" anchorCtr="0">
+            <a:noAutofit/>
+          </a:bodyPr>
+          <a:lstStyle/>
+          <a:p>
+            <a:r>
+              <a:rPr lang="en"/>
+              <a:t>Feature Engineering: Why we need to do it</a:t>
+            </a:r>
+            <a:endParaRPr/>
+          </a:p>
+        </p:txBody>
+      </p:sp>
+      <p:sp>
+        <p:nvSpPr>
+          <p:cNvPr id="263" name="Google Shape;263;p52"/>
+          <p:cNvSpPr txBox="1">
+            <a:spLocks noGrp="1"/>
+          </p:cNvSpPr>
+          <p:nvPr>
+            <p:ph type="body" idx="1"/>
+          </p:nvPr>
+        </p:nvSpPr>
+        <p:spPr>
+          <a:xfrm>
+            <a:off x="415600" y="1536633"/>
+            <a:ext cx="11360800" cy="4555200"/>
+          </a:xfrm>
+          <a:prstGeom prst="rect">
+            <a:avLst/>
+          </a:prstGeom>
+        </p:spPr>
+        <p:txBody>
+          <a:bodyPr spcFirstLastPara="1" wrap="square" lIns="121900" tIns="121900" rIns="121900" bIns="121900" anchor="t" anchorCtr="0">
+            <a:noAutofit/>
+          </a:bodyPr>
+          <a:lstStyle/>
+          <a:p>
+            <a:pPr marL="0" indent="0">
+              <a:buNone/>
+            </a:pPr>
+            <a:r>
+              <a:rPr lang="en" dirty="0">
+                <a:solidFill>
+                  <a:schemeClr val="dk1"/>
+                </a:solidFill>
+              </a:rPr>
+              <a:t>A pretrained language model helps on </a:t>
+            </a:r>
+            <a:r>
+              <a:rPr lang="en" i="1" dirty="0">
+                <a:solidFill>
+                  <a:schemeClr val="dk1"/>
+                </a:solidFill>
+              </a:rPr>
+              <a:t>your</a:t>
+            </a:r>
+            <a:r>
+              <a:rPr lang="en" dirty="0">
+                <a:solidFill>
+                  <a:schemeClr val="dk1"/>
+                </a:solidFill>
+              </a:rPr>
+              <a:t> text because grammar and world knowledge transfer.</a:t>
+            </a:r>
+            <a:br>
+              <a:rPr lang="en" dirty="0">
+                <a:solidFill>
+                  <a:schemeClr val="dk1"/>
+                </a:solidFill>
+              </a:rPr>
+            </a:br>
+            <a:br>
+              <a:rPr lang="en" dirty="0">
+                <a:solidFill>
+                  <a:schemeClr val="dk1"/>
+                </a:solidFill>
+              </a:rPr>
+            </a:br>
+            <a:r>
+              <a:rPr lang="en" dirty="0">
+                <a:solidFill>
+                  <a:schemeClr val="dk1"/>
+                </a:solidFill>
+              </a:rPr>
+              <a:t>A column named: x or x1 or dsl_event_1y may not mean anything in anyone else's dataset.</a:t>
+            </a:r>
+            <a:endParaRPr dirty="0">
+              <a:solidFill>
+                <a:schemeClr val="dk1"/>
+              </a:solidFill>
+            </a:endParaRPr>
+          </a:p>
+          <a:p>
+            <a:pPr marL="0" indent="0">
+              <a:buNone/>
+            </a:pPr>
+            <a:endParaRPr dirty="0">
+              <a:solidFill>
+                <a:schemeClr val="dk1"/>
+              </a:solidFill>
+            </a:endParaRPr>
+          </a:p>
+          <a:p>
+            <a:pPr marL="0" indent="0">
+              <a:buNone/>
+            </a:pPr>
+            <a:endParaRPr dirty="0">
+              <a:solidFill>
+                <a:schemeClr val="dk1"/>
+              </a:solidFill>
+            </a:endParaRPr>
+          </a:p>
+          <a:p>
+            <a:pPr marL="0" indent="0">
+              <a:buNone/>
+            </a:pPr>
+            <a:r>
+              <a:rPr lang="en" dirty="0">
+                <a:solidFill>
+                  <a:schemeClr val="dk1"/>
+                </a:solidFill>
+              </a:rPr>
+              <a:t>When there's no shared structure to learn from, the structure has to come from the ML Developers. That's what a feature is.</a:t>
+            </a:r>
+            <a:endParaRPr dirty="0">
+              <a:solidFill>
+                <a:schemeClr val="dk1"/>
+              </a:solidFill>
+            </a:endParaRPr>
+          </a:p>
+        </p:txBody>
+      </p:sp>
+    </p:spTree>
+  </p:cSld>
+  <p:clrMapOvr>
+    <a:masterClrMapping/>
+  </p:clrMapOvr>
+</p:sld>
+</file>
+
+<file path=ppt/slides/slide11.xml><?xml version="1.0" encoding="utf-8"?>
+<p:sld xmlns:a="http://schemas.openxmlformats.org/drawingml/2006/main" xmlns:r="http://schemas.openxmlformats.org/officeDocument/2006/relationships" xmlns:p="http://schemas.openxmlformats.org/presentationml/2006/main">
+  <p:cSld>
+    <p:spTree>
+      <p:nvGrpSpPr>
+        <p:cNvPr id="1" name="Shape 281"/>
+        <p:cNvGrpSpPr/>
+        <p:nvPr/>
+      </p:nvGrpSpPr>
+      <p:grpSpPr>
+        <a:xfrm>
+          <a:off x="0" y="0"/>
+          <a:ext cx="0" cy="0"/>
+          <a:chOff x="0" y="0"/>
+          <a:chExt cx="0" cy="0"/>
+        </a:xfrm>
+      </p:grpSpPr>
+      <p:sp>
+        <p:nvSpPr>
+          <p:cNvPr id="282" name="Google Shape;282;p55"/>
+          <p:cNvSpPr txBox="1">
+            <a:spLocks noGrp="1"/>
+          </p:cNvSpPr>
+          <p:nvPr>
+            <p:ph type="title"/>
+          </p:nvPr>
+        </p:nvSpPr>
+        <p:spPr>
+          <a:xfrm>
+            <a:off x="415601" y="593367"/>
+            <a:ext cx="11360700" cy="763500"/>
+          </a:xfrm>
+          <a:prstGeom prst="rect">
+            <a:avLst/>
+          </a:prstGeom>
+          <a:noFill/>
+          <a:ln>
+            <a:noFill/>
+          </a:ln>
+        </p:spPr>
+        <p:txBody>
+          <a:bodyPr spcFirstLastPara="1" wrap="square" lIns="121900" tIns="121900" rIns="121900" bIns="121900" anchor="t" anchorCtr="0">
+            <a:noAutofit/>
+          </a:bodyPr>
+          <a:lstStyle/>
+          <a:p>
+            <a:pPr>
+              <a:buSzPts val="2800"/>
+            </a:pPr>
+            <a:r>
+              <a:rPr lang="en"/>
+              <a:t>Key Points</a:t>
+            </a:r>
+            <a:endParaRPr/>
+          </a:p>
+        </p:txBody>
+      </p:sp>
+      <p:sp>
+        <p:nvSpPr>
+          <p:cNvPr id="283" name="Google Shape;283;p55"/>
+          <p:cNvSpPr txBox="1">
+            <a:spLocks noGrp="1"/>
+          </p:cNvSpPr>
+          <p:nvPr>
+            <p:ph type="body" idx="1"/>
+          </p:nvPr>
+        </p:nvSpPr>
+        <p:spPr>
+          <a:xfrm>
+            <a:off x="415600" y="1737884"/>
+            <a:ext cx="11360800" cy="4555200"/>
+          </a:xfrm>
+          <a:prstGeom prst="rect">
+            <a:avLst/>
+          </a:prstGeom>
+          <a:noFill/>
+          <a:ln>
+            <a:noFill/>
+          </a:ln>
+        </p:spPr>
+        <p:txBody>
+          <a:bodyPr spcFirstLastPara="1" wrap="square" lIns="121900" tIns="121900" rIns="121900" bIns="121900" anchor="t" anchorCtr="0">
+            <a:normAutofit fontScale="92500" lnSpcReduction="10000"/>
+          </a:bodyPr>
+          <a:lstStyle/>
+          <a:p>
+            <a:pPr marL="457189" indent="-372524">
+              <a:buSzPts val="1800"/>
+            </a:pPr>
+            <a:r>
+              <a:rPr lang="en"/>
+              <a:t>Data does not come with features - you need to turn it into features</a:t>
+            </a:r>
+            <a:endParaRPr/>
+          </a:p>
+          <a:p>
+            <a:pPr marL="457189" indent="0">
+              <a:buNone/>
+            </a:pPr>
+            <a:endParaRPr/>
+          </a:p>
+          <a:p>
+            <a:pPr marL="457189" indent="-372524">
+              <a:buSzPts val="1800"/>
+            </a:pPr>
+            <a:r>
+              <a:rPr lang="en"/>
+              <a:t>Big Constraint: When generating a feature, you need to know what did you know and </a:t>
+            </a:r>
+            <a:r>
+              <a:rPr lang="en" b="1" u="sng"/>
+              <a:t>when</a:t>
+            </a:r>
+            <a:r>
+              <a:rPr lang="en"/>
+              <a:t> did you know it?</a:t>
+            </a:r>
+            <a:endParaRPr/>
+          </a:p>
+          <a:p>
+            <a:pPr marL="914377" indent="0">
+              <a:spcBef>
+                <a:spcPts val="2133"/>
+              </a:spcBef>
+              <a:buNone/>
+            </a:pPr>
+            <a:r>
+              <a:rPr lang="en"/>
+              <a:t>You can only create features from information available </a:t>
+            </a:r>
+            <a:r>
+              <a:rPr lang="en" sz="3200" b="1">
+                <a:solidFill>
+                  <a:srgbClr val="FF0000"/>
+                </a:solidFill>
+              </a:rPr>
+              <a:t>before</a:t>
+            </a:r>
+            <a:r>
+              <a:rPr lang="en"/>
+              <a:t> the “training” date for a given row</a:t>
+            </a:r>
+            <a:br>
+              <a:rPr lang="en"/>
+            </a:br>
+            <a:endParaRPr/>
+          </a:p>
+          <a:p>
+            <a:pPr marL="457189" indent="-372524">
+              <a:buSzPts val="1800"/>
+            </a:pPr>
+            <a:r>
+              <a:rPr lang="en"/>
+              <a:t>Do it systematically instead of an arbitrary list of features</a:t>
+            </a:r>
+            <a:endParaRPr/>
+          </a:p>
+          <a:p>
+            <a:pPr marL="457189" indent="0">
+              <a:buNone/>
+            </a:pPr>
+            <a:endParaRPr/>
+          </a:p>
+          <a:p>
+            <a:pPr marL="457189" indent="-372524">
+              <a:buSzPts val="1800"/>
+            </a:pPr>
+            <a:r>
+              <a:rPr lang="en"/>
+              <a:t>Spend time understanding domain/expert knowledge and prior research in the application area you’re woking in</a:t>
+            </a:r>
+            <a:endParaRPr/>
+          </a:p>
+        </p:txBody>
+      </p:sp>
+    </p:spTree>
+  </p:cSld>
+  <p:clrMapOvr>
+    <a:masterClrMapping/>
+  </p:clrMapOvr>
+</p:sld>
+</file>
+
+<file path=ppt/slides/slide12.xml><?xml version="1.0" encoding="utf-8"?>
+<p:sld xmlns:a="http://schemas.openxmlformats.org/drawingml/2006/main" xmlns:r="http://schemas.openxmlformats.org/officeDocument/2006/relationships" xmlns:p="http://schemas.openxmlformats.org/presentationml/2006/main">
+  <p:cSld>
+    <p:spTree>
+      <p:nvGrpSpPr>
+        <p:cNvPr id="1" name="Shape 274"/>
+        <p:cNvGrpSpPr/>
+        <p:nvPr/>
+      </p:nvGrpSpPr>
+      <p:grpSpPr>
+        <a:xfrm>
+          <a:off x="0" y="0"/>
+          <a:ext cx="0" cy="0"/>
+          <a:chOff x="0" y="0"/>
+          <a:chExt cx="0" cy="0"/>
+        </a:xfrm>
+      </p:grpSpPr>
+      <p:sp>
+        <p:nvSpPr>
+          <p:cNvPr id="275" name="Google Shape;275;p54"/>
+          <p:cNvSpPr txBox="1">
+            <a:spLocks noGrp="1"/>
+          </p:cNvSpPr>
+          <p:nvPr>
+            <p:ph type="title"/>
+          </p:nvPr>
+        </p:nvSpPr>
+        <p:spPr>
+          <a:xfrm>
+            <a:off x="415601" y="593367"/>
+            <a:ext cx="11360700" cy="763500"/>
+          </a:xfrm>
+          <a:prstGeom prst="rect">
+            <a:avLst/>
+          </a:prstGeom>
+          <a:noFill/>
+          <a:ln>
+            <a:noFill/>
+          </a:ln>
+        </p:spPr>
+        <p:txBody>
+          <a:bodyPr spcFirstLastPara="1" wrap="square" lIns="121900" tIns="121900" rIns="121900" bIns="121900" anchor="t" anchorCtr="0">
+            <a:noAutofit/>
+          </a:bodyPr>
+          <a:lstStyle/>
+          <a:p>
+            <a:pPr>
+              <a:buSzPts val="2800"/>
+            </a:pPr>
+            <a:r>
+              <a:rPr lang="en"/>
+              <a:t>Feature Engineering: Why do we care?</a:t>
+            </a:r>
+            <a:endParaRPr/>
+          </a:p>
+        </p:txBody>
+      </p:sp>
+      <p:sp>
+        <p:nvSpPr>
+          <p:cNvPr id="276" name="Google Shape;276;p54"/>
+          <p:cNvSpPr txBox="1">
+            <a:spLocks noGrp="1"/>
+          </p:cNvSpPr>
+          <p:nvPr>
+            <p:ph type="body" idx="1"/>
+          </p:nvPr>
+        </p:nvSpPr>
+        <p:spPr>
+          <a:xfrm>
+            <a:off x="415601" y="1536633"/>
+            <a:ext cx="11360700" cy="4555200"/>
+          </a:xfrm>
+          <a:prstGeom prst="rect">
+            <a:avLst/>
+          </a:prstGeom>
+          <a:noFill/>
+          <a:ln>
+            <a:noFill/>
+          </a:ln>
+        </p:spPr>
+        <p:txBody>
+          <a:bodyPr spcFirstLastPara="1" wrap="square" lIns="121900" tIns="121900" rIns="121900" bIns="121900" anchor="t" anchorCtr="0">
+            <a:normAutofit/>
+          </a:bodyPr>
+          <a:lstStyle/>
+          <a:p>
+            <a:pPr marL="457189" indent="-372524">
+              <a:buSzPts val="1800"/>
+            </a:pPr>
+            <a:r>
+              <a:rPr lang="en"/>
+              <a:t>Features are hypothesis/hints/rules of thumb you give your model</a:t>
+            </a:r>
+            <a:endParaRPr/>
+          </a:p>
+          <a:p>
+            <a:pPr marL="914377" lvl="1" indent="-338658">
+              <a:spcBef>
+                <a:spcPts val="2133"/>
+              </a:spcBef>
+              <a:buSzPts val="1400"/>
+            </a:pPr>
+            <a:r>
+              <a:rPr lang="en" sz="2000"/>
+              <a:t>Encoding domain knowledge and context for the model to use</a:t>
+            </a:r>
+            <a:endParaRPr/>
+          </a:p>
+          <a:p>
+            <a:pPr marL="457189" indent="-220128">
+              <a:buSzPts val="1800"/>
+              <a:buNone/>
+            </a:pPr>
+            <a:endParaRPr/>
+          </a:p>
+          <a:p>
+            <a:pPr marL="457189" indent="-372524">
+              <a:buSzPts val="1800"/>
+            </a:pPr>
+            <a:r>
+              <a:rPr lang="en"/>
+              <a:t>Feature generation is still a critical part of the machine learning modeling process </a:t>
+            </a:r>
+            <a:r>
+              <a:rPr lang="en" b="1"/>
+              <a:t>with tabular/relational data.</a:t>
+            </a:r>
+            <a:endParaRPr b="1"/>
+          </a:p>
+          <a:p>
+            <a:pPr marL="0" indent="0">
+              <a:buSzPts val="1800"/>
+              <a:buNone/>
+            </a:pPr>
+            <a:endParaRPr/>
+          </a:p>
+          <a:p>
+            <a:pPr marL="457189" indent="-220128">
+              <a:buSzPts val="1800"/>
+              <a:buNone/>
+            </a:pPr>
+            <a:endParaRPr/>
+          </a:p>
+        </p:txBody>
+      </p:sp>
+    </p:spTree>
+  </p:cSld>
+  <p:clrMapOvr>
+    <a:masterClrMapping/>
+  </p:clrMapOvr>
+</p:sld>
+</file>
+
+<file path=ppt/slides/slide13.xml><?xml version="1.0" encoding="utf-8"?>
+<p:sld xmlns:a="http://schemas.openxmlformats.org/drawingml/2006/main" xmlns:r="http://schemas.openxmlformats.org/officeDocument/2006/relationships" xmlns:p="http://schemas.openxmlformats.org/presentationml/2006/main">
+  <p:cSld>
+    <p:spTree>
+      <p:nvGrpSpPr>
         <p:cNvPr id="1" name=""/>
         <p:cNvGrpSpPr/>
         <p:nvPr/>
@@ -15615,7 +16619,7 @@
 </p:sld>
 </file>
 
-<file path=ppt/slides/slide11.xml><?xml version="1.0" encoding="utf-8"?>
+<file path=ppt/slides/slide14.xml><?xml version="1.0" encoding="utf-8"?>
 <p:sld xmlns:a="http://schemas.openxmlformats.org/drawingml/2006/main" xmlns:r="http://schemas.openxmlformats.org/officeDocument/2006/relationships" xmlns:p="http://schemas.openxmlformats.org/presentationml/2006/main">
   <p:cSld>
     <p:spTree>
@@ -15718,7 +16722,7 @@
 </p:sld>
 </file>
 
-<file path=ppt/slides/slide12.xml><?xml version="1.0" encoding="utf-8"?>
+<file path=ppt/slides/slide15.xml><?xml version="1.0" encoding="utf-8"?>
 <p:sld xmlns:a="http://schemas.openxmlformats.org/drawingml/2006/main" xmlns:r="http://schemas.openxmlformats.org/officeDocument/2006/relationships" xmlns:p="http://schemas.openxmlformats.org/presentationml/2006/main">
   <p:cSld>
     <p:spTree>
@@ -15900,241 +16904,7 @@
 </p:sld>
 </file>
 
-<file path=ppt/slides/slide13.xml><?xml version="1.0" encoding="utf-8"?>
-<p:sld xmlns:a="http://schemas.openxmlformats.org/drawingml/2006/main" xmlns:r="http://schemas.openxmlformats.org/officeDocument/2006/relationships" xmlns:p="http://schemas.openxmlformats.org/presentationml/2006/main">
-  <p:cSld>
-    <p:spTree>
-      <p:nvGrpSpPr>
-        <p:cNvPr id="1" name=""/>
-        <p:cNvGrpSpPr/>
-        <p:nvPr/>
-      </p:nvGrpSpPr>
-      <p:grpSpPr>
-        <a:xfrm>
-          <a:off x="0" y="0"/>
-          <a:ext cx="0" cy="0"/>
-          <a:chOff x="0" y="0"/>
-          <a:chExt cx="0" cy="0"/>
-        </a:xfrm>
-      </p:grpSpPr>
-      <p:sp>
-        <p:nvSpPr>
-          <p:cNvPr id="3" name="Title 2">
-            <a:extLst>
-              <a:ext uri="{FF2B5EF4-FFF2-40B4-BE49-F238E27FC236}">
-                <a16:creationId xmlns:a16="http://schemas.microsoft.com/office/drawing/2014/main" id="{9323871C-7CA8-1448-8FFC-1AE6E1838941}"/>
-              </a:ext>
-            </a:extLst>
-          </p:cNvPr>
-          <p:cNvSpPr>
-            <a:spLocks noGrp="1"/>
-          </p:cNvSpPr>
-          <p:nvPr>
-            <p:ph type="title"/>
-          </p:nvPr>
-        </p:nvSpPr>
-        <p:spPr/>
-        <p:txBody>
-          <a:bodyPr/>
-          <a:lstStyle/>
-          <a:p>
-            <a:r>
-              <a:rPr lang="en-US" dirty="0"/>
-              <a:t>Discussion Question</a:t>
-            </a:r>
-          </a:p>
-        </p:txBody>
-      </p:sp>
-      <p:sp>
-        <p:nvSpPr>
-          <p:cNvPr id="4" name="Text Placeholder 3">
-            <a:extLst>
-              <a:ext uri="{FF2B5EF4-FFF2-40B4-BE49-F238E27FC236}">
-                <a16:creationId xmlns:a16="http://schemas.microsoft.com/office/drawing/2014/main" id="{5E600BA7-FA45-884F-9820-9E5F2CB7AA48}"/>
-              </a:ext>
-            </a:extLst>
-          </p:cNvPr>
-          <p:cNvSpPr>
-            <a:spLocks noGrp="1"/>
-          </p:cNvSpPr>
-          <p:nvPr>
-            <p:ph type="body" idx="1"/>
-          </p:nvPr>
-        </p:nvSpPr>
-        <p:spPr/>
-        <p:txBody>
-          <a:bodyPr/>
-          <a:lstStyle/>
-          <a:p>
-            <a:pPr marL="76200" indent="0">
-              <a:buNone/>
-            </a:pPr>
-            <a:endParaRPr lang="en-US" dirty="0"/>
-          </a:p>
-          <a:p>
-            <a:pPr marL="76200" indent="0">
-              <a:buNone/>
-            </a:pPr>
-            <a:endParaRPr lang="en-US" dirty="0"/>
-          </a:p>
-          <a:p>
-            <a:pPr marL="76200" indent="0" algn="ctr">
-              <a:buNone/>
-            </a:pPr>
-            <a:r>
-              <a:rPr lang="en-US" sz="3600" dirty="0"/>
-              <a:t>In the class project, what are two ways bias might </a:t>
-            </a:r>
-          </a:p>
-          <a:p>
-            <a:pPr marL="76200" indent="0" algn="ctr">
-              <a:buNone/>
-            </a:pPr>
-            <a:r>
-              <a:rPr lang="en-US" sz="3600" dirty="0"/>
-              <a:t>be introduced in your feature development?</a:t>
-            </a:r>
-          </a:p>
-        </p:txBody>
-      </p:sp>
-    </p:spTree>
-    <p:extLst>
-      <p:ext uri="{BB962C8B-B14F-4D97-AF65-F5344CB8AC3E}">
-        <p14:creationId xmlns:p14="http://schemas.microsoft.com/office/powerpoint/2010/main" val="3940342555"/>
-      </p:ext>
-    </p:extLst>
-  </p:cSld>
-  <p:clrMapOvr>
-    <a:masterClrMapping/>
-  </p:clrMapOvr>
-</p:sld>
-</file>
-
-<file path=ppt/slides/slide14.xml><?xml version="1.0" encoding="utf-8"?>
-<p:sld xmlns:a="http://schemas.openxmlformats.org/drawingml/2006/main" xmlns:r="http://schemas.openxmlformats.org/officeDocument/2006/relationships" xmlns:p="http://schemas.openxmlformats.org/presentationml/2006/main">
-  <p:cSld>
-    <p:spTree>
-      <p:nvGrpSpPr>
-        <p:cNvPr id="1" name=""/>
-        <p:cNvGrpSpPr/>
-        <p:nvPr/>
-      </p:nvGrpSpPr>
-      <p:grpSpPr>
-        <a:xfrm>
-          <a:off x="0" y="0"/>
-          <a:ext cx="0" cy="0"/>
-          <a:chOff x="0" y="0"/>
-          <a:chExt cx="0" cy="0"/>
-        </a:xfrm>
-      </p:grpSpPr>
-      <p:sp>
-        <p:nvSpPr>
-          <p:cNvPr id="2" name="Title 1">
-            <a:extLst>
-              <a:ext uri="{FF2B5EF4-FFF2-40B4-BE49-F238E27FC236}">
-                <a16:creationId xmlns:a16="http://schemas.microsoft.com/office/drawing/2014/main" id="{3E4FE157-27B9-B559-B9D7-D61ECB2A4402}"/>
-              </a:ext>
-            </a:extLst>
-          </p:cNvPr>
-          <p:cNvSpPr>
-            <a:spLocks noGrp="1"/>
-          </p:cNvSpPr>
-          <p:nvPr>
-            <p:ph type="title"/>
-          </p:nvPr>
-        </p:nvSpPr>
-        <p:spPr/>
-        <p:txBody>
-          <a:bodyPr/>
-          <a:lstStyle/>
-          <a:p>
-            <a:r>
-              <a:rPr lang="en-US" dirty="0"/>
-              <a:t>Topics for today</a:t>
-            </a:r>
-          </a:p>
-        </p:txBody>
-      </p:sp>
-      <p:sp>
-        <p:nvSpPr>
-          <p:cNvPr id="3" name="Text Placeholder 2">
-            <a:extLst>
-              <a:ext uri="{FF2B5EF4-FFF2-40B4-BE49-F238E27FC236}">
-                <a16:creationId xmlns:a16="http://schemas.microsoft.com/office/drawing/2014/main" id="{8E70F623-77EE-6ABB-6C57-D5F1265436FD}"/>
-              </a:ext>
-            </a:extLst>
-          </p:cNvPr>
-          <p:cNvSpPr>
-            <a:spLocks noGrp="1"/>
-          </p:cNvSpPr>
-          <p:nvPr>
-            <p:ph type="body" idx="1"/>
-          </p:nvPr>
-        </p:nvSpPr>
-        <p:spPr/>
-        <p:txBody>
-          <a:bodyPr/>
-          <a:lstStyle/>
-          <a:p>
-            <a:r>
-              <a:rPr lang="en-US" dirty="0"/>
-              <a:t>Recap on features</a:t>
-            </a:r>
-          </a:p>
-          <a:p>
-            <a:r>
-              <a:rPr lang="en-US" dirty="0"/>
-              <a:t>Triage and Feature Generation</a:t>
-            </a:r>
-          </a:p>
-          <a:p>
-            <a:r>
-              <a:rPr lang="en-US" dirty="0"/>
-              <a:t>Feedback</a:t>
-            </a:r>
-          </a:p>
-          <a:p>
-            <a:r>
-              <a:rPr lang="en-US" dirty="0"/>
-              <a:t>Plan for Thursday</a:t>
-            </a:r>
-          </a:p>
-          <a:p>
-            <a:r>
-              <a:rPr lang="en-US" dirty="0"/>
-              <a:t>Plan for the rest of the semester</a:t>
-            </a:r>
-          </a:p>
-          <a:p>
-            <a:pPr lvl="1"/>
-            <a:r>
-              <a:rPr lang="en-US" dirty="0"/>
-              <a:t>No mid-term presentations</a:t>
-            </a:r>
-          </a:p>
-          <a:p>
-            <a:pPr lvl="1"/>
-            <a:r>
-              <a:rPr lang="en-US" dirty="0"/>
-              <a:t>Baselines and some features -&gt; More feature and models - &gt; over time - &gt; understanding what the models are/do -&gt; bias audits</a:t>
-            </a:r>
-          </a:p>
-        </p:txBody>
-      </p:sp>
-    </p:spTree>
-    <p:extLst>
-      <p:ext uri="{BB962C8B-B14F-4D97-AF65-F5344CB8AC3E}">
-        <p14:creationId xmlns:p14="http://schemas.microsoft.com/office/powerpoint/2010/main" val="1527228990"/>
-      </p:ext>
-    </p:extLst>
-  </p:cSld>
-  <p:clrMapOvr>
-    <a:masterClrMapping/>
-  </p:clrMapOvr>
-</p:sld>
-</file>
-
-<file path=ppt/slides/slide15.xml><?xml version="1.0" encoding="utf-8"?>
+<file path=ppt/slides/slide16.xml><?xml version="1.0" encoding="utf-8"?>
 <p:sld xmlns:a="http://schemas.openxmlformats.org/drawingml/2006/main" xmlns:r="http://schemas.openxmlformats.org/officeDocument/2006/relationships" xmlns:p="http://schemas.openxmlformats.org/presentationml/2006/main">
   <p:cSld>
     <p:spTree>
@@ -16542,7 +17312,7 @@
 </p:sld>
 </file>
 
-<file path=ppt/slides/slide16.xml><?xml version="1.0" encoding="utf-8"?>
+<file path=ppt/slides/slide17.xml><?xml version="1.0" encoding="utf-8"?>
 <p:sld xmlns:a="http://schemas.openxmlformats.org/drawingml/2006/main" xmlns:r="http://schemas.openxmlformats.org/officeDocument/2006/relationships" xmlns:p="http://schemas.openxmlformats.org/presentationml/2006/main" show="0">
   <p:cSld>
     <p:spTree>
@@ -16989,7 +17759,7 @@
 </p:sld>
 </file>
 
-<file path=ppt/slides/slide17.xml><?xml version="1.0" encoding="utf-8"?>
+<file path=ppt/slides/slide18.xml><?xml version="1.0" encoding="utf-8"?>
 <p:sld xmlns:a="http://schemas.openxmlformats.org/drawingml/2006/main" xmlns:r="http://schemas.openxmlformats.org/officeDocument/2006/relationships" xmlns:p="http://schemas.openxmlformats.org/presentationml/2006/main">
   <p:cSld>
     <p:spTree>
@@ -17105,7 +17875,7 @@
 </p:sld>
 </file>
 
-<file path=ppt/slides/slide18.xml><?xml version="1.0" encoding="utf-8"?>
+<file path=ppt/slides/slide19.xml><?xml version="1.0" encoding="utf-8"?>
 <p:sld xmlns:a="http://schemas.openxmlformats.org/drawingml/2006/main" xmlns:r="http://schemas.openxmlformats.org/officeDocument/2006/relationships" xmlns:p="http://schemas.openxmlformats.org/presentationml/2006/main">
   <p:cSld>
     <p:spTree>
@@ -17338,7 +18108,136 @@
 </p:sld>
 </file>
 
-<file path=ppt/slides/slide19.xml><?xml version="1.0" encoding="utf-8"?>
+<file path=ppt/slides/slide2.xml><?xml version="1.0" encoding="utf-8"?>
+<p:sld xmlns:a="http://schemas.openxmlformats.org/drawingml/2006/main" xmlns:r="http://schemas.openxmlformats.org/officeDocument/2006/relationships" xmlns:p="http://schemas.openxmlformats.org/presentationml/2006/main">
+  <p:cSld>
+    <p:spTree>
+      <p:nvGrpSpPr>
+        <p:cNvPr id="1" name=""/>
+        <p:cNvGrpSpPr/>
+        <p:nvPr/>
+      </p:nvGrpSpPr>
+      <p:grpSpPr>
+        <a:xfrm>
+          <a:off x="0" y="0"/>
+          <a:ext cx="0" cy="0"/>
+          <a:chOff x="0" y="0"/>
+          <a:chExt cx="0" cy="0"/>
+        </a:xfrm>
+      </p:grpSpPr>
+      <p:sp>
+        <p:nvSpPr>
+          <p:cNvPr id="2" name="Title 1">
+            <a:extLst>
+              <a:ext uri="{FF2B5EF4-FFF2-40B4-BE49-F238E27FC236}">
+                <a16:creationId xmlns:a16="http://schemas.microsoft.com/office/drawing/2014/main" id="{94CF2A94-A63F-6149-AA28-2E35B60E3D3E}"/>
+              </a:ext>
+            </a:extLst>
+          </p:cNvPr>
+          <p:cNvSpPr>
+            <a:spLocks noGrp="1"/>
+          </p:cNvSpPr>
+          <p:nvPr>
+            <p:ph type="title"/>
+          </p:nvPr>
+        </p:nvSpPr>
+        <p:spPr/>
+        <p:txBody>
+          <a:bodyPr/>
+          <a:lstStyle/>
+          <a:p>
+            <a:endParaRPr lang="en-US"/>
+          </a:p>
+        </p:txBody>
+      </p:sp>
+      <p:graphicFrame>
+        <p:nvGraphicFramePr>
+          <p:cNvPr id="3" name="Diagram 2">
+            <a:extLst>
+              <a:ext uri="{FF2B5EF4-FFF2-40B4-BE49-F238E27FC236}">
+                <a16:creationId xmlns:a16="http://schemas.microsoft.com/office/drawing/2014/main" id="{8E902576-68A9-6E48-B0FE-5B1889953DC8}"/>
+              </a:ext>
+            </a:extLst>
+          </p:cNvPr>
+          <p:cNvGraphicFramePr/>
+          <p:nvPr/>
+        </p:nvGraphicFramePr>
+        <p:xfrm>
+          <a:off x="180467" y="0"/>
+          <a:ext cx="11776400" cy="6858000"/>
+        </p:xfrm>
+        <a:graphic>
+          <a:graphicData uri="http://schemas.openxmlformats.org/drawingml/2006/diagram">
+            <dgm:relIds xmlns:dgm="http://schemas.openxmlformats.org/drawingml/2006/diagram" xmlns:r="http://schemas.openxmlformats.org/officeDocument/2006/relationships" r:dm="rId3" r:lo="rId4" r:qs="rId5" r:cs="rId6"/>
+          </a:graphicData>
+        </a:graphic>
+      </p:graphicFrame>
+      <p:sp>
+        <p:nvSpPr>
+          <p:cNvPr id="4" name="Rectangle 3">
+            <a:extLst>
+              <a:ext uri="{FF2B5EF4-FFF2-40B4-BE49-F238E27FC236}">
+                <a16:creationId xmlns:a16="http://schemas.microsoft.com/office/drawing/2014/main" id="{E2C99BF2-C81A-5246-89D3-E49BCDCAD699}"/>
+              </a:ext>
+            </a:extLst>
+          </p:cNvPr>
+          <p:cNvSpPr/>
+          <p:nvPr/>
+        </p:nvSpPr>
+        <p:spPr>
+          <a:xfrm>
+            <a:off x="9553197" y="115748"/>
+            <a:ext cx="2534195" cy="4208008"/>
+          </a:xfrm>
+          <a:prstGeom prst="rect">
+            <a:avLst/>
+          </a:prstGeom>
+          <a:noFill/>
+          <a:ln w="76200">
+            <a:solidFill>
+              <a:srgbClr val="C00000"/>
+            </a:solidFill>
+          </a:ln>
+        </p:spPr>
+        <p:style>
+          <a:lnRef idx="2">
+            <a:schemeClr val="accent1">
+              <a:shade val="50000"/>
+            </a:schemeClr>
+          </a:lnRef>
+          <a:fillRef idx="1">
+            <a:schemeClr val="accent1"/>
+          </a:fillRef>
+          <a:effectRef idx="0">
+            <a:schemeClr val="accent1"/>
+          </a:effectRef>
+          <a:fontRef idx="minor">
+            <a:schemeClr val="lt1"/>
+          </a:fontRef>
+        </p:style>
+        <p:txBody>
+          <a:bodyPr rtlCol="0" anchor="ctr"/>
+          <a:lstStyle/>
+          <a:p>
+            <a:pPr algn="ctr"/>
+            <a:endParaRPr lang="en-US"/>
+          </a:p>
+        </p:txBody>
+      </p:sp>
+    </p:spTree>
+    <p:extLst>
+      <p:ext uri="{BB962C8B-B14F-4D97-AF65-F5344CB8AC3E}">
+        <p14:creationId xmlns:p14="http://schemas.microsoft.com/office/powerpoint/2010/main" val="3141728949"/>
+      </p:ext>
+    </p:extLst>
+  </p:cSld>
+  <p:clrMapOvr>
+    <a:masterClrMapping/>
+  </p:clrMapOvr>
+</p:sld>
+</file>
+
+<file path=ppt/slides/slide20.xml><?xml version="1.0" encoding="utf-8"?>
 <p:sld xmlns:a="http://schemas.openxmlformats.org/drawingml/2006/main" xmlns:r="http://schemas.openxmlformats.org/officeDocument/2006/relationships" xmlns:p="http://schemas.openxmlformats.org/presentationml/2006/main">
   <p:cSld>
     <p:spTree>
@@ -18050,136 +18949,7 @@
 </p:sld>
 </file>
 
-<file path=ppt/slides/slide2.xml><?xml version="1.0" encoding="utf-8"?>
-<p:sld xmlns:a="http://schemas.openxmlformats.org/drawingml/2006/main" xmlns:r="http://schemas.openxmlformats.org/officeDocument/2006/relationships" xmlns:p="http://schemas.openxmlformats.org/presentationml/2006/main">
-  <p:cSld>
-    <p:spTree>
-      <p:nvGrpSpPr>
-        <p:cNvPr id="1" name=""/>
-        <p:cNvGrpSpPr/>
-        <p:nvPr/>
-      </p:nvGrpSpPr>
-      <p:grpSpPr>
-        <a:xfrm>
-          <a:off x="0" y="0"/>
-          <a:ext cx="0" cy="0"/>
-          <a:chOff x="0" y="0"/>
-          <a:chExt cx="0" cy="0"/>
-        </a:xfrm>
-      </p:grpSpPr>
-      <p:sp>
-        <p:nvSpPr>
-          <p:cNvPr id="2" name="Title 1">
-            <a:extLst>
-              <a:ext uri="{FF2B5EF4-FFF2-40B4-BE49-F238E27FC236}">
-                <a16:creationId xmlns:a16="http://schemas.microsoft.com/office/drawing/2014/main" id="{94CF2A94-A63F-6149-AA28-2E35B60E3D3E}"/>
-              </a:ext>
-            </a:extLst>
-          </p:cNvPr>
-          <p:cNvSpPr>
-            <a:spLocks noGrp="1"/>
-          </p:cNvSpPr>
-          <p:nvPr>
-            <p:ph type="title"/>
-          </p:nvPr>
-        </p:nvSpPr>
-        <p:spPr/>
-        <p:txBody>
-          <a:bodyPr/>
-          <a:lstStyle/>
-          <a:p>
-            <a:endParaRPr lang="en-US"/>
-          </a:p>
-        </p:txBody>
-      </p:sp>
-      <p:graphicFrame>
-        <p:nvGraphicFramePr>
-          <p:cNvPr id="3" name="Diagram 2">
-            <a:extLst>
-              <a:ext uri="{FF2B5EF4-FFF2-40B4-BE49-F238E27FC236}">
-                <a16:creationId xmlns:a16="http://schemas.microsoft.com/office/drawing/2014/main" id="{8E902576-68A9-6E48-B0FE-5B1889953DC8}"/>
-              </a:ext>
-            </a:extLst>
-          </p:cNvPr>
-          <p:cNvGraphicFramePr/>
-          <p:nvPr/>
-        </p:nvGraphicFramePr>
-        <p:xfrm>
-          <a:off x="180467" y="0"/>
-          <a:ext cx="11776400" cy="6858000"/>
-        </p:xfrm>
-        <a:graphic>
-          <a:graphicData uri="http://schemas.openxmlformats.org/drawingml/2006/diagram">
-            <dgm:relIds xmlns:dgm="http://schemas.openxmlformats.org/drawingml/2006/diagram" xmlns:r="http://schemas.openxmlformats.org/officeDocument/2006/relationships" r:dm="rId3" r:lo="rId4" r:qs="rId5" r:cs="rId6"/>
-          </a:graphicData>
-        </a:graphic>
-      </p:graphicFrame>
-      <p:sp>
-        <p:nvSpPr>
-          <p:cNvPr id="4" name="Rectangle 3">
-            <a:extLst>
-              <a:ext uri="{FF2B5EF4-FFF2-40B4-BE49-F238E27FC236}">
-                <a16:creationId xmlns:a16="http://schemas.microsoft.com/office/drawing/2014/main" id="{E2C99BF2-C81A-5246-89D3-E49BCDCAD699}"/>
-              </a:ext>
-            </a:extLst>
-          </p:cNvPr>
-          <p:cNvSpPr/>
-          <p:nvPr/>
-        </p:nvSpPr>
-        <p:spPr>
-          <a:xfrm>
-            <a:off x="9553197" y="115748"/>
-            <a:ext cx="2534195" cy="4208008"/>
-          </a:xfrm>
-          <a:prstGeom prst="rect">
-            <a:avLst/>
-          </a:prstGeom>
-          <a:noFill/>
-          <a:ln w="76200">
-            <a:solidFill>
-              <a:srgbClr val="C00000"/>
-            </a:solidFill>
-          </a:ln>
-        </p:spPr>
-        <p:style>
-          <a:lnRef idx="2">
-            <a:schemeClr val="accent1">
-              <a:shade val="50000"/>
-            </a:schemeClr>
-          </a:lnRef>
-          <a:fillRef idx="1">
-            <a:schemeClr val="accent1"/>
-          </a:fillRef>
-          <a:effectRef idx="0">
-            <a:schemeClr val="accent1"/>
-          </a:effectRef>
-          <a:fontRef idx="minor">
-            <a:schemeClr val="lt1"/>
-          </a:fontRef>
-        </p:style>
-        <p:txBody>
-          <a:bodyPr rtlCol="0" anchor="ctr"/>
-          <a:lstStyle/>
-          <a:p>
-            <a:pPr algn="ctr"/>
-            <a:endParaRPr lang="en-US"/>
-          </a:p>
-        </p:txBody>
-      </p:sp>
-    </p:spTree>
-    <p:extLst>
-      <p:ext uri="{BB962C8B-B14F-4D97-AF65-F5344CB8AC3E}">
-        <p14:creationId xmlns:p14="http://schemas.microsoft.com/office/powerpoint/2010/main" val="3141728949"/>
-      </p:ext>
-    </p:extLst>
-  </p:cSld>
-  <p:clrMapOvr>
-    <a:masterClrMapping/>
-  </p:clrMapOvr>
-</p:sld>
-</file>
-
-<file path=ppt/slides/slide20.xml><?xml version="1.0" encoding="utf-8"?>
+<file path=ppt/slides/slide21.xml><?xml version="1.0" encoding="utf-8"?>
 <p:sld xmlns:a="http://schemas.openxmlformats.org/drawingml/2006/main" xmlns:r="http://schemas.openxmlformats.org/officeDocument/2006/relationships" xmlns:p="http://schemas.openxmlformats.org/presentationml/2006/main">
   <p:cSld>
     <p:spTree>
@@ -18487,7 +19257,7 @@
 </p:sld>
 </file>
 
-<file path=ppt/slides/slide21.xml><?xml version="1.0" encoding="utf-8"?>
+<file path=ppt/slides/slide22.xml><?xml version="1.0" encoding="utf-8"?>
 <p:sld xmlns:a="http://schemas.openxmlformats.org/drawingml/2006/main" xmlns:r="http://schemas.openxmlformats.org/officeDocument/2006/relationships" xmlns:p="http://schemas.openxmlformats.org/presentationml/2006/main">
   <p:cSld>
     <p:spTree>
@@ -18689,7 +19459,7 @@
 </p:sld>
 </file>
 
-<file path=ppt/slides/slide22.xml><?xml version="1.0" encoding="utf-8"?>
+<file path=ppt/slides/slide23.xml><?xml version="1.0" encoding="utf-8"?>
 <p:sld xmlns:a="http://schemas.openxmlformats.org/drawingml/2006/main" xmlns:r="http://schemas.openxmlformats.org/officeDocument/2006/relationships" xmlns:p="http://schemas.openxmlformats.org/presentationml/2006/main">
   <p:cSld>
     <p:spTree>
@@ -19036,7 +19806,7 @@
 </p:sld>
 </file>
 
-<file path=ppt/slides/slide23.xml><?xml version="1.0" encoding="utf-8"?>
+<file path=ppt/slides/slide24.xml><?xml version="1.0" encoding="utf-8"?>
 <p:sld xmlns:a="http://schemas.openxmlformats.org/drawingml/2006/main" xmlns:r="http://schemas.openxmlformats.org/officeDocument/2006/relationships" xmlns:p="http://schemas.openxmlformats.org/presentationml/2006/main">
   <p:cSld>
     <p:spTree>
@@ -19272,7 +20042,7 @@
 </p:sld>
 </file>
 
-<file path=ppt/slides/slide24.xml><?xml version="1.0" encoding="utf-8"?>
+<file path=ppt/slides/slide25.xml><?xml version="1.0" encoding="utf-8"?>
 <p:sld xmlns:a="http://schemas.openxmlformats.org/drawingml/2006/main" xmlns:r="http://schemas.openxmlformats.org/officeDocument/2006/relationships" xmlns:p="http://schemas.openxmlformats.org/presentationml/2006/main">
   <p:cSld>
     <p:spTree>
@@ -19450,7 +20220,7 @@
 </p:sld>
 </file>
 
-<file path=ppt/slides/slide25.xml><?xml version="1.0" encoding="utf-8"?>
+<file path=ppt/slides/slide26.xml><?xml version="1.0" encoding="utf-8"?>
 <p:sld xmlns:a="http://schemas.openxmlformats.org/drawingml/2006/main" xmlns:r="http://schemas.openxmlformats.org/officeDocument/2006/relationships" xmlns:p="http://schemas.openxmlformats.org/presentationml/2006/main">
   <p:cSld>
     <p:spTree>
@@ -19610,7 +20380,7 @@
 </p:sld>
 </file>
 
-<file path=ppt/slides/slide26.xml><?xml version="1.0" encoding="utf-8"?>
+<file path=ppt/slides/slide27.xml><?xml version="1.0" encoding="utf-8"?>
 <p:sld xmlns:a="http://schemas.openxmlformats.org/drawingml/2006/main" xmlns:r="http://schemas.openxmlformats.org/officeDocument/2006/relationships" xmlns:p="http://schemas.openxmlformats.org/presentationml/2006/main">
   <p:cSld>
     <p:spTree>
@@ -20082,138 +20852,6 @@
 </p:sld>
 </file>
 
-<file path=ppt/slides/slide27.xml><?xml version="1.0" encoding="utf-8"?>
-<p:sld xmlns:a="http://schemas.openxmlformats.org/drawingml/2006/main" xmlns:r="http://schemas.openxmlformats.org/officeDocument/2006/relationships" xmlns:p="http://schemas.openxmlformats.org/presentationml/2006/main">
-  <p:cSld>
-    <p:spTree>
-      <p:nvGrpSpPr>
-        <p:cNvPr id="1" name=""/>
-        <p:cNvGrpSpPr/>
-        <p:nvPr/>
-      </p:nvGrpSpPr>
-      <p:grpSpPr>
-        <a:xfrm>
-          <a:off x="0" y="0"/>
-          <a:ext cx="0" cy="0"/>
-          <a:chOff x="0" y="0"/>
-          <a:chExt cx="0" cy="0"/>
-        </a:xfrm>
-      </p:grpSpPr>
-      <p:sp>
-        <p:nvSpPr>
-          <p:cNvPr id="3" name="Title 2"/>
-          <p:cNvSpPr>
-            <a:spLocks noGrp="1"/>
-          </p:cNvSpPr>
-          <p:nvPr>
-            <p:ph type="title"/>
-          </p:nvPr>
-        </p:nvSpPr>
-        <p:spPr/>
-        <p:txBody>
-          <a:bodyPr/>
-          <a:lstStyle/>
-          <a:p>
-            <a:r>
-              <a:rPr lang="en-US" dirty="0"/>
-              <a:t>Feature Generation – A Deeper Look</a:t>
-            </a:r>
-          </a:p>
-        </p:txBody>
-      </p:sp>
-      <p:sp>
-        <p:nvSpPr>
-          <p:cNvPr id="2" name="Content Placeholder 1"/>
-          <p:cNvSpPr>
-            <a:spLocks noGrp="1"/>
-          </p:cNvSpPr>
-          <p:nvPr>
-            <p:ph type="body" idx="1"/>
-          </p:nvPr>
-        </p:nvSpPr>
-        <p:spPr/>
-        <p:txBody>
-          <a:bodyPr>
-            <a:normAutofit/>
-          </a:bodyPr>
-          <a:lstStyle/>
-          <a:p>
-            <a:r>
-              <a:rPr lang="en-US" dirty="0"/>
-              <a:t>Categorical to Binary (Dummies)</a:t>
-            </a:r>
-          </a:p>
-          <a:p>
-            <a:r>
-              <a:rPr lang="en-US" dirty="0"/>
-              <a:t>Features for missing values</a:t>
-            </a:r>
-          </a:p>
-          <a:p>
-            <a:r>
-              <a:rPr lang="en-US" dirty="0"/>
-              <a:t>Discretization</a:t>
-            </a:r>
-          </a:p>
-          <a:p>
-            <a:r>
-              <a:rPr lang="en-US" dirty="0"/>
-              <a:t>Date/Time Features</a:t>
-            </a:r>
-          </a:p>
-          <a:p>
-            <a:r>
-              <a:rPr lang="en-US" dirty="0"/>
-              <a:t>Scaling/Normalizing</a:t>
-            </a:r>
-          </a:p>
-          <a:p>
-            <a:r>
-              <a:rPr lang="en-US" dirty="0"/>
-              <a:t>Transformations</a:t>
-            </a:r>
-          </a:p>
-          <a:p>
-            <a:r>
-              <a:rPr lang="en-US" b="1" dirty="0"/>
-              <a:t>Aggregations (space, time, space and time)</a:t>
-            </a:r>
-          </a:p>
-          <a:p>
-            <a:r>
-              <a:rPr lang="en-US" b="1" dirty="0"/>
-              <a:t>Relative (compared to the average</a:t>
-            </a:r>
-            <a:r>
-              <a:rPr lang="mr-IN" b="1" dirty="0"/>
-              <a:t>…</a:t>
-            </a:r>
-            <a:r>
-              <a:rPr lang="en-US" b="1" dirty="0"/>
-              <a:t>)</a:t>
-            </a:r>
-          </a:p>
-          <a:p>
-            <a:r>
-              <a:rPr lang="en-US" dirty="0"/>
-              <a:t>Interactions</a:t>
-            </a:r>
-          </a:p>
-        </p:txBody>
-      </p:sp>
-    </p:spTree>
-    <p:extLst>
-      <p:ext uri="{BB962C8B-B14F-4D97-AF65-F5344CB8AC3E}">
-        <p14:creationId xmlns:p14="http://schemas.microsoft.com/office/powerpoint/2010/main" val="273184349"/>
-      </p:ext>
-    </p:extLst>
-  </p:cSld>
-  <p:clrMapOvr>
-    <a:masterClrMapping/>
-  </p:clrMapOvr>
-</p:sld>
-</file>
-
 <file path=ppt/slides/slide28.xml><?xml version="1.0" encoding="utf-8"?>
 <p:sld xmlns:a="http://schemas.openxmlformats.org/drawingml/2006/main" xmlns:r="http://schemas.openxmlformats.org/officeDocument/2006/relationships" xmlns:p="http://schemas.openxmlformats.org/presentationml/2006/main">
   <p:cSld>
@@ -20248,6 +20886,138 @@
           <a:p>
             <a:r>
               <a:rPr lang="en-US" dirty="0"/>
+              <a:t>Feature Generation – A Deeper Look</a:t>
+            </a:r>
+          </a:p>
+        </p:txBody>
+      </p:sp>
+      <p:sp>
+        <p:nvSpPr>
+          <p:cNvPr id="2" name="Content Placeholder 1"/>
+          <p:cNvSpPr>
+            <a:spLocks noGrp="1"/>
+          </p:cNvSpPr>
+          <p:nvPr>
+            <p:ph type="body" idx="1"/>
+          </p:nvPr>
+        </p:nvSpPr>
+        <p:spPr/>
+        <p:txBody>
+          <a:bodyPr>
+            <a:normAutofit/>
+          </a:bodyPr>
+          <a:lstStyle/>
+          <a:p>
+            <a:r>
+              <a:rPr lang="en-US" dirty="0"/>
+              <a:t>Categorical to Binary (Dummies)</a:t>
+            </a:r>
+          </a:p>
+          <a:p>
+            <a:r>
+              <a:rPr lang="en-US" dirty="0"/>
+              <a:t>Features for missing values</a:t>
+            </a:r>
+          </a:p>
+          <a:p>
+            <a:r>
+              <a:rPr lang="en-US" dirty="0"/>
+              <a:t>Discretization</a:t>
+            </a:r>
+          </a:p>
+          <a:p>
+            <a:r>
+              <a:rPr lang="en-US" dirty="0"/>
+              <a:t>Date/Time Features</a:t>
+            </a:r>
+          </a:p>
+          <a:p>
+            <a:r>
+              <a:rPr lang="en-US" dirty="0"/>
+              <a:t>Scaling/Normalizing</a:t>
+            </a:r>
+          </a:p>
+          <a:p>
+            <a:r>
+              <a:rPr lang="en-US" dirty="0"/>
+              <a:t>Transformations</a:t>
+            </a:r>
+          </a:p>
+          <a:p>
+            <a:r>
+              <a:rPr lang="en-US" b="1" dirty="0"/>
+              <a:t>Aggregations (space, time, space and time)</a:t>
+            </a:r>
+          </a:p>
+          <a:p>
+            <a:r>
+              <a:rPr lang="en-US" b="1" dirty="0"/>
+              <a:t>Relative (compared to the average</a:t>
+            </a:r>
+            <a:r>
+              <a:rPr lang="mr-IN" b="1" dirty="0"/>
+              <a:t>…</a:t>
+            </a:r>
+            <a:r>
+              <a:rPr lang="en-US" b="1" dirty="0"/>
+              <a:t>)</a:t>
+            </a:r>
+          </a:p>
+          <a:p>
+            <a:r>
+              <a:rPr lang="en-US" dirty="0"/>
+              <a:t>Interactions</a:t>
+            </a:r>
+          </a:p>
+        </p:txBody>
+      </p:sp>
+    </p:spTree>
+    <p:extLst>
+      <p:ext uri="{BB962C8B-B14F-4D97-AF65-F5344CB8AC3E}">
+        <p14:creationId xmlns:p14="http://schemas.microsoft.com/office/powerpoint/2010/main" val="273184349"/>
+      </p:ext>
+    </p:extLst>
+  </p:cSld>
+  <p:clrMapOvr>
+    <a:masterClrMapping/>
+  </p:clrMapOvr>
+</p:sld>
+</file>
+
+<file path=ppt/slides/slide29.xml><?xml version="1.0" encoding="utf-8"?>
+<p:sld xmlns:a="http://schemas.openxmlformats.org/drawingml/2006/main" xmlns:r="http://schemas.openxmlformats.org/officeDocument/2006/relationships" xmlns:p="http://schemas.openxmlformats.org/presentationml/2006/main">
+  <p:cSld>
+    <p:spTree>
+      <p:nvGrpSpPr>
+        <p:cNvPr id="1" name=""/>
+        <p:cNvGrpSpPr/>
+        <p:nvPr/>
+      </p:nvGrpSpPr>
+      <p:grpSpPr>
+        <a:xfrm>
+          <a:off x="0" y="0"/>
+          <a:ext cx="0" cy="0"/>
+          <a:chOff x="0" y="0"/>
+          <a:chExt cx="0" cy="0"/>
+        </a:xfrm>
+      </p:grpSpPr>
+      <p:sp>
+        <p:nvSpPr>
+          <p:cNvPr id="3" name="Title 2"/>
+          <p:cNvSpPr>
+            <a:spLocks noGrp="1"/>
+          </p:cNvSpPr>
+          <p:nvPr>
+            <p:ph type="title"/>
+          </p:nvPr>
+        </p:nvSpPr>
+        <p:spPr/>
+        <p:txBody>
+          <a:bodyPr/>
+          <a:lstStyle/>
+          <a:p>
+            <a:r>
+              <a:rPr lang="en-US" dirty="0"/>
               <a:t>Categorical to Binary</a:t>
             </a:r>
           </a:p>
@@ -20311,7 +21081,205 @@
 </p:sld>
 </file>
 
-<file path=ppt/slides/slide29.xml><?xml version="1.0" encoding="utf-8"?>
+<file path=ppt/slides/slide3.xml><?xml version="1.0" encoding="utf-8"?>
+<p:sld xmlns:a="http://schemas.openxmlformats.org/drawingml/2006/main" xmlns:r="http://schemas.openxmlformats.org/officeDocument/2006/relationships" xmlns:p="http://schemas.openxmlformats.org/presentationml/2006/main">
+  <p:cSld>
+    <p:spTree>
+      <p:nvGrpSpPr>
+        <p:cNvPr id="1" name=""/>
+        <p:cNvGrpSpPr/>
+        <p:nvPr/>
+      </p:nvGrpSpPr>
+      <p:grpSpPr>
+        <a:xfrm>
+          <a:off x="0" y="0"/>
+          <a:ext cx="0" cy="0"/>
+          <a:chOff x="0" y="0"/>
+          <a:chExt cx="0" cy="0"/>
+        </a:xfrm>
+      </p:grpSpPr>
+      <p:sp>
+        <p:nvSpPr>
+          <p:cNvPr id="3" name="Title 2">
+            <a:extLst>
+              <a:ext uri="{FF2B5EF4-FFF2-40B4-BE49-F238E27FC236}">
+                <a16:creationId xmlns:a16="http://schemas.microsoft.com/office/drawing/2014/main" id="{9323871C-7CA8-1448-8FFC-1AE6E1838941}"/>
+              </a:ext>
+            </a:extLst>
+          </p:cNvPr>
+          <p:cNvSpPr>
+            <a:spLocks noGrp="1"/>
+          </p:cNvSpPr>
+          <p:nvPr>
+            <p:ph type="title"/>
+          </p:nvPr>
+        </p:nvSpPr>
+        <p:spPr/>
+        <p:txBody>
+          <a:bodyPr/>
+          <a:lstStyle/>
+          <a:p>
+            <a:r>
+              <a:rPr lang="en-US" dirty="0"/>
+              <a:t>Reminders</a:t>
+            </a:r>
+          </a:p>
+        </p:txBody>
+      </p:sp>
+      <p:sp>
+        <p:nvSpPr>
+          <p:cNvPr id="5" name="Text Placeholder 4">
+            <a:extLst>
+              <a:ext uri="{FF2B5EF4-FFF2-40B4-BE49-F238E27FC236}">
+                <a16:creationId xmlns:a16="http://schemas.microsoft.com/office/drawing/2014/main" id="{F4E0A5F0-1D89-954D-91FB-596CD9E690F2}"/>
+              </a:ext>
+            </a:extLst>
+          </p:cNvPr>
+          <p:cNvSpPr>
+            <a:spLocks noGrp="1"/>
+          </p:cNvSpPr>
+          <p:nvPr>
+            <p:ph type="body" idx="1"/>
+          </p:nvPr>
+        </p:nvSpPr>
+        <p:spPr/>
+        <p:txBody>
+          <a:bodyPr/>
+          <a:lstStyle/>
+          <a:p>
+            <a:pPr marL="76200" indent="0">
+              <a:buNone/>
+            </a:pPr>
+            <a:r>
+              <a:rPr lang="en-US" b="1" dirty="0">
+                <a:solidFill>
+                  <a:schemeClr val="tx1">
+                    <a:lumMod val="75000"/>
+                    <a:lumOff val="25000"/>
+                  </a:schemeClr>
+                </a:solidFill>
+              </a:rPr>
+              <a:t>This week:</a:t>
+            </a:r>
+          </a:p>
+          <a:p>
+            <a:r>
+              <a:rPr lang="en-US" dirty="0">
+                <a:solidFill>
+                  <a:schemeClr val="tx1">
+                    <a:lumMod val="75000"/>
+                    <a:lumOff val="25000"/>
+                  </a:schemeClr>
+                </a:solidFill>
+              </a:rPr>
+              <a:t>Tomorrow: Wednesday Group Check-Ins</a:t>
+            </a:r>
+          </a:p>
+          <a:p>
+            <a:r>
+              <a:rPr lang="en-US" dirty="0">
+                <a:solidFill>
+                  <a:schemeClr val="tx1">
+                    <a:lumMod val="75000"/>
+                    <a:lumOff val="25000"/>
+                  </a:schemeClr>
+                </a:solidFill>
+              </a:rPr>
+              <a:t>Thursday: Triage Q&amp;A + time for group work</a:t>
+            </a:r>
+            <a:endParaRPr lang="en-US" b="1" dirty="0">
+              <a:solidFill>
+                <a:schemeClr val="tx1">
+                  <a:lumMod val="75000"/>
+                  <a:lumOff val="25000"/>
+                </a:schemeClr>
+              </a:solidFill>
+            </a:endParaRPr>
+          </a:p>
+          <a:p>
+            <a:pPr marL="76200" indent="0">
+              <a:buNone/>
+            </a:pPr>
+            <a:endParaRPr lang="en-US" b="1" dirty="0">
+              <a:solidFill>
+                <a:schemeClr val="tx1">
+                  <a:lumMod val="75000"/>
+                  <a:lumOff val="25000"/>
+                </a:schemeClr>
+              </a:solidFill>
+            </a:endParaRPr>
+          </a:p>
+          <a:p>
+            <a:pPr marL="76200" indent="0">
+              <a:buNone/>
+            </a:pPr>
+            <a:r>
+              <a:rPr lang="en-US" b="1" dirty="0">
+                <a:solidFill>
+                  <a:schemeClr val="tx1">
+                    <a:lumMod val="75000"/>
+                    <a:lumOff val="25000"/>
+                  </a:schemeClr>
+                </a:solidFill>
+              </a:rPr>
+              <a:t>Coming up after fall break:</a:t>
+            </a:r>
+          </a:p>
+          <a:p>
+            <a:r>
+              <a:rPr lang="en-US" dirty="0">
+                <a:solidFill>
+                  <a:schemeClr val="tx1">
+                    <a:lumMod val="75000"/>
+                    <a:lumOff val="25000"/>
+                  </a:schemeClr>
+                </a:solidFill>
+              </a:rPr>
+              <a:t>Monday: Project Update 3</a:t>
+            </a:r>
+          </a:p>
+          <a:p>
+            <a:r>
+              <a:rPr lang="en-US" dirty="0">
+                <a:solidFill>
+                  <a:schemeClr val="tx1">
+                    <a:lumMod val="75000"/>
+                    <a:lumOff val="25000"/>
+                  </a:schemeClr>
+                </a:solidFill>
+              </a:rPr>
+              <a:t>Tuesday: Weekly Feedback Form</a:t>
+            </a:r>
+          </a:p>
+          <a:p>
+            <a:r>
+              <a:rPr lang="en-US" dirty="0">
+                <a:solidFill>
+                  <a:schemeClr val="tx1">
+                    <a:lumMod val="75000"/>
+                    <a:lumOff val="25000"/>
+                  </a:schemeClr>
+                </a:solidFill>
+              </a:rPr>
+              <a:t>Tuesday: Building Features in Triage</a:t>
+            </a:r>
+          </a:p>
+        </p:txBody>
+      </p:sp>
+    </p:spTree>
+    <p:extLst>
+      <p:ext uri="{BB962C8B-B14F-4D97-AF65-F5344CB8AC3E}">
+        <p14:creationId xmlns:p14="http://schemas.microsoft.com/office/powerpoint/2010/main" val="186046226"/>
+      </p:ext>
+    </p:extLst>
+  </p:cSld>
+  <p:clrMapOvr>
+    <a:masterClrMapping/>
+  </p:clrMapOvr>
+</p:sld>
+</file>
+
+<file path=ppt/slides/slide30.xml><?xml version="1.0" encoding="utf-8"?>
 <p:sld xmlns:a="http://schemas.openxmlformats.org/drawingml/2006/main" xmlns:r="http://schemas.openxmlformats.org/officeDocument/2006/relationships" xmlns:p="http://schemas.openxmlformats.org/presentationml/2006/main">
   <p:cSld>
     <p:spTree>
@@ -20603,205 +21571,7 @@
 </p:sld>
 </file>
 
-<file path=ppt/slides/slide3.xml><?xml version="1.0" encoding="utf-8"?>
-<p:sld xmlns:a="http://schemas.openxmlformats.org/drawingml/2006/main" xmlns:r="http://schemas.openxmlformats.org/officeDocument/2006/relationships" xmlns:p="http://schemas.openxmlformats.org/presentationml/2006/main">
-  <p:cSld>
-    <p:spTree>
-      <p:nvGrpSpPr>
-        <p:cNvPr id="1" name=""/>
-        <p:cNvGrpSpPr/>
-        <p:nvPr/>
-      </p:nvGrpSpPr>
-      <p:grpSpPr>
-        <a:xfrm>
-          <a:off x="0" y="0"/>
-          <a:ext cx="0" cy="0"/>
-          <a:chOff x="0" y="0"/>
-          <a:chExt cx="0" cy="0"/>
-        </a:xfrm>
-      </p:grpSpPr>
-      <p:sp>
-        <p:nvSpPr>
-          <p:cNvPr id="3" name="Title 2">
-            <a:extLst>
-              <a:ext uri="{FF2B5EF4-FFF2-40B4-BE49-F238E27FC236}">
-                <a16:creationId xmlns:a16="http://schemas.microsoft.com/office/drawing/2014/main" id="{9323871C-7CA8-1448-8FFC-1AE6E1838941}"/>
-              </a:ext>
-            </a:extLst>
-          </p:cNvPr>
-          <p:cNvSpPr>
-            <a:spLocks noGrp="1"/>
-          </p:cNvSpPr>
-          <p:nvPr>
-            <p:ph type="title"/>
-          </p:nvPr>
-        </p:nvSpPr>
-        <p:spPr/>
-        <p:txBody>
-          <a:bodyPr/>
-          <a:lstStyle/>
-          <a:p>
-            <a:r>
-              <a:rPr lang="en-US" dirty="0"/>
-              <a:t>Reminders</a:t>
-            </a:r>
-          </a:p>
-        </p:txBody>
-      </p:sp>
-      <p:sp>
-        <p:nvSpPr>
-          <p:cNvPr id="5" name="Text Placeholder 4">
-            <a:extLst>
-              <a:ext uri="{FF2B5EF4-FFF2-40B4-BE49-F238E27FC236}">
-                <a16:creationId xmlns:a16="http://schemas.microsoft.com/office/drawing/2014/main" id="{F4E0A5F0-1D89-954D-91FB-596CD9E690F2}"/>
-              </a:ext>
-            </a:extLst>
-          </p:cNvPr>
-          <p:cNvSpPr>
-            <a:spLocks noGrp="1"/>
-          </p:cNvSpPr>
-          <p:nvPr>
-            <p:ph type="body" idx="1"/>
-          </p:nvPr>
-        </p:nvSpPr>
-        <p:spPr/>
-        <p:txBody>
-          <a:bodyPr/>
-          <a:lstStyle/>
-          <a:p>
-            <a:pPr marL="76200" indent="0">
-              <a:buNone/>
-            </a:pPr>
-            <a:r>
-              <a:rPr lang="en-US" b="1" dirty="0">
-                <a:solidFill>
-                  <a:schemeClr val="tx1">
-                    <a:lumMod val="75000"/>
-                    <a:lumOff val="25000"/>
-                  </a:schemeClr>
-                </a:solidFill>
-              </a:rPr>
-              <a:t>This week:</a:t>
-            </a:r>
-          </a:p>
-          <a:p>
-            <a:r>
-              <a:rPr lang="en-US" dirty="0">
-                <a:solidFill>
-                  <a:schemeClr val="tx1">
-                    <a:lumMod val="75000"/>
-                    <a:lumOff val="25000"/>
-                  </a:schemeClr>
-                </a:solidFill>
-              </a:rPr>
-              <a:t>Tomorrow: Wednesday Group Check-Ins</a:t>
-            </a:r>
-          </a:p>
-          <a:p>
-            <a:r>
-              <a:rPr lang="en-US" dirty="0">
-                <a:solidFill>
-                  <a:schemeClr val="tx1">
-                    <a:lumMod val="75000"/>
-                    <a:lumOff val="25000"/>
-                  </a:schemeClr>
-                </a:solidFill>
-              </a:rPr>
-              <a:t>Thursday: Triage Q&amp;A + time for group work</a:t>
-            </a:r>
-            <a:endParaRPr lang="en-US" b="1" dirty="0">
-              <a:solidFill>
-                <a:schemeClr val="tx1">
-                  <a:lumMod val="75000"/>
-                  <a:lumOff val="25000"/>
-                </a:schemeClr>
-              </a:solidFill>
-            </a:endParaRPr>
-          </a:p>
-          <a:p>
-            <a:pPr marL="76200" indent="0">
-              <a:buNone/>
-            </a:pPr>
-            <a:endParaRPr lang="en-US" b="1" dirty="0">
-              <a:solidFill>
-                <a:schemeClr val="tx1">
-                  <a:lumMod val="75000"/>
-                  <a:lumOff val="25000"/>
-                </a:schemeClr>
-              </a:solidFill>
-            </a:endParaRPr>
-          </a:p>
-          <a:p>
-            <a:pPr marL="76200" indent="0">
-              <a:buNone/>
-            </a:pPr>
-            <a:r>
-              <a:rPr lang="en-US" b="1" dirty="0">
-                <a:solidFill>
-                  <a:schemeClr val="tx1">
-                    <a:lumMod val="75000"/>
-                    <a:lumOff val="25000"/>
-                  </a:schemeClr>
-                </a:solidFill>
-              </a:rPr>
-              <a:t>Coming up after fall break:</a:t>
-            </a:r>
-          </a:p>
-          <a:p>
-            <a:r>
-              <a:rPr lang="en-US" dirty="0">
-                <a:solidFill>
-                  <a:schemeClr val="tx1">
-                    <a:lumMod val="75000"/>
-                    <a:lumOff val="25000"/>
-                  </a:schemeClr>
-                </a:solidFill>
-              </a:rPr>
-              <a:t>Monday: Project Update 3</a:t>
-            </a:r>
-          </a:p>
-          <a:p>
-            <a:r>
-              <a:rPr lang="en-US" dirty="0">
-                <a:solidFill>
-                  <a:schemeClr val="tx1">
-                    <a:lumMod val="75000"/>
-                    <a:lumOff val="25000"/>
-                  </a:schemeClr>
-                </a:solidFill>
-              </a:rPr>
-              <a:t>Tuesday: Weekly Feedback Form</a:t>
-            </a:r>
-          </a:p>
-          <a:p>
-            <a:r>
-              <a:rPr lang="en-US" dirty="0">
-                <a:solidFill>
-                  <a:schemeClr val="tx1">
-                    <a:lumMod val="75000"/>
-                    <a:lumOff val="25000"/>
-                  </a:schemeClr>
-                </a:solidFill>
-              </a:rPr>
-              <a:t>Tuesday: Building Features in Triage</a:t>
-            </a:r>
-          </a:p>
-        </p:txBody>
-      </p:sp>
-    </p:spTree>
-    <p:extLst>
-      <p:ext uri="{BB962C8B-B14F-4D97-AF65-F5344CB8AC3E}">
-        <p14:creationId xmlns:p14="http://schemas.microsoft.com/office/powerpoint/2010/main" val="186046226"/>
-      </p:ext>
-    </p:extLst>
-  </p:cSld>
-  <p:clrMapOvr>
-    <a:masterClrMapping/>
-  </p:clrMapOvr>
-</p:sld>
-</file>
-
-<file path=ppt/slides/slide30.xml><?xml version="1.0" encoding="utf-8"?>
+<file path=ppt/slides/slide31.xml><?xml version="1.0" encoding="utf-8"?>
 <p:sld xmlns:a="http://schemas.openxmlformats.org/drawingml/2006/main" xmlns:r="http://schemas.openxmlformats.org/officeDocument/2006/relationships" xmlns:p="http://schemas.openxmlformats.org/presentationml/2006/main">
   <p:cSld>
     <p:spTree>
@@ -20937,7 +21707,7 @@
 </p:sld>
 </file>
 
-<file path=ppt/slides/slide31.xml><?xml version="1.0" encoding="utf-8"?>
+<file path=ppt/slides/slide32.xml><?xml version="1.0" encoding="utf-8"?>
 <p:sld xmlns:a="http://schemas.openxmlformats.org/drawingml/2006/main" xmlns:r="http://schemas.openxmlformats.org/officeDocument/2006/relationships" xmlns:p="http://schemas.openxmlformats.org/presentationml/2006/main">
   <p:cSld>
     <p:spTree>
@@ -21117,159 +21887,6 @@
 </p:sld>
 </file>
 
-<file path=ppt/slides/slide32.xml><?xml version="1.0" encoding="utf-8"?>
-<p:sld xmlns:a="http://schemas.openxmlformats.org/drawingml/2006/main" xmlns:r="http://schemas.openxmlformats.org/officeDocument/2006/relationships" xmlns:p="http://schemas.openxmlformats.org/presentationml/2006/main">
-  <p:cSld>
-    <p:spTree>
-      <p:nvGrpSpPr>
-        <p:cNvPr id="1" name=""/>
-        <p:cNvGrpSpPr/>
-        <p:nvPr/>
-      </p:nvGrpSpPr>
-      <p:grpSpPr>
-        <a:xfrm>
-          <a:off x="0" y="0"/>
-          <a:ext cx="0" cy="0"/>
-          <a:chOff x="0" y="0"/>
-          <a:chExt cx="0" cy="0"/>
-        </a:xfrm>
-      </p:grpSpPr>
-      <p:sp>
-        <p:nvSpPr>
-          <p:cNvPr id="3" name="Title 2"/>
-          <p:cNvSpPr>
-            <a:spLocks noGrp="1"/>
-          </p:cNvSpPr>
-          <p:nvPr>
-            <p:ph type="title"/>
-          </p:nvPr>
-        </p:nvSpPr>
-        <p:spPr/>
-        <p:txBody>
-          <a:bodyPr/>
-          <a:lstStyle/>
-          <a:p>
-            <a:r>
-              <a:rPr lang="en-US" dirty="0"/>
-              <a:t>Aggregations</a:t>
-            </a:r>
-          </a:p>
-        </p:txBody>
-      </p:sp>
-      <p:sp>
-        <p:nvSpPr>
-          <p:cNvPr id="2" name="Content Placeholder 1"/>
-          <p:cNvSpPr>
-            <a:spLocks noGrp="1"/>
-          </p:cNvSpPr>
-          <p:nvPr>
-            <p:ph type="body" idx="1"/>
-          </p:nvPr>
-        </p:nvSpPr>
-        <p:spPr/>
-        <p:txBody>
-          <a:bodyPr>
-            <a:normAutofit lnSpcReduction="10000"/>
-          </a:bodyPr>
-          <a:lstStyle/>
-          <a:p>
-            <a:r>
-              <a:rPr lang="en-US" dirty="0"/>
-              <a:t>Date differences (# of days since…)</a:t>
-            </a:r>
-          </a:p>
-          <a:p>
-            <a:r>
-              <a:rPr lang="en-US" dirty="0"/>
-              <a:t>Aggregates over different time periods</a:t>
-            </a:r>
-          </a:p>
-          <a:p>
-            <a:pPr lvl="1"/>
-            <a:r>
-              <a:rPr lang="en-US" dirty="0"/>
-              <a:t>min, max, avg, </a:t>
-            </a:r>
-            <a:r>
-              <a:rPr lang="en-US" dirty="0" err="1"/>
-              <a:t>stdev</a:t>
-            </a:r>
-            <a:endParaRPr lang="en-US" dirty="0"/>
-          </a:p>
-          <a:p>
-            <a:pPr lvl="1"/>
-            <a:r>
-              <a:rPr lang="en-US" dirty="0" err="1"/>
-              <a:t>Avg</a:t>
-            </a:r>
-            <a:r>
-              <a:rPr lang="en-US" dirty="0"/>
-              <a:t> spend in the past 3 months</a:t>
-            </a:r>
-          </a:p>
-          <a:p>
-            <a:r>
-              <a:rPr lang="en-US" dirty="0"/>
-              <a:t>Relative aggregates</a:t>
-            </a:r>
-          </a:p>
-          <a:p>
-            <a:pPr lvl="1"/>
-            <a:r>
-              <a:rPr lang="en-US" dirty="0"/>
-              <a:t>1.5x </a:t>
-            </a:r>
-            <a:r>
-              <a:rPr lang="en-US" dirty="0" err="1"/>
-              <a:t>avg</a:t>
-            </a:r>
-            <a:r>
-              <a:rPr lang="en-US" dirty="0"/>
-              <a:t> spend</a:t>
-            </a:r>
-          </a:p>
-          <a:p>
-            <a:r>
-              <a:rPr lang="en-US" dirty="0"/>
-              <a:t>Distances</a:t>
-            </a:r>
-          </a:p>
-          <a:p>
-            <a:r>
-              <a:rPr lang="en-US" dirty="0"/>
-              <a:t>Aggregates over different distances</a:t>
-            </a:r>
-          </a:p>
-          <a:p>
-            <a:r>
-              <a:rPr lang="en-US" dirty="0"/>
-              <a:t>Seasonality</a:t>
-            </a:r>
-          </a:p>
-          <a:p>
-            <a:endParaRPr lang="en-US" dirty="0"/>
-          </a:p>
-          <a:p>
-            <a:endParaRPr lang="en-US" dirty="0"/>
-          </a:p>
-          <a:p>
-            <a:endParaRPr lang="en-US" dirty="0"/>
-          </a:p>
-        </p:txBody>
-      </p:sp>
-    </p:spTree>
-    <p:extLst>
-      <p:ext uri="{BB962C8B-B14F-4D97-AF65-F5344CB8AC3E}">
-        <p14:creationId xmlns:p14="http://schemas.microsoft.com/office/powerpoint/2010/main" val="3227679789"/>
-      </p:ext>
-    </p:extLst>
-  </p:cSld>
-  <p:clrMapOvr>
-    <a:masterClrMapping/>
-  </p:clrMapOvr>
-</p:sld>
-</file>
-
 <file path=ppt/slides/slide33.xml><?xml version="1.0" encoding="utf-8"?>
 <p:sld xmlns:a="http://schemas.openxmlformats.org/drawingml/2006/main" xmlns:r="http://schemas.openxmlformats.org/officeDocument/2006/relationships" xmlns:p="http://schemas.openxmlformats.org/presentationml/2006/main">
   <p:cSld>
@@ -21304,7 +21921,7 @@
           <a:p>
             <a:r>
               <a:rPr lang="en-US" dirty="0"/>
-              <a:t>Feature Interactions</a:t>
+              <a:t>Aggregations</a:t>
             </a:r>
           </a:p>
         </p:txBody>
@@ -21321,46 +21938,99 @@
         </p:nvSpPr>
         <p:spPr/>
         <p:txBody>
-          <a:bodyPr/>
+          <a:bodyPr>
+            <a:normAutofit lnSpcReduction="10000"/>
+          </a:bodyPr>
           <a:lstStyle/>
           <a:p>
             <a:r>
               <a:rPr lang="en-US" dirty="0"/>
-              <a:t>Generate features for combination of features</a:t>
+              <a:t>Date differences (# of days since…)</a:t>
+            </a:r>
+          </a:p>
+          <a:p>
+            <a:r>
+              <a:rPr lang="en-US" dirty="0"/>
+              <a:t>Aggregates over different time periods</a:t>
             </a:r>
           </a:p>
           <a:p>
             <a:pPr lvl="1"/>
             <a:r>
               <a:rPr lang="en-US" dirty="0"/>
-              <a:t>Age x gender</a:t>
-            </a:r>
+              <a:t>min, max, avg, </a:t>
+            </a:r>
+            <a:r>
+              <a:rPr lang="en-US" dirty="0" err="1"/>
+              <a:t>stdev</a:t>
+            </a:r>
+            <a:endParaRPr lang="en-US" dirty="0"/>
           </a:p>
           <a:p>
             <a:pPr lvl="1"/>
+            <a:r>
+              <a:rPr lang="en-US" dirty="0" err="1"/>
+              <a:t>Avg</a:t>
+            </a:r>
+            <a:r>
+              <a:rPr lang="en-US" dirty="0"/>
+              <a:t> spend in the past 3 months</a:t>
+            </a:r>
+          </a:p>
+          <a:p>
+            <a:r>
+              <a:rPr lang="en-US" dirty="0"/>
+              <a:t>Relative aggregates</a:t>
+            </a:r>
+          </a:p>
+          <a:p>
+            <a:pPr lvl="1"/>
+            <a:r>
+              <a:rPr lang="en-US" dirty="0"/>
+              <a:t>1.5x </a:t>
+            </a:r>
+            <a:r>
+              <a:rPr lang="en-US" dirty="0" err="1"/>
+              <a:t>avg</a:t>
+            </a:r>
+            <a:r>
+              <a:rPr lang="en-US" dirty="0"/>
+              <a:t> spend</a:t>
+            </a:r>
+          </a:p>
+          <a:p>
+            <a:r>
+              <a:rPr lang="en-US" dirty="0"/>
+              <a:t>Distances</a:t>
+            </a:r>
+          </a:p>
+          <a:p>
+            <a:r>
+              <a:rPr lang="en-US" dirty="0"/>
+              <a:t>Aggregates over different distances</a:t>
+            </a:r>
+          </a:p>
+          <a:p>
+            <a:r>
+              <a:rPr lang="en-US" dirty="0"/>
+              <a:t>Seasonality</a:t>
+            </a:r>
+          </a:p>
+          <a:p>
             <a:endParaRPr lang="en-US" dirty="0"/>
           </a:p>
           <a:p>
-            <a:r>
-              <a:rPr lang="en-US" dirty="0"/>
-              <a:t>Allows you to use linear models but still model non linear relationships</a:t>
-            </a:r>
-          </a:p>
-          <a:p>
             <a:endParaRPr lang="en-US" dirty="0"/>
           </a:p>
           <a:p>
-            <a:r>
-              <a:rPr lang="en-US" dirty="0"/>
-              <a:t>Random Forests are one way of discovering useful interactions</a:t>
-            </a:r>
+            <a:endParaRPr lang="en-US" dirty="0"/>
           </a:p>
         </p:txBody>
       </p:sp>
     </p:spTree>
     <p:extLst>
       <p:ext uri="{BB962C8B-B14F-4D97-AF65-F5344CB8AC3E}">
-        <p14:creationId xmlns:p14="http://schemas.microsoft.com/office/powerpoint/2010/main" val="2835794600"/>
+        <p14:creationId xmlns:p14="http://schemas.microsoft.com/office/powerpoint/2010/main" val="3227679789"/>
       </p:ext>
     </p:extLst>
   </p:cSld>
@@ -21397,19 +22067,14 @@
             <p:ph type="title"/>
           </p:nvPr>
         </p:nvSpPr>
-        <p:spPr>
-          <a:xfrm>
-            <a:off x="180821" y="293023"/>
-            <a:ext cx="11360700" cy="763500"/>
-          </a:xfrm>
-        </p:spPr>
+        <p:spPr/>
         <p:txBody>
           <a:bodyPr/>
           <a:lstStyle/>
           <a:p>
             <a:r>
               <a:rPr lang="en-US" dirty="0"/>
-              <a:t>Features are also model-dependent</a:t>
+              <a:t>Feature Interactions</a:t>
             </a:r>
           </a:p>
         </p:txBody>
@@ -21429,39 +22094,43 @@
           <a:bodyPr/>
           <a:lstStyle/>
           <a:p>
+            <a:r>
+              <a:rPr lang="en-US" dirty="0"/>
+              <a:t>Generate features for combination of features</a:t>
+            </a:r>
+          </a:p>
+          <a:p>
+            <a:pPr lvl="1"/>
+            <a:r>
+              <a:rPr lang="en-US" dirty="0"/>
+              <a:t>Age x gender</a:t>
+            </a:r>
+          </a:p>
+          <a:p>
+            <a:pPr lvl="1"/>
             <a:endParaRPr lang="en-US" dirty="0"/>
           </a:p>
           <a:p>
-            <a:pPr marL="76200" indent="0">
-              <a:buNone/>
-            </a:pPr>
+            <a:r>
+              <a:rPr lang="en-US" dirty="0"/>
+              <a:t>Allows you to use linear models but still model non linear relationships</a:t>
+            </a:r>
+          </a:p>
+          <a:p>
             <a:endParaRPr lang="en-US" dirty="0"/>
           </a:p>
           <a:p>
             <a:r>
               <a:rPr lang="en-US" dirty="0"/>
-              <a:t>Linear models may need … ?</a:t>
-            </a:r>
-            <a:br>
-              <a:rPr lang="en-US" dirty="0"/>
-            </a:br>
-            <a:endParaRPr lang="en-US" dirty="0"/>
-          </a:p>
-          <a:p>
-            <a:r>
-              <a:rPr lang="en-US" dirty="0"/>
-              <a:t>Non-linear models may need …?</a:t>
-            </a:r>
-          </a:p>
-          <a:p>
-            <a:endParaRPr lang="en-US" dirty="0"/>
+              <a:t>Random Forests are one way of discovering useful interactions</a:t>
+            </a:r>
           </a:p>
         </p:txBody>
       </p:sp>
     </p:spTree>
     <p:extLst>
       <p:ext uri="{BB962C8B-B14F-4D97-AF65-F5344CB8AC3E}">
-        <p14:creationId xmlns:p14="http://schemas.microsoft.com/office/powerpoint/2010/main" val="466559840"/>
+        <p14:creationId xmlns:p14="http://schemas.microsoft.com/office/powerpoint/2010/main" val="2835794600"/>
       </p:ext>
     </p:extLst>
   </p:cSld>
@@ -21498,14 +22167,19 @@
             <p:ph type="title"/>
           </p:nvPr>
         </p:nvSpPr>
-        <p:spPr/>
+        <p:spPr>
+          <a:xfrm>
+            <a:off x="180821" y="293023"/>
+            <a:ext cx="11360700" cy="763500"/>
+          </a:xfrm>
+        </p:spPr>
         <p:txBody>
           <a:bodyPr/>
           <a:lstStyle/>
           <a:p>
             <a:r>
               <a:rPr lang="en-US" dirty="0"/>
-              <a:t>Missing Values</a:t>
+              <a:t>Features are also model-dependent</a:t>
             </a:r>
           </a:p>
         </p:txBody>
@@ -21525,56 +22199,39 @@
           <a:bodyPr/>
           <a:lstStyle/>
           <a:p>
+            <a:endParaRPr lang="en-US" dirty="0"/>
+          </a:p>
+          <a:p>
+            <a:pPr marL="76200" indent="0">
+              <a:buNone/>
+            </a:pPr>
+            <a:endParaRPr lang="en-US" dirty="0"/>
+          </a:p>
+          <a:p>
             <a:r>
               <a:rPr lang="en-US" dirty="0"/>
-              <a:t>Impute (Fill in) missing values based on why you think they may be missing and what you want the model to do with those missing values</a:t>
-            </a:r>
-          </a:p>
-          <a:p>
-            <a:pPr lvl="1"/>
-            <a:r>
+              <a:t>Linear models may need … ?</a:t>
+            </a:r>
+            <a:br>
               <a:rPr lang="en-US" dirty="0"/>
-              <a:t>Missing Completely at Random</a:t>
-            </a:r>
-          </a:p>
-          <a:p>
-            <a:pPr lvl="1"/>
+            </a:br>
+            <a:endParaRPr lang="en-US" dirty="0"/>
+          </a:p>
+          <a:p>
             <a:r>
               <a:rPr lang="en-US" dirty="0"/>
-              <a:t>Missing at Random</a:t>
-            </a:r>
-          </a:p>
-          <a:p>
-            <a:pPr lvl="1"/>
-            <a:r>
-              <a:rPr lang="en-US" dirty="0"/>
-              <a:t>Missing Not at Random</a:t>
-            </a:r>
-          </a:p>
-          <a:p>
-            <a:pPr lvl="1"/>
+              <a:t>Non-linear models may need …?</a:t>
+            </a:r>
+          </a:p>
+          <a:p>
             <a:endParaRPr lang="en-US" dirty="0"/>
-          </a:p>
-          <a:p>
-            <a:r>
-              <a:rPr lang="en-US" dirty="0"/>
-              <a:t>Typically, also add binary feature (dummy) for missing vs not missing in case “</a:t>
-            </a:r>
-            <a:r>
-              <a:rPr lang="en-US" dirty="0" err="1"/>
-              <a:t>missingness</a:t>
-            </a:r>
-            <a:r>
-              <a:rPr lang="en-US" dirty="0"/>
-              <a:t>” is predictive of the outcome</a:t>
-            </a:r>
           </a:p>
         </p:txBody>
       </p:sp>
     </p:spTree>
     <p:extLst>
       <p:ext uri="{BB962C8B-B14F-4D97-AF65-F5344CB8AC3E}">
-        <p14:creationId xmlns:p14="http://schemas.microsoft.com/office/powerpoint/2010/main" val="3357099955"/>
+        <p14:creationId xmlns:p14="http://schemas.microsoft.com/office/powerpoint/2010/main" val="466559840"/>
       </p:ext>
     </p:extLst>
   </p:cSld>
@@ -21618,7 +22275,7 @@
           <a:p>
             <a:r>
               <a:rPr lang="en-US" dirty="0"/>
-              <a:t>Imputing Missing Values: Some Options</a:t>
+              <a:t>Missing Values</a:t>
             </a:r>
           </a:p>
         </p:txBody>
@@ -21633,88 +22290,61 @@
             <p:ph type="body" idx="1"/>
           </p:nvPr>
         </p:nvSpPr>
-        <p:spPr>
-          <a:xfrm>
-            <a:off x="415600" y="1601179"/>
-            <a:ext cx="11360700" cy="4555200"/>
-          </a:xfrm>
-        </p:spPr>
+        <p:spPr/>
         <p:txBody>
           <a:bodyPr/>
           <a:lstStyle/>
           <a:p>
             <a:r>
               <a:rPr lang="en-US" dirty="0"/>
-              <a:t>Nothing?</a:t>
-            </a:r>
-          </a:p>
-          <a:p>
+              <a:t>Impute (Fill in) missing values based on why you think they may be missing and what you want the model to do with those missing values</a:t>
+            </a:r>
+          </a:p>
+          <a:p>
+            <a:pPr lvl="1"/>
+            <a:r>
+              <a:rPr lang="en-US" dirty="0"/>
+              <a:t>Missing Completely at Random</a:t>
+            </a:r>
+          </a:p>
+          <a:p>
+            <a:pPr lvl="1"/>
+            <a:r>
+              <a:rPr lang="en-US" dirty="0"/>
+              <a:t>Missing at Random</a:t>
+            </a:r>
+          </a:p>
+          <a:p>
+            <a:pPr lvl="1"/>
+            <a:r>
+              <a:rPr lang="en-US" dirty="0"/>
+              <a:t>Missing Not at Random</a:t>
+            </a:r>
+          </a:p>
+          <a:p>
+            <a:pPr lvl="1"/>
             <a:endParaRPr lang="en-US" dirty="0"/>
           </a:p>
           <a:p>
             <a:r>
               <a:rPr lang="en-US" dirty="0"/>
-              <a:t>Central Tendency: Mean / Median / Mode</a:t>
-            </a:r>
-            <a:br>
+              <a:t>Typically, also add binary feature (dummy) for missing vs not missing in case “</a:t>
+            </a:r>
+            <a:r>
+              <a:rPr lang="en-US" dirty="0" err="1"/>
+              <a:t>missingness</a:t>
+            </a:r>
+            <a:r>
               <a:rPr lang="en-US" dirty="0"/>
-            </a:br>
-            <a:endParaRPr lang="en-US" dirty="0"/>
-          </a:p>
-          <a:p>
-            <a:r>
-              <a:rPr lang="en-US" dirty="0"/>
-              <a:t>ML methods that handle missing data (e.g., </a:t>
-            </a:r>
-            <a:r>
-              <a:rPr lang="en-US" dirty="0" err="1"/>
-              <a:t>xgboost</a:t>
-            </a:r>
-            <a:r>
-              <a:rPr lang="en-US" dirty="0"/>
-              <a:t>)</a:t>
-            </a:r>
-          </a:p>
-          <a:p>
-            <a:endParaRPr lang="en-US" dirty="0"/>
-          </a:p>
-          <a:p>
-            <a:r>
-              <a:rPr lang="en-US" dirty="0"/>
-              <a:t>Others</a:t>
-            </a:r>
-          </a:p>
-          <a:p>
-            <a:pPr lvl="1"/>
-            <a:r>
-              <a:rPr lang="en-US" dirty="0"/>
-              <a:t>Regression</a:t>
-            </a:r>
-          </a:p>
-          <a:p>
-            <a:pPr lvl="1"/>
-            <a:r>
-              <a:rPr lang="en-US" dirty="0"/>
-              <a:t>k-Nearest Neighbor</a:t>
-            </a:r>
-          </a:p>
-          <a:p>
-            <a:pPr lvl="1"/>
-            <a:r>
-              <a:rPr lang="en-US" dirty="0"/>
-              <a:t>Multiple Imputation</a:t>
-            </a:r>
-            <a:br>
-              <a:rPr lang="en-US" dirty="0"/>
-            </a:br>
-            <a:endParaRPr lang="en-US" dirty="0"/>
+              <a:t>” is predictive of the outcome</a:t>
+            </a:r>
           </a:p>
         </p:txBody>
       </p:sp>
     </p:spTree>
     <p:extLst>
       <p:ext uri="{BB962C8B-B14F-4D97-AF65-F5344CB8AC3E}">
-        <p14:creationId xmlns:p14="http://schemas.microsoft.com/office/powerpoint/2010/main" val="1168414506"/>
+        <p14:creationId xmlns:p14="http://schemas.microsoft.com/office/powerpoint/2010/main" val="3357099955"/>
       </p:ext>
     </p:extLst>
   </p:cSld>
@@ -21758,7 +22388,7 @@
           <a:p>
             <a:r>
               <a:rPr lang="en-US" dirty="0"/>
-              <a:t>Imputing – Central Tendency</a:t>
+              <a:t>Imputing Missing Values: Some Options</a:t>
             </a:r>
           </a:p>
         </p:txBody>
@@ -21773,14 +22403,28 @@
             <p:ph type="body" idx="1"/>
           </p:nvPr>
         </p:nvSpPr>
-        <p:spPr/>
+        <p:spPr>
+          <a:xfrm>
+            <a:off x="415600" y="1601179"/>
+            <a:ext cx="11360700" cy="4555200"/>
+          </a:xfrm>
+        </p:spPr>
         <p:txBody>
           <a:bodyPr/>
           <a:lstStyle/>
           <a:p>
             <a:r>
               <a:rPr lang="en-US" dirty="0"/>
-              <a:t>Simple to calculate and computationally fast</a:t>
+              <a:t>Nothing?</a:t>
+            </a:r>
+          </a:p>
+          <a:p>
+            <a:endParaRPr lang="en-US" dirty="0"/>
+          </a:p>
+          <a:p>
+            <a:r>
+              <a:rPr lang="en-US" dirty="0"/>
+              <a:t>Central Tendency: Mean / Median / Mode</a:t>
             </a:r>
             <a:br>
               <a:rPr lang="en-US" dirty="0"/>
@@ -21790,119 +22434,63 @@
           <a:p>
             <a:r>
               <a:rPr lang="en-US" dirty="0"/>
-              <a:t>Often a reasonable starting point</a:t>
+              <a:t>ML methods that handle missing data (e.g., </a:t>
+            </a:r>
+            <a:r>
+              <a:rPr lang="en-US" dirty="0" err="1"/>
+              <a:t>xgboost</a:t>
+            </a:r>
+            <a:r>
+              <a:rPr lang="en-US" dirty="0"/>
+              <a:t>)</a:t>
+            </a:r>
+          </a:p>
+          <a:p>
+            <a:endParaRPr lang="en-US" dirty="0"/>
+          </a:p>
+          <a:p>
+            <a:r>
+              <a:rPr lang="en-US" dirty="0"/>
+              <a:t>Others</a:t>
+            </a:r>
+          </a:p>
+          <a:p>
+            <a:pPr lvl="1"/>
+            <a:r>
+              <a:rPr lang="en-US" dirty="0"/>
+              <a:t>Regression</a:t>
+            </a:r>
+          </a:p>
+          <a:p>
+            <a:pPr lvl="1"/>
+            <a:r>
+              <a:rPr lang="en-US" dirty="0"/>
+              <a:t>k-Nearest Neighbor</a:t>
+            </a:r>
+          </a:p>
+          <a:p>
+            <a:pPr lvl="1"/>
+            <a:r>
+              <a:rPr lang="en-US" dirty="0"/>
+              <a:t>Multiple Imputation</a:t>
             </a:r>
             <a:br>
               <a:rPr lang="en-US" dirty="0"/>
             </a:br>
             <a:endParaRPr lang="en-US" dirty="0"/>
-          </a:p>
-          <a:p>
-            <a:r>
-              <a:rPr lang="en-US" dirty="0"/>
-              <a:t>May be able to capture more nuance by using other, correlated data to help fill in missing values</a:t>
-            </a:r>
-            <a:br>
-              <a:rPr lang="en-US" dirty="0"/>
-            </a:br>
-            <a:endParaRPr lang="en-US" dirty="0"/>
-          </a:p>
-          <a:p>
-            <a:r>
-              <a:rPr lang="en-US" dirty="0"/>
-              <a:t>Under-represents variance/covariance of data</a:t>
-            </a:r>
           </a:p>
         </p:txBody>
       </p:sp>
     </p:spTree>
     <p:extLst>
       <p:ext uri="{BB962C8B-B14F-4D97-AF65-F5344CB8AC3E}">
-        <p14:creationId xmlns:p14="http://schemas.microsoft.com/office/powerpoint/2010/main" val="2396215195"/>
+        <p14:creationId xmlns:p14="http://schemas.microsoft.com/office/powerpoint/2010/main" val="1168414506"/>
       </p:ext>
     </p:extLst>
   </p:cSld>
   <p:clrMapOvr>
     <a:masterClrMapping/>
   </p:clrMapOvr>
-  <p:timing>
-    <p:tnLst>
-      <p:par>
-        <p:cTn id="1" dur="indefinite" restart="never" nodeType="tmRoot">
-          <p:childTnLst>
-            <p:seq concurrent="1" nextAc="seek">
-              <p:cTn id="2" dur="indefinite" nodeType="mainSeq">
-                <p:childTnLst>
-                  <p:par>
-                    <p:cTn id="3" fill="hold">
-                      <p:stCondLst>
-                        <p:cond delay="indefinite"/>
-                      </p:stCondLst>
-                      <p:childTnLst>
-                        <p:par>
-                          <p:cTn id="4" fill="hold">
-                            <p:stCondLst>
-                              <p:cond delay="0"/>
-                            </p:stCondLst>
-                            <p:childTnLst>
-                              <p:par>
-                                <p:cTn id="5" presetID="1" presetClass="entr" presetSubtype="0" fill="hold" grpId="0" nodeType="clickEffect">
-                                  <p:stCondLst>
-                                    <p:cond delay="0"/>
-                                  </p:stCondLst>
-                                  <p:childTnLst>
-                                    <p:set>
-                                      <p:cBhvr>
-                                        <p:cTn id="6" dur="1" fill="hold">
-                                          <p:stCondLst>
-                                            <p:cond delay="0"/>
-                                          </p:stCondLst>
-                                        </p:cTn>
-                                        <p:tgtEl>
-                                          <p:spTgt spid="2"/>
-                                        </p:tgtEl>
-                                        <p:attrNameLst>
-                                          <p:attrName>style.visibility</p:attrName>
-                                        </p:attrNameLst>
-                                      </p:cBhvr>
-                                      <p:to>
-                                        <p:strVal val="visible"/>
-                                      </p:to>
-                                    </p:set>
-                                  </p:childTnLst>
-                                </p:cTn>
-                              </p:par>
-                            </p:childTnLst>
-                          </p:cTn>
-                        </p:par>
-                      </p:childTnLst>
-                    </p:cTn>
-                  </p:par>
-                </p:childTnLst>
-              </p:cTn>
-              <p:prevCondLst>
-                <p:cond evt="onPrev" delay="0">
-                  <p:tgtEl>
-                    <p:sldTgt/>
-                  </p:tgtEl>
-                </p:cond>
-              </p:prevCondLst>
-              <p:nextCondLst>
-                <p:cond evt="onNext" delay="0">
-                  <p:tgtEl>
-                    <p:sldTgt/>
-                  </p:tgtEl>
-                </p:cond>
-              </p:nextCondLst>
-            </p:seq>
-          </p:childTnLst>
-        </p:cTn>
-      </p:par>
-    </p:tnLst>
-    <p:bldLst>
-      <p:bldP spid="2" grpId="0"/>
-    </p:bldLst>
-  </p:timing>
 </p:sld>
 </file>
 
@@ -21940,7 +22528,7 @@
           <a:p>
             <a:r>
               <a:rPr lang="en-US" dirty="0"/>
-              <a:t>Imputing – ML Methods with Missing Data Handling</a:t>
+              <a:t>Imputing – Central Tendency</a:t>
             </a:r>
           </a:p>
         </p:txBody>
@@ -21962,15 +22550,7 @@
           <a:p>
             <a:r>
               <a:rPr lang="en-US" dirty="0"/>
-              <a:t>Some models have built-in handling of missing data, such as </a:t>
-            </a:r>
-            <a:r>
-              <a:rPr lang="en-US" dirty="0" err="1"/>
-              <a:t>xgboost</a:t>
-            </a:r>
-            <a:r>
-              <a:rPr lang="en-US" dirty="0"/>
-              <a:t> (which decides which direction to send missing values at each split)</a:t>
+              <a:t>Simple to calculate and computationally fast</a:t>
             </a:r>
             <a:br>
               <a:rPr lang="en-US" dirty="0"/>
@@ -21980,7 +22560,7 @@
           <a:p>
             <a:r>
               <a:rPr lang="en-US" dirty="0"/>
-              <a:t>May not be the best modeling method for your problem, don’t want to be locked into certain type of model</a:t>
+              <a:t>Often a reasonable starting point</a:t>
             </a:r>
             <a:br>
               <a:rPr lang="en-US" dirty="0"/>
@@ -21990,7 +22570,17 @@
           <a:p>
             <a:r>
               <a:rPr lang="en-US" dirty="0"/>
-              <a:t>Nevertheless, worth exploring performance of other imputation methods even when using these models as well</a:t>
+              <a:t>May be able to capture more nuance by using other, correlated data to help fill in missing values</a:t>
+            </a:r>
+            <a:br>
+              <a:rPr lang="en-US" dirty="0"/>
+            </a:br>
+            <a:endParaRPr lang="en-US" dirty="0"/>
+          </a:p>
+          <a:p>
+            <a:r>
+              <a:rPr lang="en-US" dirty="0"/>
+              <a:t>Under-represents variance/covariance of data</a:t>
             </a:r>
           </a:p>
         </p:txBody>
@@ -21998,7 +22588,7 @@
     </p:spTree>
     <p:extLst>
       <p:ext uri="{BB962C8B-B14F-4D97-AF65-F5344CB8AC3E}">
-        <p14:creationId xmlns:p14="http://schemas.microsoft.com/office/powerpoint/2010/main" val="2521997284"/>
+        <p14:creationId xmlns:p14="http://schemas.microsoft.com/office/powerpoint/2010/main" val="2396215195"/>
       </p:ext>
     </p:extLst>
   </p:cSld>
@@ -22120,7 +22710,7 @@
           <a:p>
             <a:r>
               <a:rPr lang="en-US" dirty="0"/>
-              <a:t>Imputing – Regression</a:t>
+              <a:t>Imputing – ML Methods with Missing Data Handling</a:t>
             </a:r>
           </a:p>
         </p:txBody>
@@ -22142,7 +22732,15 @@
           <a:p>
             <a:r>
               <a:rPr lang="en-US" dirty="0"/>
-              <a:t>Make use of information in correlated features, more flexible than central tendency</a:t>
+              <a:t>Some models have built-in handling of missing data, such as </a:t>
+            </a:r>
+            <a:r>
+              <a:rPr lang="en-US" dirty="0" err="1"/>
+              <a:t>xgboost</a:t>
+            </a:r>
+            <a:r>
+              <a:rPr lang="en-US" dirty="0"/>
+              <a:t> (which decides which direction to send missing values at each split)</a:t>
             </a:r>
             <a:br>
               <a:rPr lang="en-US" dirty="0"/>
@@ -22152,7 +22750,7 @@
           <a:p>
             <a:r>
               <a:rPr lang="en-US" dirty="0"/>
-              <a:t>However, may not be flexible enough to capture complex relationships or interactions</a:t>
+              <a:t>May not be the best modeling method for your problem, don’t want to be locked into certain type of model</a:t>
             </a:r>
             <a:br>
               <a:rPr lang="en-US" dirty="0"/>
@@ -22162,17 +22760,7 @@
           <a:p>
             <a:r>
               <a:rPr lang="en-US" dirty="0"/>
-              <a:t>May be somewhat more computationally expensive </a:t>
-            </a:r>
-            <a:br>
-              <a:rPr lang="en-US" dirty="0"/>
-            </a:br>
-            <a:endParaRPr lang="en-US" dirty="0"/>
-          </a:p>
-          <a:p>
-            <a:r>
-              <a:rPr lang="en-US" dirty="0"/>
-              <a:t>Generally will still underestimate variation in data</a:t>
+              <a:t>Nevertheless, worth exploring performance of other imputation methods even when using these models as well</a:t>
             </a:r>
           </a:p>
         </p:txBody>
@@ -22180,7 +22768,7 @@
     </p:spTree>
     <p:extLst>
       <p:ext uri="{BB962C8B-B14F-4D97-AF65-F5344CB8AC3E}">
-        <p14:creationId xmlns:p14="http://schemas.microsoft.com/office/powerpoint/2010/main" val="3808227576"/>
+        <p14:creationId xmlns:p14="http://schemas.microsoft.com/office/powerpoint/2010/main" val="2521997284"/>
       </p:ext>
     </p:extLst>
   </p:cSld>
@@ -22350,7 +22938,7 @@
             <a:pPr lvl="1"/>
             <a:r>
               <a:rPr lang="en-US" dirty="0"/>
-              <a:t>Initial brainstorming features you’d like to build</a:t>
+              <a:t>Initial brainstorming on features you’d like to build</a:t>
             </a:r>
           </a:p>
           <a:p>
@@ -22361,6 +22949,13 @@
             <a:r>
               <a:rPr lang="en-US" dirty="0"/>
               <a:t>What you should be building this week</a:t>
+            </a:r>
+          </a:p>
+          <a:p>
+            <a:pPr lvl="1"/>
+            <a:r>
+              <a:rPr lang="en-US" dirty="0"/>
+              <a:t>Getting comfortable with running triage</a:t>
             </a:r>
           </a:p>
           <a:p>
@@ -22426,7 +23021,7 @@
           <a:p>
             <a:r>
               <a:rPr lang="en-US" dirty="0"/>
-              <a:t>Imputing – k-Nearest Neighbor</a:t>
+              <a:t>Imputing – Regression</a:t>
             </a:r>
           </a:p>
         </p:txBody>
@@ -22448,7 +23043,7 @@
           <a:p>
             <a:r>
               <a:rPr lang="en-US" dirty="0"/>
-              <a:t>More flexible option, capture more complexity in relationships in data</a:t>
+              <a:t>Make use of information in correlated features, more flexible than central tendency</a:t>
             </a:r>
             <a:br>
               <a:rPr lang="en-US" dirty="0"/>
@@ -22458,7 +23053,7 @@
           <a:p>
             <a:r>
               <a:rPr lang="en-US" dirty="0"/>
-              <a:t>Difficult to choose appropriate distance metric, value of k</a:t>
+              <a:t>However, may not be flexible enough to capture complex relationships or interactions</a:t>
             </a:r>
             <a:br>
               <a:rPr lang="en-US" dirty="0"/>
@@ -22468,7 +23063,7 @@
           <a:p>
             <a:r>
               <a:rPr lang="en-US" dirty="0"/>
-              <a:t>More computationally expensive than other methods of imputation</a:t>
+              <a:t>May be somewhat more computationally expensive </a:t>
             </a:r>
             <a:br>
               <a:rPr lang="en-US" dirty="0"/>
@@ -22478,7 +23073,7 @@
           <a:p>
             <a:r>
               <a:rPr lang="en-US" dirty="0"/>
-              <a:t>Requires entire training set to calculate imputed values for new examples</a:t>
+              <a:t>Generally will still underestimate variation in data</a:t>
             </a:r>
           </a:p>
         </p:txBody>
@@ -22486,7 +23081,7 @@
     </p:spTree>
     <p:extLst>
       <p:ext uri="{BB962C8B-B14F-4D97-AF65-F5344CB8AC3E}">
-        <p14:creationId xmlns:p14="http://schemas.microsoft.com/office/powerpoint/2010/main" val="3729575760"/>
+        <p14:creationId xmlns:p14="http://schemas.microsoft.com/office/powerpoint/2010/main" val="3808227576"/>
       </p:ext>
     </p:extLst>
   </p:cSld>
@@ -22608,7 +23203,7 @@
           <a:p>
             <a:r>
               <a:rPr lang="en-US" dirty="0"/>
-              <a:t>Imputing – Multiple Imputation</a:t>
+              <a:t>Imputing – k-Nearest Neighbor</a:t>
             </a:r>
           </a:p>
         </p:txBody>
@@ -22630,7 +23225,7 @@
           <a:p>
             <a:r>
               <a:rPr lang="en-US" dirty="0"/>
-              <a:t>Create multiple “complete” datasets with different values using different regression models</a:t>
+              <a:t>More flexible option, capture more complexity in relationships in data</a:t>
             </a:r>
             <a:br>
               <a:rPr lang="en-US" dirty="0"/>
@@ -22640,7 +23235,7 @@
           <a:p>
             <a:r>
               <a:rPr lang="en-US" dirty="0"/>
-              <a:t>Helps analyze sensitivity to handling of missing values</a:t>
+              <a:t>Difficult to choose appropriate distance metric, value of k</a:t>
             </a:r>
             <a:br>
               <a:rPr lang="en-US" dirty="0"/>
@@ -22650,7 +23245,7 @@
           <a:p>
             <a:r>
               <a:rPr lang="en-US" dirty="0"/>
-              <a:t>Much more computationally expensive, both for imputation and downstream modeling</a:t>
+              <a:t>More computationally expensive than other methods of imputation</a:t>
             </a:r>
             <a:br>
               <a:rPr lang="en-US" dirty="0"/>
@@ -22660,7 +23255,7 @@
           <a:p>
             <a:r>
               <a:rPr lang="en-US" dirty="0"/>
-              <a:t>Can provide better representation of variability in data</a:t>
+              <a:t>Requires entire training set to calculate imputed values for new examples</a:t>
             </a:r>
           </a:p>
         </p:txBody>
@@ -22668,7 +23263,7 @@
     </p:spTree>
     <p:extLst>
       <p:ext uri="{BB962C8B-B14F-4D97-AF65-F5344CB8AC3E}">
-        <p14:creationId xmlns:p14="http://schemas.microsoft.com/office/powerpoint/2010/main" val="2069799902"/>
+        <p14:creationId xmlns:p14="http://schemas.microsoft.com/office/powerpoint/2010/main" val="3729575760"/>
       </p:ext>
     </p:extLst>
   </p:cSld>
@@ -22775,13 +23370,7 @@
       </p:grpSpPr>
       <p:sp>
         <p:nvSpPr>
-          <p:cNvPr id="2" name="Title 1">
-            <a:extLst>
-              <a:ext uri="{FF2B5EF4-FFF2-40B4-BE49-F238E27FC236}">
-                <a16:creationId xmlns:a16="http://schemas.microsoft.com/office/drawing/2014/main" id="{D5568ADA-C1EF-2741-BD8A-A472FF070613}"/>
-              </a:ext>
-            </a:extLst>
-          </p:cNvPr>
+          <p:cNvPr id="3" name="Title 2"/>
           <p:cNvSpPr>
             <a:spLocks noGrp="1"/>
           </p:cNvSpPr>
@@ -22796,20 +23385,14 @@
           <a:p>
             <a:r>
               <a:rPr lang="en-US" dirty="0"/>
-              <a:t>Missing Value Tips</a:t>
+              <a:t>Imputing – Multiple Imputation</a:t>
             </a:r>
           </a:p>
         </p:txBody>
       </p:sp>
       <p:sp>
         <p:nvSpPr>
-          <p:cNvPr id="3" name="Text Placeholder 2">
-            <a:extLst>
-              <a:ext uri="{FF2B5EF4-FFF2-40B4-BE49-F238E27FC236}">
-                <a16:creationId xmlns:a16="http://schemas.microsoft.com/office/drawing/2014/main" id="{D88AE774-4907-F841-8BD3-E9ECDB6BD8E8}"/>
-              </a:ext>
-            </a:extLst>
-          </p:cNvPr>
+          <p:cNvPr id="2" name="Content Placeholder 1"/>
           <p:cNvSpPr>
             <a:spLocks noGrp="1"/>
           </p:cNvSpPr>
@@ -22824,34 +23407,37 @@
           <a:p>
             <a:r>
               <a:rPr lang="en-US" dirty="0"/>
-              <a:t>Do not remove rows or columns with missing values (unless there is a really really really good reason)</a:t>
-            </a:r>
-          </a:p>
-          <a:p>
+              <a:t>Create multiple “complete” datasets with different values using different regression models</a:t>
+            </a:r>
+            <a:br>
+              <a:rPr lang="en-US" dirty="0"/>
+            </a:br>
             <a:endParaRPr lang="en-US" dirty="0"/>
           </a:p>
           <a:p>
             <a:r>
               <a:rPr lang="en-US" dirty="0"/>
-              <a:t>Missingness can be a useful predictor: create a flag even if you impute a value</a:t>
-            </a:r>
-          </a:p>
-          <a:p>
+              <a:t>Helps analyze sensitivity to handling of missing values</a:t>
+            </a:r>
+            <a:br>
+              <a:rPr lang="en-US" dirty="0"/>
+            </a:br>
             <a:endParaRPr lang="en-US" dirty="0"/>
           </a:p>
           <a:p>
             <a:r>
               <a:rPr lang="en-US" dirty="0"/>
-              <a:t>Data can be missing for different reasons and missingness for each row/column/cell may need to be handled differently</a:t>
-            </a:r>
-          </a:p>
-          <a:p>
+              <a:t>Much more computationally expensive, both for imputation and downstream modeling</a:t>
+            </a:r>
+            <a:br>
+              <a:rPr lang="en-US" dirty="0"/>
+            </a:br>
             <a:endParaRPr lang="en-US" dirty="0"/>
           </a:p>
           <a:p>
             <a:r>
               <a:rPr lang="en-US" dirty="0"/>
-              <a:t>Only use data from the past for imputation</a:t>
+              <a:t>Can provide better representation of variability in data</a:t>
             </a:r>
           </a:p>
         </p:txBody>
@@ -22859,13 +23445,91 @@
     </p:spTree>
     <p:extLst>
       <p:ext uri="{BB962C8B-B14F-4D97-AF65-F5344CB8AC3E}">
-        <p14:creationId xmlns:p14="http://schemas.microsoft.com/office/powerpoint/2010/main" val="2557082716"/>
+        <p14:creationId xmlns:p14="http://schemas.microsoft.com/office/powerpoint/2010/main" val="2069799902"/>
       </p:ext>
     </p:extLst>
   </p:cSld>
   <p:clrMapOvr>
     <a:masterClrMapping/>
   </p:clrMapOvr>
+  <p:timing>
+    <p:tnLst>
+      <p:par>
+        <p:cTn id="1" dur="indefinite" restart="never" nodeType="tmRoot">
+          <p:childTnLst>
+            <p:seq concurrent="1" nextAc="seek">
+              <p:cTn id="2" dur="indefinite" nodeType="mainSeq">
+                <p:childTnLst>
+                  <p:par>
+                    <p:cTn id="3" fill="hold">
+                      <p:stCondLst>
+                        <p:cond delay="indefinite"/>
+                      </p:stCondLst>
+                      <p:childTnLst>
+                        <p:par>
+                          <p:cTn id="4" fill="hold">
+                            <p:stCondLst>
+                              <p:cond delay="0"/>
+                            </p:stCondLst>
+                            <p:childTnLst>
+                              <p:par>
+                                <p:cTn id="5" presetID="1" presetClass="entr" presetSubtype="0" fill="hold" grpId="0" nodeType="clickEffect">
+                                  <p:stCondLst>
+                                    <p:cond delay="0"/>
+                                  </p:stCondLst>
+                                  <p:childTnLst>
+                                    <p:set>
+                                      <p:cBhvr>
+                                        <p:cTn id="6" dur="1" fill="hold">
+                                          <p:stCondLst>
+                                            <p:cond delay="0"/>
+                                          </p:stCondLst>
+                                        </p:cTn>
+                                        <p:tgtEl>
+                                          <p:spTgt spid="2"/>
+                                        </p:tgtEl>
+                                        <p:attrNameLst>
+                                          <p:attrName>style.visibility</p:attrName>
+                                        </p:attrNameLst>
+                                      </p:cBhvr>
+                                      <p:to>
+                                        <p:strVal val="visible"/>
+                                      </p:to>
+                                    </p:set>
+                                  </p:childTnLst>
+                                </p:cTn>
+                              </p:par>
+                            </p:childTnLst>
+                          </p:cTn>
+                        </p:par>
+                      </p:childTnLst>
+                    </p:cTn>
+                  </p:par>
+                </p:childTnLst>
+              </p:cTn>
+              <p:prevCondLst>
+                <p:cond evt="onPrev" delay="0">
+                  <p:tgtEl>
+                    <p:sldTgt/>
+                  </p:tgtEl>
+                </p:cond>
+              </p:prevCondLst>
+              <p:nextCondLst>
+                <p:cond evt="onNext" delay="0">
+                  <p:tgtEl>
+                    <p:sldTgt/>
+                  </p:tgtEl>
+                </p:cond>
+              </p:nextCondLst>
+            </p:seq>
+          </p:childTnLst>
+        </p:cTn>
+      </p:par>
+    </p:tnLst>
+    <p:bldLst>
+      <p:bldP spid="2" grpId="0"/>
+    </p:bldLst>
+  </p:timing>
 </p:sld>
 </file>
 
@@ -22891,7 +23555,7 @@
           <p:cNvPr id="2" name="Title 1">
             <a:extLst>
               <a:ext uri="{FF2B5EF4-FFF2-40B4-BE49-F238E27FC236}">
-                <a16:creationId xmlns:a16="http://schemas.microsoft.com/office/drawing/2014/main" id="{98347210-B4BE-4047-93B4-3D7AA966D0F1}"/>
+                <a16:creationId xmlns:a16="http://schemas.microsoft.com/office/drawing/2014/main" id="{D5568ADA-C1EF-2741-BD8A-A472FF070613}"/>
               </a:ext>
             </a:extLst>
           </p:cNvPr>
@@ -22909,7 +23573,7 @@
           <a:p>
             <a:r>
               <a:rPr lang="en-US" dirty="0"/>
-              <a:t>How can imputation introduce bias in your models?</a:t>
+              <a:t>Missing Value Tips</a:t>
             </a:r>
           </a:p>
         </p:txBody>
@@ -22919,7 +23583,7 @@
           <p:cNvPr id="3" name="Text Placeholder 2">
             <a:extLst>
               <a:ext uri="{FF2B5EF4-FFF2-40B4-BE49-F238E27FC236}">
-                <a16:creationId xmlns:a16="http://schemas.microsoft.com/office/drawing/2014/main" id="{8B9D9112-B2A1-D142-B67C-41AA10739FF6}"/>
+                <a16:creationId xmlns:a16="http://schemas.microsoft.com/office/drawing/2014/main" id="{D88AE774-4907-F841-8BD3-E9ECDB6BD8E8}"/>
               </a:ext>
             </a:extLst>
           </p:cNvPr>
@@ -22935,14 +23599,44 @@
           <a:bodyPr/>
           <a:lstStyle/>
           <a:p>
-            <a:endParaRPr lang="en-US"/>
+            <a:r>
+              <a:rPr lang="en-US" dirty="0"/>
+              <a:t>Do not remove rows or columns with missing values (unless there is a really really really good reason)</a:t>
+            </a:r>
+          </a:p>
+          <a:p>
+            <a:endParaRPr lang="en-US" dirty="0"/>
+          </a:p>
+          <a:p>
+            <a:r>
+              <a:rPr lang="en-US" dirty="0"/>
+              <a:t>Missingness can be a useful predictor: create a flag even if you impute a value</a:t>
+            </a:r>
+          </a:p>
+          <a:p>
+            <a:endParaRPr lang="en-US" dirty="0"/>
+          </a:p>
+          <a:p>
+            <a:r>
+              <a:rPr lang="en-US" dirty="0"/>
+              <a:t>Data can be missing for different reasons and missingness for each row/column/cell may need to be handled differently</a:t>
+            </a:r>
+          </a:p>
+          <a:p>
+            <a:endParaRPr lang="en-US" dirty="0"/>
+          </a:p>
+          <a:p>
+            <a:r>
+              <a:rPr lang="en-US" dirty="0"/>
+              <a:t>Only use data from the past for imputation</a:t>
+            </a:r>
           </a:p>
         </p:txBody>
       </p:sp>
     </p:spTree>
     <p:extLst>
       <p:ext uri="{BB962C8B-B14F-4D97-AF65-F5344CB8AC3E}">
-        <p14:creationId xmlns:p14="http://schemas.microsoft.com/office/powerpoint/2010/main" val="2801915227"/>
+        <p14:creationId xmlns:p14="http://schemas.microsoft.com/office/powerpoint/2010/main" val="2557082716"/>
       </p:ext>
     </p:extLst>
   </p:cSld>
@@ -22957,7 +23651,7 @@
   <p:cSld>
     <p:spTree>
       <p:nvGrpSpPr>
-        <p:cNvPr id="1" name=""/>
+        <p:cNvPr id="1" name="Shape 447"/>
         <p:cNvGrpSpPr/>
         <p:nvPr/>
       </p:nvGrpSpPr>
@@ -22971,102 +23665,297 @@
       </p:grpSpPr>
       <p:sp>
         <p:nvSpPr>
-          <p:cNvPr id="3" name="Title 2">
-            <a:extLst>
-              <a:ext uri="{FF2B5EF4-FFF2-40B4-BE49-F238E27FC236}">
-                <a16:creationId xmlns:a16="http://schemas.microsoft.com/office/drawing/2014/main" id="{9323871C-7CA8-1448-8FFC-1AE6E1838941}"/>
-              </a:ext>
-            </a:extLst>
-          </p:cNvPr>
-          <p:cNvSpPr>
+          <p:cNvPr id="448" name="Google Shape;448;p78"/>
+          <p:cNvSpPr txBox="1">
             <a:spLocks noGrp="1"/>
           </p:cNvSpPr>
           <p:nvPr>
             <p:ph type="title"/>
           </p:nvPr>
         </p:nvSpPr>
-        <p:spPr/>
+        <p:spPr>
+          <a:xfrm>
+            <a:off x="415601" y="593367"/>
+            <a:ext cx="11360700" cy="763500"/>
+          </a:xfrm>
+          <a:prstGeom prst="rect">
+            <a:avLst/>
+          </a:prstGeom>
+          <a:noFill/>
+          <a:ln>
+            <a:noFill/>
+          </a:ln>
+        </p:spPr>
         <p:txBody>
-          <a:bodyPr/>
+          <a:bodyPr spcFirstLastPara="1" wrap="square" lIns="121900" tIns="121900" rIns="121900" bIns="121900" anchor="t" anchorCtr="0">
+            <a:noAutofit/>
+          </a:bodyPr>
           <a:lstStyle/>
           <a:p>
-            <a:r>
-              <a:rPr lang="en-US" dirty="0"/>
-              <a:t>Reminders</a:t>
-            </a:r>
+            <a:pPr>
+              <a:buSzPts val="2800"/>
+            </a:pPr>
+            <a:r>
+              <a:rPr lang="en"/>
+              <a:t>How can imputation introduce bias in your models?</a:t>
+            </a:r>
+            <a:endParaRPr/>
           </a:p>
         </p:txBody>
       </p:sp>
       <p:sp>
         <p:nvSpPr>
-          <p:cNvPr id="5" name="Text Placeholder 4">
-            <a:extLst>
-              <a:ext uri="{FF2B5EF4-FFF2-40B4-BE49-F238E27FC236}">
-                <a16:creationId xmlns:a16="http://schemas.microsoft.com/office/drawing/2014/main" id="{F4E0A5F0-1D89-954D-91FB-596CD9E690F2}"/>
-              </a:ext>
-            </a:extLst>
-          </p:cNvPr>
-          <p:cNvSpPr>
+          <p:cNvPr id="449" name="Google Shape;449;p78"/>
+          <p:cNvSpPr txBox="1">
             <a:spLocks noGrp="1"/>
           </p:cNvSpPr>
           <p:nvPr>
             <p:ph type="body" idx="1"/>
           </p:nvPr>
         </p:nvSpPr>
-        <p:spPr/>
+        <p:spPr>
+          <a:xfrm>
+            <a:off x="415601" y="1536633"/>
+            <a:ext cx="11360700" cy="4555200"/>
+          </a:xfrm>
+          <a:prstGeom prst="rect">
+            <a:avLst/>
+          </a:prstGeom>
+          <a:noFill/>
+          <a:ln>
+            <a:noFill/>
+          </a:ln>
+        </p:spPr>
         <p:txBody>
-          <a:bodyPr/>
+          <a:bodyPr spcFirstLastPara="1" wrap="square" lIns="121900" tIns="121900" rIns="121900" bIns="121900" anchor="t" anchorCtr="0">
+            <a:noAutofit/>
+          </a:bodyPr>
           <a:lstStyle/>
           <a:p>
-            <a:pPr marL="76200" indent="0">
+            <a:pPr marL="457189" indent="-220128">
+              <a:buSzPts val="1800"/>
               <a:buNone/>
             </a:pPr>
-            <a:r>
-              <a:rPr lang="en-US" b="1" dirty="0">
-                <a:solidFill>
-                  <a:schemeClr val="tx1">
-                    <a:lumMod val="75000"/>
-                    <a:lumOff val="25000"/>
-                  </a:schemeClr>
-                </a:solidFill>
-              </a:rPr>
-              <a:t>This week:</a:t>
-            </a:r>
-          </a:p>
-          <a:p>
-            <a:r>
-              <a:rPr lang="en-US" dirty="0">
-                <a:solidFill>
-                  <a:schemeClr val="tx1">
-                    <a:lumMod val="75000"/>
-                    <a:lumOff val="25000"/>
-                  </a:schemeClr>
-                </a:solidFill>
-              </a:rPr>
-              <a:t>Tomorrow: Wednesday Group Check-Ins</a:t>
-            </a:r>
-          </a:p>
-          <a:p>
-            <a:pPr marL="76200" indent="0">
-              <a:buNone/>
-            </a:pPr>
-            <a:endParaRPr lang="en-US" b="1" dirty="0">
-              <a:solidFill>
-                <a:schemeClr val="tx1">
-                  <a:lumMod val="75000"/>
-                  <a:lumOff val="25000"/>
-                </a:schemeClr>
-              </a:solidFill>
-            </a:endParaRPr>
+            <a:endParaRPr/>
           </a:p>
         </p:txBody>
       </p:sp>
     </p:spTree>
-    <p:extLst>
-      <p:ext uri="{BB962C8B-B14F-4D97-AF65-F5344CB8AC3E}">
-        <p14:creationId xmlns:p14="http://schemas.microsoft.com/office/powerpoint/2010/main" val="867991865"/>
-      </p:ext>
-    </p:extLst>
+  </p:cSld>
+  <p:clrMapOvr>
+    <a:masterClrMapping/>
+  </p:clrMapOvr>
+</p:sld>
+</file>
+
+<file path=ppt/slides/slide45.xml><?xml version="1.0" encoding="utf-8"?>
+<p:sld xmlns:a="http://schemas.openxmlformats.org/drawingml/2006/main" xmlns:r="http://schemas.openxmlformats.org/officeDocument/2006/relationships" xmlns:p="http://schemas.openxmlformats.org/presentationml/2006/main">
+  <p:cSld>
+    <p:spTree>
+      <p:nvGrpSpPr>
+        <p:cNvPr id="1" name="Shape 453"/>
+        <p:cNvGrpSpPr/>
+        <p:nvPr/>
+      </p:nvGrpSpPr>
+      <p:grpSpPr>
+        <a:xfrm>
+          <a:off x="0" y="0"/>
+          <a:ext cx="0" cy="0"/>
+          <a:chOff x="0" y="0"/>
+          <a:chExt cx="0" cy="0"/>
+        </a:xfrm>
+      </p:grpSpPr>
+      <p:sp>
+        <p:nvSpPr>
+          <p:cNvPr id="454" name="Google Shape;454;p79"/>
+          <p:cNvSpPr txBox="1">
+            <a:spLocks noGrp="1"/>
+          </p:cNvSpPr>
+          <p:nvPr>
+            <p:ph type="title" idx="4294967295"/>
+          </p:nvPr>
+        </p:nvSpPr>
+        <p:spPr>
+          <a:xfrm>
+            <a:off x="415600" y="218767"/>
+            <a:ext cx="11360800" cy="763600"/>
+          </a:xfrm>
+          <a:prstGeom prst="rect">
+            <a:avLst/>
+          </a:prstGeom>
+        </p:spPr>
+        <p:txBody>
+          <a:bodyPr spcFirstLastPara="1" wrap="square" lIns="121900" tIns="121900" rIns="121900" bIns="121900" anchor="t" anchorCtr="0">
+            <a:noAutofit/>
+          </a:bodyPr>
+          <a:lstStyle/>
+          <a:p>
+            <a:r>
+              <a:rPr lang="en">
+                <a:solidFill>
+                  <a:schemeClr val="lt1"/>
+                </a:solidFill>
+              </a:rPr>
+              <a:t>Takeaways</a:t>
+            </a:r>
+            <a:endParaRPr>
+              <a:solidFill>
+                <a:schemeClr val="lt1"/>
+              </a:solidFill>
+            </a:endParaRPr>
+          </a:p>
+        </p:txBody>
+      </p:sp>
+      <p:sp>
+        <p:nvSpPr>
+          <p:cNvPr id="455" name="Google Shape;455;p79"/>
+          <p:cNvSpPr txBox="1">
+            <a:spLocks noGrp="1"/>
+          </p:cNvSpPr>
+          <p:nvPr>
+            <p:ph type="body" idx="1"/>
+          </p:nvPr>
+        </p:nvSpPr>
+        <p:spPr>
+          <a:xfrm>
+            <a:off x="262805" y="1217573"/>
+            <a:ext cx="11666400" cy="4954400"/>
+          </a:xfrm>
+          <a:prstGeom prst="rect">
+            <a:avLst/>
+          </a:prstGeom>
+        </p:spPr>
+        <p:txBody>
+          <a:bodyPr spcFirstLastPara="1" wrap="square" lIns="91433" tIns="45700" rIns="91433" bIns="45700" anchor="t" anchorCtr="0">
+            <a:noAutofit/>
+          </a:bodyPr>
+          <a:lstStyle/>
+          <a:p>
+            <a:pPr marL="0" indent="0">
+              <a:spcBef>
+                <a:spcPts val="400"/>
+              </a:spcBef>
+              <a:buNone/>
+            </a:pPr>
+            <a:r>
+              <a:rPr lang="en"/>
+              <a:t>Features are hypotheses you make about the world</a:t>
+            </a:r>
+            <a:endParaRPr/>
+          </a:p>
+          <a:p>
+            <a:pPr marL="0" indent="0">
+              <a:spcBef>
+                <a:spcPts val="400"/>
+              </a:spcBef>
+              <a:buNone/>
+            </a:pPr>
+            <a:endParaRPr/>
+          </a:p>
+          <a:p>
+            <a:pPr marL="0" indent="0">
+              <a:spcBef>
+                <a:spcPts val="400"/>
+              </a:spcBef>
+              <a:buNone/>
+            </a:pPr>
+            <a:r>
+              <a:rPr lang="en"/>
+              <a:t>Enumerate them systematically - entity x time x space x aggregation, ratio, peer comparison, trends, etc.</a:t>
+            </a:r>
+            <a:endParaRPr/>
+          </a:p>
+          <a:p>
+            <a:pPr marL="0" indent="0">
+              <a:spcBef>
+                <a:spcPts val="400"/>
+              </a:spcBef>
+              <a:buNone/>
+            </a:pPr>
+            <a:endParaRPr/>
+          </a:p>
+          <a:p>
+            <a:pPr marL="0" indent="0">
+              <a:spcBef>
+                <a:spcPts val="400"/>
+              </a:spcBef>
+              <a:buNone/>
+            </a:pPr>
+            <a:r>
+              <a:rPr lang="en"/>
+              <a:t>Treat time as a hard constraint</a:t>
+            </a:r>
+            <a:endParaRPr/>
+          </a:p>
+          <a:p>
+            <a:pPr marL="0" indent="0">
+              <a:spcBef>
+                <a:spcPts val="400"/>
+              </a:spcBef>
+              <a:buNone/>
+            </a:pPr>
+            <a:endParaRPr/>
+          </a:p>
+          <a:p>
+            <a:pPr marL="0" indent="0">
+              <a:spcBef>
+                <a:spcPts val="400"/>
+              </a:spcBef>
+              <a:buNone/>
+            </a:pPr>
+            <a:r>
+              <a:rPr lang="en"/>
+              <a:t>Deal with missingness and outliers carefully and deliberately</a:t>
+            </a:r>
+            <a:endParaRPr/>
+          </a:p>
+          <a:p>
+            <a:pPr marL="0" indent="0">
+              <a:spcBef>
+                <a:spcPts val="400"/>
+              </a:spcBef>
+              <a:buNone/>
+            </a:pPr>
+            <a:endParaRPr/>
+          </a:p>
+          <a:p>
+            <a:pPr marL="0" indent="0">
+              <a:spcBef>
+                <a:spcPts val="400"/>
+              </a:spcBef>
+              <a:buNone/>
+            </a:pPr>
+            <a:r>
+              <a:rPr lang="en"/>
+              <a:t>Use LLMs to propose features - verify if they make sense and don’t leak</a:t>
+            </a:r>
+            <a:endParaRPr/>
+          </a:p>
+          <a:p>
+            <a:pPr marL="0" indent="0">
+              <a:spcBef>
+                <a:spcPts val="400"/>
+              </a:spcBef>
+              <a:buNone/>
+            </a:pPr>
+            <a:endParaRPr/>
+          </a:p>
+          <a:p>
+            <a:pPr marL="0" indent="0">
+              <a:spcBef>
+                <a:spcPts val="400"/>
+              </a:spcBef>
+              <a:buNone/>
+            </a:pPr>
+            <a:r>
+              <a:rPr lang="en"/>
+              <a:t>FMs and Embeddings (to generate features) - verify</a:t>
+            </a:r>
+            <a:endParaRPr/>
+          </a:p>
+        </p:txBody>
+      </p:sp>
+    </p:spTree>
   </p:cSld>
   <p:clrMapOvr>
     <a:masterClrMapping/>
@@ -23341,6 +24230,664 @@
           <p:cNvPr id="2" name="Title 1">
             <a:extLst>
               <a:ext uri="{FF2B5EF4-FFF2-40B4-BE49-F238E27FC236}">
+                <a16:creationId xmlns:a16="http://schemas.microsoft.com/office/drawing/2014/main" id="{5DD0C6A8-0A3F-D65E-A0FE-D7E8A349A4D2}"/>
+              </a:ext>
+            </a:extLst>
+          </p:cNvPr>
+          <p:cNvSpPr>
+            <a:spLocks noGrp="1"/>
+          </p:cNvSpPr>
+          <p:nvPr>
+            <p:ph type="title"/>
+          </p:nvPr>
+        </p:nvSpPr>
+        <p:spPr>
+          <a:xfrm>
+            <a:off x="415600" y="61215"/>
+            <a:ext cx="11360700" cy="763500"/>
+          </a:xfrm>
+        </p:spPr>
+        <p:txBody>
+          <a:bodyPr/>
+          <a:lstStyle/>
+          <a:p>
+            <a:r>
+              <a:rPr lang="en-US" dirty="0"/>
+              <a:t>Which of these is a </a:t>
+            </a:r>
+            <a:r>
+              <a:rPr lang="en-US" u="sng" dirty="0"/>
+              <a:t>possible</a:t>
+            </a:r>
+            <a:r>
+              <a:rPr lang="en-US" dirty="0"/>
+              <a:t> PR-k curve on the same dataset as the one outlined? </a:t>
+            </a:r>
+            <a:br>
+              <a:rPr lang="en-US" dirty="0"/>
+            </a:br>
+            <a:br>
+              <a:rPr lang="en-US" dirty="0"/>
+            </a:br>
+            <a:endParaRPr lang="en-US" dirty="0"/>
+          </a:p>
+        </p:txBody>
+      </p:sp>
+      <p:pic>
+        <p:nvPicPr>
+          <p:cNvPr id="6" name="Picture 5">
+            <a:extLst>
+              <a:ext uri="{FF2B5EF4-FFF2-40B4-BE49-F238E27FC236}">
+                <a16:creationId xmlns:a16="http://schemas.microsoft.com/office/drawing/2014/main" id="{C8D43867-3053-5501-82F6-E3C3C29D31B2}"/>
+              </a:ext>
+            </a:extLst>
+          </p:cNvPr>
+          <p:cNvPicPr>
+            <a:picLocks noChangeAspect="1"/>
+          </p:cNvPicPr>
+          <p:nvPr/>
+        </p:nvPicPr>
+        <p:blipFill>
+          <a:blip r:embed="rId2"/>
+          <a:stretch>
+            <a:fillRect/>
+          </a:stretch>
+        </p:blipFill>
+        <p:spPr>
+          <a:xfrm>
+            <a:off x="0" y="1445278"/>
+            <a:ext cx="11776300" cy="5351507"/>
+          </a:xfrm>
+          <a:prstGeom prst="rect">
+            <a:avLst/>
+          </a:prstGeom>
+        </p:spPr>
+      </p:pic>
+    </p:spTree>
+    <p:extLst>
+      <p:ext uri="{BB962C8B-B14F-4D97-AF65-F5344CB8AC3E}">
+        <p14:creationId xmlns:p14="http://schemas.microsoft.com/office/powerpoint/2010/main" val="84368634"/>
+      </p:ext>
+    </p:extLst>
+  </p:cSld>
+  <p:clrMapOvr>
+    <a:masterClrMapping/>
+  </p:clrMapOvr>
+</p:sld>
+</file>
+
+<file path=ppt/slides/slide8.xml><?xml version="1.0" encoding="utf-8"?>
+<p:sld xmlns:a="http://schemas.openxmlformats.org/drawingml/2006/main" xmlns:r="http://schemas.openxmlformats.org/officeDocument/2006/relationships" xmlns:p="http://schemas.openxmlformats.org/presentationml/2006/main" showMasterSp="0">
+  <p:cSld>
+    <p:bg>
+      <p:bgPr>
+        <a:solidFill>
+          <a:srgbClr val="1A1A1A"/>
+        </a:solidFill>
+        <a:effectLst/>
+      </p:bgPr>
+    </p:bg>
+    <p:spTree>
+      <p:nvGrpSpPr>
+        <p:cNvPr id="1" name=""/>
+        <p:cNvGrpSpPr/>
+        <p:nvPr/>
+      </p:nvGrpSpPr>
+      <p:grpSpPr>
+        <a:xfrm>
+          <a:off x="0" y="0"/>
+          <a:ext cx="0" cy="0"/>
+          <a:chOff x="0" y="0"/>
+          <a:chExt cx="0" cy="0"/>
+        </a:xfrm>
+      </p:grpSpPr>
+      <p:sp>
+        <p:nvSpPr>
+          <p:cNvPr id="2" name="Rectangle 1">
+            <a:extLst>
+              <a:ext uri="{FF2B5EF4-FFF2-40B4-BE49-F238E27FC236}">
+                <a16:creationId xmlns:a16="http://schemas.microsoft.com/office/drawing/2014/main" id="{4E2297B6-E7D2-A6DD-A8DA-F3F18F0835A9}"/>
+              </a:ext>
+            </a:extLst>
+          </p:cNvPr>
+          <p:cNvSpPr/>
+          <p:nvPr>
+            <p:custDataLst>
+              <p:tags r:id="rId2"/>
+            </p:custDataLst>
+          </p:nvPr>
+        </p:nvSpPr>
+        <p:spPr>
+          <a:xfrm>
+            <a:off x="444693" y="1742703"/>
+            <a:ext cx="2371696" cy="2371696"/>
+          </a:xfrm>
+          <a:prstGeom prst="rect">
+            <a:avLst/>
+          </a:prstGeom>
+          <a:blipFill>
+            <a:blip>
+              <a:extLst>
+                <a:ext uri="{96DAC541-7B7A-43D3-8B79-37D633B846F1}">
+                  <asvg:svgBlip xmlns:asvg="http://schemas.microsoft.com/office/drawing/2016/SVG/main" r:embed="rId7"/>
+                </a:ext>
+              </a:extLst>
+            </a:blip>
+            <a:stretch>
+              <a:fillRect/>
+            </a:stretch>
+          </a:blipFill>
+          <a:ln w="25400" cap="flat" cmpd="sng" algn="ctr">
+            <a:noFill/>
+            <a:prstDash val="solid"/>
+          </a:ln>
+          <a:effectLst/>
+          <a:extLst>
+            <a:ext uri="{91240B29-F687-4F45-9708-019B960494DF}">
+              <a14:hiddenLine xmlns:a14="http://schemas.microsoft.com/office/drawing/2010/main" w="25400" cap="flat" cmpd="sng" algn="ctr">
+                <a:solidFill>
+                  <a:srgbClr val="FFFFFF"/>
+                </a:solidFill>
+                <a:prstDash val="solid"/>
+              </a14:hiddenLine>
+            </a:ext>
+          </a:extLst>
+        </p:spPr>
+        <p:style>
+          <a:lnRef idx="2">
+            <a:schemeClr val="accent1">
+              <a:shade val="15000"/>
+            </a:schemeClr>
+          </a:lnRef>
+          <a:fillRef idx="1">
+            <a:schemeClr val="accent1"/>
+          </a:fillRef>
+          <a:effectRef idx="0">
+            <a:schemeClr val="accent1"/>
+          </a:effectRef>
+          <a:fontRef idx="minor">
+            <a:schemeClr val="lt1"/>
+          </a:fontRef>
+        </p:style>
+        <p:txBody>
+          <a:bodyPr rtlCol="0" anchor="ctr"/>
+          <a:lstStyle/>
+          <a:p>
+            <a:pPr algn="ctr"/>
+            <a:endParaRPr lang="en-US"/>
+          </a:p>
+        </p:txBody>
+      </p:sp>
+      <p:sp>
+        <p:nvSpPr>
+          <p:cNvPr id="3" name="Rectangle 2">
+            <a:extLst>
+              <a:ext uri="{FF2B5EF4-FFF2-40B4-BE49-F238E27FC236}">
+                <a16:creationId xmlns:a16="http://schemas.microsoft.com/office/drawing/2014/main" id="{9BBDBEFF-44FC-DD79-3A7E-10B385976B4C}"/>
+              </a:ext>
+            </a:extLst>
+          </p:cNvPr>
+          <p:cNvSpPr/>
+          <p:nvPr>
+            <p:custDataLst>
+              <p:tags r:id="rId3"/>
+            </p:custDataLst>
+          </p:nvPr>
+        </p:nvSpPr>
+        <p:spPr>
+          <a:xfrm>
+            <a:off x="3112851" y="1000897"/>
+            <a:ext cx="8486226" cy="3855308"/>
+          </a:xfrm>
+          <a:prstGeom prst="rect">
+            <a:avLst/>
+          </a:prstGeom>
+          <a:noFill/>
+          <a:ln w="25400" cap="flat" cmpd="sng" algn="ctr">
+            <a:noFill/>
+            <a:prstDash val="solid"/>
+          </a:ln>
+          <a:effectLst/>
+          <a:extLst>
+            <a:ext uri="{909E8E84-426E-40DD-AFC4-6F175D3DCCD1}">
+              <a14:hiddenFill xmlns:a14="http://schemas.microsoft.com/office/drawing/2010/main">
+                <a:solidFill>
+                  <a:schemeClr val="accent1"/>
+                </a:solidFill>
+              </a14:hiddenFill>
+            </a:ext>
+            <a:ext uri="{91240B29-F687-4F45-9708-019B960494DF}">
+              <a14:hiddenLine xmlns:a14="http://schemas.microsoft.com/office/drawing/2010/main" w="25400" cap="flat" cmpd="sng" algn="ctr">
+                <a:solidFill>
+                  <a:srgbClr val="FFFFFF"/>
+                </a:solidFill>
+                <a:prstDash val="solid"/>
+              </a14:hiddenLine>
+            </a:ext>
+          </a:extLst>
+        </p:spPr>
+        <p:style>
+          <a:lnRef idx="2">
+            <a:schemeClr val="accent1">
+              <a:shade val="15000"/>
+            </a:schemeClr>
+          </a:lnRef>
+          <a:fillRef idx="1">
+            <a:schemeClr val="accent1"/>
+          </a:fillRef>
+          <a:effectRef idx="0">
+            <a:schemeClr val="accent1"/>
+          </a:effectRef>
+          <a:fontRef idx="minor">
+            <a:schemeClr val="lt1"/>
+          </a:fontRef>
+        </p:style>
+        <p:txBody>
+          <a:bodyPr rtlCol="0" anchor="ctr"/>
+          <a:lstStyle/>
+          <a:p>
+            <a:r>
+              <a:rPr lang="en-US" sz="2400" b="1">
+                <a:solidFill>
+                  <a:srgbClr val="FFFFFF"/>
+                </a:solidFill>
+              </a:rPr>
+              <a:t>Given that the PR-k curve outlined is from a model applied to some validation data, which of the other curves shown could be from other models applied to the same validation data (check all that apply)?
+</a:t>
+            </a:r>
+          </a:p>
+        </p:txBody>
+      </p:sp>
+      <p:sp>
+        <p:nvSpPr>
+          <p:cNvPr id="4" name="Rectangle 3">
+            <a:extLst>
+              <a:ext uri="{FF2B5EF4-FFF2-40B4-BE49-F238E27FC236}">
+                <a16:creationId xmlns:a16="http://schemas.microsoft.com/office/drawing/2014/main" id="{6269DFCD-1558-930C-12A6-57FF1F982D6C}"/>
+              </a:ext>
+            </a:extLst>
+          </p:cNvPr>
+          <p:cNvSpPr/>
+          <p:nvPr>
+            <p:custDataLst>
+              <p:tags r:id="rId4"/>
+            </p:custDataLst>
+          </p:nvPr>
+        </p:nvSpPr>
+        <p:spPr>
+          <a:xfrm>
+            <a:off x="0" y="5820032"/>
+            <a:ext cx="12192001" cy="1037968"/>
+          </a:xfrm>
+          <a:prstGeom prst="rect">
+            <a:avLst/>
+          </a:prstGeom>
+          <a:solidFill>
+            <a:srgbClr val="198038"/>
+          </a:solidFill>
+          <a:ln w="25400" cap="flat" cmpd="sng" algn="ctr">
+            <a:noFill/>
+            <a:prstDash val="solid"/>
+          </a:ln>
+          <a:effectLst/>
+          <a:extLst>
+            <a:ext uri="{91240B29-F687-4F45-9708-019B960494DF}">
+              <a14:hiddenLine xmlns:a14="http://schemas.microsoft.com/office/drawing/2010/main" w="25400" cap="flat" cmpd="sng" algn="ctr">
+                <a:solidFill>
+                  <a:schemeClr val="accent1">
+                    <a:shade val="15000"/>
+                  </a:schemeClr>
+                </a:solidFill>
+                <a:prstDash val="solid"/>
+              </a14:hiddenLine>
+            </a:ext>
+          </a:extLst>
+        </p:spPr>
+        <p:style>
+          <a:lnRef idx="2">
+            <a:schemeClr val="accent1">
+              <a:shade val="15000"/>
+            </a:schemeClr>
+          </a:lnRef>
+          <a:fillRef idx="1">
+            <a:schemeClr val="accent1"/>
+          </a:fillRef>
+          <a:effectRef idx="0">
+            <a:schemeClr val="accent1"/>
+          </a:effectRef>
+          <a:fontRef idx="minor">
+            <a:schemeClr val="lt1"/>
+          </a:fontRef>
+        </p:style>
+        <p:txBody>
+          <a:bodyPr lIns="741155" tIns="259492" rIns="1852888" bIns="203886" rtlCol="0" anchor="ctr">
+            <a:normAutofit fontScale="85000" lnSpcReduction="10000"/>
+          </a:bodyPr>
+          <a:lstStyle/>
+          <a:p>
+            <a:r>
+              <a:rPr lang="en-US" sz="2600">
+                <a:solidFill>
+                  <a:srgbClr val="FFFFFF"/>
+                </a:solidFill>
+              </a:rPr>
+              <a:t>The </a:t>
+            </a:r>
+            <a:r>
+              <a:rPr lang="en-US" sz="2600">
+                <a:solidFill>
+                  <a:srgbClr val="FFFFFF"/>
+                </a:solidFill>
+                <a:hlinkClick r:id="rId8">
+                  <a:extLst>
+                    <a:ext uri="{A12FA001-AC4F-418D-AE19-62706E023703}">
+                      <ahyp:hlinkClr xmlns:ahyp="http://schemas.microsoft.com/office/drawing/2018/hyperlinkcolor" val="tx"/>
+                    </a:ext>
+                  </a:extLst>
+                </a:hlinkClick>
+              </a:rPr>
+              <a:t>Slido app</a:t>
+            </a:r>
+            <a:r>
+              <a:rPr lang="en-US" sz="2600">
+                <a:solidFill>
+                  <a:srgbClr val="FFFFFF"/>
+                </a:solidFill>
+              </a:rPr>
+              <a:t> must be installed on every computer you’re presenting from</a:t>
+            </a:r>
+          </a:p>
+        </p:txBody>
+      </p:sp>
+      <p:pic>
+        <p:nvPicPr>
+          <p:cNvPr id="6" name="Graphic 5">
+            <a:extLst>
+              <a:ext uri="{FF2B5EF4-FFF2-40B4-BE49-F238E27FC236}">
+                <a16:creationId xmlns:a16="http://schemas.microsoft.com/office/drawing/2014/main" id="{AF663EE5-E49B-2BE2-A98B-E90B000B0E36}"/>
+              </a:ext>
+            </a:extLst>
+          </p:cNvPr>
+          <p:cNvPicPr>
+            <a:picLocks/>
+          </p:cNvPicPr>
+          <p:nvPr/>
+        </p:nvPicPr>
+        <p:blipFill>
+          <a:blip>
+            <a:extLst>
+              <a:ext uri="{96DAC541-7B7A-43D3-8B79-37D633B846F1}">
+                <asvg:svgBlip xmlns:asvg="http://schemas.microsoft.com/office/drawing/2016/SVG/main" r:embed="rId9"/>
+              </a:ext>
+            </a:extLst>
+          </a:blip>
+          <a:stretch>
+            <a:fillRect/>
+          </a:stretch>
+        </p:blipFill>
+        <p:spPr>
+          <a:xfrm>
+            <a:off x="296462" y="6190785"/>
+            <a:ext cx="296462" cy="296462"/>
+          </a:xfrm>
+          <a:prstGeom prst="rect">
+            <a:avLst/>
+          </a:prstGeom>
+        </p:spPr>
+      </p:pic>
+      <p:sp>
+        <p:nvSpPr>
+          <p:cNvPr id="7" name="Trapezoid 6">
+            <a:extLst>
+              <a:ext uri="{FF2B5EF4-FFF2-40B4-BE49-F238E27FC236}">
+                <a16:creationId xmlns:a16="http://schemas.microsoft.com/office/drawing/2014/main" id="{A970E15A-18C5-C4E0-DF06-A2886BFB3FB0}"/>
+              </a:ext>
+            </a:extLst>
+          </p:cNvPr>
+          <p:cNvSpPr/>
+          <p:nvPr>
+            <p:custDataLst>
+              <p:tags r:id="rId5"/>
+            </p:custDataLst>
+          </p:nvPr>
+        </p:nvSpPr>
+        <p:spPr>
+          <a:xfrm rot="2700000">
+            <a:off x="9620371" y="514924"/>
+            <a:ext cx="3335198" cy="778213"/>
+          </a:xfrm>
+          <a:prstGeom prst="trapezoid">
+            <a:avLst>
+              <a:gd name="adj" fmla="val 100000"/>
+            </a:avLst>
+          </a:prstGeom>
+          <a:solidFill>
+            <a:srgbClr val="0A3316"/>
+          </a:solidFill>
+          <a:ln w="25400" cap="flat" cmpd="sng" algn="ctr">
+            <a:noFill/>
+            <a:prstDash val="solid"/>
+          </a:ln>
+          <a:effectLst/>
+          <a:extLst>
+            <a:ext uri="{91240B29-F687-4F45-9708-019B960494DF}">
+              <a14:hiddenLine xmlns:a14="http://schemas.microsoft.com/office/drawing/2010/main" w="25400" cap="flat" cmpd="sng" algn="ctr">
+                <a:solidFill>
+                  <a:schemeClr val="accent1">
+                    <a:shade val="15000"/>
+                  </a:schemeClr>
+                </a:solidFill>
+                <a:prstDash val="solid"/>
+              </a14:hiddenLine>
+            </a:ext>
+          </a:extLst>
+        </p:spPr>
+        <p:style>
+          <a:lnRef idx="2">
+            <a:schemeClr val="accent1">
+              <a:shade val="15000"/>
+            </a:schemeClr>
+          </a:lnRef>
+          <a:fillRef idx="1">
+            <a:schemeClr val="accent1"/>
+          </a:fillRef>
+          <a:effectRef idx="0">
+            <a:schemeClr val="accent1"/>
+          </a:effectRef>
+          <a:fontRef idx="minor">
+            <a:schemeClr val="lt1"/>
+          </a:fontRef>
+        </p:style>
+        <p:txBody>
+          <a:bodyPr tIns="0" bIns="0" rtlCol="0" anchor="t">
+            <a:normAutofit fontScale="70000" lnSpcReduction="20000"/>
+          </a:bodyPr>
+          <a:lstStyle/>
+          <a:p>
+            <a:pPr algn="ctr"/>
+            <a:r>
+              <a:rPr lang="en-US" sz="2600" b="1">
+                <a:solidFill>
+                  <a:srgbClr val="42A65F"/>
+                </a:solidFill>
+              </a:rPr>
+              <a:t>Do not edit
+</a:t>
+            </a:r>
+            <a:r>
+              <a:rPr lang="en-US" sz="2200">
+                <a:solidFill>
+                  <a:srgbClr val="42A65F"/>
+                </a:solidFill>
+                <a:hlinkClick r:id="rId10">
+                  <a:extLst>
+                    <a:ext uri="{A12FA001-AC4F-418D-AE19-62706E023703}">
+                      <ahyp:hlinkClr xmlns:ahyp="http://schemas.microsoft.com/office/drawing/2018/hyperlinkcolor" val="tx"/>
+                    </a:ext>
+                  </a:extLst>
+                </a:hlinkClick>
+              </a:rPr>
+              <a:t>How to change the design</a:t>
+            </a:r>
+            <a:endParaRPr lang="en-US" sz="2200">
+              <a:solidFill>
+                <a:srgbClr val="42A65F"/>
+              </a:solidFill>
+            </a:endParaRPr>
+          </a:p>
+        </p:txBody>
+      </p:sp>
+      <p:pic>
+        <p:nvPicPr>
+          <p:cNvPr id="9" name="Graphic 8">
+            <a:extLst>
+              <a:ext uri="{FF2B5EF4-FFF2-40B4-BE49-F238E27FC236}">
+                <a16:creationId xmlns:a16="http://schemas.microsoft.com/office/drawing/2014/main" id="{B9933A29-AEB8-C04D-440E-3A511C2BF4E9}"/>
+              </a:ext>
+            </a:extLst>
+          </p:cNvPr>
+          <p:cNvPicPr>
+            <a:picLocks/>
+          </p:cNvPicPr>
+          <p:nvPr/>
+        </p:nvPicPr>
+        <p:blipFill>
+          <a:blip>
+            <a:extLst>
+              <a:ext uri="{96DAC541-7B7A-43D3-8B79-37D633B846F1}">
+                <asvg:svgBlip xmlns:asvg="http://schemas.microsoft.com/office/drawing/2016/SVG/main" r:embed="rId11"/>
+              </a:ext>
+            </a:extLst>
+          </a:blip>
+          <a:stretch>
+            <a:fillRect/>
+          </a:stretch>
+        </p:blipFill>
+        <p:spPr>
+          <a:xfrm>
+            <a:off x="10746748" y="6153727"/>
+            <a:ext cx="1111733" cy="370578"/>
+          </a:xfrm>
+          <a:prstGeom prst="rect">
+            <a:avLst/>
+          </a:prstGeom>
+        </p:spPr>
+      </p:pic>
+    </p:spTree>
+    <p:custDataLst>
+      <p:tags r:id="rId1"/>
+    </p:custDataLst>
+    <p:extLst>
+      <p:ext uri="{BB962C8B-B14F-4D97-AF65-F5344CB8AC3E}">
+        <p14:creationId xmlns:p14="http://schemas.microsoft.com/office/powerpoint/2010/main" val="389086267"/>
+      </p:ext>
+    </p:extLst>
+  </p:cSld>
+  <p:clrMapOvr>
+    <a:masterClrMapping/>
+  </p:clrMapOvr>
+  <p:timing>
+    <p:tnLst>
+      <p:par>
+        <p:cTn id="1" dur="indefinite" restart="never" nodeType="tmRoot">
+          <p:childTnLst>
+            <p:seq concurrent="1" nextAc="seek">
+              <p:cTn id="2" dur="indefinite" nodeType="mainSeq">
+                <p:childTnLst>
+                  <p:par>
+                    <p:cTn id="3" fill="hold">
+                      <p:stCondLst>
+                        <p:cond delay="indefinite"/>
+                      </p:stCondLst>
+                      <p:childTnLst>
+                        <p:par>
+                          <p:cTn id="4" fill="hold">
+                            <p:stCondLst>
+                              <p:cond delay="0"/>
+                            </p:stCondLst>
+                            <p:childTnLst>
+                              <p:par>
+                                <p:cTn id="5" presetID="26" presetClass="emph" presetSubtype="0" fill="hold" grpId="0" nodeType="clickEffect">
+                                  <p:stCondLst>
+                                    <p:cond delay="0"/>
+                                  </p:stCondLst>
+                                  <p:childTnLst>
+                                    <p:animEffect transition="out" filter="fade">
+                                      <p:cBhvr>
+                                        <p:cTn id="6" dur="50" tmFilter="0, 0; .2, .5; .8, .5; 1, 0"/>
+                                        <p:tgtEl>
+                                          <p:spTgt spid="3"/>
+                                        </p:tgtEl>
+                                      </p:cBhvr>
+                                    </p:animEffect>
+                                    <p:animScale>
+                                      <p:cBhvr>
+                                        <p:cTn id="7" dur="25" autoRev="1" fill="hold"/>
+                                        <p:tgtEl>
+                                          <p:spTgt spid="3"/>
+                                        </p:tgtEl>
+                                      </p:cBhvr>
+                                      <p:by x="105000" y="105000"/>
+                                    </p:animScale>
+                                  </p:childTnLst>
+                                </p:cTn>
+                              </p:par>
+                            </p:childTnLst>
+                          </p:cTn>
+                        </p:par>
+                      </p:childTnLst>
+                    </p:cTn>
+                  </p:par>
+                </p:childTnLst>
+              </p:cTn>
+              <p:prevCondLst>
+                <p:cond evt="onPrev" delay="0">
+                  <p:tgtEl>
+                    <p:sldTgt/>
+                  </p:tgtEl>
+                </p:cond>
+              </p:prevCondLst>
+              <p:nextCondLst>
+                <p:cond evt="onNext" delay="0">
+                  <p:tgtEl>
+                    <p:sldTgt/>
+                  </p:tgtEl>
+                </p:cond>
+              </p:nextCondLst>
+            </p:seq>
+          </p:childTnLst>
+        </p:cTn>
+      </p:par>
+    </p:tnLst>
+    <p:bldLst>
+      <p:bldP spid="3" grpId="0"/>
+    </p:bldLst>
+  </p:timing>
+</p:sld>
+</file>
+
+<file path=ppt/slides/slide9.xml><?xml version="1.0" encoding="utf-8"?>
+<p:sld xmlns:a="http://schemas.openxmlformats.org/drawingml/2006/main" xmlns:r="http://schemas.openxmlformats.org/officeDocument/2006/relationships" xmlns:p="http://schemas.openxmlformats.org/presentationml/2006/main">
+  <p:cSld>
+    <p:spTree>
+      <p:nvGrpSpPr>
+        <p:cNvPr id="1" name=""/>
+        <p:cNvGrpSpPr/>
+        <p:nvPr/>
+      </p:nvGrpSpPr>
+      <p:grpSpPr>
+        <a:xfrm>
+          <a:off x="0" y="0"/>
+          <a:ext cx="0" cy="0"/>
+          <a:chOff x="0" y="0"/>
+          <a:chExt cx="0" cy="0"/>
+        </a:xfrm>
+      </p:grpSpPr>
+      <p:sp>
+        <p:nvSpPr>
+          <p:cNvPr id="2" name="Title 1">
+            <a:extLst>
+              <a:ext uri="{FF2B5EF4-FFF2-40B4-BE49-F238E27FC236}">
                 <a16:creationId xmlns:a16="http://schemas.microsoft.com/office/drawing/2014/main" id="{21359BA9-BA2B-D148-89DA-A99081B1FF81}"/>
               </a:ext>
             </a:extLst>
@@ -23428,227 +24975,46 @@
 </p:sld>
 </file>
 
-<file path=ppt/slides/slide8.xml><?xml version="1.0" encoding="utf-8"?>
-<p:sld xmlns:a="http://schemas.openxmlformats.org/drawingml/2006/main" xmlns:r="http://schemas.openxmlformats.org/officeDocument/2006/relationships" xmlns:p="http://schemas.openxmlformats.org/presentationml/2006/main">
-  <p:cSld>
-    <p:spTree>
-      <p:nvGrpSpPr>
-        <p:cNvPr id="1" name=""/>
-        <p:cNvGrpSpPr/>
-        <p:nvPr/>
-      </p:nvGrpSpPr>
-      <p:grpSpPr>
-        <a:xfrm>
-          <a:off x="0" y="0"/>
-          <a:ext cx="0" cy="0"/>
-          <a:chOff x="0" y="0"/>
-          <a:chExt cx="0" cy="0"/>
-        </a:xfrm>
-      </p:grpSpPr>
-      <p:sp>
-        <p:nvSpPr>
-          <p:cNvPr id="3" name="Title 2"/>
-          <p:cNvSpPr>
-            <a:spLocks noGrp="1"/>
-          </p:cNvSpPr>
-          <p:nvPr>
-            <p:ph type="title"/>
-          </p:nvPr>
-        </p:nvSpPr>
-        <p:spPr/>
-        <p:txBody>
-          <a:bodyPr/>
-          <a:lstStyle/>
-          <a:p>
-            <a:r>
-              <a:rPr lang="en-US" dirty="0"/>
-              <a:t>Why do we care?</a:t>
-            </a:r>
-          </a:p>
-        </p:txBody>
-      </p:sp>
-      <p:sp>
-        <p:nvSpPr>
-          <p:cNvPr id="2" name="Content Placeholder 1"/>
-          <p:cNvSpPr>
-            <a:spLocks noGrp="1"/>
-          </p:cNvSpPr>
-          <p:nvPr>
-            <p:ph type="body" idx="1"/>
-          </p:nvPr>
-        </p:nvSpPr>
-        <p:spPr/>
-        <p:txBody>
-          <a:bodyPr>
-            <a:normAutofit/>
-          </a:bodyPr>
-          <a:lstStyle/>
-          <a:p>
-            <a:r>
-              <a:rPr lang="en-US" dirty="0"/>
-              <a:t>Features are hints/rules of thumb you give your model</a:t>
-            </a:r>
-          </a:p>
-          <a:p>
-            <a:pPr lvl="1"/>
-            <a:r>
-              <a:rPr lang="en-US" sz="2000" dirty="0"/>
-              <a:t>Encoding domain knowledge and context for the model to use</a:t>
-            </a:r>
-          </a:p>
-          <a:p>
-            <a:endParaRPr lang="en-US" dirty="0"/>
-          </a:p>
-          <a:p>
-            <a:r>
-              <a:rPr lang="en-US" dirty="0"/>
-              <a:t>Feature generation is a critical part of the machine learning modeling process, especially with structured data.</a:t>
-            </a:r>
-          </a:p>
-          <a:p>
-            <a:endParaRPr lang="en-US" dirty="0"/>
-          </a:p>
-          <a:p>
-            <a:r>
-              <a:rPr lang="en-US" dirty="0"/>
-              <a:t>Complexity in features may allow us to use less complex models that are faster to run, easier to understand and easier to maintain.</a:t>
-            </a:r>
-          </a:p>
-          <a:p>
-            <a:endParaRPr lang="en-US" dirty="0"/>
-          </a:p>
-          <a:p>
-            <a:endParaRPr lang="en-US" dirty="0"/>
-          </a:p>
-        </p:txBody>
-      </p:sp>
-    </p:spTree>
-    <p:extLst>
-      <p:ext uri="{BB962C8B-B14F-4D97-AF65-F5344CB8AC3E}">
-        <p14:creationId xmlns:p14="http://schemas.microsoft.com/office/powerpoint/2010/main" val="837826461"/>
-      </p:ext>
-    </p:extLst>
-  </p:cSld>
-  <p:clrMapOvr>
-    <a:masterClrMapping/>
-  </p:clrMapOvr>
-</p:sld>
+<file path=ppt/tags/tag1.xml><?xml version="1.0" encoding="utf-8"?>
+<p:tagLst xmlns:a="http://schemas.openxmlformats.org/drawingml/2006/main" xmlns:r="http://schemas.openxmlformats.org/officeDocument/2006/relationships" xmlns:p="http://schemas.openxmlformats.org/presentationml/2006/main">
+  <p:tag name="SLIDO_APP_VERSION" val="1.5.0.0"/>
+  <p:tag name="SLIDO_PRESENTATION_ID" val="85dea1e7-201f-4264-8231-e662824d1cb9"/>
+  <p:tag name="SLIDO_EVENT_UUID" val="4ee70ca1-e1e6-4271-9fce-4efcf7d701cb"/>
+  <p:tag name="SLIDO_EVENT_SECTION_UUID" val="4e6b9f65-e842-4d53-9e0b-c4f65d721159"/>
+</p:tagLst>
 </file>
 
-<file path=ppt/slides/slide9.xml><?xml version="1.0" encoding="utf-8"?>
-<p:sld xmlns:a="http://schemas.openxmlformats.org/drawingml/2006/main" xmlns:r="http://schemas.openxmlformats.org/officeDocument/2006/relationships" xmlns:p="http://schemas.openxmlformats.org/presentationml/2006/main">
-  <p:cSld>
-    <p:spTree>
-      <p:nvGrpSpPr>
-        <p:cNvPr id="1" name=""/>
-        <p:cNvGrpSpPr/>
-        <p:nvPr/>
-      </p:nvGrpSpPr>
-      <p:grpSpPr>
-        <a:xfrm>
-          <a:off x="0" y="0"/>
-          <a:ext cx="0" cy="0"/>
-          <a:chOff x="0" y="0"/>
-          <a:chExt cx="0" cy="0"/>
-        </a:xfrm>
-      </p:grpSpPr>
-      <p:sp>
-        <p:nvSpPr>
-          <p:cNvPr id="3" name="Title 2"/>
-          <p:cNvSpPr>
-            <a:spLocks noGrp="1"/>
-          </p:cNvSpPr>
-          <p:nvPr>
-            <p:ph type="title"/>
-          </p:nvPr>
-        </p:nvSpPr>
-        <p:spPr/>
-        <p:txBody>
-          <a:bodyPr/>
-          <a:lstStyle/>
-          <a:p>
-            <a:r>
-              <a:rPr lang="en-US" dirty="0"/>
-              <a:t>Practical Pointers</a:t>
-            </a:r>
-          </a:p>
-        </p:txBody>
-      </p:sp>
-      <p:sp>
-        <p:nvSpPr>
-          <p:cNvPr id="2" name="Content Placeholder 1"/>
-          <p:cNvSpPr>
-            <a:spLocks noGrp="1"/>
-          </p:cNvSpPr>
-          <p:nvPr>
-            <p:ph type="body" idx="1"/>
-          </p:nvPr>
-        </p:nvSpPr>
-        <p:spPr/>
-        <p:txBody>
-          <a:bodyPr>
-            <a:normAutofit/>
-          </a:bodyPr>
-          <a:lstStyle/>
-          <a:p>
-            <a:r>
-              <a:rPr lang="en-US" dirty="0"/>
-              <a:t>When generating a feature, what did you know and </a:t>
-            </a:r>
-            <a:r>
-              <a:rPr lang="en-US" b="1" u="sng" dirty="0"/>
-              <a:t>when</a:t>
-            </a:r>
-            <a:r>
-              <a:rPr lang="en-US" dirty="0"/>
-              <a:t> did you know it?</a:t>
-            </a:r>
-          </a:p>
-          <a:p>
-            <a:pPr lvl="1"/>
-            <a:r>
-              <a:rPr lang="en-US" dirty="0"/>
-              <a:t>You can only create features from information available </a:t>
-            </a:r>
-            <a:r>
-              <a:rPr lang="en-US" sz="3200" b="1" dirty="0">
-                <a:solidFill>
-                  <a:srgbClr val="FF0000"/>
-                </a:solidFill>
-              </a:rPr>
-              <a:t>before</a:t>
-            </a:r>
-            <a:r>
-              <a:rPr lang="en-US" dirty="0"/>
-              <a:t> the “training” date for a given row</a:t>
-            </a:r>
-            <a:br>
-              <a:rPr lang="en-US" dirty="0"/>
-            </a:br>
-            <a:endParaRPr lang="en-US" dirty="0"/>
-          </a:p>
-          <a:p>
-            <a:r>
-              <a:rPr lang="en-US" dirty="0"/>
-              <a:t>Domain/expert knowledge and prior research in the field can help a lot!</a:t>
-            </a:r>
-          </a:p>
-          <a:p>
-            <a:endParaRPr lang="en-US" dirty="0"/>
-          </a:p>
-        </p:txBody>
-      </p:sp>
-    </p:spTree>
-    <p:extLst>
-      <p:ext uri="{BB962C8B-B14F-4D97-AF65-F5344CB8AC3E}">
-        <p14:creationId xmlns:p14="http://schemas.microsoft.com/office/powerpoint/2010/main" val="4045032903"/>
-      </p:ext>
-    </p:extLst>
-  </p:cSld>
-  <p:clrMapOvr>
-    <a:masterClrMapping/>
-  </p:clrMapOvr>
-</p:sld>
+<file path=ppt/tags/tag2.xml><?xml version="1.0" encoding="utf-8"?>
+<p:tagLst xmlns:a="http://schemas.openxmlformats.org/drawingml/2006/main" xmlns:r="http://schemas.openxmlformats.org/officeDocument/2006/relationships" xmlns:p="http://schemas.openxmlformats.org/presentationml/2006/main">
+  <p:tag name="SLIDO_TYPE" val="SlidoPoll"/>
+  <p:tag name="SLIDO_POLL_UUID" val="fc8bb486-a3e7-4c2b-ada3-0963fab6bfca"/>
+  <p:tag name="SLIDO_TIMELINE" val="W3sicG9sbFF1ZXN0aW9uVXVpZCI6ImMxMDRjMGI3LTYwYTMtNGZlYS1iYjY0LTZlOWEyMGUxOGFjYSIsInNob3dSZXN1bHRzIjpmYWxzZX0seyJwb2xsUXVlc3Rpb25VdWlkIjoiYzEwNGMwYjctNjBhMy00ZmVhLWJiNjQtNmU5YTIwZTE4YWNhIiwic2hvd1Jlc3VsdHMiOnRydWV9XQ=="/>
+</p:tagLst>
+</file>
+
+<file path=ppt/tags/tag3.xml><?xml version="1.0" encoding="utf-8"?>
+<p:tagLst xmlns:a="http://schemas.openxmlformats.org/drawingml/2006/main" xmlns:r="http://schemas.openxmlformats.org/officeDocument/2006/relationships" xmlns:p="http://schemas.openxmlformats.org/presentationml/2006/main">
+  <p:tag name="SLIDO_ELEMENT" val="interaction_image"/>
+  <p:tag name="INTERACTION_TYPE" val="MultipleChoice"/>
+</p:tagLst>
+</file>
+
+<file path=ppt/tags/tag4.xml><?xml version="1.0" encoding="utf-8"?>
+<p:tagLst xmlns:a="http://schemas.openxmlformats.org/drawingml/2006/main" xmlns:r="http://schemas.openxmlformats.org/officeDocument/2006/relationships" xmlns:p="http://schemas.openxmlformats.org/presentationml/2006/main">
+  <p:tag name="SLIDO_ELEMENT" val="title"/>
+</p:tagLst>
+</file>
+
+<file path=ppt/tags/tag5.xml><?xml version="1.0" encoding="utf-8"?>
+<p:tagLst xmlns:a="http://schemas.openxmlformats.org/drawingml/2006/main" xmlns:r="http://schemas.openxmlformats.org/officeDocument/2006/relationships" xmlns:p="http://schemas.openxmlformats.org/presentationml/2006/main">
+  <p:tag name="SLIDO_ELEMENT" val="footer"/>
+</p:tagLst>
+</file>
+
+<file path=ppt/tags/tag6.xml><?xml version="1.0" encoding="utf-8"?>
+<p:tagLst xmlns:a="http://schemas.openxmlformats.org/drawingml/2006/main" xmlns:r="http://schemas.openxmlformats.org/officeDocument/2006/relationships" xmlns:p="http://schemas.openxmlformats.org/presentationml/2006/main">
+  <p:tag name="SLIDO_ELEMENT" val="corner"/>
+</p:tagLst>
 </file>
 
 <file path=ppt/theme/theme1.xml><?xml version="1.0" encoding="utf-8"?>

--- a/Lectures/12-features-and-imputation.pptx
+++ b/Lectures/12-features-and-imputation.pptx
@@ -5,7 +5,7 @@
     <p:sldMasterId id="2147483648" r:id="rId1"/>
   </p:sldMasterIdLst>
   <p:notesMasterIdLst>
-    <p:notesMasterId r:id="rId47"/>
+    <p:notesMasterId r:id="rId45"/>
   </p:notesMasterIdLst>
   <p:sldIdLst>
     <p:sldId id="256" r:id="rId2"/>
@@ -17,47 +17,45 @@
     <p:sldId id="543" r:id="rId8"/>
     <p:sldId id="544" r:id="rId9"/>
     <p:sldId id="282" r:id="rId10"/>
-    <p:sldId id="266" r:id="rId11"/>
-    <p:sldId id="269" r:id="rId12"/>
-    <p:sldId id="268" r:id="rId13"/>
+    <p:sldId id="268" r:id="rId11"/>
+    <p:sldId id="266" r:id="rId12"/>
+    <p:sldId id="269" r:id="rId13"/>
     <p:sldId id="301" r:id="rId14"/>
-    <p:sldId id="303" r:id="rId15"/>
-    <p:sldId id="320" r:id="rId16"/>
-    <p:sldId id="503" r:id="rId17"/>
-    <p:sldId id="478" r:id="rId18"/>
-    <p:sldId id="502" r:id="rId19"/>
-    <p:sldId id="522" r:id="rId20"/>
-    <p:sldId id="524" r:id="rId21"/>
-    <p:sldId id="525" r:id="rId22"/>
-    <p:sldId id="526" r:id="rId23"/>
-    <p:sldId id="514" r:id="rId24"/>
-    <p:sldId id="541" r:id="rId25"/>
-    <p:sldId id="542" r:id="rId26"/>
-    <p:sldId id="513" r:id="rId27"/>
-    <p:sldId id="515" r:id="rId28"/>
-    <p:sldId id="300" r:id="rId29"/>
-    <p:sldId id="302" r:id="rId30"/>
-    <p:sldId id="304" r:id="rId31"/>
-    <p:sldId id="277" r:id="rId32"/>
-    <p:sldId id="278" r:id="rId33"/>
-    <p:sldId id="280" r:id="rId34"/>
-    <p:sldId id="279" r:id="rId35"/>
-    <p:sldId id="306" r:id="rId36"/>
-    <p:sldId id="310" r:id="rId37"/>
-    <p:sldId id="312" r:id="rId38"/>
-    <p:sldId id="313" r:id="rId39"/>
-    <p:sldId id="317" r:id="rId40"/>
-    <p:sldId id="314" r:id="rId41"/>
-    <p:sldId id="316" r:id="rId42"/>
-    <p:sldId id="315" r:id="rId43"/>
-    <p:sldId id="322" r:id="rId44"/>
-    <p:sldId id="292" r:id="rId45"/>
-    <p:sldId id="293" r:id="rId46"/>
+    <p:sldId id="320" r:id="rId15"/>
+    <p:sldId id="503" r:id="rId16"/>
+    <p:sldId id="502" r:id="rId17"/>
+    <p:sldId id="522" r:id="rId18"/>
+    <p:sldId id="524" r:id="rId19"/>
+    <p:sldId id="525" r:id="rId20"/>
+    <p:sldId id="526" r:id="rId21"/>
+    <p:sldId id="514" r:id="rId22"/>
+    <p:sldId id="541" r:id="rId23"/>
+    <p:sldId id="542" r:id="rId24"/>
+    <p:sldId id="513" r:id="rId25"/>
+    <p:sldId id="515" r:id="rId26"/>
+    <p:sldId id="300" r:id="rId27"/>
+    <p:sldId id="302" r:id="rId28"/>
+    <p:sldId id="304" r:id="rId29"/>
+    <p:sldId id="277" r:id="rId30"/>
+    <p:sldId id="278" r:id="rId31"/>
+    <p:sldId id="280" r:id="rId32"/>
+    <p:sldId id="279" r:id="rId33"/>
+    <p:sldId id="306" r:id="rId34"/>
+    <p:sldId id="310" r:id="rId35"/>
+    <p:sldId id="312" r:id="rId36"/>
+    <p:sldId id="313" r:id="rId37"/>
+    <p:sldId id="317" r:id="rId38"/>
+    <p:sldId id="314" r:id="rId39"/>
+    <p:sldId id="316" r:id="rId40"/>
+    <p:sldId id="315" r:id="rId41"/>
+    <p:sldId id="322" r:id="rId42"/>
+    <p:sldId id="292" r:id="rId43"/>
+    <p:sldId id="293" r:id="rId44"/>
   </p:sldIdLst>
   <p:sldSz cx="12192000" cy="6858000"/>
   <p:notesSz cx="6858000" cy="9144000"/>
   <p:custDataLst>
-    <p:tags r:id="rId48"/>
+    <p:tags r:id="rId46"/>
   </p:custDataLst>
   <p:defaultTextStyle>
     <a:defPPr marR="0" lvl="0" algn="l" rtl="0">
@@ -293,7 +291,7 @@
       <p15:sldGuideLst xmlns:p15="http://schemas.microsoft.com/office/powerpoint/2012/main"/>
     </p:ext>
     <p:ext uri="http://customooxmlschemas.google.com/">
-      <go:slidesCustomData xmlns:go="http://customooxmlschemas.google.com/" xmlns:p15="http://schemas.microsoft.com/office/powerpoint/2012/main" xmlns:p14="http://schemas.microsoft.com/office/powerpoint/2010/main" xmlns:com="http://schemas.openxmlformats.org/drawingml/2006/compatibility" xmlns:pvml="urn:schemas-microsoft-com:office:powerpoint" xmlns:v="urn:schemas-microsoft-com:vml" xmlns:o="urn:schemas-microsoft-com:office:office" xmlns:dgm="http://schemas.openxmlformats.org/drawingml/2006/diagram" xmlns:c="http://schemas.openxmlformats.org/drawingml/2006/chart" xmlns:mv="urn:schemas-microsoft-com:mac:vml" xmlns:mc="http://schemas.openxmlformats.org/markup-compatibility/2006" xmlns="" r:id="rId49" roundtripDataSignature="AMtx7mjFyVUGRZWio+dc9dxzYsimUxNJbg=="/>
+      <go:slidesCustomData xmlns:go="http://customooxmlschemas.google.com/" xmlns:p15="http://schemas.microsoft.com/office/powerpoint/2012/main" xmlns:p14="http://schemas.microsoft.com/office/powerpoint/2010/main" xmlns:com="http://schemas.openxmlformats.org/drawingml/2006/compatibility" xmlns:pvml="urn:schemas-microsoft-com:office:powerpoint" xmlns:v="urn:schemas-microsoft-com:vml" xmlns:o="urn:schemas-microsoft-com:office:office" xmlns:dgm="http://schemas.openxmlformats.org/drawingml/2006/diagram" xmlns:c="http://schemas.openxmlformats.org/drawingml/2006/chart" xmlns:mv="urn:schemas-microsoft-com:mac:vml" xmlns:mc="http://schemas.openxmlformats.org/markup-compatibility/2006" xmlns="" r:id="rId47" roundtripDataSignature="AMtx7mjFyVUGRZWio+dc9dxzYsimUxNJbg=="/>
     </p:ext>
   </p:extLst>
 </p:presentation>
@@ -9628,6 +9626,177 @@
   <p:cSld>
     <p:spTree>
       <p:nvGrpSpPr>
+        <p:cNvPr id="1" name="Shape 270"/>
+        <p:cNvGrpSpPr/>
+        <p:nvPr/>
+      </p:nvGrpSpPr>
+      <p:grpSpPr>
+        <a:xfrm>
+          <a:off x="0" y="0"/>
+          <a:ext cx="0" cy="0"/>
+          <a:chOff x="0" y="0"/>
+          <a:chExt cx="0" cy="0"/>
+        </a:xfrm>
+      </p:grpSpPr>
+      <p:sp>
+        <p:nvSpPr>
+          <p:cNvPr id="271" name="Google Shape;271;g3fbf111a05e_3_129:notes"/>
+          <p:cNvSpPr>
+            <a:spLocks noGrp="1" noRot="1" noChangeAspect="1"/>
+          </p:cNvSpPr>
+          <p:nvPr>
+            <p:ph type="sldImg" idx="2"/>
+          </p:nvPr>
+        </p:nvSpPr>
+        <p:spPr>
+          <a:xfrm>
+            <a:off x="685800" y="1143000"/>
+            <a:ext cx="5486400" cy="3086100"/>
+          </a:xfrm>
+          <a:custGeom>
+            <a:avLst/>
+            <a:gdLst/>
+            <a:ahLst/>
+            <a:cxnLst/>
+            <a:rect l="l" t="t" r="r" b="b"/>
+            <a:pathLst>
+              <a:path w="120000" h="120000" extrusionOk="0">
+                <a:moveTo>
+                  <a:pt x="0" y="0"/>
+                </a:moveTo>
+                <a:lnTo>
+                  <a:pt x="120000" y="0"/>
+                </a:lnTo>
+                <a:lnTo>
+                  <a:pt x="120000" y="120000"/>
+                </a:lnTo>
+                <a:lnTo>
+                  <a:pt x="0" y="120000"/>
+                </a:lnTo>
+                <a:close/>
+              </a:path>
+            </a:pathLst>
+          </a:custGeom>
+          <a:noFill/>
+          <a:ln w="12700" cap="flat" cmpd="sng">
+            <a:solidFill>
+              <a:srgbClr val="000000"/>
+            </a:solidFill>
+            <a:prstDash val="solid"/>
+            <a:round/>
+            <a:headEnd type="none" w="sm" len="sm"/>
+            <a:tailEnd type="none" w="sm" len="sm"/>
+          </a:ln>
+        </p:spPr>
+      </p:sp>
+      <p:sp>
+        <p:nvSpPr>
+          <p:cNvPr id="272" name="Google Shape;272;g3fbf111a05e_3_129:notes"/>
+          <p:cNvSpPr txBox="1">
+            <a:spLocks noGrp="1"/>
+          </p:cNvSpPr>
+          <p:nvPr>
+            <p:ph type="body" idx="1"/>
+          </p:nvPr>
+        </p:nvSpPr>
+        <p:spPr>
+          <a:xfrm>
+            <a:off x="685800" y="4400550"/>
+            <a:ext cx="5486400" cy="3600450"/>
+          </a:xfrm>
+          <a:prstGeom prst="rect">
+            <a:avLst/>
+          </a:prstGeom>
+          <a:noFill/>
+          <a:ln>
+            <a:noFill/>
+          </a:ln>
+        </p:spPr>
+        <p:txBody>
+          <a:bodyPr spcFirstLastPara="1" wrap="square" lIns="91425" tIns="45700" rIns="91425" bIns="45700" anchor="t" anchorCtr="0">
+            <a:noAutofit/>
+          </a:bodyPr>
+          <a:lstStyle/>
+          <a:p>
+            <a:pPr marL="457200" marR="0" lvl="0" indent="-228600" algn="l" rtl="0">
+              <a:lnSpc>
+                <a:spcPct val="100000"/>
+              </a:lnSpc>
+              <a:spcBef>
+                <a:spcPts val="0"/>
+              </a:spcBef>
+              <a:spcAft>
+                <a:spcPts val="0"/>
+              </a:spcAft>
+              <a:buSzPts val="1400"/>
+              <a:buNone/>
+            </a:pPr>
+            <a:endParaRPr/>
+          </a:p>
+        </p:txBody>
+      </p:sp>
+      <p:sp>
+        <p:nvSpPr>
+          <p:cNvPr id="273" name="Google Shape;273;g3fbf111a05e_3_129:notes"/>
+          <p:cNvSpPr txBox="1">
+            <a:spLocks noGrp="1"/>
+          </p:cNvSpPr>
+          <p:nvPr>
+            <p:ph type="sldNum" idx="12"/>
+          </p:nvPr>
+        </p:nvSpPr>
+        <p:spPr>
+          <a:xfrm>
+            <a:off x="3884613" y="8685213"/>
+            <a:ext cx="2971800" cy="458787"/>
+          </a:xfrm>
+          <a:prstGeom prst="rect">
+            <a:avLst/>
+          </a:prstGeom>
+          <a:noFill/>
+          <a:ln>
+            <a:noFill/>
+          </a:ln>
+        </p:spPr>
+        <p:txBody>
+          <a:bodyPr spcFirstLastPara="1" wrap="square" lIns="91425" tIns="45700" rIns="91425" bIns="45700" anchor="b" anchorCtr="0">
+            <a:noAutofit/>
+          </a:bodyPr>
+          <a:lstStyle/>
+          <a:p>
+            <a:pPr marL="0" lvl="0" indent="0" algn="l" rtl="0">
+              <a:lnSpc>
+                <a:spcPct val="100000"/>
+              </a:lnSpc>
+              <a:spcBef>
+                <a:spcPts val="0"/>
+              </a:spcBef>
+              <a:spcAft>
+                <a:spcPts val="0"/>
+              </a:spcAft>
+              <a:buNone/>
+            </a:pPr>
+            <a:fld id="{00000000-1234-1234-1234-123412341234}" type="slidenum">
+              <a:rPr lang="en"/>
+              <a:t>10</a:t>
+            </a:fld>
+            <a:endParaRPr/>
+          </a:p>
+        </p:txBody>
+      </p:sp>
+    </p:spTree>
+  </p:cSld>
+  <p:clrMapOvr>
+    <a:masterClrMapping/>
+  </p:clrMapOvr>
+</p:notes>
+</file>
+
+<file path=ppt/notesSlides/notesSlide4.xml><?xml version="1.0" encoding="utf-8"?>
+<p:notes xmlns:a="http://schemas.openxmlformats.org/drawingml/2006/main" xmlns:r="http://schemas.openxmlformats.org/officeDocument/2006/relationships" xmlns:p="http://schemas.openxmlformats.org/presentationml/2006/main" showMasterSp="0" showMasterPhAnim="0">
+  <p:cSld>
+    <p:spTree>
+      <p:nvGrpSpPr>
         <p:cNvPr id="1" name="Shape 258"/>
         <p:cNvGrpSpPr/>
         <p:nvPr/>
@@ -9727,7 +9896,7 @@
 </p:notes>
 </file>
 
-<file path=ppt/notesSlides/notesSlide4.xml><?xml version="1.0" encoding="utf-8"?>
+<file path=ppt/notesSlides/notesSlide5.xml><?xml version="1.0" encoding="utf-8"?>
 <p:notes xmlns:a="http://schemas.openxmlformats.org/drawingml/2006/main" xmlns:r="http://schemas.openxmlformats.org/officeDocument/2006/relationships" xmlns:p="http://schemas.openxmlformats.org/presentationml/2006/main" showMasterSp="0" showMasterPhAnim="0">
   <p:cSld>
     <p:spTree>
@@ -9884,177 +10053,6 @@
             </a:pPr>
             <a:fld id="{00000000-1234-1234-1234-123412341234}" type="slidenum">
               <a:rPr lang="en"/>
-              <a:t>11</a:t>
-            </a:fld>
-            <a:endParaRPr/>
-          </a:p>
-        </p:txBody>
-      </p:sp>
-    </p:spTree>
-  </p:cSld>
-  <p:clrMapOvr>
-    <a:masterClrMapping/>
-  </p:clrMapOvr>
-</p:notes>
-</file>
-
-<file path=ppt/notesSlides/notesSlide5.xml><?xml version="1.0" encoding="utf-8"?>
-<p:notes xmlns:a="http://schemas.openxmlformats.org/drawingml/2006/main" xmlns:r="http://schemas.openxmlformats.org/officeDocument/2006/relationships" xmlns:p="http://schemas.openxmlformats.org/presentationml/2006/main" showMasterSp="0" showMasterPhAnim="0">
-  <p:cSld>
-    <p:spTree>
-      <p:nvGrpSpPr>
-        <p:cNvPr id="1" name="Shape 270"/>
-        <p:cNvGrpSpPr/>
-        <p:nvPr/>
-      </p:nvGrpSpPr>
-      <p:grpSpPr>
-        <a:xfrm>
-          <a:off x="0" y="0"/>
-          <a:ext cx="0" cy="0"/>
-          <a:chOff x="0" y="0"/>
-          <a:chExt cx="0" cy="0"/>
-        </a:xfrm>
-      </p:grpSpPr>
-      <p:sp>
-        <p:nvSpPr>
-          <p:cNvPr id="271" name="Google Shape;271;g3fbf111a05e_3_129:notes"/>
-          <p:cNvSpPr>
-            <a:spLocks noGrp="1" noRot="1" noChangeAspect="1"/>
-          </p:cNvSpPr>
-          <p:nvPr>
-            <p:ph type="sldImg" idx="2"/>
-          </p:nvPr>
-        </p:nvSpPr>
-        <p:spPr>
-          <a:xfrm>
-            <a:off x="685800" y="1143000"/>
-            <a:ext cx="5486400" cy="3086100"/>
-          </a:xfrm>
-          <a:custGeom>
-            <a:avLst/>
-            <a:gdLst/>
-            <a:ahLst/>
-            <a:cxnLst/>
-            <a:rect l="l" t="t" r="r" b="b"/>
-            <a:pathLst>
-              <a:path w="120000" h="120000" extrusionOk="0">
-                <a:moveTo>
-                  <a:pt x="0" y="0"/>
-                </a:moveTo>
-                <a:lnTo>
-                  <a:pt x="120000" y="0"/>
-                </a:lnTo>
-                <a:lnTo>
-                  <a:pt x="120000" y="120000"/>
-                </a:lnTo>
-                <a:lnTo>
-                  <a:pt x="0" y="120000"/>
-                </a:lnTo>
-                <a:close/>
-              </a:path>
-            </a:pathLst>
-          </a:custGeom>
-          <a:noFill/>
-          <a:ln w="12700" cap="flat" cmpd="sng">
-            <a:solidFill>
-              <a:srgbClr val="000000"/>
-            </a:solidFill>
-            <a:prstDash val="solid"/>
-            <a:round/>
-            <a:headEnd type="none" w="sm" len="sm"/>
-            <a:tailEnd type="none" w="sm" len="sm"/>
-          </a:ln>
-        </p:spPr>
-      </p:sp>
-      <p:sp>
-        <p:nvSpPr>
-          <p:cNvPr id="272" name="Google Shape;272;g3fbf111a05e_3_129:notes"/>
-          <p:cNvSpPr txBox="1">
-            <a:spLocks noGrp="1"/>
-          </p:cNvSpPr>
-          <p:nvPr>
-            <p:ph type="body" idx="1"/>
-          </p:nvPr>
-        </p:nvSpPr>
-        <p:spPr>
-          <a:xfrm>
-            <a:off x="685800" y="4400550"/>
-            <a:ext cx="5486400" cy="3600450"/>
-          </a:xfrm>
-          <a:prstGeom prst="rect">
-            <a:avLst/>
-          </a:prstGeom>
-          <a:noFill/>
-          <a:ln>
-            <a:noFill/>
-          </a:ln>
-        </p:spPr>
-        <p:txBody>
-          <a:bodyPr spcFirstLastPara="1" wrap="square" lIns="91425" tIns="45700" rIns="91425" bIns="45700" anchor="t" anchorCtr="0">
-            <a:noAutofit/>
-          </a:bodyPr>
-          <a:lstStyle/>
-          <a:p>
-            <a:pPr marL="457200" marR="0" lvl="0" indent="-228600" algn="l" rtl="0">
-              <a:lnSpc>
-                <a:spcPct val="100000"/>
-              </a:lnSpc>
-              <a:spcBef>
-                <a:spcPts val="0"/>
-              </a:spcBef>
-              <a:spcAft>
-                <a:spcPts val="0"/>
-              </a:spcAft>
-              <a:buSzPts val="1400"/>
-              <a:buNone/>
-            </a:pPr>
-            <a:endParaRPr/>
-          </a:p>
-        </p:txBody>
-      </p:sp>
-      <p:sp>
-        <p:nvSpPr>
-          <p:cNvPr id="273" name="Google Shape;273;g3fbf111a05e_3_129:notes"/>
-          <p:cNvSpPr txBox="1">
-            <a:spLocks noGrp="1"/>
-          </p:cNvSpPr>
-          <p:nvPr>
-            <p:ph type="sldNum" idx="12"/>
-          </p:nvPr>
-        </p:nvSpPr>
-        <p:spPr>
-          <a:xfrm>
-            <a:off x="3884613" y="8685213"/>
-            <a:ext cx="2971800" cy="458787"/>
-          </a:xfrm>
-          <a:prstGeom prst="rect">
-            <a:avLst/>
-          </a:prstGeom>
-          <a:noFill/>
-          <a:ln>
-            <a:noFill/>
-          </a:ln>
-        </p:spPr>
-        <p:txBody>
-          <a:bodyPr spcFirstLastPara="1" wrap="square" lIns="91425" tIns="45700" rIns="91425" bIns="45700" anchor="b" anchorCtr="0">
-            <a:noAutofit/>
-          </a:bodyPr>
-          <a:lstStyle/>
-          <a:p>
-            <a:pPr marL="0" lvl="0" indent="0" algn="l" rtl="0">
-              <a:lnSpc>
-                <a:spcPct val="100000"/>
-              </a:lnSpc>
-              <a:spcBef>
-                <a:spcPts val="0"/>
-              </a:spcBef>
-              <a:spcAft>
-                <a:spcPts val="0"/>
-              </a:spcAft>
-              <a:buNone/>
-            </a:pPr>
-            <a:fld id="{00000000-1234-1234-1234-123412341234}" type="slidenum">
-              <a:rPr lang="en"/>
               <a:t>12</a:t>
             </a:fld>
             <a:endParaRPr/>
@@ -10166,7 +10164,7 @@
                 <a:cs typeface="Calibri"/>
                 <a:sym typeface="Calibri"/>
               </a:rPr>
-              <a:t>16</a:t>
+              <a:t>15</a:t>
             </a:fld>
             <a:endParaRPr lang="en-US" sz="1200" b="0" i="0" u="none" strike="noStrike" cap="none">
               <a:solidFill>
@@ -15981,6 +15979,159 @@
   <p:cSld>
     <p:spTree>
       <p:nvGrpSpPr>
+        <p:cNvPr id="1" name="Shape 274"/>
+        <p:cNvGrpSpPr/>
+        <p:nvPr/>
+      </p:nvGrpSpPr>
+      <p:grpSpPr>
+        <a:xfrm>
+          <a:off x="0" y="0"/>
+          <a:ext cx="0" cy="0"/>
+          <a:chOff x="0" y="0"/>
+          <a:chExt cx="0" cy="0"/>
+        </a:xfrm>
+      </p:grpSpPr>
+      <p:sp>
+        <p:nvSpPr>
+          <p:cNvPr id="275" name="Google Shape;275;p54"/>
+          <p:cNvSpPr txBox="1">
+            <a:spLocks noGrp="1"/>
+          </p:cNvSpPr>
+          <p:nvPr>
+            <p:ph type="title"/>
+          </p:nvPr>
+        </p:nvSpPr>
+        <p:spPr>
+          <a:xfrm>
+            <a:off x="415601" y="593367"/>
+            <a:ext cx="11360700" cy="763500"/>
+          </a:xfrm>
+          <a:prstGeom prst="rect">
+            <a:avLst/>
+          </a:prstGeom>
+          <a:noFill/>
+          <a:ln>
+            <a:noFill/>
+          </a:ln>
+        </p:spPr>
+        <p:txBody>
+          <a:bodyPr spcFirstLastPara="1" wrap="square" lIns="121900" tIns="121900" rIns="121900" bIns="121900" anchor="t" anchorCtr="0">
+            <a:noAutofit/>
+          </a:bodyPr>
+          <a:lstStyle/>
+          <a:p>
+            <a:pPr>
+              <a:buSzPts val="2800"/>
+            </a:pPr>
+            <a:r>
+              <a:rPr lang="en"/>
+              <a:t>Feature Engineering: Why do we care?</a:t>
+            </a:r>
+            <a:endParaRPr/>
+          </a:p>
+        </p:txBody>
+      </p:sp>
+      <p:sp>
+        <p:nvSpPr>
+          <p:cNvPr id="276" name="Google Shape;276;p54"/>
+          <p:cNvSpPr txBox="1">
+            <a:spLocks noGrp="1"/>
+          </p:cNvSpPr>
+          <p:nvPr>
+            <p:ph type="body" idx="1"/>
+          </p:nvPr>
+        </p:nvSpPr>
+        <p:spPr>
+          <a:xfrm>
+            <a:off x="415601" y="1536633"/>
+            <a:ext cx="11360700" cy="4555200"/>
+          </a:xfrm>
+          <a:prstGeom prst="rect">
+            <a:avLst/>
+          </a:prstGeom>
+          <a:noFill/>
+          <a:ln>
+            <a:noFill/>
+          </a:ln>
+        </p:spPr>
+        <p:txBody>
+          <a:bodyPr spcFirstLastPara="1" wrap="square" lIns="121900" tIns="121900" rIns="121900" bIns="121900" anchor="t" anchorCtr="0">
+            <a:normAutofit/>
+          </a:bodyPr>
+          <a:lstStyle/>
+          <a:p>
+            <a:pPr marL="457189" indent="-372524">
+              <a:buSzPts val="1800"/>
+            </a:pPr>
+            <a:r>
+              <a:rPr lang="en"/>
+              <a:t>Features are hypothesis/hints/rules of thumb you give your model</a:t>
+            </a:r>
+            <a:endParaRPr/>
+          </a:p>
+          <a:p>
+            <a:pPr marL="914377" lvl="1" indent="-338658">
+              <a:spcBef>
+                <a:spcPts val="2133"/>
+              </a:spcBef>
+              <a:buSzPts val="1400"/>
+            </a:pPr>
+            <a:r>
+              <a:rPr lang="en" sz="2000"/>
+              <a:t>Encoding domain knowledge and context for the model to use</a:t>
+            </a:r>
+            <a:endParaRPr/>
+          </a:p>
+          <a:p>
+            <a:pPr marL="457189" indent="-220128">
+              <a:buSzPts val="1800"/>
+              <a:buNone/>
+            </a:pPr>
+            <a:endParaRPr/>
+          </a:p>
+          <a:p>
+            <a:pPr marL="457189" indent="-372524">
+              <a:buSzPts val="1800"/>
+            </a:pPr>
+            <a:r>
+              <a:rPr lang="en"/>
+              <a:t>Feature generation is still a critical part of the machine learning modeling process </a:t>
+            </a:r>
+            <a:r>
+              <a:rPr lang="en" b="1"/>
+              <a:t>with tabular/relational data.</a:t>
+            </a:r>
+            <a:endParaRPr b="1"/>
+          </a:p>
+          <a:p>
+            <a:pPr marL="0" indent="0">
+              <a:buSzPts val="1800"/>
+              <a:buNone/>
+            </a:pPr>
+            <a:endParaRPr/>
+          </a:p>
+          <a:p>
+            <a:pPr marL="457189" indent="-220128">
+              <a:buSzPts val="1800"/>
+              <a:buNone/>
+            </a:pPr>
+            <a:endParaRPr/>
+          </a:p>
+        </p:txBody>
+      </p:sp>
+    </p:spTree>
+  </p:cSld>
+  <p:clrMapOvr>
+    <a:masterClrMapping/>
+  </p:clrMapOvr>
+</p:sld>
+</file>
+
+<file path=ppt/slides/slide11.xml><?xml version="1.0" encoding="utf-8"?>
+<p:sld xmlns:a="http://schemas.openxmlformats.org/drawingml/2006/main" xmlns:r="http://schemas.openxmlformats.org/officeDocument/2006/relationships" xmlns:p="http://schemas.openxmlformats.org/presentationml/2006/main">
+  <p:cSld>
+    <p:spTree>
+      <p:nvGrpSpPr>
         <p:cNvPr id="1" name="Shape 261"/>
         <p:cNvGrpSpPr/>
         <p:nvPr/>
@@ -16005,7 +16156,7 @@
         </p:nvSpPr>
         <p:spPr>
           <a:xfrm>
-            <a:off x="415600" y="86563"/>
+            <a:off x="415600" y="271620"/>
             <a:ext cx="11360800" cy="763600"/>
           </a:xfrm>
           <a:prstGeom prst="rect">
@@ -16019,10 +16170,10 @@
           <a:lstStyle/>
           <a:p>
             <a:r>
-              <a:rPr lang="en"/>
+              <a:rPr lang="en" dirty="0"/>
               <a:t>Feature Engineering: Why we need to do it</a:t>
             </a:r>
-            <a:endParaRPr/>
+            <a:endParaRPr dirty="0"/>
           </a:p>
         </p:txBody>
       </p:sp>
@@ -16154,7 +16305,7 @@
 </p:sld>
 </file>
 
-<file path=ppt/slides/slide11.xml><?xml version="1.0" encoding="utf-8"?>
+<file path=ppt/slides/slide12.xml><?xml version="1.0" encoding="utf-8"?>
 <p:sld xmlns:a="http://schemas.openxmlformats.org/drawingml/2006/main" xmlns:r="http://schemas.openxmlformats.org/officeDocument/2006/relationships" xmlns:p="http://schemas.openxmlformats.org/presentationml/2006/main">
   <p:cSld>
     <p:spTree>
@@ -16325,159 +16476,6 @@
               <a:rPr lang="en"/>
               <a:t>Spend time understanding domain/expert knowledge and prior research in the application area you’re woking in</a:t>
             </a:r>
-            <a:endParaRPr/>
-          </a:p>
-        </p:txBody>
-      </p:sp>
-    </p:spTree>
-  </p:cSld>
-  <p:clrMapOvr>
-    <a:masterClrMapping/>
-  </p:clrMapOvr>
-</p:sld>
-</file>
-
-<file path=ppt/slides/slide12.xml><?xml version="1.0" encoding="utf-8"?>
-<p:sld xmlns:a="http://schemas.openxmlformats.org/drawingml/2006/main" xmlns:r="http://schemas.openxmlformats.org/officeDocument/2006/relationships" xmlns:p="http://schemas.openxmlformats.org/presentationml/2006/main">
-  <p:cSld>
-    <p:spTree>
-      <p:nvGrpSpPr>
-        <p:cNvPr id="1" name="Shape 274"/>
-        <p:cNvGrpSpPr/>
-        <p:nvPr/>
-      </p:nvGrpSpPr>
-      <p:grpSpPr>
-        <a:xfrm>
-          <a:off x="0" y="0"/>
-          <a:ext cx="0" cy="0"/>
-          <a:chOff x="0" y="0"/>
-          <a:chExt cx="0" cy="0"/>
-        </a:xfrm>
-      </p:grpSpPr>
-      <p:sp>
-        <p:nvSpPr>
-          <p:cNvPr id="275" name="Google Shape;275;p54"/>
-          <p:cNvSpPr txBox="1">
-            <a:spLocks noGrp="1"/>
-          </p:cNvSpPr>
-          <p:nvPr>
-            <p:ph type="title"/>
-          </p:nvPr>
-        </p:nvSpPr>
-        <p:spPr>
-          <a:xfrm>
-            <a:off x="415601" y="593367"/>
-            <a:ext cx="11360700" cy="763500"/>
-          </a:xfrm>
-          <a:prstGeom prst="rect">
-            <a:avLst/>
-          </a:prstGeom>
-          <a:noFill/>
-          <a:ln>
-            <a:noFill/>
-          </a:ln>
-        </p:spPr>
-        <p:txBody>
-          <a:bodyPr spcFirstLastPara="1" wrap="square" lIns="121900" tIns="121900" rIns="121900" bIns="121900" anchor="t" anchorCtr="0">
-            <a:noAutofit/>
-          </a:bodyPr>
-          <a:lstStyle/>
-          <a:p>
-            <a:pPr>
-              <a:buSzPts val="2800"/>
-            </a:pPr>
-            <a:r>
-              <a:rPr lang="en"/>
-              <a:t>Feature Engineering: Why do we care?</a:t>
-            </a:r>
-            <a:endParaRPr/>
-          </a:p>
-        </p:txBody>
-      </p:sp>
-      <p:sp>
-        <p:nvSpPr>
-          <p:cNvPr id="276" name="Google Shape;276;p54"/>
-          <p:cNvSpPr txBox="1">
-            <a:spLocks noGrp="1"/>
-          </p:cNvSpPr>
-          <p:nvPr>
-            <p:ph type="body" idx="1"/>
-          </p:nvPr>
-        </p:nvSpPr>
-        <p:spPr>
-          <a:xfrm>
-            <a:off x="415601" y="1536633"/>
-            <a:ext cx="11360700" cy="4555200"/>
-          </a:xfrm>
-          <a:prstGeom prst="rect">
-            <a:avLst/>
-          </a:prstGeom>
-          <a:noFill/>
-          <a:ln>
-            <a:noFill/>
-          </a:ln>
-        </p:spPr>
-        <p:txBody>
-          <a:bodyPr spcFirstLastPara="1" wrap="square" lIns="121900" tIns="121900" rIns="121900" bIns="121900" anchor="t" anchorCtr="0">
-            <a:normAutofit/>
-          </a:bodyPr>
-          <a:lstStyle/>
-          <a:p>
-            <a:pPr marL="457189" indent="-372524">
-              <a:buSzPts val="1800"/>
-            </a:pPr>
-            <a:r>
-              <a:rPr lang="en"/>
-              <a:t>Features are hypothesis/hints/rules of thumb you give your model</a:t>
-            </a:r>
-            <a:endParaRPr/>
-          </a:p>
-          <a:p>
-            <a:pPr marL="914377" lvl="1" indent="-338658">
-              <a:spcBef>
-                <a:spcPts val="2133"/>
-              </a:spcBef>
-              <a:buSzPts val="1400"/>
-            </a:pPr>
-            <a:r>
-              <a:rPr lang="en" sz="2000"/>
-              <a:t>Encoding domain knowledge and context for the model to use</a:t>
-            </a:r>
-            <a:endParaRPr/>
-          </a:p>
-          <a:p>
-            <a:pPr marL="457189" indent="-220128">
-              <a:buSzPts val="1800"/>
-              <a:buNone/>
-            </a:pPr>
-            <a:endParaRPr/>
-          </a:p>
-          <a:p>
-            <a:pPr marL="457189" indent="-372524">
-              <a:buSzPts val="1800"/>
-            </a:pPr>
-            <a:r>
-              <a:rPr lang="en"/>
-              <a:t>Feature generation is still a critical part of the machine learning modeling process </a:t>
-            </a:r>
-            <a:r>
-              <a:rPr lang="en" b="1"/>
-              <a:t>with tabular/relational data.</a:t>
-            </a:r>
-            <a:endParaRPr b="1"/>
-          </a:p>
-          <a:p>
-            <a:pPr marL="0" indent="0">
-              <a:buSzPts val="1800"/>
-              <a:buNone/>
-            </a:pPr>
-            <a:endParaRPr/>
-          </a:p>
-          <a:p>
-            <a:pPr marL="457189" indent="-220128">
-              <a:buSzPts val="1800"/>
-              <a:buNone/>
-            </a:pPr>
             <a:endParaRPr/>
           </a:p>
         </p:txBody>
@@ -16620,109 +16618,6 @@
 </file>
 
 <file path=ppt/slides/slide14.xml><?xml version="1.0" encoding="utf-8"?>
-<p:sld xmlns:a="http://schemas.openxmlformats.org/drawingml/2006/main" xmlns:r="http://schemas.openxmlformats.org/officeDocument/2006/relationships" xmlns:p="http://schemas.openxmlformats.org/presentationml/2006/main">
-  <p:cSld>
-    <p:spTree>
-      <p:nvGrpSpPr>
-        <p:cNvPr id="1" name=""/>
-        <p:cNvGrpSpPr/>
-        <p:nvPr/>
-      </p:nvGrpSpPr>
-      <p:grpSpPr>
-        <a:xfrm>
-          <a:off x="0" y="0"/>
-          <a:ext cx="0" cy="0"/>
-          <a:chOff x="0" y="0"/>
-          <a:chExt cx="0" cy="0"/>
-        </a:xfrm>
-      </p:grpSpPr>
-      <p:sp>
-        <p:nvSpPr>
-          <p:cNvPr id="3" name="Title 2"/>
-          <p:cNvSpPr>
-            <a:spLocks noGrp="1"/>
-          </p:cNvSpPr>
-          <p:nvPr>
-            <p:ph type="title"/>
-          </p:nvPr>
-        </p:nvSpPr>
-        <p:spPr/>
-        <p:txBody>
-          <a:bodyPr/>
-          <a:lstStyle/>
-          <a:p>
-            <a:r>
-              <a:rPr lang="en-US" dirty="0"/>
-              <a:t>Bias in Feature Development: Mechanisms</a:t>
-            </a:r>
-          </a:p>
-        </p:txBody>
-      </p:sp>
-      <p:sp>
-        <p:nvSpPr>
-          <p:cNvPr id="2" name="Content Placeholder 1"/>
-          <p:cNvSpPr>
-            <a:spLocks noGrp="1"/>
-          </p:cNvSpPr>
-          <p:nvPr>
-            <p:ph type="body" idx="1"/>
-          </p:nvPr>
-        </p:nvSpPr>
-        <p:spPr/>
-        <p:txBody>
-          <a:bodyPr/>
-          <a:lstStyle/>
-          <a:p>
-            <a:r>
-              <a:rPr lang="en-US" dirty="0"/>
-              <a:t>Is your feature directly measuring what you want it to or a proxy? Is it an equally good proxy across groups?</a:t>
-            </a:r>
-            <a:br>
-              <a:rPr lang="en-US" dirty="0"/>
-            </a:br>
-            <a:endParaRPr lang="en-US" dirty="0"/>
-          </a:p>
-          <a:p>
-            <a:r>
-              <a:rPr lang="en-US" dirty="0"/>
-              <a:t>Is measurement error correlated to group membership?</a:t>
-            </a:r>
-            <a:br>
-              <a:rPr lang="en-US" dirty="0"/>
-            </a:br>
-            <a:endParaRPr lang="en-US" dirty="0"/>
-          </a:p>
-          <a:p>
-            <a:r>
-              <a:rPr lang="en-US" dirty="0"/>
-              <a:t>How does predictiveness of your feature vary by group?</a:t>
-            </a:r>
-          </a:p>
-          <a:p>
-            <a:endParaRPr lang="en-US" dirty="0"/>
-          </a:p>
-          <a:p>
-            <a:r>
-              <a:rPr lang="en-US" dirty="0"/>
-              <a:t>Does missingness vary across groups?</a:t>
-            </a:r>
-          </a:p>
-        </p:txBody>
-      </p:sp>
-    </p:spTree>
-    <p:extLst>
-      <p:ext uri="{BB962C8B-B14F-4D97-AF65-F5344CB8AC3E}">
-        <p14:creationId xmlns:p14="http://schemas.microsoft.com/office/powerpoint/2010/main" val="3586805378"/>
-      </p:ext>
-    </p:extLst>
-  </p:cSld>
-  <p:clrMapOvr>
-    <a:masterClrMapping/>
-  </p:clrMapOvr>
-</p:sld>
-</file>
-
-<file path=ppt/slides/slide15.xml><?xml version="1.0" encoding="utf-8"?>
 <p:sld xmlns:a="http://schemas.openxmlformats.org/drawingml/2006/main" xmlns:r="http://schemas.openxmlformats.org/officeDocument/2006/relationships" xmlns:p="http://schemas.openxmlformats.org/presentationml/2006/main">
   <p:cSld>
     <p:spTree>
@@ -16904,7 +16799,7 @@
 </p:sld>
 </file>
 
-<file path=ppt/slides/slide16.xml><?xml version="1.0" encoding="utf-8"?>
+<file path=ppt/slides/slide15.xml><?xml version="1.0" encoding="utf-8"?>
 <p:sld xmlns:a="http://schemas.openxmlformats.org/drawingml/2006/main" xmlns:r="http://schemas.openxmlformats.org/officeDocument/2006/relationships" xmlns:p="http://schemas.openxmlformats.org/presentationml/2006/main">
   <p:cSld>
     <p:spTree>
@@ -17312,454 +17207,7 @@
 </p:sld>
 </file>
 
-<file path=ppt/slides/slide17.xml><?xml version="1.0" encoding="utf-8"?>
-<p:sld xmlns:a="http://schemas.openxmlformats.org/drawingml/2006/main" xmlns:r="http://schemas.openxmlformats.org/officeDocument/2006/relationships" xmlns:p="http://schemas.openxmlformats.org/presentationml/2006/main" show="0">
-  <p:cSld>
-    <p:spTree>
-      <p:nvGrpSpPr>
-        <p:cNvPr id="1" name=""/>
-        <p:cNvGrpSpPr/>
-        <p:nvPr/>
-      </p:nvGrpSpPr>
-      <p:grpSpPr>
-        <a:xfrm>
-          <a:off x="0" y="0"/>
-          <a:ext cx="0" cy="0"/>
-          <a:chOff x="0" y="0"/>
-          <a:chExt cx="0" cy="0"/>
-        </a:xfrm>
-      </p:grpSpPr>
-      <p:sp>
-        <p:nvSpPr>
-          <p:cNvPr id="3" name="Title 2"/>
-          <p:cNvSpPr>
-            <a:spLocks noGrp="1"/>
-          </p:cNvSpPr>
-          <p:nvPr>
-            <p:ph type="title"/>
-          </p:nvPr>
-        </p:nvSpPr>
-        <p:spPr>
-          <a:xfrm>
-            <a:off x="111210" y="367459"/>
-            <a:ext cx="12080789" cy="763500"/>
-          </a:xfrm>
-        </p:spPr>
-        <p:txBody>
-          <a:bodyPr/>
-          <a:lstStyle/>
-          <a:p>
-            <a:r>
-              <a:rPr lang="en-US" dirty="0"/>
-              <a:t>Is Scaling Important for…</a:t>
-            </a:r>
-          </a:p>
-        </p:txBody>
-      </p:sp>
-      <p:sp>
-        <p:nvSpPr>
-          <p:cNvPr id="2" name="Content Placeholder 1"/>
-          <p:cNvSpPr>
-            <a:spLocks noGrp="1"/>
-          </p:cNvSpPr>
-          <p:nvPr>
-            <p:ph type="body" idx="1"/>
-          </p:nvPr>
-        </p:nvSpPr>
-        <p:spPr>
-          <a:xfrm>
-            <a:off x="415600" y="1536633"/>
-            <a:ext cx="4235913" cy="4555200"/>
-          </a:xfrm>
-        </p:spPr>
-        <p:txBody>
-          <a:bodyPr/>
-          <a:lstStyle/>
-          <a:p>
-            <a:r>
-              <a:rPr lang="en-US" dirty="0"/>
-              <a:t>Decision Trees?</a:t>
-            </a:r>
-            <a:br>
-              <a:rPr lang="en-US" dirty="0"/>
-            </a:br>
-            <a:endParaRPr lang="en-US" dirty="0"/>
-          </a:p>
-          <a:p>
-            <a:r>
-              <a:rPr lang="en-US" dirty="0"/>
-              <a:t>k-Nearest Neighbors?</a:t>
-            </a:r>
-            <a:br>
-              <a:rPr lang="en-US" dirty="0"/>
-            </a:br>
-            <a:endParaRPr lang="en-US" dirty="0"/>
-          </a:p>
-          <a:p>
-            <a:r>
-              <a:rPr lang="en-US" dirty="0"/>
-              <a:t>Random Forest?</a:t>
-            </a:r>
-            <a:br>
-              <a:rPr lang="en-US" dirty="0"/>
-            </a:br>
-            <a:endParaRPr lang="en-US" dirty="0"/>
-          </a:p>
-          <a:p>
-            <a:r>
-              <a:rPr lang="en-US" dirty="0"/>
-              <a:t>Logistic Regression?</a:t>
-            </a:r>
-          </a:p>
-          <a:p>
-            <a:endParaRPr lang="en-US" dirty="0"/>
-          </a:p>
-          <a:p>
-            <a:r>
-              <a:rPr lang="en-US" dirty="0"/>
-              <a:t>Neural Nets?</a:t>
-            </a:r>
-          </a:p>
-          <a:p>
-            <a:endParaRPr lang="en-US" dirty="0"/>
-          </a:p>
-        </p:txBody>
-      </p:sp>
-      <p:sp>
-        <p:nvSpPr>
-          <p:cNvPr id="4" name="Content Placeholder 1">
-            <a:extLst>
-              <a:ext uri="{FF2B5EF4-FFF2-40B4-BE49-F238E27FC236}">
-                <a16:creationId xmlns:a16="http://schemas.microsoft.com/office/drawing/2014/main" id="{14BBE1C8-D8BC-2A41-A04B-7C6439BF19C4}"/>
-              </a:ext>
-            </a:extLst>
-          </p:cNvPr>
-          <p:cNvSpPr txBox="1">
-            <a:spLocks/>
-          </p:cNvSpPr>
-          <p:nvPr/>
-        </p:nvSpPr>
-        <p:spPr>
-          <a:xfrm>
-            <a:off x="6557983" y="2355190"/>
-            <a:ext cx="4235913" cy="3542027"/>
-          </a:xfrm>
-          <a:prstGeom prst="rect">
-            <a:avLst/>
-          </a:prstGeom>
-          <a:noFill/>
-          <a:ln>
-            <a:noFill/>
-          </a:ln>
-        </p:spPr>
-        <p:txBody>
-          <a:bodyPr spcFirstLastPara="1" wrap="square" lIns="121900" tIns="121900" rIns="121900" bIns="121900" anchor="t" anchorCtr="0">
-            <a:noAutofit/>
-          </a:bodyPr>
-          <a:lstStyle>
-            <a:defPPr marR="0" lvl="0" algn="l" rtl="0">
-              <a:lnSpc>
-                <a:spcPct val="100000"/>
-              </a:lnSpc>
-              <a:spcBef>
-                <a:spcPts val="0"/>
-              </a:spcBef>
-              <a:spcAft>
-                <a:spcPts val="0"/>
-              </a:spcAft>
-            </a:defPPr>
-            <a:lvl1pPr marL="457200" marR="0" lvl="0" indent="-381000" algn="l" rtl="0">
-              <a:lnSpc>
-                <a:spcPct val="115000"/>
-              </a:lnSpc>
-              <a:spcBef>
-                <a:spcPts val="0"/>
-              </a:spcBef>
-              <a:spcAft>
-                <a:spcPts val="0"/>
-              </a:spcAft>
-              <a:buClr>
-                <a:srgbClr val="434343"/>
-              </a:buClr>
-              <a:buSzPts val="2400"/>
-              <a:buFont typeface="Arial"/>
-              <a:buChar char="●"/>
-              <a:defRPr sz="2400" b="0" i="0" u="none" strike="noStrike" cap="none">
-                <a:solidFill>
-                  <a:srgbClr val="434343"/>
-                </a:solidFill>
-                <a:latin typeface="Arial"/>
-                <a:ea typeface="Arial"/>
-                <a:cs typeface="Arial"/>
-                <a:sym typeface="Arial"/>
-              </a:defRPr>
-            </a:lvl1pPr>
-            <a:lvl2pPr marL="914400" marR="0" lvl="1" indent="-349250" algn="l" rtl="0">
-              <a:lnSpc>
-                <a:spcPct val="115000"/>
-              </a:lnSpc>
-              <a:spcBef>
-                <a:spcPts val="2100"/>
-              </a:spcBef>
-              <a:spcAft>
-                <a:spcPts val="0"/>
-              </a:spcAft>
-              <a:buClr>
-                <a:srgbClr val="434343"/>
-              </a:buClr>
-              <a:buSzPts val="1900"/>
-              <a:buFont typeface="Arial"/>
-              <a:buChar char="○"/>
-              <a:defRPr sz="1900" b="0" i="0" u="none" strike="noStrike" cap="none">
-                <a:solidFill>
-                  <a:srgbClr val="434343"/>
-                </a:solidFill>
-                <a:latin typeface="Arial"/>
-                <a:ea typeface="Arial"/>
-                <a:cs typeface="Arial"/>
-                <a:sym typeface="Arial"/>
-              </a:defRPr>
-            </a:lvl2pPr>
-            <a:lvl3pPr marL="1371600" marR="0" lvl="2" indent="-349250" algn="l" rtl="0">
-              <a:lnSpc>
-                <a:spcPct val="115000"/>
-              </a:lnSpc>
-              <a:spcBef>
-                <a:spcPts val="2100"/>
-              </a:spcBef>
-              <a:spcAft>
-                <a:spcPts val="0"/>
-              </a:spcAft>
-              <a:buClr>
-                <a:srgbClr val="434343"/>
-              </a:buClr>
-              <a:buSzPts val="1900"/>
-              <a:buFont typeface="Arial"/>
-              <a:buChar char="■"/>
-              <a:defRPr sz="1900" b="0" i="0" u="none" strike="noStrike" cap="none">
-                <a:solidFill>
-                  <a:srgbClr val="434343"/>
-                </a:solidFill>
-                <a:latin typeface="Arial"/>
-                <a:ea typeface="Arial"/>
-                <a:cs typeface="Arial"/>
-                <a:sym typeface="Arial"/>
-              </a:defRPr>
-            </a:lvl3pPr>
-            <a:lvl4pPr marL="1828800" marR="0" lvl="3" indent="-349250" algn="l" rtl="0">
-              <a:lnSpc>
-                <a:spcPct val="115000"/>
-              </a:lnSpc>
-              <a:spcBef>
-                <a:spcPts val="2100"/>
-              </a:spcBef>
-              <a:spcAft>
-                <a:spcPts val="0"/>
-              </a:spcAft>
-              <a:buClr>
-                <a:srgbClr val="434343"/>
-              </a:buClr>
-              <a:buSzPts val="1900"/>
-              <a:buFont typeface="Arial"/>
-              <a:buChar char="●"/>
-              <a:defRPr sz="1900" b="0" i="0" u="none" strike="noStrike" cap="none">
-                <a:solidFill>
-                  <a:srgbClr val="434343"/>
-                </a:solidFill>
-                <a:latin typeface="Arial"/>
-                <a:ea typeface="Arial"/>
-                <a:cs typeface="Arial"/>
-                <a:sym typeface="Arial"/>
-              </a:defRPr>
-            </a:lvl4pPr>
-            <a:lvl5pPr marL="2286000" marR="0" lvl="4" indent="-349250" algn="l" rtl="0">
-              <a:lnSpc>
-                <a:spcPct val="115000"/>
-              </a:lnSpc>
-              <a:spcBef>
-                <a:spcPts val="2100"/>
-              </a:spcBef>
-              <a:spcAft>
-                <a:spcPts val="0"/>
-              </a:spcAft>
-              <a:buClr>
-                <a:srgbClr val="434343"/>
-              </a:buClr>
-              <a:buSzPts val="1900"/>
-              <a:buFont typeface="Arial"/>
-              <a:buChar char="○"/>
-              <a:defRPr sz="1900" b="0" i="0" u="none" strike="noStrike" cap="none">
-                <a:solidFill>
-                  <a:srgbClr val="434343"/>
-                </a:solidFill>
-                <a:latin typeface="Arial"/>
-                <a:ea typeface="Arial"/>
-                <a:cs typeface="Arial"/>
-                <a:sym typeface="Arial"/>
-              </a:defRPr>
-            </a:lvl5pPr>
-            <a:lvl6pPr marL="2743200" marR="0" lvl="5" indent="-349250" algn="l" rtl="0">
-              <a:lnSpc>
-                <a:spcPct val="115000"/>
-              </a:lnSpc>
-              <a:spcBef>
-                <a:spcPts val="2100"/>
-              </a:spcBef>
-              <a:spcAft>
-                <a:spcPts val="0"/>
-              </a:spcAft>
-              <a:buClr>
-                <a:srgbClr val="434343"/>
-              </a:buClr>
-              <a:buSzPts val="1900"/>
-              <a:buFont typeface="Arial"/>
-              <a:buChar char="■"/>
-              <a:defRPr sz="1900" b="0" i="0" u="none" strike="noStrike" cap="none">
-                <a:solidFill>
-                  <a:srgbClr val="434343"/>
-                </a:solidFill>
-                <a:latin typeface="Arial"/>
-                <a:ea typeface="Arial"/>
-                <a:cs typeface="Arial"/>
-                <a:sym typeface="Arial"/>
-              </a:defRPr>
-            </a:lvl6pPr>
-            <a:lvl7pPr marL="3200400" marR="0" lvl="6" indent="-349250" algn="l" rtl="0">
-              <a:lnSpc>
-                <a:spcPct val="115000"/>
-              </a:lnSpc>
-              <a:spcBef>
-                <a:spcPts val="2100"/>
-              </a:spcBef>
-              <a:spcAft>
-                <a:spcPts val="0"/>
-              </a:spcAft>
-              <a:buClr>
-                <a:srgbClr val="434343"/>
-              </a:buClr>
-              <a:buSzPts val="1900"/>
-              <a:buFont typeface="Arial"/>
-              <a:buChar char="●"/>
-              <a:defRPr sz="1900" b="0" i="0" u="none" strike="noStrike" cap="none">
-                <a:solidFill>
-                  <a:srgbClr val="434343"/>
-                </a:solidFill>
-                <a:latin typeface="Arial"/>
-                <a:ea typeface="Arial"/>
-                <a:cs typeface="Arial"/>
-                <a:sym typeface="Arial"/>
-              </a:defRPr>
-            </a:lvl7pPr>
-            <a:lvl8pPr marL="3657600" marR="0" lvl="7" indent="-349250" algn="l" rtl="0">
-              <a:lnSpc>
-                <a:spcPct val="115000"/>
-              </a:lnSpc>
-              <a:spcBef>
-                <a:spcPts val="2100"/>
-              </a:spcBef>
-              <a:spcAft>
-                <a:spcPts val="0"/>
-              </a:spcAft>
-              <a:buClr>
-                <a:srgbClr val="434343"/>
-              </a:buClr>
-              <a:buSzPts val="1900"/>
-              <a:buFont typeface="Arial"/>
-              <a:buChar char="○"/>
-              <a:defRPr sz="1900" b="0" i="0" u="none" strike="noStrike" cap="none">
-                <a:solidFill>
-                  <a:srgbClr val="434343"/>
-                </a:solidFill>
-                <a:latin typeface="Arial"/>
-                <a:ea typeface="Arial"/>
-                <a:cs typeface="Arial"/>
-                <a:sym typeface="Arial"/>
-              </a:defRPr>
-            </a:lvl8pPr>
-            <a:lvl9pPr marL="4114800" marR="0" lvl="8" indent="-349250" algn="l" rtl="0">
-              <a:lnSpc>
-                <a:spcPct val="115000"/>
-              </a:lnSpc>
-              <a:spcBef>
-                <a:spcPts val="2100"/>
-              </a:spcBef>
-              <a:spcAft>
-                <a:spcPts val="2100"/>
-              </a:spcAft>
-              <a:buClr>
-                <a:srgbClr val="434343"/>
-              </a:buClr>
-              <a:buSzPts val="1900"/>
-              <a:buFont typeface="Arial"/>
-              <a:buChar char="■"/>
-              <a:defRPr sz="1900" b="0" i="0" u="none" strike="noStrike" cap="none">
-                <a:solidFill>
-                  <a:srgbClr val="434343"/>
-                </a:solidFill>
-                <a:latin typeface="Arial"/>
-                <a:ea typeface="Arial"/>
-                <a:cs typeface="Arial"/>
-                <a:sym typeface="Arial"/>
-              </a:defRPr>
-            </a:lvl9pPr>
-          </a:lstStyle>
-          <a:p>
-            <a:pPr marL="76200" indent="0" algn="ctr">
-              <a:buNone/>
-            </a:pPr>
-            <a:r>
-              <a:rPr lang="en-US" sz="5400" b="1" dirty="0" err="1">
-                <a:solidFill>
-                  <a:srgbClr val="C00000"/>
-                </a:solidFill>
-              </a:rPr>
-              <a:t>slido.com</a:t>
-            </a:r>
-            <a:endParaRPr lang="en-US" sz="5400" b="1" dirty="0">
-              <a:solidFill>
-                <a:srgbClr val="C00000"/>
-              </a:solidFill>
-            </a:endParaRPr>
-          </a:p>
-          <a:p>
-            <a:pPr marL="76200" indent="0" algn="ctr">
-              <a:buNone/>
-            </a:pPr>
-            <a:endParaRPr lang="en-US" sz="5400" b="1" dirty="0">
-              <a:solidFill>
-                <a:srgbClr val="C00000"/>
-              </a:solidFill>
-            </a:endParaRPr>
-          </a:p>
-          <a:p>
-            <a:pPr marL="76200" indent="0" algn="ctr">
-              <a:buNone/>
-            </a:pPr>
-            <a:r>
-              <a:rPr lang="en-US" sz="5400" b="1" dirty="0">
-                <a:solidFill>
-                  <a:srgbClr val="C00000"/>
-                </a:solidFill>
-              </a:rPr>
-              <a:t>#94889</a:t>
-            </a:r>
-          </a:p>
-        </p:txBody>
-      </p:sp>
-    </p:spTree>
-    <p:extLst>
-      <p:ext uri="{BB962C8B-B14F-4D97-AF65-F5344CB8AC3E}">
-        <p14:creationId xmlns:p14="http://schemas.microsoft.com/office/powerpoint/2010/main" val="838504151"/>
-      </p:ext>
-    </p:extLst>
-  </p:cSld>
-  <p:clrMapOvr>
-    <a:masterClrMapping/>
-  </p:clrMapOvr>
-</p:sld>
-</file>
-
-<file path=ppt/slides/slide18.xml><?xml version="1.0" encoding="utf-8"?>
+<file path=ppt/slides/slide16.xml><?xml version="1.0" encoding="utf-8"?>
 <p:sld xmlns:a="http://schemas.openxmlformats.org/drawingml/2006/main" xmlns:r="http://schemas.openxmlformats.org/officeDocument/2006/relationships" xmlns:p="http://schemas.openxmlformats.org/presentationml/2006/main">
   <p:cSld>
     <p:spTree>
@@ -17875,7 +17323,7 @@
 </p:sld>
 </file>
 
-<file path=ppt/slides/slide19.xml><?xml version="1.0" encoding="utf-8"?>
+<file path=ppt/slides/slide17.xml><?xml version="1.0" encoding="utf-8"?>
 <p:sld xmlns:a="http://schemas.openxmlformats.org/drawingml/2006/main" xmlns:r="http://schemas.openxmlformats.org/officeDocument/2006/relationships" xmlns:p="http://schemas.openxmlformats.org/presentationml/2006/main">
   <p:cSld>
     <p:spTree>
@@ -18108,136 +17556,7 @@
 </p:sld>
 </file>
 
-<file path=ppt/slides/slide2.xml><?xml version="1.0" encoding="utf-8"?>
-<p:sld xmlns:a="http://schemas.openxmlformats.org/drawingml/2006/main" xmlns:r="http://schemas.openxmlformats.org/officeDocument/2006/relationships" xmlns:p="http://schemas.openxmlformats.org/presentationml/2006/main">
-  <p:cSld>
-    <p:spTree>
-      <p:nvGrpSpPr>
-        <p:cNvPr id="1" name=""/>
-        <p:cNvGrpSpPr/>
-        <p:nvPr/>
-      </p:nvGrpSpPr>
-      <p:grpSpPr>
-        <a:xfrm>
-          <a:off x="0" y="0"/>
-          <a:ext cx="0" cy="0"/>
-          <a:chOff x="0" y="0"/>
-          <a:chExt cx="0" cy="0"/>
-        </a:xfrm>
-      </p:grpSpPr>
-      <p:sp>
-        <p:nvSpPr>
-          <p:cNvPr id="2" name="Title 1">
-            <a:extLst>
-              <a:ext uri="{FF2B5EF4-FFF2-40B4-BE49-F238E27FC236}">
-                <a16:creationId xmlns:a16="http://schemas.microsoft.com/office/drawing/2014/main" id="{94CF2A94-A63F-6149-AA28-2E35B60E3D3E}"/>
-              </a:ext>
-            </a:extLst>
-          </p:cNvPr>
-          <p:cNvSpPr>
-            <a:spLocks noGrp="1"/>
-          </p:cNvSpPr>
-          <p:nvPr>
-            <p:ph type="title"/>
-          </p:nvPr>
-        </p:nvSpPr>
-        <p:spPr/>
-        <p:txBody>
-          <a:bodyPr/>
-          <a:lstStyle/>
-          <a:p>
-            <a:endParaRPr lang="en-US"/>
-          </a:p>
-        </p:txBody>
-      </p:sp>
-      <p:graphicFrame>
-        <p:nvGraphicFramePr>
-          <p:cNvPr id="3" name="Diagram 2">
-            <a:extLst>
-              <a:ext uri="{FF2B5EF4-FFF2-40B4-BE49-F238E27FC236}">
-                <a16:creationId xmlns:a16="http://schemas.microsoft.com/office/drawing/2014/main" id="{8E902576-68A9-6E48-B0FE-5B1889953DC8}"/>
-              </a:ext>
-            </a:extLst>
-          </p:cNvPr>
-          <p:cNvGraphicFramePr/>
-          <p:nvPr/>
-        </p:nvGraphicFramePr>
-        <p:xfrm>
-          <a:off x="180467" y="0"/>
-          <a:ext cx="11776400" cy="6858000"/>
-        </p:xfrm>
-        <a:graphic>
-          <a:graphicData uri="http://schemas.openxmlformats.org/drawingml/2006/diagram">
-            <dgm:relIds xmlns:dgm="http://schemas.openxmlformats.org/drawingml/2006/diagram" xmlns:r="http://schemas.openxmlformats.org/officeDocument/2006/relationships" r:dm="rId3" r:lo="rId4" r:qs="rId5" r:cs="rId6"/>
-          </a:graphicData>
-        </a:graphic>
-      </p:graphicFrame>
-      <p:sp>
-        <p:nvSpPr>
-          <p:cNvPr id="4" name="Rectangle 3">
-            <a:extLst>
-              <a:ext uri="{FF2B5EF4-FFF2-40B4-BE49-F238E27FC236}">
-                <a16:creationId xmlns:a16="http://schemas.microsoft.com/office/drawing/2014/main" id="{E2C99BF2-C81A-5246-89D3-E49BCDCAD699}"/>
-              </a:ext>
-            </a:extLst>
-          </p:cNvPr>
-          <p:cNvSpPr/>
-          <p:nvPr/>
-        </p:nvSpPr>
-        <p:spPr>
-          <a:xfrm>
-            <a:off x="9553197" y="115748"/>
-            <a:ext cx="2534195" cy="4208008"/>
-          </a:xfrm>
-          <a:prstGeom prst="rect">
-            <a:avLst/>
-          </a:prstGeom>
-          <a:noFill/>
-          <a:ln w="76200">
-            <a:solidFill>
-              <a:srgbClr val="C00000"/>
-            </a:solidFill>
-          </a:ln>
-        </p:spPr>
-        <p:style>
-          <a:lnRef idx="2">
-            <a:schemeClr val="accent1">
-              <a:shade val="50000"/>
-            </a:schemeClr>
-          </a:lnRef>
-          <a:fillRef idx="1">
-            <a:schemeClr val="accent1"/>
-          </a:fillRef>
-          <a:effectRef idx="0">
-            <a:schemeClr val="accent1"/>
-          </a:effectRef>
-          <a:fontRef idx="minor">
-            <a:schemeClr val="lt1"/>
-          </a:fontRef>
-        </p:style>
-        <p:txBody>
-          <a:bodyPr rtlCol="0" anchor="ctr"/>
-          <a:lstStyle/>
-          <a:p>
-            <a:pPr algn="ctr"/>
-            <a:endParaRPr lang="en-US"/>
-          </a:p>
-        </p:txBody>
-      </p:sp>
-    </p:spTree>
-    <p:extLst>
-      <p:ext uri="{BB962C8B-B14F-4D97-AF65-F5344CB8AC3E}">
-        <p14:creationId xmlns:p14="http://schemas.microsoft.com/office/powerpoint/2010/main" val="3141728949"/>
-      </p:ext>
-    </p:extLst>
-  </p:cSld>
-  <p:clrMapOvr>
-    <a:masterClrMapping/>
-  </p:clrMapOvr>
-</p:sld>
-</file>
-
-<file path=ppt/slides/slide20.xml><?xml version="1.0" encoding="utf-8"?>
+<file path=ppt/slides/slide18.xml><?xml version="1.0" encoding="utf-8"?>
 <p:sld xmlns:a="http://schemas.openxmlformats.org/drawingml/2006/main" xmlns:r="http://schemas.openxmlformats.org/officeDocument/2006/relationships" xmlns:p="http://schemas.openxmlformats.org/presentationml/2006/main">
   <p:cSld>
     <p:spTree>
@@ -18949,7 +18268,7 @@
 </p:sld>
 </file>
 
-<file path=ppt/slides/slide21.xml><?xml version="1.0" encoding="utf-8"?>
+<file path=ppt/slides/slide19.xml><?xml version="1.0" encoding="utf-8"?>
 <p:sld xmlns:a="http://schemas.openxmlformats.org/drawingml/2006/main" xmlns:r="http://schemas.openxmlformats.org/officeDocument/2006/relationships" xmlns:p="http://schemas.openxmlformats.org/presentationml/2006/main">
   <p:cSld>
     <p:spTree>
@@ -19257,7 +18576,136 @@
 </p:sld>
 </file>
 
-<file path=ppt/slides/slide22.xml><?xml version="1.0" encoding="utf-8"?>
+<file path=ppt/slides/slide2.xml><?xml version="1.0" encoding="utf-8"?>
+<p:sld xmlns:a="http://schemas.openxmlformats.org/drawingml/2006/main" xmlns:r="http://schemas.openxmlformats.org/officeDocument/2006/relationships" xmlns:p="http://schemas.openxmlformats.org/presentationml/2006/main">
+  <p:cSld>
+    <p:spTree>
+      <p:nvGrpSpPr>
+        <p:cNvPr id="1" name=""/>
+        <p:cNvGrpSpPr/>
+        <p:nvPr/>
+      </p:nvGrpSpPr>
+      <p:grpSpPr>
+        <a:xfrm>
+          <a:off x="0" y="0"/>
+          <a:ext cx="0" cy="0"/>
+          <a:chOff x="0" y="0"/>
+          <a:chExt cx="0" cy="0"/>
+        </a:xfrm>
+      </p:grpSpPr>
+      <p:sp>
+        <p:nvSpPr>
+          <p:cNvPr id="2" name="Title 1">
+            <a:extLst>
+              <a:ext uri="{FF2B5EF4-FFF2-40B4-BE49-F238E27FC236}">
+                <a16:creationId xmlns:a16="http://schemas.microsoft.com/office/drawing/2014/main" id="{94CF2A94-A63F-6149-AA28-2E35B60E3D3E}"/>
+              </a:ext>
+            </a:extLst>
+          </p:cNvPr>
+          <p:cNvSpPr>
+            <a:spLocks noGrp="1"/>
+          </p:cNvSpPr>
+          <p:nvPr>
+            <p:ph type="title"/>
+          </p:nvPr>
+        </p:nvSpPr>
+        <p:spPr/>
+        <p:txBody>
+          <a:bodyPr/>
+          <a:lstStyle/>
+          <a:p>
+            <a:endParaRPr lang="en-US"/>
+          </a:p>
+        </p:txBody>
+      </p:sp>
+      <p:graphicFrame>
+        <p:nvGraphicFramePr>
+          <p:cNvPr id="3" name="Diagram 2">
+            <a:extLst>
+              <a:ext uri="{FF2B5EF4-FFF2-40B4-BE49-F238E27FC236}">
+                <a16:creationId xmlns:a16="http://schemas.microsoft.com/office/drawing/2014/main" id="{8E902576-68A9-6E48-B0FE-5B1889953DC8}"/>
+              </a:ext>
+            </a:extLst>
+          </p:cNvPr>
+          <p:cNvGraphicFramePr/>
+          <p:nvPr/>
+        </p:nvGraphicFramePr>
+        <p:xfrm>
+          <a:off x="180467" y="0"/>
+          <a:ext cx="11776400" cy="6858000"/>
+        </p:xfrm>
+        <a:graphic>
+          <a:graphicData uri="http://schemas.openxmlformats.org/drawingml/2006/diagram">
+            <dgm:relIds xmlns:dgm="http://schemas.openxmlformats.org/drawingml/2006/diagram" xmlns:r="http://schemas.openxmlformats.org/officeDocument/2006/relationships" r:dm="rId3" r:lo="rId4" r:qs="rId5" r:cs="rId6"/>
+          </a:graphicData>
+        </a:graphic>
+      </p:graphicFrame>
+      <p:sp>
+        <p:nvSpPr>
+          <p:cNvPr id="4" name="Rectangle 3">
+            <a:extLst>
+              <a:ext uri="{FF2B5EF4-FFF2-40B4-BE49-F238E27FC236}">
+                <a16:creationId xmlns:a16="http://schemas.microsoft.com/office/drawing/2014/main" id="{E2C99BF2-C81A-5246-89D3-E49BCDCAD699}"/>
+              </a:ext>
+            </a:extLst>
+          </p:cNvPr>
+          <p:cNvSpPr/>
+          <p:nvPr/>
+        </p:nvSpPr>
+        <p:spPr>
+          <a:xfrm>
+            <a:off x="9477338" y="246376"/>
+            <a:ext cx="2534195" cy="1778367"/>
+          </a:xfrm>
+          <a:prstGeom prst="rect">
+            <a:avLst/>
+          </a:prstGeom>
+          <a:noFill/>
+          <a:ln w="76200">
+            <a:solidFill>
+              <a:srgbClr val="C00000"/>
+            </a:solidFill>
+          </a:ln>
+        </p:spPr>
+        <p:style>
+          <a:lnRef idx="2">
+            <a:schemeClr val="accent1">
+              <a:shade val="50000"/>
+            </a:schemeClr>
+          </a:lnRef>
+          <a:fillRef idx="1">
+            <a:schemeClr val="accent1"/>
+          </a:fillRef>
+          <a:effectRef idx="0">
+            <a:schemeClr val="accent1"/>
+          </a:effectRef>
+          <a:fontRef idx="minor">
+            <a:schemeClr val="lt1"/>
+          </a:fontRef>
+        </p:style>
+        <p:txBody>
+          <a:bodyPr rtlCol="0" anchor="ctr"/>
+          <a:lstStyle/>
+          <a:p>
+            <a:pPr algn="ctr"/>
+            <a:endParaRPr lang="en-US"/>
+          </a:p>
+        </p:txBody>
+      </p:sp>
+    </p:spTree>
+    <p:extLst>
+      <p:ext uri="{BB962C8B-B14F-4D97-AF65-F5344CB8AC3E}">
+        <p14:creationId xmlns:p14="http://schemas.microsoft.com/office/powerpoint/2010/main" val="3141728949"/>
+      </p:ext>
+    </p:extLst>
+  </p:cSld>
+  <p:clrMapOvr>
+    <a:masterClrMapping/>
+  </p:clrMapOvr>
+</p:sld>
+</file>
+
+<file path=ppt/slides/slide20.xml><?xml version="1.0" encoding="utf-8"?>
 <p:sld xmlns:a="http://schemas.openxmlformats.org/drawingml/2006/main" xmlns:r="http://schemas.openxmlformats.org/officeDocument/2006/relationships" xmlns:p="http://schemas.openxmlformats.org/presentationml/2006/main">
   <p:cSld>
     <p:spTree>
@@ -19459,7 +18907,7 @@
 </p:sld>
 </file>
 
-<file path=ppt/slides/slide23.xml><?xml version="1.0" encoding="utf-8"?>
+<file path=ppt/slides/slide21.xml><?xml version="1.0" encoding="utf-8"?>
 <p:sld xmlns:a="http://schemas.openxmlformats.org/drawingml/2006/main" xmlns:r="http://schemas.openxmlformats.org/officeDocument/2006/relationships" xmlns:p="http://schemas.openxmlformats.org/presentationml/2006/main">
   <p:cSld>
     <p:spTree>
@@ -19806,7 +19254,7 @@
 </p:sld>
 </file>
 
-<file path=ppt/slides/slide24.xml><?xml version="1.0" encoding="utf-8"?>
+<file path=ppt/slides/slide22.xml><?xml version="1.0" encoding="utf-8"?>
 <p:sld xmlns:a="http://schemas.openxmlformats.org/drawingml/2006/main" xmlns:r="http://schemas.openxmlformats.org/officeDocument/2006/relationships" xmlns:p="http://schemas.openxmlformats.org/presentationml/2006/main">
   <p:cSld>
     <p:spTree>
@@ -20042,7 +19490,7 @@
 </p:sld>
 </file>
 
-<file path=ppt/slides/slide25.xml><?xml version="1.0" encoding="utf-8"?>
+<file path=ppt/slides/slide23.xml><?xml version="1.0" encoding="utf-8"?>
 <p:sld xmlns:a="http://schemas.openxmlformats.org/drawingml/2006/main" xmlns:r="http://schemas.openxmlformats.org/officeDocument/2006/relationships" xmlns:p="http://schemas.openxmlformats.org/presentationml/2006/main">
   <p:cSld>
     <p:spTree>
@@ -20220,7 +19668,7 @@
 </p:sld>
 </file>
 
-<file path=ppt/slides/slide26.xml><?xml version="1.0" encoding="utf-8"?>
+<file path=ppt/slides/slide24.xml><?xml version="1.0" encoding="utf-8"?>
 <p:sld xmlns:a="http://schemas.openxmlformats.org/drawingml/2006/main" xmlns:r="http://schemas.openxmlformats.org/officeDocument/2006/relationships" xmlns:p="http://schemas.openxmlformats.org/presentationml/2006/main">
   <p:cSld>
     <p:spTree>
@@ -20291,23 +19739,10 @@
                 <a:solidFill>
                   <a:srgbClr val="8A0002"/>
                 </a:solidFill>
-                <a:hlinkClick r:id="rId2">
-                  <a:extLst>
-                    <a:ext uri="{A12FA001-AC4F-418D-AE19-62706E023703}">
-                      <ahyp:hlinkClr xmlns:ahyp="http://schemas.microsoft.com/office/drawing/2018/hyperlinkcolor" val="tx"/>
-                    </a:ext>
-                  </a:extLst>
-                </a:hlinkClick>
+                <a:hlinkClick r:id="rId2"/>
               </a:rPr>
-              <a:t>Days between inspection cases in San Jose</a:t>
-            </a:r>
-            <a:br>
-              <a:rPr lang="en-US" dirty="0">
-                <a:solidFill>
-                  <a:srgbClr val="8A0002"/>
-                </a:solidFill>
-              </a:rPr>
-            </a:br>
+              <a:t>https://dssg.github.io/triage_cookbook/configure/features.html</a:t>
+            </a:r>
             <a:endParaRPr lang="en-US" dirty="0">
               <a:solidFill>
                 <a:srgbClr val="8A0002"/>
@@ -20315,50 +19750,6 @@
             </a:endParaRPr>
           </a:p>
           <a:p>
-            <a:r>
-              <a:rPr lang="en-US" dirty="0">
-                <a:solidFill>
-                  <a:srgbClr val="8A0002"/>
-                </a:solidFill>
-                <a:hlinkClick r:id="rId3">
-                  <a:extLst>
-                    <a:ext uri="{A12FA001-AC4F-418D-AE19-62706E023703}">
-                      <ahyp:hlinkClr xmlns:ahyp="http://schemas.microsoft.com/office/drawing/2018/hyperlinkcolor" val="tx"/>
-                    </a:ext>
-                  </a:extLst>
-                </a:hlinkClick>
-              </a:rPr>
-              <a:t>Vaccine History and Categoricals from CSF</a:t>
-            </a:r>
-            <a:br>
-              <a:rPr lang="en-US" dirty="0">
-                <a:solidFill>
-                  <a:srgbClr val="8A0002"/>
-                </a:solidFill>
-              </a:rPr>
-            </a:br>
-            <a:endParaRPr lang="en-US" dirty="0">
-              <a:solidFill>
-                <a:srgbClr val="8A0002"/>
-              </a:solidFill>
-            </a:endParaRPr>
-          </a:p>
-          <a:p>
-            <a:r>
-              <a:rPr lang="en-US" dirty="0">
-                <a:solidFill>
-                  <a:srgbClr val="8A0002"/>
-                </a:solidFill>
-                <a:hlinkClick r:id="rId4">
-                  <a:extLst>
-                    <a:ext uri="{A12FA001-AC4F-418D-AE19-62706E023703}">
-                      <ahyp:hlinkClr xmlns:ahyp="http://schemas.microsoft.com/office/drawing/2018/hyperlinkcolor" val="tx"/>
-                    </a:ext>
-                  </a:extLst>
-                </a:hlinkClick>
-              </a:rPr>
-              <a:t>Days since last event in LA (using collate date)</a:t>
-            </a:r>
             <a:endParaRPr lang="en-US" dirty="0">
               <a:solidFill>
                 <a:srgbClr val="8A0002"/>
@@ -20380,7 +19771,7 @@
 </p:sld>
 </file>
 
-<file path=ppt/slides/slide27.xml><?xml version="1.0" encoding="utf-8"?>
+<file path=ppt/slides/slide25.xml><?xml version="1.0" encoding="utf-8"?>
 <p:sld xmlns:a="http://schemas.openxmlformats.org/drawingml/2006/main" xmlns:r="http://schemas.openxmlformats.org/officeDocument/2006/relationships" xmlns:p="http://schemas.openxmlformats.org/presentationml/2006/main">
   <p:cSld>
     <p:spTree>
@@ -20852,7 +20243,7 @@
 </p:sld>
 </file>
 
-<file path=ppt/slides/slide28.xml><?xml version="1.0" encoding="utf-8"?>
+<file path=ppt/slides/slide26.xml><?xml version="1.0" encoding="utf-8"?>
 <p:sld xmlns:a="http://schemas.openxmlformats.org/drawingml/2006/main" xmlns:r="http://schemas.openxmlformats.org/officeDocument/2006/relationships" xmlns:p="http://schemas.openxmlformats.org/presentationml/2006/main">
   <p:cSld>
     <p:spTree>
@@ -20984,7 +20375,7 @@
 </p:sld>
 </file>
 
-<file path=ppt/slides/slide29.xml><?xml version="1.0" encoding="utf-8"?>
+<file path=ppt/slides/slide27.xml><?xml version="1.0" encoding="utf-8"?>
 <p:sld xmlns:a="http://schemas.openxmlformats.org/drawingml/2006/main" xmlns:r="http://schemas.openxmlformats.org/officeDocument/2006/relationships" xmlns:p="http://schemas.openxmlformats.org/presentationml/2006/main">
   <p:cSld>
     <p:spTree>
@@ -21081,205 +20472,7 @@
 </p:sld>
 </file>
 
-<file path=ppt/slides/slide3.xml><?xml version="1.0" encoding="utf-8"?>
-<p:sld xmlns:a="http://schemas.openxmlformats.org/drawingml/2006/main" xmlns:r="http://schemas.openxmlformats.org/officeDocument/2006/relationships" xmlns:p="http://schemas.openxmlformats.org/presentationml/2006/main">
-  <p:cSld>
-    <p:spTree>
-      <p:nvGrpSpPr>
-        <p:cNvPr id="1" name=""/>
-        <p:cNvGrpSpPr/>
-        <p:nvPr/>
-      </p:nvGrpSpPr>
-      <p:grpSpPr>
-        <a:xfrm>
-          <a:off x="0" y="0"/>
-          <a:ext cx="0" cy="0"/>
-          <a:chOff x="0" y="0"/>
-          <a:chExt cx="0" cy="0"/>
-        </a:xfrm>
-      </p:grpSpPr>
-      <p:sp>
-        <p:nvSpPr>
-          <p:cNvPr id="3" name="Title 2">
-            <a:extLst>
-              <a:ext uri="{FF2B5EF4-FFF2-40B4-BE49-F238E27FC236}">
-                <a16:creationId xmlns:a16="http://schemas.microsoft.com/office/drawing/2014/main" id="{9323871C-7CA8-1448-8FFC-1AE6E1838941}"/>
-              </a:ext>
-            </a:extLst>
-          </p:cNvPr>
-          <p:cNvSpPr>
-            <a:spLocks noGrp="1"/>
-          </p:cNvSpPr>
-          <p:nvPr>
-            <p:ph type="title"/>
-          </p:nvPr>
-        </p:nvSpPr>
-        <p:spPr/>
-        <p:txBody>
-          <a:bodyPr/>
-          <a:lstStyle/>
-          <a:p>
-            <a:r>
-              <a:rPr lang="en-US" dirty="0"/>
-              <a:t>Reminders</a:t>
-            </a:r>
-          </a:p>
-        </p:txBody>
-      </p:sp>
-      <p:sp>
-        <p:nvSpPr>
-          <p:cNvPr id="5" name="Text Placeholder 4">
-            <a:extLst>
-              <a:ext uri="{FF2B5EF4-FFF2-40B4-BE49-F238E27FC236}">
-                <a16:creationId xmlns:a16="http://schemas.microsoft.com/office/drawing/2014/main" id="{F4E0A5F0-1D89-954D-91FB-596CD9E690F2}"/>
-              </a:ext>
-            </a:extLst>
-          </p:cNvPr>
-          <p:cNvSpPr>
-            <a:spLocks noGrp="1"/>
-          </p:cNvSpPr>
-          <p:nvPr>
-            <p:ph type="body" idx="1"/>
-          </p:nvPr>
-        </p:nvSpPr>
-        <p:spPr/>
-        <p:txBody>
-          <a:bodyPr/>
-          <a:lstStyle/>
-          <a:p>
-            <a:pPr marL="76200" indent="0">
-              <a:buNone/>
-            </a:pPr>
-            <a:r>
-              <a:rPr lang="en-US" b="1" dirty="0">
-                <a:solidFill>
-                  <a:schemeClr val="tx1">
-                    <a:lumMod val="75000"/>
-                    <a:lumOff val="25000"/>
-                  </a:schemeClr>
-                </a:solidFill>
-              </a:rPr>
-              <a:t>This week:</a:t>
-            </a:r>
-          </a:p>
-          <a:p>
-            <a:r>
-              <a:rPr lang="en-US" dirty="0">
-                <a:solidFill>
-                  <a:schemeClr val="tx1">
-                    <a:lumMod val="75000"/>
-                    <a:lumOff val="25000"/>
-                  </a:schemeClr>
-                </a:solidFill>
-              </a:rPr>
-              <a:t>Tomorrow: Wednesday Group Check-Ins</a:t>
-            </a:r>
-          </a:p>
-          <a:p>
-            <a:r>
-              <a:rPr lang="en-US" dirty="0">
-                <a:solidFill>
-                  <a:schemeClr val="tx1">
-                    <a:lumMod val="75000"/>
-                    <a:lumOff val="25000"/>
-                  </a:schemeClr>
-                </a:solidFill>
-              </a:rPr>
-              <a:t>Thursday: Triage Q&amp;A + time for group work</a:t>
-            </a:r>
-            <a:endParaRPr lang="en-US" b="1" dirty="0">
-              <a:solidFill>
-                <a:schemeClr val="tx1">
-                  <a:lumMod val="75000"/>
-                  <a:lumOff val="25000"/>
-                </a:schemeClr>
-              </a:solidFill>
-            </a:endParaRPr>
-          </a:p>
-          <a:p>
-            <a:pPr marL="76200" indent="0">
-              <a:buNone/>
-            </a:pPr>
-            <a:endParaRPr lang="en-US" b="1" dirty="0">
-              <a:solidFill>
-                <a:schemeClr val="tx1">
-                  <a:lumMod val="75000"/>
-                  <a:lumOff val="25000"/>
-                </a:schemeClr>
-              </a:solidFill>
-            </a:endParaRPr>
-          </a:p>
-          <a:p>
-            <a:pPr marL="76200" indent="0">
-              <a:buNone/>
-            </a:pPr>
-            <a:r>
-              <a:rPr lang="en-US" b="1" dirty="0">
-                <a:solidFill>
-                  <a:schemeClr val="tx1">
-                    <a:lumMod val="75000"/>
-                    <a:lumOff val="25000"/>
-                  </a:schemeClr>
-                </a:solidFill>
-              </a:rPr>
-              <a:t>Coming up after fall break:</a:t>
-            </a:r>
-          </a:p>
-          <a:p>
-            <a:r>
-              <a:rPr lang="en-US" dirty="0">
-                <a:solidFill>
-                  <a:schemeClr val="tx1">
-                    <a:lumMod val="75000"/>
-                    <a:lumOff val="25000"/>
-                  </a:schemeClr>
-                </a:solidFill>
-              </a:rPr>
-              <a:t>Monday: Project Update 3</a:t>
-            </a:r>
-          </a:p>
-          <a:p>
-            <a:r>
-              <a:rPr lang="en-US" dirty="0">
-                <a:solidFill>
-                  <a:schemeClr val="tx1">
-                    <a:lumMod val="75000"/>
-                    <a:lumOff val="25000"/>
-                  </a:schemeClr>
-                </a:solidFill>
-              </a:rPr>
-              <a:t>Tuesday: Weekly Feedback Form</a:t>
-            </a:r>
-          </a:p>
-          <a:p>
-            <a:r>
-              <a:rPr lang="en-US" dirty="0">
-                <a:solidFill>
-                  <a:schemeClr val="tx1">
-                    <a:lumMod val="75000"/>
-                    <a:lumOff val="25000"/>
-                  </a:schemeClr>
-                </a:solidFill>
-              </a:rPr>
-              <a:t>Tuesday: Building Features in Triage</a:t>
-            </a:r>
-          </a:p>
-        </p:txBody>
-      </p:sp>
-    </p:spTree>
-    <p:extLst>
-      <p:ext uri="{BB962C8B-B14F-4D97-AF65-F5344CB8AC3E}">
-        <p14:creationId xmlns:p14="http://schemas.microsoft.com/office/powerpoint/2010/main" val="186046226"/>
-      </p:ext>
-    </p:extLst>
-  </p:cSld>
-  <p:clrMapOvr>
-    <a:masterClrMapping/>
-  </p:clrMapOvr>
-</p:sld>
-</file>
-
-<file path=ppt/slides/slide30.xml><?xml version="1.0" encoding="utf-8"?>
+<file path=ppt/slides/slide28.xml><?xml version="1.0" encoding="utf-8"?>
 <p:sld xmlns:a="http://schemas.openxmlformats.org/drawingml/2006/main" xmlns:r="http://schemas.openxmlformats.org/officeDocument/2006/relationships" xmlns:p="http://schemas.openxmlformats.org/presentationml/2006/main">
   <p:cSld>
     <p:spTree>
@@ -21571,7 +20764,7 @@
 </p:sld>
 </file>
 
-<file path=ppt/slides/slide31.xml><?xml version="1.0" encoding="utf-8"?>
+<file path=ppt/slides/slide29.xml><?xml version="1.0" encoding="utf-8"?>
 <p:sld xmlns:a="http://schemas.openxmlformats.org/drawingml/2006/main" xmlns:r="http://schemas.openxmlformats.org/officeDocument/2006/relationships" xmlns:p="http://schemas.openxmlformats.org/presentationml/2006/main">
   <p:cSld>
     <p:spTree>
@@ -21707,7 +20900,205 @@
 </p:sld>
 </file>
 
-<file path=ppt/slides/slide32.xml><?xml version="1.0" encoding="utf-8"?>
+<file path=ppt/slides/slide3.xml><?xml version="1.0" encoding="utf-8"?>
+<p:sld xmlns:a="http://schemas.openxmlformats.org/drawingml/2006/main" xmlns:r="http://schemas.openxmlformats.org/officeDocument/2006/relationships" xmlns:p="http://schemas.openxmlformats.org/presentationml/2006/main">
+  <p:cSld>
+    <p:spTree>
+      <p:nvGrpSpPr>
+        <p:cNvPr id="1" name=""/>
+        <p:cNvGrpSpPr/>
+        <p:nvPr/>
+      </p:nvGrpSpPr>
+      <p:grpSpPr>
+        <a:xfrm>
+          <a:off x="0" y="0"/>
+          <a:ext cx="0" cy="0"/>
+          <a:chOff x="0" y="0"/>
+          <a:chExt cx="0" cy="0"/>
+        </a:xfrm>
+      </p:grpSpPr>
+      <p:sp>
+        <p:nvSpPr>
+          <p:cNvPr id="3" name="Title 2">
+            <a:extLst>
+              <a:ext uri="{FF2B5EF4-FFF2-40B4-BE49-F238E27FC236}">
+                <a16:creationId xmlns:a16="http://schemas.microsoft.com/office/drawing/2014/main" id="{9323871C-7CA8-1448-8FFC-1AE6E1838941}"/>
+              </a:ext>
+            </a:extLst>
+          </p:cNvPr>
+          <p:cNvSpPr>
+            <a:spLocks noGrp="1"/>
+          </p:cNvSpPr>
+          <p:nvPr>
+            <p:ph type="title"/>
+          </p:nvPr>
+        </p:nvSpPr>
+        <p:spPr/>
+        <p:txBody>
+          <a:bodyPr/>
+          <a:lstStyle/>
+          <a:p>
+            <a:r>
+              <a:rPr lang="en-US" dirty="0"/>
+              <a:t>Reminders</a:t>
+            </a:r>
+          </a:p>
+        </p:txBody>
+      </p:sp>
+      <p:sp>
+        <p:nvSpPr>
+          <p:cNvPr id="5" name="Text Placeholder 4">
+            <a:extLst>
+              <a:ext uri="{FF2B5EF4-FFF2-40B4-BE49-F238E27FC236}">
+                <a16:creationId xmlns:a16="http://schemas.microsoft.com/office/drawing/2014/main" id="{F4E0A5F0-1D89-954D-91FB-596CD9E690F2}"/>
+              </a:ext>
+            </a:extLst>
+          </p:cNvPr>
+          <p:cNvSpPr>
+            <a:spLocks noGrp="1"/>
+          </p:cNvSpPr>
+          <p:nvPr>
+            <p:ph type="body" idx="1"/>
+          </p:nvPr>
+        </p:nvSpPr>
+        <p:spPr/>
+        <p:txBody>
+          <a:bodyPr/>
+          <a:lstStyle/>
+          <a:p>
+            <a:pPr marL="76200" indent="0">
+              <a:buNone/>
+            </a:pPr>
+            <a:r>
+              <a:rPr lang="en-US" b="1" dirty="0">
+                <a:solidFill>
+                  <a:schemeClr val="tx1">
+                    <a:lumMod val="75000"/>
+                    <a:lumOff val="25000"/>
+                  </a:schemeClr>
+                </a:solidFill>
+              </a:rPr>
+              <a:t>This week:</a:t>
+            </a:r>
+          </a:p>
+          <a:p>
+            <a:r>
+              <a:rPr lang="en-US" dirty="0">
+                <a:solidFill>
+                  <a:schemeClr val="tx1">
+                    <a:lumMod val="75000"/>
+                    <a:lumOff val="25000"/>
+                  </a:schemeClr>
+                </a:solidFill>
+              </a:rPr>
+              <a:t>Tomorrow: Group Check-Ins</a:t>
+            </a:r>
+          </a:p>
+          <a:p>
+            <a:r>
+              <a:rPr lang="en-US" dirty="0">
+                <a:solidFill>
+                  <a:schemeClr val="tx1">
+                    <a:lumMod val="75000"/>
+                    <a:lumOff val="25000"/>
+                  </a:schemeClr>
+                </a:solidFill>
+              </a:rPr>
+              <a:t>Thursday: Triage Q&amp;A + time for group work</a:t>
+            </a:r>
+            <a:endParaRPr lang="en-US" b="1" dirty="0">
+              <a:solidFill>
+                <a:schemeClr val="tx1">
+                  <a:lumMod val="75000"/>
+                  <a:lumOff val="25000"/>
+                </a:schemeClr>
+              </a:solidFill>
+            </a:endParaRPr>
+          </a:p>
+          <a:p>
+            <a:pPr marL="76200" indent="0">
+              <a:buNone/>
+            </a:pPr>
+            <a:endParaRPr lang="en-US" b="1" dirty="0">
+              <a:solidFill>
+                <a:schemeClr val="tx1">
+                  <a:lumMod val="75000"/>
+                  <a:lumOff val="25000"/>
+                </a:schemeClr>
+              </a:solidFill>
+            </a:endParaRPr>
+          </a:p>
+          <a:p>
+            <a:pPr marL="76200" indent="0">
+              <a:buNone/>
+            </a:pPr>
+            <a:r>
+              <a:rPr lang="en-US" b="1" dirty="0">
+                <a:solidFill>
+                  <a:schemeClr val="tx1">
+                    <a:lumMod val="75000"/>
+                    <a:lumOff val="25000"/>
+                  </a:schemeClr>
+                </a:solidFill>
+              </a:rPr>
+              <a:t>Coming up after fall break:</a:t>
+            </a:r>
+          </a:p>
+          <a:p>
+            <a:r>
+              <a:rPr lang="en-US" dirty="0">
+                <a:solidFill>
+                  <a:schemeClr val="tx1">
+                    <a:lumMod val="75000"/>
+                    <a:lumOff val="25000"/>
+                  </a:schemeClr>
+                </a:solidFill>
+              </a:rPr>
+              <a:t>Monday: Project Update 3</a:t>
+            </a:r>
+          </a:p>
+          <a:p>
+            <a:r>
+              <a:rPr lang="en-US" dirty="0">
+                <a:solidFill>
+                  <a:schemeClr val="tx1">
+                    <a:lumMod val="75000"/>
+                    <a:lumOff val="25000"/>
+                  </a:schemeClr>
+                </a:solidFill>
+              </a:rPr>
+              <a:t>Tuesday: Weekly Feedback Form</a:t>
+            </a:r>
+          </a:p>
+          <a:p>
+            <a:r>
+              <a:rPr lang="en-US" dirty="0">
+                <a:solidFill>
+                  <a:schemeClr val="tx1">
+                    <a:lumMod val="75000"/>
+                    <a:lumOff val="25000"/>
+                  </a:schemeClr>
+                </a:solidFill>
+              </a:rPr>
+              <a:t>Tuesday: Building Features in Triage</a:t>
+            </a:r>
+          </a:p>
+        </p:txBody>
+      </p:sp>
+    </p:spTree>
+    <p:extLst>
+      <p:ext uri="{BB962C8B-B14F-4D97-AF65-F5344CB8AC3E}">
+        <p14:creationId xmlns:p14="http://schemas.microsoft.com/office/powerpoint/2010/main" val="186046226"/>
+      </p:ext>
+    </p:extLst>
+  </p:cSld>
+  <p:clrMapOvr>
+    <a:masterClrMapping/>
+  </p:clrMapOvr>
+</p:sld>
+</file>
+
+<file path=ppt/slides/slide30.xml><?xml version="1.0" encoding="utf-8"?>
 <p:sld xmlns:a="http://schemas.openxmlformats.org/drawingml/2006/main" xmlns:r="http://schemas.openxmlformats.org/officeDocument/2006/relationships" xmlns:p="http://schemas.openxmlformats.org/presentationml/2006/main">
   <p:cSld>
     <p:spTree>
@@ -21887,7 +21278,7 @@
 </p:sld>
 </file>
 
-<file path=ppt/slides/slide33.xml><?xml version="1.0" encoding="utf-8"?>
+<file path=ppt/slides/slide31.xml><?xml version="1.0" encoding="utf-8"?>
 <p:sld xmlns:a="http://schemas.openxmlformats.org/drawingml/2006/main" xmlns:r="http://schemas.openxmlformats.org/officeDocument/2006/relationships" xmlns:p="http://schemas.openxmlformats.org/presentationml/2006/main">
   <p:cSld>
     <p:spTree>
@@ -22031,6 +21422,207 @@
     <p:extLst>
       <p:ext uri="{BB962C8B-B14F-4D97-AF65-F5344CB8AC3E}">
         <p14:creationId xmlns:p14="http://schemas.microsoft.com/office/powerpoint/2010/main" val="3227679789"/>
+      </p:ext>
+    </p:extLst>
+  </p:cSld>
+  <p:clrMapOvr>
+    <a:masterClrMapping/>
+  </p:clrMapOvr>
+</p:sld>
+</file>
+
+<file path=ppt/slides/slide32.xml><?xml version="1.0" encoding="utf-8"?>
+<p:sld xmlns:a="http://schemas.openxmlformats.org/drawingml/2006/main" xmlns:r="http://schemas.openxmlformats.org/officeDocument/2006/relationships" xmlns:p="http://schemas.openxmlformats.org/presentationml/2006/main">
+  <p:cSld>
+    <p:spTree>
+      <p:nvGrpSpPr>
+        <p:cNvPr id="1" name=""/>
+        <p:cNvGrpSpPr/>
+        <p:nvPr/>
+      </p:nvGrpSpPr>
+      <p:grpSpPr>
+        <a:xfrm>
+          <a:off x="0" y="0"/>
+          <a:ext cx="0" cy="0"/>
+          <a:chOff x="0" y="0"/>
+          <a:chExt cx="0" cy="0"/>
+        </a:xfrm>
+      </p:grpSpPr>
+      <p:sp>
+        <p:nvSpPr>
+          <p:cNvPr id="3" name="Title 2"/>
+          <p:cNvSpPr>
+            <a:spLocks noGrp="1"/>
+          </p:cNvSpPr>
+          <p:nvPr>
+            <p:ph type="title"/>
+          </p:nvPr>
+        </p:nvSpPr>
+        <p:spPr/>
+        <p:txBody>
+          <a:bodyPr/>
+          <a:lstStyle/>
+          <a:p>
+            <a:r>
+              <a:rPr lang="en-US" dirty="0"/>
+              <a:t>Feature Interactions</a:t>
+            </a:r>
+          </a:p>
+        </p:txBody>
+      </p:sp>
+      <p:sp>
+        <p:nvSpPr>
+          <p:cNvPr id="2" name="Content Placeholder 1"/>
+          <p:cNvSpPr>
+            <a:spLocks noGrp="1"/>
+          </p:cNvSpPr>
+          <p:nvPr>
+            <p:ph type="body" idx="1"/>
+          </p:nvPr>
+        </p:nvSpPr>
+        <p:spPr/>
+        <p:txBody>
+          <a:bodyPr/>
+          <a:lstStyle/>
+          <a:p>
+            <a:r>
+              <a:rPr lang="en-US" dirty="0"/>
+              <a:t>Generate features for combination of features</a:t>
+            </a:r>
+          </a:p>
+          <a:p>
+            <a:pPr lvl="1"/>
+            <a:r>
+              <a:rPr lang="en-US" dirty="0"/>
+              <a:t>Age x gender</a:t>
+            </a:r>
+          </a:p>
+          <a:p>
+            <a:pPr lvl="1"/>
+            <a:endParaRPr lang="en-US" dirty="0"/>
+          </a:p>
+          <a:p>
+            <a:r>
+              <a:rPr lang="en-US" dirty="0"/>
+              <a:t>Allows you to use linear models but still model non linear relationships</a:t>
+            </a:r>
+          </a:p>
+          <a:p>
+            <a:endParaRPr lang="en-US" dirty="0"/>
+          </a:p>
+          <a:p>
+            <a:r>
+              <a:rPr lang="en-US" dirty="0"/>
+              <a:t>Random Forests are one way of discovering useful interactions</a:t>
+            </a:r>
+          </a:p>
+        </p:txBody>
+      </p:sp>
+    </p:spTree>
+    <p:extLst>
+      <p:ext uri="{BB962C8B-B14F-4D97-AF65-F5344CB8AC3E}">
+        <p14:creationId xmlns:p14="http://schemas.microsoft.com/office/powerpoint/2010/main" val="2835794600"/>
+      </p:ext>
+    </p:extLst>
+  </p:cSld>
+  <p:clrMapOvr>
+    <a:masterClrMapping/>
+  </p:clrMapOvr>
+</p:sld>
+</file>
+
+<file path=ppt/slides/slide33.xml><?xml version="1.0" encoding="utf-8"?>
+<p:sld xmlns:a="http://schemas.openxmlformats.org/drawingml/2006/main" xmlns:r="http://schemas.openxmlformats.org/officeDocument/2006/relationships" xmlns:p="http://schemas.openxmlformats.org/presentationml/2006/main">
+  <p:cSld>
+    <p:spTree>
+      <p:nvGrpSpPr>
+        <p:cNvPr id="1" name=""/>
+        <p:cNvGrpSpPr/>
+        <p:nvPr/>
+      </p:nvGrpSpPr>
+      <p:grpSpPr>
+        <a:xfrm>
+          <a:off x="0" y="0"/>
+          <a:ext cx="0" cy="0"/>
+          <a:chOff x="0" y="0"/>
+          <a:chExt cx="0" cy="0"/>
+        </a:xfrm>
+      </p:grpSpPr>
+      <p:sp>
+        <p:nvSpPr>
+          <p:cNvPr id="3" name="Title 2"/>
+          <p:cNvSpPr>
+            <a:spLocks noGrp="1"/>
+          </p:cNvSpPr>
+          <p:nvPr>
+            <p:ph type="title"/>
+          </p:nvPr>
+        </p:nvSpPr>
+        <p:spPr>
+          <a:xfrm>
+            <a:off x="180821" y="293023"/>
+            <a:ext cx="11360700" cy="763500"/>
+          </a:xfrm>
+        </p:spPr>
+        <p:txBody>
+          <a:bodyPr/>
+          <a:lstStyle/>
+          <a:p>
+            <a:r>
+              <a:rPr lang="en-US" dirty="0"/>
+              <a:t>Features are also model-dependent</a:t>
+            </a:r>
+          </a:p>
+        </p:txBody>
+      </p:sp>
+      <p:sp>
+        <p:nvSpPr>
+          <p:cNvPr id="2" name="Content Placeholder 1"/>
+          <p:cNvSpPr>
+            <a:spLocks noGrp="1"/>
+          </p:cNvSpPr>
+          <p:nvPr>
+            <p:ph type="body" idx="1"/>
+          </p:nvPr>
+        </p:nvSpPr>
+        <p:spPr/>
+        <p:txBody>
+          <a:bodyPr/>
+          <a:lstStyle/>
+          <a:p>
+            <a:endParaRPr lang="en-US" dirty="0"/>
+          </a:p>
+          <a:p>
+            <a:pPr marL="76200" indent="0">
+              <a:buNone/>
+            </a:pPr>
+            <a:endParaRPr lang="en-US" dirty="0"/>
+          </a:p>
+          <a:p>
+            <a:r>
+              <a:rPr lang="en-US" dirty="0"/>
+              <a:t>Linear models may need … ?</a:t>
+            </a:r>
+            <a:br>
+              <a:rPr lang="en-US" dirty="0"/>
+            </a:br>
+            <a:endParaRPr lang="en-US" dirty="0"/>
+          </a:p>
+          <a:p>
+            <a:r>
+              <a:rPr lang="en-US" dirty="0"/>
+              <a:t>Non-linear models may need …?</a:t>
+            </a:r>
+          </a:p>
+          <a:p>
+            <a:endParaRPr lang="en-US" dirty="0"/>
+          </a:p>
+        </p:txBody>
+      </p:sp>
+    </p:spTree>
+    <p:extLst>
+      <p:ext uri="{BB962C8B-B14F-4D97-AF65-F5344CB8AC3E}">
+        <p14:creationId xmlns:p14="http://schemas.microsoft.com/office/powerpoint/2010/main" val="466559840"/>
       </p:ext>
     </p:extLst>
   </p:cSld>
@@ -22074,7 +21666,7 @@
           <a:p>
             <a:r>
               <a:rPr lang="en-US" dirty="0"/>
-              <a:t>Feature Interactions</a:t>
+              <a:t>Missing Values</a:t>
             </a:r>
           </a:p>
         </p:txBody>
@@ -22096,14 +21688,28 @@
           <a:p>
             <a:r>
               <a:rPr lang="en-US" dirty="0"/>
-              <a:t>Generate features for combination of features</a:t>
+              <a:t>Impute (Fill in) missing values based on why you think they may be missing and what you want the model to do with those missing values</a:t>
             </a:r>
           </a:p>
           <a:p>
             <a:pPr lvl="1"/>
             <a:r>
               <a:rPr lang="en-US" dirty="0"/>
-              <a:t>Age x gender</a:t>
+              <a:t>Missing Completely at Random</a:t>
+            </a:r>
+          </a:p>
+          <a:p>
+            <a:pPr lvl="1"/>
+            <a:r>
+              <a:rPr lang="en-US" dirty="0"/>
+              <a:t>Missing at Random</a:t>
+            </a:r>
+          </a:p>
+          <a:p>
+            <a:pPr lvl="1"/>
+            <a:r>
+              <a:rPr lang="en-US" dirty="0"/>
+              <a:t>Missing Not at Random</a:t>
             </a:r>
           </a:p>
           <a:p>
@@ -22113,16 +21719,15 @@
           <a:p>
             <a:r>
               <a:rPr lang="en-US" dirty="0"/>
-              <a:t>Allows you to use linear models but still model non linear relationships</a:t>
-            </a:r>
-          </a:p>
-          <a:p>
-            <a:endParaRPr lang="en-US" dirty="0"/>
-          </a:p>
-          <a:p>
+              <a:t>Typically, also add binary feature (dummy) for missing vs not missing in case “</a:t>
+            </a:r>
+            <a:r>
+              <a:rPr lang="en-US" dirty="0" err="1"/>
+              <a:t>missingness</a:t>
+            </a:r>
             <a:r>
               <a:rPr lang="en-US" dirty="0"/>
-              <a:t>Random Forests are one way of discovering useful interactions</a:t>
+              <a:t>” is predictive of the outcome</a:t>
             </a:r>
           </a:p>
         </p:txBody>
@@ -22130,7 +21735,7 @@
     </p:spTree>
     <p:extLst>
       <p:ext uri="{BB962C8B-B14F-4D97-AF65-F5344CB8AC3E}">
-        <p14:creationId xmlns:p14="http://schemas.microsoft.com/office/powerpoint/2010/main" val="2835794600"/>
+        <p14:creationId xmlns:p14="http://schemas.microsoft.com/office/powerpoint/2010/main" val="3357099955"/>
       </p:ext>
     </p:extLst>
   </p:cSld>
@@ -22167,19 +21772,14 @@
             <p:ph type="title"/>
           </p:nvPr>
         </p:nvSpPr>
-        <p:spPr>
-          <a:xfrm>
-            <a:off x="180821" y="293023"/>
-            <a:ext cx="11360700" cy="763500"/>
-          </a:xfrm>
-        </p:spPr>
+        <p:spPr/>
         <p:txBody>
           <a:bodyPr/>
           <a:lstStyle/>
           <a:p>
             <a:r>
               <a:rPr lang="en-US" dirty="0"/>
-              <a:t>Features are also model-dependent</a:t>
+              <a:t>Imputing Missing Values: Some Options</a:t>
             </a:r>
           </a:p>
         </p:txBody>
@@ -22194,23 +21794,28 @@
             <p:ph type="body" idx="1"/>
           </p:nvPr>
         </p:nvSpPr>
-        <p:spPr/>
+        <p:spPr>
+          <a:xfrm>
+            <a:off x="415600" y="1601179"/>
+            <a:ext cx="11360700" cy="4555200"/>
+          </a:xfrm>
+        </p:spPr>
         <p:txBody>
           <a:bodyPr/>
           <a:lstStyle/>
           <a:p>
+            <a:r>
+              <a:rPr lang="en-US" dirty="0"/>
+              <a:t>Nothing?</a:t>
+            </a:r>
+          </a:p>
+          <a:p>
             <a:endParaRPr lang="en-US" dirty="0"/>
           </a:p>
           <a:p>
-            <a:pPr marL="76200" indent="0">
-              <a:buNone/>
-            </a:pPr>
-            <a:endParaRPr lang="en-US" dirty="0"/>
-          </a:p>
-          <a:p>
             <a:r>
               <a:rPr lang="en-US" dirty="0"/>
-              <a:t>Linear models may need … ?</a:t>
+              <a:t>Central Tendency: Mean / Median / Mode</a:t>
             </a:r>
             <a:br>
               <a:rPr lang="en-US" dirty="0"/>
@@ -22220,10 +21825,49 @@
           <a:p>
             <a:r>
               <a:rPr lang="en-US" dirty="0"/>
-              <a:t>Non-linear models may need …?</a:t>
-            </a:r>
-          </a:p>
-          <a:p>
+              <a:t>ML methods that handle missing data (e.g., </a:t>
+            </a:r>
+            <a:r>
+              <a:rPr lang="en-US" dirty="0" err="1"/>
+              <a:t>xgboost</a:t>
+            </a:r>
+            <a:r>
+              <a:rPr lang="en-US" dirty="0"/>
+              <a:t>)</a:t>
+            </a:r>
+          </a:p>
+          <a:p>
+            <a:endParaRPr lang="en-US" dirty="0"/>
+          </a:p>
+          <a:p>
+            <a:r>
+              <a:rPr lang="en-US" dirty="0"/>
+              <a:t>Others</a:t>
+            </a:r>
+          </a:p>
+          <a:p>
+            <a:pPr lvl="1"/>
+            <a:r>
+              <a:rPr lang="en-US" dirty="0"/>
+              <a:t>Regression</a:t>
+            </a:r>
+          </a:p>
+          <a:p>
+            <a:pPr lvl="1"/>
+            <a:r>
+              <a:rPr lang="en-US" dirty="0"/>
+              <a:t>k-Nearest Neighbor</a:t>
+            </a:r>
+          </a:p>
+          <a:p>
+            <a:pPr lvl="1"/>
+            <a:r>
+              <a:rPr lang="en-US" dirty="0"/>
+              <a:t>Multiple Imputation</a:t>
+            </a:r>
+            <a:br>
+              <a:rPr lang="en-US" dirty="0"/>
+            </a:br>
             <a:endParaRPr lang="en-US" dirty="0"/>
           </a:p>
         </p:txBody>
@@ -22231,7 +21875,7 @@
     </p:spTree>
     <p:extLst>
       <p:ext uri="{BB962C8B-B14F-4D97-AF65-F5344CB8AC3E}">
-        <p14:creationId xmlns:p14="http://schemas.microsoft.com/office/powerpoint/2010/main" val="466559840"/>
+        <p14:creationId xmlns:p14="http://schemas.microsoft.com/office/powerpoint/2010/main" val="1168414506"/>
       </p:ext>
     </p:extLst>
   </p:cSld>
@@ -22275,7 +21919,7 @@
           <a:p>
             <a:r>
               <a:rPr lang="en-US" dirty="0"/>
-              <a:t>Missing Values</a:t>
+              <a:t>Imputing – Central Tendency</a:t>
             </a:r>
           </a:p>
         </p:txBody>
@@ -22297,46 +21941,37 @@
           <a:p>
             <a:r>
               <a:rPr lang="en-US" dirty="0"/>
-              <a:t>Impute (Fill in) missing values based on why you think they may be missing and what you want the model to do with those missing values</a:t>
-            </a:r>
-          </a:p>
-          <a:p>
-            <a:pPr lvl="1"/>
-            <a:r>
+              <a:t>Simple to calculate and computationally fast</a:t>
+            </a:r>
+            <a:br>
               <a:rPr lang="en-US" dirty="0"/>
-              <a:t>Missing Completely at Random</a:t>
-            </a:r>
-          </a:p>
-          <a:p>
-            <a:pPr lvl="1"/>
+            </a:br>
+            <a:endParaRPr lang="en-US" dirty="0"/>
+          </a:p>
+          <a:p>
             <a:r>
               <a:rPr lang="en-US" dirty="0"/>
-              <a:t>Missing at Random</a:t>
-            </a:r>
-          </a:p>
-          <a:p>
-            <a:pPr lvl="1"/>
-            <a:r>
+              <a:t>Often a reasonable starting point</a:t>
+            </a:r>
+            <a:br>
               <a:rPr lang="en-US" dirty="0"/>
-              <a:t>Missing Not at Random</a:t>
-            </a:r>
-          </a:p>
-          <a:p>
-            <a:pPr lvl="1"/>
+            </a:br>
             <a:endParaRPr lang="en-US" dirty="0"/>
           </a:p>
           <a:p>
             <a:r>
               <a:rPr lang="en-US" dirty="0"/>
-              <a:t>Typically, also add binary feature (dummy) for missing vs not missing in case “</a:t>
-            </a:r>
-            <a:r>
-              <a:rPr lang="en-US" dirty="0" err="1"/>
-              <a:t>missingness</a:t>
-            </a:r>
-            <a:r>
+              <a:t>May be able to capture more nuance by using other, correlated data to help fill in missing values</a:t>
+            </a:r>
+            <a:br>
               <a:rPr lang="en-US" dirty="0"/>
-              <a:t>” is predictive of the outcome</a:t>
+            </a:br>
+            <a:endParaRPr lang="en-US" dirty="0"/>
+          </a:p>
+          <a:p>
+            <a:r>
+              <a:rPr lang="en-US" dirty="0"/>
+              <a:t>Under-represents variance/covariance of data</a:t>
             </a:r>
           </a:p>
         </p:txBody>
@@ -22344,13 +21979,91 @@
     </p:spTree>
     <p:extLst>
       <p:ext uri="{BB962C8B-B14F-4D97-AF65-F5344CB8AC3E}">
-        <p14:creationId xmlns:p14="http://schemas.microsoft.com/office/powerpoint/2010/main" val="3357099955"/>
+        <p14:creationId xmlns:p14="http://schemas.microsoft.com/office/powerpoint/2010/main" val="2396215195"/>
       </p:ext>
     </p:extLst>
   </p:cSld>
   <p:clrMapOvr>
     <a:masterClrMapping/>
   </p:clrMapOvr>
+  <p:timing>
+    <p:tnLst>
+      <p:par>
+        <p:cTn id="1" dur="indefinite" restart="never" nodeType="tmRoot">
+          <p:childTnLst>
+            <p:seq concurrent="1" nextAc="seek">
+              <p:cTn id="2" dur="indefinite" nodeType="mainSeq">
+                <p:childTnLst>
+                  <p:par>
+                    <p:cTn id="3" fill="hold">
+                      <p:stCondLst>
+                        <p:cond delay="indefinite"/>
+                      </p:stCondLst>
+                      <p:childTnLst>
+                        <p:par>
+                          <p:cTn id="4" fill="hold">
+                            <p:stCondLst>
+                              <p:cond delay="0"/>
+                            </p:stCondLst>
+                            <p:childTnLst>
+                              <p:par>
+                                <p:cTn id="5" presetID="1" presetClass="entr" presetSubtype="0" fill="hold" grpId="0" nodeType="clickEffect">
+                                  <p:stCondLst>
+                                    <p:cond delay="0"/>
+                                  </p:stCondLst>
+                                  <p:childTnLst>
+                                    <p:set>
+                                      <p:cBhvr>
+                                        <p:cTn id="6" dur="1" fill="hold">
+                                          <p:stCondLst>
+                                            <p:cond delay="0"/>
+                                          </p:stCondLst>
+                                        </p:cTn>
+                                        <p:tgtEl>
+                                          <p:spTgt spid="2"/>
+                                        </p:tgtEl>
+                                        <p:attrNameLst>
+                                          <p:attrName>style.visibility</p:attrName>
+                                        </p:attrNameLst>
+                                      </p:cBhvr>
+                                      <p:to>
+                                        <p:strVal val="visible"/>
+                                      </p:to>
+                                    </p:set>
+                                  </p:childTnLst>
+                                </p:cTn>
+                              </p:par>
+                            </p:childTnLst>
+                          </p:cTn>
+                        </p:par>
+                      </p:childTnLst>
+                    </p:cTn>
+                  </p:par>
+                </p:childTnLst>
+              </p:cTn>
+              <p:prevCondLst>
+                <p:cond evt="onPrev" delay="0">
+                  <p:tgtEl>
+                    <p:sldTgt/>
+                  </p:tgtEl>
+                </p:cond>
+              </p:prevCondLst>
+              <p:nextCondLst>
+                <p:cond evt="onNext" delay="0">
+                  <p:tgtEl>
+                    <p:sldTgt/>
+                  </p:tgtEl>
+                </p:cond>
+              </p:nextCondLst>
+            </p:seq>
+          </p:childTnLst>
+        </p:cTn>
+      </p:par>
+    </p:tnLst>
+    <p:bldLst>
+      <p:bldP spid="2" grpId="0"/>
+    </p:bldLst>
+  </p:timing>
 </p:sld>
 </file>
 
@@ -22388,7 +22101,7 @@
           <a:p>
             <a:r>
               <a:rPr lang="en-US" dirty="0"/>
-              <a:t>Imputing Missing Values: Some Options</a:t>
+              <a:t>Imputing – ML Methods with Missing Data Handling</a:t>
             </a:r>
           </a:p>
         </p:txBody>
@@ -22403,28 +22116,22 @@
             <p:ph type="body" idx="1"/>
           </p:nvPr>
         </p:nvSpPr>
-        <p:spPr>
-          <a:xfrm>
-            <a:off x="415600" y="1601179"/>
-            <a:ext cx="11360700" cy="4555200"/>
-          </a:xfrm>
-        </p:spPr>
+        <p:spPr/>
         <p:txBody>
           <a:bodyPr/>
           <a:lstStyle/>
           <a:p>
             <a:r>
               <a:rPr lang="en-US" dirty="0"/>
-              <a:t>Nothing?</a:t>
-            </a:r>
-          </a:p>
-          <a:p>
-            <a:endParaRPr lang="en-US" dirty="0"/>
-          </a:p>
-          <a:p>
+              <a:t>Some models have built-in handling of missing data, such as </a:t>
+            </a:r>
+            <a:r>
+              <a:rPr lang="en-US" dirty="0" err="1"/>
+              <a:t>xgboost</a:t>
+            </a:r>
             <a:r>
               <a:rPr lang="en-US" dirty="0"/>
-              <a:t>Central Tendency: Mean / Median / Mode</a:t>
+              <a:t> (which decides which direction to send missing values at each split)</a:t>
             </a:r>
             <a:br>
               <a:rPr lang="en-US" dirty="0"/>
@@ -22434,63 +22141,109 @@
           <a:p>
             <a:r>
               <a:rPr lang="en-US" dirty="0"/>
-              <a:t>ML methods that handle missing data (e.g., </a:t>
-            </a:r>
-            <a:r>
-              <a:rPr lang="en-US" dirty="0" err="1"/>
-              <a:t>xgboost</a:t>
-            </a:r>
-            <a:r>
-              <a:rPr lang="en-US" dirty="0"/>
-              <a:t>)</a:t>
-            </a:r>
-          </a:p>
-          <a:p>
-            <a:endParaRPr lang="en-US" dirty="0"/>
-          </a:p>
-          <a:p>
-            <a:r>
-              <a:rPr lang="en-US" dirty="0"/>
-              <a:t>Others</a:t>
-            </a:r>
-          </a:p>
-          <a:p>
-            <a:pPr lvl="1"/>
-            <a:r>
-              <a:rPr lang="en-US" dirty="0"/>
-              <a:t>Regression</a:t>
-            </a:r>
-          </a:p>
-          <a:p>
-            <a:pPr lvl="1"/>
-            <a:r>
-              <a:rPr lang="en-US" dirty="0"/>
-              <a:t>k-Nearest Neighbor</a:t>
-            </a:r>
-          </a:p>
-          <a:p>
-            <a:pPr lvl="1"/>
-            <a:r>
-              <a:rPr lang="en-US" dirty="0"/>
-              <a:t>Multiple Imputation</a:t>
+              <a:t>May not be the best modeling method for your problem, don’t want to be locked into certain type of model</a:t>
             </a:r>
             <a:br>
               <a:rPr lang="en-US" dirty="0"/>
             </a:br>
             <a:endParaRPr lang="en-US" dirty="0"/>
+          </a:p>
+          <a:p>
+            <a:r>
+              <a:rPr lang="en-US" dirty="0"/>
+              <a:t>Nevertheless, worth exploring performance of other imputation methods even when using these models as well</a:t>
+            </a:r>
           </a:p>
         </p:txBody>
       </p:sp>
     </p:spTree>
     <p:extLst>
       <p:ext uri="{BB962C8B-B14F-4D97-AF65-F5344CB8AC3E}">
-        <p14:creationId xmlns:p14="http://schemas.microsoft.com/office/powerpoint/2010/main" val="1168414506"/>
+        <p14:creationId xmlns:p14="http://schemas.microsoft.com/office/powerpoint/2010/main" val="2521997284"/>
       </p:ext>
     </p:extLst>
   </p:cSld>
   <p:clrMapOvr>
     <a:masterClrMapping/>
   </p:clrMapOvr>
+  <p:timing>
+    <p:tnLst>
+      <p:par>
+        <p:cTn id="1" dur="indefinite" restart="never" nodeType="tmRoot">
+          <p:childTnLst>
+            <p:seq concurrent="1" nextAc="seek">
+              <p:cTn id="2" dur="indefinite" nodeType="mainSeq">
+                <p:childTnLst>
+                  <p:par>
+                    <p:cTn id="3" fill="hold">
+                      <p:stCondLst>
+                        <p:cond delay="indefinite"/>
+                      </p:stCondLst>
+                      <p:childTnLst>
+                        <p:par>
+                          <p:cTn id="4" fill="hold">
+                            <p:stCondLst>
+                              <p:cond delay="0"/>
+                            </p:stCondLst>
+                            <p:childTnLst>
+                              <p:par>
+                                <p:cTn id="5" presetID="1" presetClass="entr" presetSubtype="0" fill="hold" grpId="0" nodeType="clickEffect">
+                                  <p:stCondLst>
+                                    <p:cond delay="0"/>
+                                  </p:stCondLst>
+                                  <p:childTnLst>
+                                    <p:set>
+                                      <p:cBhvr>
+                                        <p:cTn id="6" dur="1" fill="hold">
+                                          <p:stCondLst>
+                                            <p:cond delay="0"/>
+                                          </p:stCondLst>
+                                        </p:cTn>
+                                        <p:tgtEl>
+                                          <p:spTgt spid="2"/>
+                                        </p:tgtEl>
+                                        <p:attrNameLst>
+                                          <p:attrName>style.visibility</p:attrName>
+                                        </p:attrNameLst>
+                                      </p:cBhvr>
+                                      <p:to>
+                                        <p:strVal val="visible"/>
+                                      </p:to>
+                                    </p:set>
+                                  </p:childTnLst>
+                                </p:cTn>
+                              </p:par>
+                            </p:childTnLst>
+                          </p:cTn>
+                        </p:par>
+                      </p:childTnLst>
+                    </p:cTn>
+                  </p:par>
+                </p:childTnLst>
+              </p:cTn>
+              <p:prevCondLst>
+                <p:cond evt="onPrev" delay="0">
+                  <p:tgtEl>
+                    <p:sldTgt/>
+                  </p:tgtEl>
+                </p:cond>
+              </p:prevCondLst>
+              <p:nextCondLst>
+                <p:cond evt="onNext" delay="0">
+                  <p:tgtEl>
+                    <p:sldTgt/>
+                  </p:tgtEl>
+                </p:cond>
+              </p:nextCondLst>
+            </p:seq>
+          </p:childTnLst>
+        </p:cTn>
+      </p:par>
+    </p:tnLst>
+    <p:bldLst>
+      <p:bldP spid="2" grpId="0"/>
+    </p:bldLst>
+  </p:timing>
 </p:sld>
 </file>
 
@@ -22528,7 +22281,7 @@
           <a:p>
             <a:r>
               <a:rPr lang="en-US" dirty="0"/>
-              <a:t>Imputing – Central Tendency</a:t>
+              <a:t>Imputing – Regression</a:t>
             </a:r>
           </a:p>
         </p:txBody>
@@ -22550,7 +22303,7 @@
           <a:p>
             <a:r>
               <a:rPr lang="en-US" dirty="0"/>
-              <a:t>Simple to calculate and computationally fast</a:t>
+              <a:t>Make use of information in correlated features, more flexible than central tendency</a:t>
             </a:r>
             <a:br>
               <a:rPr lang="en-US" dirty="0"/>
@@ -22560,7 +22313,7 @@
           <a:p>
             <a:r>
               <a:rPr lang="en-US" dirty="0"/>
-              <a:t>Often a reasonable starting point</a:t>
+              <a:t>However, may not be flexible enough to capture complex relationships or interactions</a:t>
             </a:r>
             <a:br>
               <a:rPr lang="en-US" dirty="0"/>
@@ -22570,7 +22323,7 @@
           <a:p>
             <a:r>
               <a:rPr lang="en-US" dirty="0"/>
-              <a:t>May be able to capture more nuance by using other, correlated data to help fill in missing values</a:t>
+              <a:t>May be somewhat more computationally expensive </a:t>
             </a:r>
             <a:br>
               <a:rPr lang="en-US" dirty="0"/>
@@ -22580,7 +22333,7 @@
           <a:p>
             <a:r>
               <a:rPr lang="en-US" dirty="0"/>
-              <a:t>Under-represents variance/covariance of data</a:t>
+              <a:t>Generally will still underestimate variation in data</a:t>
             </a:r>
           </a:p>
         </p:txBody>
@@ -22588,7 +22341,7 @@
     </p:spTree>
     <p:extLst>
       <p:ext uri="{BB962C8B-B14F-4D97-AF65-F5344CB8AC3E}">
-        <p14:creationId xmlns:p14="http://schemas.microsoft.com/office/powerpoint/2010/main" val="2396215195"/>
+        <p14:creationId xmlns:p14="http://schemas.microsoft.com/office/powerpoint/2010/main" val="3808227576"/>
       </p:ext>
     </p:extLst>
   </p:cSld>
@@ -22710,7 +22463,7 @@
           <a:p>
             <a:r>
               <a:rPr lang="en-US" dirty="0"/>
-              <a:t>Imputing – ML Methods with Missing Data Handling</a:t>
+              <a:t>Imputing – k-Nearest Neighbor</a:t>
             </a:r>
           </a:p>
         </p:txBody>
@@ -22732,15 +22485,7 @@
           <a:p>
             <a:r>
               <a:rPr lang="en-US" dirty="0"/>
-              <a:t>Some models have built-in handling of missing data, such as </a:t>
-            </a:r>
-            <a:r>
-              <a:rPr lang="en-US" dirty="0" err="1"/>
-              <a:t>xgboost</a:t>
-            </a:r>
-            <a:r>
-              <a:rPr lang="en-US" dirty="0"/>
-              <a:t> (which decides which direction to send missing values at each split)</a:t>
+              <a:t>More flexible option, capture more complexity in relationships in data</a:t>
             </a:r>
             <a:br>
               <a:rPr lang="en-US" dirty="0"/>
@@ -22750,7 +22495,7 @@
           <a:p>
             <a:r>
               <a:rPr lang="en-US" dirty="0"/>
-              <a:t>May not be the best modeling method for your problem, don’t want to be locked into certain type of model</a:t>
+              <a:t>Difficult to choose appropriate distance metric, value of k</a:t>
             </a:r>
             <a:br>
               <a:rPr lang="en-US" dirty="0"/>
@@ -22760,7 +22505,17 @@
           <a:p>
             <a:r>
               <a:rPr lang="en-US" dirty="0"/>
-              <a:t>Nevertheless, worth exploring performance of other imputation methods even when using these models as well</a:t>
+              <a:t>More computationally expensive than other methods of imputation</a:t>
+            </a:r>
+            <a:br>
+              <a:rPr lang="en-US" dirty="0"/>
+            </a:br>
+            <a:endParaRPr lang="en-US" dirty="0"/>
+          </a:p>
+          <a:p>
+            <a:r>
+              <a:rPr lang="en-US" dirty="0"/>
+              <a:t>Requires entire training set to calculate imputed values for new examples</a:t>
             </a:r>
           </a:p>
         </p:txBody>
@@ -22768,7 +22523,7 @@
     </p:spTree>
     <p:extLst>
       <p:ext uri="{BB962C8B-B14F-4D97-AF65-F5344CB8AC3E}">
-        <p14:creationId xmlns:p14="http://schemas.microsoft.com/office/powerpoint/2010/main" val="2521997284"/>
+        <p14:creationId xmlns:p14="http://schemas.microsoft.com/office/powerpoint/2010/main" val="3729575760"/>
       </p:ext>
     </p:extLst>
   </p:cSld>
@@ -22938,7 +22693,7 @@
             <a:pPr lvl="1"/>
             <a:r>
               <a:rPr lang="en-US" dirty="0"/>
-              <a:t>Initial brainstorming on features you’d like to build</a:t>
+              <a:t>Brainstorming on features you’d like to build</a:t>
             </a:r>
           </a:p>
           <a:p>
@@ -23021,7 +22776,7 @@
           <a:p>
             <a:r>
               <a:rPr lang="en-US" dirty="0"/>
-              <a:t>Imputing – Regression</a:t>
+              <a:t>Imputing – Multiple Imputation</a:t>
             </a:r>
           </a:p>
         </p:txBody>
@@ -23043,7 +22798,7 @@
           <a:p>
             <a:r>
               <a:rPr lang="en-US" dirty="0"/>
-              <a:t>Make use of information in correlated features, more flexible than central tendency</a:t>
+              <a:t>Create multiple “complete” datasets with different values using different regression models</a:t>
             </a:r>
             <a:br>
               <a:rPr lang="en-US" dirty="0"/>
@@ -23053,7 +22808,7 @@
           <a:p>
             <a:r>
               <a:rPr lang="en-US" dirty="0"/>
-              <a:t>However, may not be flexible enough to capture complex relationships or interactions</a:t>
+              <a:t>Helps analyze sensitivity to handling of missing values</a:t>
             </a:r>
             <a:br>
               <a:rPr lang="en-US" dirty="0"/>
@@ -23063,7 +22818,7 @@
           <a:p>
             <a:r>
               <a:rPr lang="en-US" dirty="0"/>
-              <a:t>May be somewhat more computationally expensive </a:t>
+              <a:t>Much more computationally expensive, both for imputation and downstream modeling</a:t>
             </a:r>
             <a:br>
               <a:rPr lang="en-US" dirty="0"/>
@@ -23073,7 +22828,7 @@
           <a:p>
             <a:r>
               <a:rPr lang="en-US" dirty="0"/>
-              <a:t>Generally will still underestimate variation in data</a:t>
+              <a:t>Can provide better representation of variability in data</a:t>
             </a:r>
           </a:p>
         </p:txBody>
@@ -23081,7 +22836,7 @@
     </p:spTree>
     <p:extLst>
       <p:ext uri="{BB962C8B-B14F-4D97-AF65-F5344CB8AC3E}">
-        <p14:creationId xmlns:p14="http://schemas.microsoft.com/office/powerpoint/2010/main" val="3808227576"/>
+        <p14:creationId xmlns:p14="http://schemas.microsoft.com/office/powerpoint/2010/main" val="2069799902"/>
       </p:ext>
     </p:extLst>
   </p:cSld>
@@ -23188,370 +22943,6 @@
       </p:grpSpPr>
       <p:sp>
         <p:nvSpPr>
-          <p:cNvPr id="3" name="Title 2"/>
-          <p:cNvSpPr>
-            <a:spLocks noGrp="1"/>
-          </p:cNvSpPr>
-          <p:nvPr>
-            <p:ph type="title"/>
-          </p:nvPr>
-        </p:nvSpPr>
-        <p:spPr/>
-        <p:txBody>
-          <a:bodyPr/>
-          <a:lstStyle/>
-          <a:p>
-            <a:r>
-              <a:rPr lang="en-US" dirty="0"/>
-              <a:t>Imputing – k-Nearest Neighbor</a:t>
-            </a:r>
-          </a:p>
-        </p:txBody>
-      </p:sp>
-      <p:sp>
-        <p:nvSpPr>
-          <p:cNvPr id="2" name="Content Placeholder 1"/>
-          <p:cNvSpPr>
-            <a:spLocks noGrp="1"/>
-          </p:cNvSpPr>
-          <p:nvPr>
-            <p:ph type="body" idx="1"/>
-          </p:nvPr>
-        </p:nvSpPr>
-        <p:spPr/>
-        <p:txBody>
-          <a:bodyPr/>
-          <a:lstStyle/>
-          <a:p>
-            <a:r>
-              <a:rPr lang="en-US" dirty="0"/>
-              <a:t>More flexible option, capture more complexity in relationships in data</a:t>
-            </a:r>
-            <a:br>
-              <a:rPr lang="en-US" dirty="0"/>
-            </a:br>
-            <a:endParaRPr lang="en-US" dirty="0"/>
-          </a:p>
-          <a:p>
-            <a:r>
-              <a:rPr lang="en-US" dirty="0"/>
-              <a:t>Difficult to choose appropriate distance metric, value of k</a:t>
-            </a:r>
-            <a:br>
-              <a:rPr lang="en-US" dirty="0"/>
-            </a:br>
-            <a:endParaRPr lang="en-US" dirty="0"/>
-          </a:p>
-          <a:p>
-            <a:r>
-              <a:rPr lang="en-US" dirty="0"/>
-              <a:t>More computationally expensive than other methods of imputation</a:t>
-            </a:r>
-            <a:br>
-              <a:rPr lang="en-US" dirty="0"/>
-            </a:br>
-            <a:endParaRPr lang="en-US" dirty="0"/>
-          </a:p>
-          <a:p>
-            <a:r>
-              <a:rPr lang="en-US" dirty="0"/>
-              <a:t>Requires entire training set to calculate imputed values for new examples</a:t>
-            </a:r>
-          </a:p>
-        </p:txBody>
-      </p:sp>
-    </p:spTree>
-    <p:extLst>
-      <p:ext uri="{BB962C8B-B14F-4D97-AF65-F5344CB8AC3E}">
-        <p14:creationId xmlns:p14="http://schemas.microsoft.com/office/powerpoint/2010/main" val="3729575760"/>
-      </p:ext>
-    </p:extLst>
-  </p:cSld>
-  <p:clrMapOvr>
-    <a:masterClrMapping/>
-  </p:clrMapOvr>
-  <p:timing>
-    <p:tnLst>
-      <p:par>
-        <p:cTn id="1" dur="indefinite" restart="never" nodeType="tmRoot">
-          <p:childTnLst>
-            <p:seq concurrent="1" nextAc="seek">
-              <p:cTn id="2" dur="indefinite" nodeType="mainSeq">
-                <p:childTnLst>
-                  <p:par>
-                    <p:cTn id="3" fill="hold">
-                      <p:stCondLst>
-                        <p:cond delay="indefinite"/>
-                      </p:stCondLst>
-                      <p:childTnLst>
-                        <p:par>
-                          <p:cTn id="4" fill="hold">
-                            <p:stCondLst>
-                              <p:cond delay="0"/>
-                            </p:stCondLst>
-                            <p:childTnLst>
-                              <p:par>
-                                <p:cTn id="5" presetID="1" presetClass="entr" presetSubtype="0" fill="hold" grpId="0" nodeType="clickEffect">
-                                  <p:stCondLst>
-                                    <p:cond delay="0"/>
-                                  </p:stCondLst>
-                                  <p:childTnLst>
-                                    <p:set>
-                                      <p:cBhvr>
-                                        <p:cTn id="6" dur="1" fill="hold">
-                                          <p:stCondLst>
-                                            <p:cond delay="0"/>
-                                          </p:stCondLst>
-                                        </p:cTn>
-                                        <p:tgtEl>
-                                          <p:spTgt spid="2"/>
-                                        </p:tgtEl>
-                                        <p:attrNameLst>
-                                          <p:attrName>style.visibility</p:attrName>
-                                        </p:attrNameLst>
-                                      </p:cBhvr>
-                                      <p:to>
-                                        <p:strVal val="visible"/>
-                                      </p:to>
-                                    </p:set>
-                                  </p:childTnLst>
-                                </p:cTn>
-                              </p:par>
-                            </p:childTnLst>
-                          </p:cTn>
-                        </p:par>
-                      </p:childTnLst>
-                    </p:cTn>
-                  </p:par>
-                </p:childTnLst>
-              </p:cTn>
-              <p:prevCondLst>
-                <p:cond evt="onPrev" delay="0">
-                  <p:tgtEl>
-                    <p:sldTgt/>
-                  </p:tgtEl>
-                </p:cond>
-              </p:prevCondLst>
-              <p:nextCondLst>
-                <p:cond evt="onNext" delay="0">
-                  <p:tgtEl>
-                    <p:sldTgt/>
-                  </p:tgtEl>
-                </p:cond>
-              </p:nextCondLst>
-            </p:seq>
-          </p:childTnLst>
-        </p:cTn>
-      </p:par>
-    </p:tnLst>
-    <p:bldLst>
-      <p:bldP spid="2" grpId="0"/>
-    </p:bldLst>
-  </p:timing>
-</p:sld>
-</file>
-
-<file path=ppt/slides/slide42.xml><?xml version="1.0" encoding="utf-8"?>
-<p:sld xmlns:a="http://schemas.openxmlformats.org/drawingml/2006/main" xmlns:r="http://schemas.openxmlformats.org/officeDocument/2006/relationships" xmlns:p="http://schemas.openxmlformats.org/presentationml/2006/main">
-  <p:cSld>
-    <p:spTree>
-      <p:nvGrpSpPr>
-        <p:cNvPr id="1" name=""/>
-        <p:cNvGrpSpPr/>
-        <p:nvPr/>
-      </p:nvGrpSpPr>
-      <p:grpSpPr>
-        <a:xfrm>
-          <a:off x="0" y="0"/>
-          <a:ext cx="0" cy="0"/>
-          <a:chOff x="0" y="0"/>
-          <a:chExt cx="0" cy="0"/>
-        </a:xfrm>
-      </p:grpSpPr>
-      <p:sp>
-        <p:nvSpPr>
-          <p:cNvPr id="3" name="Title 2"/>
-          <p:cNvSpPr>
-            <a:spLocks noGrp="1"/>
-          </p:cNvSpPr>
-          <p:nvPr>
-            <p:ph type="title"/>
-          </p:nvPr>
-        </p:nvSpPr>
-        <p:spPr/>
-        <p:txBody>
-          <a:bodyPr/>
-          <a:lstStyle/>
-          <a:p>
-            <a:r>
-              <a:rPr lang="en-US" dirty="0"/>
-              <a:t>Imputing – Multiple Imputation</a:t>
-            </a:r>
-          </a:p>
-        </p:txBody>
-      </p:sp>
-      <p:sp>
-        <p:nvSpPr>
-          <p:cNvPr id="2" name="Content Placeholder 1"/>
-          <p:cNvSpPr>
-            <a:spLocks noGrp="1"/>
-          </p:cNvSpPr>
-          <p:nvPr>
-            <p:ph type="body" idx="1"/>
-          </p:nvPr>
-        </p:nvSpPr>
-        <p:spPr/>
-        <p:txBody>
-          <a:bodyPr/>
-          <a:lstStyle/>
-          <a:p>
-            <a:r>
-              <a:rPr lang="en-US" dirty="0"/>
-              <a:t>Create multiple “complete” datasets with different values using different regression models</a:t>
-            </a:r>
-            <a:br>
-              <a:rPr lang="en-US" dirty="0"/>
-            </a:br>
-            <a:endParaRPr lang="en-US" dirty="0"/>
-          </a:p>
-          <a:p>
-            <a:r>
-              <a:rPr lang="en-US" dirty="0"/>
-              <a:t>Helps analyze sensitivity to handling of missing values</a:t>
-            </a:r>
-            <a:br>
-              <a:rPr lang="en-US" dirty="0"/>
-            </a:br>
-            <a:endParaRPr lang="en-US" dirty="0"/>
-          </a:p>
-          <a:p>
-            <a:r>
-              <a:rPr lang="en-US" dirty="0"/>
-              <a:t>Much more computationally expensive, both for imputation and downstream modeling</a:t>
-            </a:r>
-            <a:br>
-              <a:rPr lang="en-US" dirty="0"/>
-            </a:br>
-            <a:endParaRPr lang="en-US" dirty="0"/>
-          </a:p>
-          <a:p>
-            <a:r>
-              <a:rPr lang="en-US" dirty="0"/>
-              <a:t>Can provide better representation of variability in data</a:t>
-            </a:r>
-          </a:p>
-        </p:txBody>
-      </p:sp>
-    </p:spTree>
-    <p:extLst>
-      <p:ext uri="{BB962C8B-B14F-4D97-AF65-F5344CB8AC3E}">
-        <p14:creationId xmlns:p14="http://schemas.microsoft.com/office/powerpoint/2010/main" val="2069799902"/>
-      </p:ext>
-    </p:extLst>
-  </p:cSld>
-  <p:clrMapOvr>
-    <a:masterClrMapping/>
-  </p:clrMapOvr>
-  <p:timing>
-    <p:tnLst>
-      <p:par>
-        <p:cTn id="1" dur="indefinite" restart="never" nodeType="tmRoot">
-          <p:childTnLst>
-            <p:seq concurrent="1" nextAc="seek">
-              <p:cTn id="2" dur="indefinite" nodeType="mainSeq">
-                <p:childTnLst>
-                  <p:par>
-                    <p:cTn id="3" fill="hold">
-                      <p:stCondLst>
-                        <p:cond delay="indefinite"/>
-                      </p:stCondLst>
-                      <p:childTnLst>
-                        <p:par>
-                          <p:cTn id="4" fill="hold">
-                            <p:stCondLst>
-                              <p:cond delay="0"/>
-                            </p:stCondLst>
-                            <p:childTnLst>
-                              <p:par>
-                                <p:cTn id="5" presetID="1" presetClass="entr" presetSubtype="0" fill="hold" grpId="0" nodeType="clickEffect">
-                                  <p:stCondLst>
-                                    <p:cond delay="0"/>
-                                  </p:stCondLst>
-                                  <p:childTnLst>
-                                    <p:set>
-                                      <p:cBhvr>
-                                        <p:cTn id="6" dur="1" fill="hold">
-                                          <p:stCondLst>
-                                            <p:cond delay="0"/>
-                                          </p:stCondLst>
-                                        </p:cTn>
-                                        <p:tgtEl>
-                                          <p:spTgt spid="2"/>
-                                        </p:tgtEl>
-                                        <p:attrNameLst>
-                                          <p:attrName>style.visibility</p:attrName>
-                                        </p:attrNameLst>
-                                      </p:cBhvr>
-                                      <p:to>
-                                        <p:strVal val="visible"/>
-                                      </p:to>
-                                    </p:set>
-                                  </p:childTnLst>
-                                </p:cTn>
-                              </p:par>
-                            </p:childTnLst>
-                          </p:cTn>
-                        </p:par>
-                      </p:childTnLst>
-                    </p:cTn>
-                  </p:par>
-                </p:childTnLst>
-              </p:cTn>
-              <p:prevCondLst>
-                <p:cond evt="onPrev" delay="0">
-                  <p:tgtEl>
-                    <p:sldTgt/>
-                  </p:tgtEl>
-                </p:cond>
-              </p:prevCondLst>
-              <p:nextCondLst>
-                <p:cond evt="onNext" delay="0">
-                  <p:tgtEl>
-                    <p:sldTgt/>
-                  </p:tgtEl>
-                </p:cond>
-              </p:nextCondLst>
-            </p:seq>
-          </p:childTnLst>
-        </p:cTn>
-      </p:par>
-    </p:tnLst>
-    <p:bldLst>
-      <p:bldP spid="2" grpId="0"/>
-    </p:bldLst>
-  </p:timing>
-</p:sld>
-</file>
-
-<file path=ppt/slides/slide43.xml><?xml version="1.0" encoding="utf-8"?>
-<p:sld xmlns:a="http://schemas.openxmlformats.org/drawingml/2006/main" xmlns:r="http://schemas.openxmlformats.org/officeDocument/2006/relationships" xmlns:p="http://schemas.openxmlformats.org/presentationml/2006/main">
-  <p:cSld>
-    <p:spTree>
-      <p:nvGrpSpPr>
-        <p:cNvPr id="1" name=""/>
-        <p:cNvGrpSpPr/>
-        <p:nvPr/>
-      </p:nvGrpSpPr>
-      <p:grpSpPr>
-        <a:xfrm>
-          <a:off x="0" y="0"/>
-          <a:ext cx="0" cy="0"/>
-          <a:chOff x="0" y="0"/>
-          <a:chExt cx="0" cy="0"/>
-        </a:xfrm>
-      </p:grpSpPr>
-      <p:sp>
-        <p:nvSpPr>
           <p:cNvPr id="2" name="Title 1">
             <a:extLst>
               <a:ext uri="{FF2B5EF4-FFF2-40B4-BE49-F238E27FC236}">
@@ -23646,7 +23037,7 @@
 </p:sld>
 </file>
 
-<file path=ppt/slides/slide44.xml><?xml version="1.0" encoding="utf-8"?>
+<file path=ppt/slides/slide42.xml><?xml version="1.0" encoding="utf-8"?>
 <p:sld xmlns:a="http://schemas.openxmlformats.org/drawingml/2006/main" xmlns:r="http://schemas.openxmlformats.org/officeDocument/2006/relationships" xmlns:p="http://schemas.openxmlformats.org/presentationml/2006/main">
   <p:cSld>
     <p:spTree>
@@ -23748,7 +23139,7 @@
 </p:sld>
 </file>
 
-<file path=ppt/slides/slide45.xml><?xml version="1.0" encoding="utf-8"?>
+<file path=ppt/slides/slide43.xml><?xml version="1.0" encoding="utf-8"?>
 <p:sld xmlns:a="http://schemas.openxmlformats.org/drawingml/2006/main" xmlns:r="http://schemas.openxmlformats.org/officeDocument/2006/relationships" xmlns:p="http://schemas.openxmlformats.org/presentationml/2006/main">
   <p:cSld>
     <p:spTree>
@@ -24935,16 +24326,6 @@
             <a:r>
               <a:rPr lang="en-US" dirty="0"/>
               <a:t>Feature Creation/Engineering</a:t>
-            </a:r>
-            <a:br>
-              <a:rPr lang="en-US" dirty="0"/>
-            </a:br>
-            <a:endParaRPr lang="en-US" dirty="0"/>
-          </a:p>
-          <a:p>
-            <a:r>
-              <a:rPr lang="en-US" dirty="0"/>
-              <a:t>Introducing Bias in Feature Development</a:t>
             </a:r>
             <a:br>
               <a:rPr lang="en-US" dirty="0"/>

--- a/Lectures/12-features-and-imputation.pptx
+++ b/Lectures/12-features-and-imputation.pptx
@@ -5,7 +5,7 @@
     <p:sldMasterId id="2147483648" r:id="rId1"/>
   </p:sldMasterIdLst>
   <p:notesMasterIdLst>
-    <p:notesMasterId r:id="rId45"/>
+    <p:notesMasterId r:id="rId48"/>
   </p:notesMasterIdLst>
   <p:sldIdLst>
     <p:sldId id="256" r:id="rId2"/>
@@ -31,31 +31,34 @@
     <p:sldId id="514" r:id="rId22"/>
     <p:sldId id="541" r:id="rId23"/>
     <p:sldId id="542" r:id="rId24"/>
-    <p:sldId id="513" r:id="rId25"/>
-    <p:sldId id="515" r:id="rId26"/>
-    <p:sldId id="300" r:id="rId27"/>
-    <p:sldId id="302" r:id="rId28"/>
-    <p:sldId id="304" r:id="rId29"/>
-    <p:sldId id="277" r:id="rId30"/>
-    <p:sldId id="278" r:id="rId31"/>
-    <p:sldId id="280" r:id="rId32"/>
-    <p:sldId id="279" r:id="rId33"/>
-    <p:sldId id="306" r:id="rId34"/>
-    <p:sldId id="310" r:id="rId35"/>
-    <p:sldId id="312" r:id="rId36"/>
-    <p:sldId id="313" r:id="rId37"/>
-    <p:sldId id="317" r:id="rId38"/>
-    <p:sldId id="314" r:id="rId39"/>
-    <p:sldId id="316" r:id="rId40"/>
-    <p:sldId id="315" r:id="rId41"/>
-    <p:sldId id="322" r:id="rId42"/>
-    <p:sldId id="292" r:id="rId43"/>
-    <p:sldId id="293" r:id="rId44"/>
+    <p:sldId id="546" r:id="rId25"/>
+    <p:sldId id="513" r:id="rId26"/>
+    <p:sldId id="515" r:id="rId27"/>
+    <p:sldId id="300" r:id="rId28"/>
+    <p:sldId id="545" r:id="rId29"/>
+    <p:sldId id="302" r:id="rId30"/>
+    <p:sldId id="304" r:id="rId31"/>
+    <p:sldId id="277" r:id="rId32"/>
+    <p:sldId id="278" r:id="rId33"/>
+    <p:sldId id="280" r:id="rId34"/>
+    <p:sldId id="279" r:id="rId35"/>
+    <p:sldId id="306" r:id="rId36"/>
+    <p:sldId id="547" r:id="rId37"/>
+    <p:sldId id="310" r:id="rId38"/>
+    <p:sldId id="312" r:id="rId39"/>
+    <p:sldId id="313" r:id="rId40"/>
+    <p:sldId id="317" r:id="rId41"/>
+    <p:sldId id="314" r:id="rId42"/>
+    <p:sldId id="316" r:id="rId43"/>
+    <p:sldId id="315" r:id="rId44"/>
+    <p:sldId id="322" r:id="rId45"/>
+    <p:sldId id="292" r:id="rId46"/>
+    <p:sldId id="293" r:id="rId47"/>
   </p:sldIdLst>
   <p:sldSz cx="12192000" cy="6858000"/>
   <p:notesSz cx="6858000" cy="9144000"/>
   <p:custDataLst>
-    <p:tags r:id="rId46"/>
+    <p:tags r:id="rId49"/>
   </p:custDataLst>
   <p:defaultTextStyle>
     <a:defPPr marR="0" lvl="0" algn="l" rtl="0">
@@ -291,7 +294,7 @@
       <p15:sldGuideLst xmlns:p15="http://schemas.microsoft.com/office/powerpoint/2012/main"/>
     </p:ext>
     <p:ext uri="http://customooxmlschemas.google.com/">
-      <go:slidesCustomData xmlns:go="http://customooxmlschemas.google.com/" xmlns:p15="http://schemas.microsoft.com/office/powerpoint/2012/main" xmlns:p14="http://schemas.microsoft.com/office/powerpoint/2010/main" xmlns:com="http://schemas.openxmlformats.org/drawingml/2006/compatibility" xmlns:pvml="urn:schemas-microsoft-com:office:powerpoint" xmlns:v="urn:schemas-microsoft-com:vml" xmlns:o="urn:schemas-microsoft-com:office:office" xmlns:dgm="http://schemas.openxmlformats.org/drawingml/2006/diagram" xmlns:c="http://schemas.openxmlformats.org/drawingml/2006/chart" xmlns:mv="urn:schemas-microsoft-com:mac:vml" xmlns:mc="http://schemas.openxmlformats.org/markup-compatibility/2006" xmlns="" r:id="rId47" roundtripDataSignature="AMtx7mjFyVUGRZWio+dc9dxzYsimUxNJbg=="/>
+      <go:slidesCustomData xmlns:go="http://customooxmlschemas.google.com/" xmlns:p15="http://schemas.microsoft.com/office/powerpoint/2012/main" xmlns:p14="http://schemas.microsoft.com/office/powerpoint/2010/main" xmlns:com="http://schemas.openxmlformats.org/drawingml/2006/compatibility" xmlns:pvml="urn:schemas-microsoft-com:office:powerpoint" xmlns:v="urn:schemas-microsoft-com:vml" xmlns:o="urn:schemas-microsoft-com:office:office" xmlns:dgm="http://schemas.openxmlformats.org/drawingml/2006/diagram" xmlns:c="http://schemas.openxmlformats.org/drawingml/2006/chart" xmlns:mv="urn:schemas-microsoft-com:mac:vml" xmlns:mc="http://schemas.openxmlformats.org/markup-compatibility/2006" xmlns="" r:id="rId50" roundtripDataSignature="AMtx7mjFyVUGRZWio+dc9dxzYsimUxNJbg=="/>
     </p:ext>
   </p:extLst>
 </p:presentation>
@@ -10121,11 +10124,7 @@
             </a:r>
             <a:r>
               <a:rPr lang="en-US" dirty="0"/>
-              <a:t> </a:t>
-            </a:r>
-            <a:r>
-              <a:rPr lang="en-US"/>
-              <a:t>+ collate</a:t>
+              <a:t> + collate</a:t>
             </a:r>
           </a:p>
         </p:txBody>
@@ -19690,6 +19689,64 @@
           <p:cNvPr id="2" name="Title 1">
             <a:extLst>
               <a:ext uri="{FF2B5EF4-FFF2-40B4-BE49-F238E27FC236}">
+                <a16:creationId xmlns:a16="http://schemas.microsoft.com/office/drawing/2014/main" id="{DD842AF3-B175-3B24-0DEA-32DB6A957D82}"/>
+              </a:ext>
+            </a:extLst>
+          </p:cNvPr>
+          <p:cNvSpPr>
+            <a:spLocks noGrp="1"/>
+          </p:cNvSpPr>
+          <p:nvPr>
+            <p:ph type="title"/>
+          </p:nvPr>
+        </p:nvSpPr>
+        <p:spPr/>
+        <p:txBody>
+          <a:bodyPr/>
+          <a:lstStyle/>
+          <a:p>
+            <a:r>
+              <a:rPr lang="en-US" dirty="0"/>
+              <a:t>Triage Detour</a:t>
+            </a:r>
+          </a:p>
+        </p:txBody>
+      </p:sp>
+    </p:spTree>
+    <p:extLst>
+      <p:ext uri="{BB962C8B-B14F-4D97-AF65-F5344CB8AC3E}">
+        <p14:creationId xmlns:p14="http://schemas.microsoft.com/office/powerpoint/2010/main" val="281897178"/>
+      </p:ext>
+    </p:extLst>
+  </p:cSld>
+  <p:clrMapOvr>
+    <a:masterClrMapping/>
+  </p:clrMapOvr>
+</p:sld>
+</file>
+
+<file path=ppt/slides/slide25.xml><?xml version="1.0" encoding="utf-8"?>
+<p:sld xmlns:a="http://schemas.openxmlformats.org/drawingml/2006/main" xmlns:r="http://schemas.openxmlformats.org/officeDocument/2006/relationships" xmlns:p="http://schemas.openxmlformats.org/presentationml/2006/main">
+  <p:cSld>
+    <p:spTree>
+      <p:nvGrpSpPr>
+        <p:cNvPr id="1" name=""/>
+        <p:cNvGrpSpPr/>
+        <p:nvPr/>
+      </p:nvGrpSpPr>
+      <p:grpSpPr>
+        <a:xfrm>
+          <a:off x="0" y="0"/>
+          <a:ext cx="0" cy="0"/>
+          <a:chOff x="0" y="0"/>
+          <a:chExt cx="0" cy="0"/>
+        </a:xfrm>
+      </p:grpSpPr>
+      <p:sp>
+        <p:nvSpPr>
+          <p:cNvPr id="2" name="Title 1">
+            <a:extLst>
+              <a:ext uri="{FF2B5EF4-FFF2-40B4-BE49-F238E27FC236}">
                 <a16:creationId xmlns:a16="http://schemas.microsoft.com/office/drawing/2014/main" id="{98347210-B4BE-4047-93B4-3D7AA966D0F1}"/>
               </a:ext>
             </a:extLst>
@@ -19756,6 +19813,82 @@
               </a:solidFill>
             </a:endParaRPr>
           </a:p>
+          <a:p>
+            <a:r>
+              <a:rPr lang="en-US" dirty="0">
+                <a:solidFill>
+                  <a:srgbClr val="8A0002"/>
+                </a:solidFill>
+                <a:hlinkClick r:id="rId3"/>
+              </a:rPr>
+              <a:t>Liver disease prediction project</a:t>
+            </a:r>
+            <a:endParaRPr lang="en-US" dirty="0">
+              <a:solidFill>
+                <a:srgbClr val="8A0002"/>
+              </a:solidFill>
+            </a:endParaRPr>
+          </a:p>
+          <a:p>
+            <a:endParaRPr lang="en-US" dirty="0">
+              <a:solidFill>
+                <a:srgbClr val="8A0002"/>
+              </a:solidFill>
+            </a:endParaRPr>
+          </a:p>
+          <a:p>
+            <a:r>
+              <a:rPr lang="en-US" dirty="0">
+                <a:solidFill>
+                  <a:srgbClr val="8A0002"/>
+                </a:solidFill>
+                <a:hlinkClick r:id="rId4"/>
+              </a:rPr>
+              <a:t>Kidney disease prediction project</a:t>
+            </a:r>
+            <a:endParaRPr lang="en-US" dirty="0">
+              <a:solidFill>
+                <a:srgbClr val="8A0002"/>
+              </a:solidFill>
+            </a:endParaRPr>
+          </a:p>
+          <a:p>
+            <a:endParaRPr lang="en-US" dirty="0">
+              <a:solidFill>
+                <a:srgbClr val="8A0002"/>
+              </a:solidFill>
+            </a:endParaRPr>
+          </a:p>
+          <a:p>
+            <a:r>
+              <a:rPr lang="en-US" dirty="0">
+                <a:solidFill>
+                  <a:srgbClr val="8A0002"/>
+                </a:solidFill>
+                <a:hlinkClick r:id="rId5"/>
+              </a:rPr>
+              <a:t>Homelessness prevention project</a:t>
+            </a:r>
+            <a:endParaRPr lang="en-US" dirty="0">
+              <a:solidFill>
+                <a:srgbClr val="8A0002"/>
+              </a:solidFill>
+            </a:endParaRPr>
+          </a:p>
+          <a:p>
+            <a:endParaRPr lang="en-US" dirty="0">
+              <a:solidFill>
+                <a:srgbClr val="8A0002"/>
+              </a:solidFill>
+            </a:endParaRPr>
+          </a:p>
+          <a:p>
+            <a:endParaRPr lang="en-US" dirty="0">
+              <a:solidFill>
+                <a:srgbClr val="8A0002"/>
+              </a:solidFill>
+            </a:endParaRPr>
+          </a:p>
         </p:txBody>
       </p:sp>
     </p:spTree>
@@ -19771,7 +19904,7 @@
 </p:sld>
 </file>
 
-<file path=ppt/slides/slide25.xml><?xml version="1.0" encoding="utf-8"?>
+<file path=ppt/slides/slide26.xml><?xml version="1.0" encoding="utf-8"?>
 <p:sld xmlns:a="http://schemas.openxmlformats.org/drawingml/2006/main" xmlns:r="http://schemas.openxmlformats.org/officeDocument/2006/relationships" xmlns:p="http://schemas.openxmlformats.org/presentationml/2006/main">
   <p:cSld>
     <p:spTree>
@@ -20243,138 +20376,6 @@
 </p:sld>
 </file>
 
-<file path=ppt/slides/slide26.xml><?xml version="1.0" encoding="utf-8"?>
-<p:sld xmlns:a="http://schemas.openxmlformats.org/drawingml/2006/main" xmlns:r="http://schemas.openxmlformats.org/officeDocument/2006/relationships" xmlns:p="http://schemas.openxmlformats.org/presentationml/2006/main">
-  <p:cSld>
-    <p:spTree>
-      <p:nvGrpSpPr>
-        <p:cNvPr id="1" name=""/>
-        <p:cNvGrpSpPr/>
-        <p:nvPr/>
-      </p:nvGrpSpPr>
-      <p:grpSpPr>
-        <a:xfrm>
-          <a:off x="0" y="0"/>
-          <a:ext cx="0" cy="0"/>
-          <a:chOff x="0" y="0"/>
-          <a:chExt cx="0" cy="0"/>
-        </a:xfrm>
-      </p:grpSpPr>
-      <p:sp>
-        <p:nvSpPr>
-          <p:cNvPr id="3" name="Title 2"/>
-          <p:cNvSpPr>
-            <a:spLocks noGrp="1"/>
-          </p:cNvSpPr>
-          <p:nvPr>
-            <p:ph type="title"/>
-          </p:nvPr>
-        </p:nvSpPr>
-        <p:spPr/>
-        <p:txBody>
-          <a:bodyPr/>
-          <a:lstStyle/>
-          <a:p>
-            <a:r>
-              <a:rPr lang="en-US" dirty="0"/>
-              <a:t>Feature Generation – A Deeper Look</a:t>
-            </a:r>
-          </a:p>
-        </p:txBody>
-      </p:sp>
-      <p:sp>
-        <p:nvSpPr>
-          <p:cNvPr id="2" name="Content Placeholder 1"/>
-          <p:cNvSpPr>
-            <a:spLocks noGrp="1"/>
-          </p:cNvSpPr>
-          <p:nvPr>
-            <p:ph type="body" idx="1"/>
-          </p:nvPr>
-        </p:nvSpPr>
-        <p:spPr/>
-        <p:txBody>
-          <a:bodyPr>
-            <a:normAutofit/>
-          </a:bodyPr>
-          <a:lstStyle/>
-          <a:p>
-            <a:r>
-              <a:rPr lang="en-US" dirty="0"/>
-              <a:t>Categorical to Binary (Dummies)</a:t>
-            </a:r>
-          </a:p>
-          <a:p>
-            <a:r>
-              <a:rPr lang="en-US" dirty="0"/>
-              <a:t>Features for missing values</a:t>
-            </a:r>
-          </a:p>
-          <a:p>
-            <a:r>
-              <a:rPr lang="en-US" dirty="0"/>
-              <a:t>Discretization</a:t>
-            </a:r>
-          </a:p>
-          <a:p>
-            <a:r>
-              <a:rPr lang="en-US" dirty="0"/>
-              <a:t>Date/Time Features</a:t>
-            </a:r>
-          </a:p>
-          <a:p>
-            <a:r>
-              <a:rPr lang="en-US" dirty="0"/>
-              <a:t>Scaling/Normalizing</a:t>
-            </a:r>
-          </a:p>
-          <a:p>
-            <a:r>
-              <a:rPr lang="en-US" dirty="0"/>
-              <a:t>Transformations</a:t>
-            </a:r>
-          </a:p>
-          <a:p>
-            <a:r>
-              <a:rPr lang="en-US" b="1" dirty="0"/>
-              <a:t>Aggregations (space, time, space and time)</a:t>
-            </a:r>
-          </a:p>
-          <a:p>
-            <a:r>
-              <a:rPr lang="en-US" b="1" dirty="0"/>
-              <a:t>Relative (compared to the average</a:t>
-            </a:r>
-            <a:r>
-              <a:rPr lang="mr-IN" b="1" dirty="0"/>
-              <a:t>…</a:t>
-            </a:r>
-            <a:r>
-              <a:rPr lang="en-US" b="1" dirty="0"/>
-              <a:t>)</a:t>
-            </a:r>
-          </a:p>
-          <a:p>
-            <a:r>
-              <a:rPr lang="en-US" dirty="0"/>
-              <a:t>Interactions</a:t>
-            </a:r>
-          </a:p>
-        </p:txBody>
-      </p:sp>
-    </p:spTree>
-    <p:extLst>
-      <p:ext uri="{BB962C8B-B14F-4D97-AF65-F5344CB8AC3E}">
-        <p14:creationId xmlns:p14="http://schemas.microsoft.com/office/powerpoint/2010/main" val="273184349"/>
-      </p:ext>
-    </p:extLst>
-  </p:cSld>
-  <p:clrMapOvr>
-    <a:masterClrMapping/>
-  </p:clrMapOvr>
-</p:sld>
-</file>
-
 <file path=ppt/slides/slide27.xml><?xml version="1.0" encoding="utf-8"?>
 <p:sld xmlns:a="http://schemas.openxmlformats.org/drawingml/2006/main" xmlns:r="http://schemas.openxmlformats.org/officeDocument/2006/relationships" xmlns:p="http://schemas.openxmlformats.org/presentationml/2006/main">
   <p:cSld>
@@ -20409,6 +20410,196 @@
           <a:p>
             <a:r>
               <a:rPr lang="en-US" dirty="0"/>
+              <a:t>Feature Generation – A Deeper Look</a:t>
+            </a:r>
+          </a:p>
+        </p:txBody>
+      </p:sp>
+      <p:sp>
+        <p:nvSpPr>
+          <p:cNvPr id="2" name="Content Placeholder 1"/>
+          <p:cNvSpPr>
+            <a:spLocks noGrp="1"/>
+          </p:cNvSpPr>
+          <p:nvPr>
+            <p:ph type="body" idx="1"/>
+          </p:nvPr>
+        </p:nvSpPr>
+        <p:spPr/>
+        <p:txBody>
+          <a:bodyPr>
+            <a:normAutofit/>
+          </a:bodyPr>
+          <a:lstStyle/>
+          <a:p>
+            <a:r>
+              <a:rPr lang="en-US" dirty="0"/>
+              <a:t>Categorical to Binary (Dummies)</a:t>
+            </a:r>
+          </a:p>
+          <a:p>
+            <a:r>
+              <a:rPr lang="en-US" dirty="0"/>
+              <a:t>Features for missing values</a:t>
+            </a:r>
+          </a:p>
+          <a:p>
+            <a:r>
+              <a:rPr lang="en-US" dirty="0"/>
+              <a:t>Discretization</a:t>
+            </a:r>
+          </a:p>
+          <a:p>
+            <a:r>
+              <a:rPr lang="en-US" dirty="0"/>
+              <a:t>Date/Time Features</a:t>
+            </a:r>
+          </a:p>
+          <a:p>
+            <a:r>
+              <a:rPr lang="en-US" dirty="0"/>
+              <a:t>Scaling/Normalizing</a:t>
+            </a:r>
+          </a:p>
+          <a:p>
+            <a:r>
+              <a:rPr lang="en-US" dirty="0"/>
+              <a:t>Transformations</a:t>
+            </a:r>
+          </a:p>
+          <a:p>
+            <a:r>
+              <a:rPr lang="en-US" b="1" dirty="0"/>
+              <a:t>Aggregations (space, time, space and time)</a:t>
+            </a:r>
+          </a:p>
+          <a:p>
+            <a:r>
+              <a:rPr lang="en-US" b="1" dirty="0"/>
+              <a:t>Relative (compared to the average</a:t>
+            </a:r>
+            <a:r>
+              <a:rPr lang="mr-IN" b="1" dirty="0"/>
+              <a:t>…</a:t>
+            </a:r>
+            <a:r>
+              <a:rPr lang="en-US" b="1" dirty="0"/>
+              <a:t>)</a:t>
+            </a:r>
+          </a:p>
+          <a:p>
+            <a:r>
+              <a:rPr lang="en-US" dirty="0"/>
+              <a:t>Interactions</a:t>
+            </a:r>
+          </a:p>
+        </p:txBody>
+      </p:sp>
+    </p:spTree>
+    <p:extLst>
+      <p:ext uri="{BB962C8B-B14F-4D97-AF65-F5344CB8AC3E}">
+        <p14:creationId xmlns:p14="http://schemas.microsoft.com/office/powerpoint/2010/main" val="273184349"/>
+      </p:ext>
+    </p:extLst>
+  </p:cSld>
+  <p:clrMapOvr>
+    <a:masterClrMapping/>
+  </p:clrMapOvr>
+</p:sld>
+</file>
+
+<file path=ppt/slides/slide28.xml><?xml version="1.0" encoding="utf-8"?>
+<p:sld xmlns:a="http://schemas.openxmlformats.org/drawingml/2006/main" xmlns:r="http://schemas.openxmlformats.org/officeDocument/2006/relationships" xmlns:p="http://schemas.openxmlformats.org/presentationml/2006/main">
+  <p:cSld>
+    <p:spTree>
+      <p:nvGrpSpPr>
+        <p:cNvPr id="1" name=""/>
+        <p:cNvGrpSpPr/>
+        <p:nvPr/>
+      </p:nvGrpSpPr>
+      <p:grpSpPr>
+        <a:xfrm>
+          <a:off x="0" y="0"/>
+          <a:ext cx="0" cy="0"/>
+          <a:chOff x="0" y="0"/>
+          <a:chExt cx="0" cy="0"/>
+        </a:xfrm>
+      </p:grpSpPr>
+      <p:sp>
+        <p:nvSpPr>
+          <p:cNvPr id="2" name="Title 1">
+            <a:extLst>
+              <a:ext uri="{FF2B5EF4-FFF2-40B4-BE49-F238E27FC236}">
+                <a16:creationId xmlns:a16="http://schemas.microsoft.com/office/drawing/2014/main" id="{F25B2164-7632-A179-E8E7-A62560A52E9D}"/>
+              </a:ext>
+            </a:extLst>
+          </p:cNvPr>
+          <p:cNvSpPr>
+            <a:spLocks noGrp="1"/>
+          </p:cNvSpPr>
+          <p:nvPr>
+            <p:ph type="title"/>
+          </p:nvPr>
+        </p:nvSpPr>
+        <p:spPr/>
+        <p:txBody>
+          <a:bodyPr/>
+          <a:lstStyle/>
+          <a:p>
+            <a:r>
+              <a:rPr lang="en-US" dirty="0"/>
+              <a:t>Back to Features</a:t>
+            </a:r>
+          </a:p>
+        </p:txBody>
+      </p:sp>
+    </p:spTree>
+    <p:extLst>
+      <p:ext uri="{BB962C8B-B14F-4D97-AF65-F5344CB8AC3E}">
+        <p14:creationId xmlns:p14="http://schemas.microsoft.com/office/powerpoint/2010/main" val="3732550391"/>
+      </p:ext>
+    </p:extLst>
+  </p:cSld>
+  <p:clrMapOvr>
+    <a:masterClrMapping/>
+  </p:clrMapOvr>
+</p:sld>
+</file>
+
+<file path=ppt/slides/slide29.xml><?xml version="1.0" encoding="utf-8"?>
+<p:sld xmlns:a="http://schemas.openxmlformats.org/drawingml/2006/main" xmlns:r="http://schemas.openxmlformats.org/officeDocument/2006/relationships" xmlns:p="http://schemas.openxmlformats.org/presentationml/2006/main">
+  <p:cSld>
+    <p:spTree>
+      <p:nvGrpSpPr>
+        <p:cNvPr id="1" name=""/>
+        <p:cNvGrpSpPr/>
+        <p:nvPr/>
+      </p:nvGrpSpPr>
+      <p:grpSpPr>
+        <a:xfrm>
+          <a:off x="0" y="0"/>
+          <a:ext cx="0" cy="0"/>
+          <a:chOff x="0" y="0"/>
+          <a:chExt cx="0" cy="0"/>
+        </a:xfrm>
+      </p:grpSpPr>
+      <p:sp>
+        <p:nvSpPr>
+          <p:cNvPr id="3" name="Title 2"/>
+          <p:cNvSpPr>
+            <a:spLocks noGrp="1"/>
+          </p:cNvSpPr>
+          <p:nvPr>
+            <p:ph type="title"/>
+          </p:nvPr>
+        </p:nvSpPr>
+        <p:spPr/>
+        <p:txBody>
+          <a:bodyPr/>
+          <a:lstStyle/>
+          <a:p>
+            <a:r>
+              <a:rPr lang="en-US" dirty="0"/>
               <a:t>Categorical to Binary</a:t>
             </a:r>
           </a:p>
@@ -20472,7 +20663,205 @@
 </p:sld>
 </file>
 
-<file path=ppt/slides/slide28.xml><?xml version="1.0" encoding="utf-8"?>
+<file path=ppt/slides/slide3.xml><?xml version="1.0" encoding="utf-8"?>
+<p:sld xmlns:a="http://schemas.openxmlformats.org/drawingml/2006/main" xmlns:r="http://schemas.openxmlformats.org/officeDocument/2006/relationships" xmlns:p="http://schemas.openxmlformats.org/presentationml/2006/main">
+  <p:cSld>
+    <p:spTree>
+      <p:nvGrpSpPr>
+        <p:cNvPr id="1" name=""/>
+        <p:cNvGrpSpPr/>
+        <p:nvPr/>
+      </p:nvGrpSpPr>
+      <p:grpSpPr>
+        <a:xfrm>
+          <a:off x="0" y="0"/>
+          <a:ext cx="0" cy="0"/>
+          <a:chOff x="0" y="0"/>
+          <a:chExt cx="0" cy="0"/>
+        </a:xfrm>
+      </p:grpSpPr>
+      <p:sp>
+        <p:nvSpPr>
+          <p:cNvPr id="3" name="Title 2">
+            <a:extLst>
+              <a:ext uri="{FF2B5EF4-FFF2-40B4-BE49-F238E27FC236}">
+                <a16:creationId xmlns:a16="http://schemas.microsoft.com/office/drawing/2014/main" id="{9323871C-7CA8-1448-8FFC-1AE6E1838941}"/>
+              </a:ext>
+            </a:extLst>
+          </p:cNvPr>
+          <p:cNvSpPr>
+            <a:spLocks noGrp="1"/>
+          </p:cNvSpPr>
+          <p:nvPr>
+            <p:ph type="title"/>
+          </p:nvPr>
+        </p:nvSpPr>
+        <p:spPr/>
+        <p:txBody>
+          <a:bodyPr/>
+          <a:lstStyle/>
+          <a:p>
+            <a:r>
+              <a:rPr lang="en-US" dirty="0"/>
+              <a:t>Reminders</a:t>
+            </a:r>
+          </a:p>
+        </p:txBody>
+      </p:sp>
+      <p:sp>
+        <p:nvSpPr>
+          <p:cNvPr id="5" name="Text Placeholder 4">
+            <a:extLst>
+              <a:ext uri="{FF2B5EF4-FFF2-40B4-BE49-F238E27FC236}">
+                <a16:creationId xmlns:a16="http://schemas.microsoft.com/office/drawing/2014/main" id="{F4E0A5F0-1D89-954D-91FB-596CD9E690F2}"/>
+              </a:ext>
+            </a:extLst>
+          </p:cNvPr>
+          <p:cNvSpPr>
+            <a:spLocks noGrp="1"/>
+          </p:cNvSpPr>
+          <p:nvPr>
+            <p:ph type="body" idx="1"/>
+          </p:nvPr>
+        </p:nvSpPr>
+        <p:spPr/>
+        <p:txBody>
+          <a:bodyPr/>
+          <a:lstStyle/>
+          <a:p>
+            <a:pPr marL="76200" indent="0">
+              <a:buNone/>
+            </a:pPr>
+            <a:r>
+              <a:rPr lang="en-US" b="1" dirty="0">
+                <a:solidFill>
+                  <a:schemeClr val="tx1">
+                    <a:lumMod val="75000"/>
+                    <a:lumOff val="25000"/>
+                  </a:schemeClr>
+                </a:solidFill>
+              </a:rPr>
+              <a:t>This week:</a:t>
+            </a:r>
+          </a:p>
+          <a:p>
+            <a:r>
+              <a:rPr lang="en-US" dirty="0">
+                <a:solidFill>
+                  <a:schemeClr val="tx1">
+                    <a:lumMod val="75000"/>
+                    <a:lumOff val="25000"/>
+                  </a:schemeClr>
+                </a:solidFill>
+              </a:rPr>
+              <a:t>Tomorrow: Group Check-Ins</a:t>
+            </a:r>
+          </a:p>
+          <a:p>
+            <a:r>
+              <a:rPr lang="en-US" dirty="0">
+                <a:solidFill>
+                  <a:schemeClr val="tx1">
+                    <a:lumMod val="75000"/>
+                    <a:lumOff val="25000"/>
+                  </a:schemeClr>
+                </a:solidFill>
+              </a:rPr>
+              <a:t>Thursday: Triage Q&amp;A + time for group work</a:t>
+            </a:r>
+            <a:endParaRPr lang="en-US" b="1" dirty="0">
+              <a:solidFill>
+                <a:schemeClr val="tx1">
+                  <a:lumMod val="75000"/>
+                  <a:lumOff val="25000"/>
+                </a:schemeClr>
+              </a:solidFill>
+            </a:endParaRPr>
+          </a:p>
+          <a:p>
+            <a:pPr marL="76200" indent="0">
+              <a:buNone/>
+            </a:pPr>
+            <a:endParaRPr lang="en-US" b="1" dirty="0">
+              <a:solidFill>
+                <a:schemeClr val="tx1">
+                  <a:lumMod val="75000"/>
+                  <a:lumOff val="25000"/>
+                </a:schemeClr>
+              </a:solidFill>
+            </a:endParaRPr>
+          </a:p>
+          <a:p>
+            <a:pPr marL="76200" indent="0">
+              <a:buNone/>
+            </a:pPr>
+            <a:r>
+              <a:rPr lang="en-US" b="1" dirty="0">
+                <a:solidFill>
+                  <a:schemeClr val="tx1">
+                    <a:lumMod val="75000"/>
+                    <a:lumOff val="25000"/>
+                  </a:schemeClr>
+                </a:solidFill>
+              </a:rPr>
+              <a:t>Coming up after fall break:</a:t>
+            </a:r>
+          </a:p>
+          <a:p>
+            <a:r>
+              <a:rPr lang="en-US" dirty="0">
+                <a:solidFill>
+                  <a:schemeClr val="tx1">
+                    <a:lumMod val="75000"/>
+                    <a:lumOff val="25000"/>
+                  </a:schemeClr>
+                </a:solidFill>
+              </a:rPr>
+              <a:t>Monday: Project Update 3</a:t>
+            </a:r>
+          </a:p>
+          <a:p>
+            <a:r>
+              <a:rPr lang="en-US" dirty="0">
+                <a:solidFill>
+                  <a:schemeClr val="tx1">
+                    <a:lumMod val="75000"/>
+                    <a:lumOff val="25000"/>
+                  </a:schemeClr>
+                </a:solidFill>
+              </a:rPr>
+              <a:t>Tuesday: Weekly Feedback Form</a:t>
+            </a:r>
+          </a:p>
+          <a:p>
+            <a:r>
+              <a:rPr lang="en-US" dirty="0">
+                <a:solidFill>
+                  <a:schemeClr val="tx1">
+                    <a:lumMod val="75000"/>
+                    <a:lumOff val="25000"/>
+                  </a:schemeClr>
+                </a:solidFill>
+              </a:rPr>
+              <a:t>Tuesday: Building Features in Triage</a:t>
+            </a:r>
+          </a:p>
+        </p:txBody>
+      </p:sp>
+    </p:spTree>
+    <p:extLst>
+      <p:ext uri="{BB962C8B-B14F-4D97-AF65-F5344CB8AC3E}">
+        <p14:creationId xmlns:p14="http://schemas.microsoft.com/office/powerpoint/2010/main" val="186046226"/>
+      </p:ext>
+    </p:extLst>
+  </p:cSld>
+  <p:clrMapOvr>
+    <a:masterClrMapping/>
+  </p:clrMapOvr>
+</p:sld>
+</file>
+
+<file path=ppt/slides/slide30.xml><?xml version="1.0" encoding="utf-8"?>
 <p:sld xmlns:a="http://schemas.openxmlformats.org/drawingml/2006/main" xmlns:r="http://schemas.openxmlformats.org/officeDocument/2006/relationships" xmlns:p="http://schemas.openxmlformats.org/presentationml/2006/main">
   <p:cSld>
     <p:spTree>
@@ -20764,7 +21153,7 @@
 </p:sld>
 </file>
 
-<file path=ppt/slides/slide29.xml><?xml version="1.0" encoding="utf-8"?>
+<file path=ppt/slides/slide31.xml><?xml version="1.0" encoding="utf-8"?>
 <p:sld xmlns:a="http://schemas.openxmlformats.org/drawingml/2006/main" xmlns:r="http://schemas.openxmlformats.org/officeDocument/2006/relationships" xmlns:p="http://schemas.openxmlformats.org/presentationml/2006/main">
   <p:cSld>
     <p:spTree>
@@ -20900,205 +21289,7 @@
 </p:sld>
 </file>
 
-<file path=ppt/slides/slide3.xml><?xml version="1.0" encoding="utf-8"?>
-<p:sld xmlns:a="http://schemas.openxmlformats.org/drawingml/2006/main" xmlns:r="http://schemas.openxmlformats.org/officeDocument/2006/relationships" xmlns:p="http://schemas.openxmlformats.org/presentationml/2006/main">
-  <p:cSld>
-    <p:spTree>
-      <p:nvGrpSpPr>
-        <p:cNvPr id="1" name=""/>
-        <p:cNvGrpSpPr/>
-        <p:nvPr/>
-      </p:nvGrpSpPr>
-      <p:grpSpPr>
-        <a:xfrm>
-          <a:off x="0" y="0"/>
-          <a:ext cx="0" cy="0"/>
-          <a:chOff x="0" y="0"/>
-          <a:chExt cx="0" cy="0"/>
-        </a:xfrm>
-      </p:grpSpPr>
-      <p:sp>
-        <p:nvSpPr>
-          <p:cNvPr id="3" name="Title 2">
-            <a:extLst>
-              <a:ext uri="{FF2B5EF4-FFF2-40B4-BE49-F238E27FC236}">
-                <a16:creationId xmlns:a16="http://schemas.microsoft.com/office/drawing/2014/main" id="{9323871C-7CA8-1448-8FFC-1AE6E1838941}"/>
-              </a:ext>
-            </a:extLst>
-          </p:cNvPr>
-          <p:cNvSpPr>
-            <a:spLocks noGrp="1"/>
-          </p:cNvSpPr>
-          <p:nvPr>
-            <p:ph type="title"/>
-          </p:nvPr>
-        </p:nvSpPr>
-        <p:spPr/>
-        <p:txBody>
-          <a:bodyPr/>
-          <a:lstStyle/>
-          <a:p>
-            <a:r>
-              <a:rPr lang="en-US" dirty="0"/>
-              <a:t>Reminders</a:t>
-            </a:r>
-          </a:p>
-        </p:txBody>
-      </p:sp>
-      <p:sp>
-        <p:nvSpPr>
-          <p:cNvPr id="5" name="Text Placeholder 4">
-            <a:extLst>
-              <a:ext uri="{FF2B5EF4-FFF2-40B4-BE49-F238E27FC236}">
-                <a16:creationId xmlns:a16="http://schemas.microsoft.com/office/drawing/2014/main" id="{F4E0A5F0-1D89-954D-91FB-596CD9E690F2}"/>
-              </a:ext>
-            </a:extLst>
-          </p:cNvPr>
-          <p:cNvSpPr>
-            <a:spLocks noGrp="1"/>
-          </p:cNvSpPr>
-          <p:nvPr>
-            <p:ph type="body" idx="1"/>
-          </p:nvPr>
-        </p:nvSpPr>
-        <p:spPr/>
-        <p:txBody>
-          <a:bodyPr/>
-          <a:lstStyle/>
-          <a:p>
-            <a:pPr marL="76200" indent="0">
-              <a:buNone/>
-            </a:pPr>
-            <a:r>
-              <a:rPr lang="en-US" b="1" dirty="0">
-                <a:solidFill>
-                  <a:schemeClr val="tx1">
-                    <a:lumMod val="75000"/>
-                    <a:lumOff val="25000"/>
-                  </a:schemeClr>
-                </a:solidFill>
-              </a:rPr>
-              <a:t>This week:</a:t>
-            </a:r>
-          </a:p>
-          <a:p>
-            <a:r>
-              <a:rPr lang="en-US" dirty="0">
-                <a:solidFill>
-                  <a:schemeClr val="tx1">
-                    <a:lumMod val="75000"/>
-                    <a:lumOff val="25000"/>
-                  </a:schemeClr>
-                </a:solidFill>
-              </a:rPr>
-              <a:t>Tomorrow: Group Check-Ins</a:t>
-            </a:r>
-          </a:p>
-          <a:p>
-            <a:r>
-              <a:rPr lang="en-US" dirty="0">
-                <a:solidFill>
-                  <a:schemeClr val="tx1">
-                    <a:lumMod val="75000"/>
-                    <a:lumOff val="25000"/>
-                  </a:schemeClr>
-                </a:solidFill>
-              </a:rPr>
-              <a:t>Thursday: Triage Q&amp;A + time for group work</a:t>
-            </a:r>
-            <a:endParaRPr lang="en-US" b="1" dirty="0">
-              <a:solidFill>
-                <a:schemeClr val="tx1">
-                  <a:lumMod val="75000"/>
-                  <a:lumOff val="25000"/>
-                </a:schemeClr>
-              </a:solidFill>
-            </a:endParaRPr>
-          </a:p>
-          <a:p>
-            <a:pPr marL="76200" indent="0">
-              <a:buNone/>
-            </a:pPr>
-            <a:endParaRPr lang="en-US" b="1" dirty="0">
-              <a:solidFill>
-                <a:schemeClr val="tx1">
-                  <a:lumMod val="75000"/>
-                  <a:lumOff val="25000"/>
-                </a:schemeClr>
-              </a:solidFill>
-            </a:endParaRPr>
-          </a:p>
-          <a:p>
-            <a:pPr marL="76200" indent="0">
-              <a:buNone/>
-            </a:pPr>
-            <a:r>
-              <a:rPr lang="en-US" b="1" dirty="0">
-                <a:solidFill>
-                  <a:schemeClr val="tx1">
-                    <a:lumMod val="75000"/>
-                    <a:lumOff val="25000"/>
-                  </a:schemeClr>
-                </a:solidFill>
-              </a:rPr>
-              <a:t>Coming up after fall break:</a:t>
-            </a:r>
-          </a:p>
-          <a:p>
-            <a:r>
-              <a:rPr lang="en-US" dirty="0">
-                <a:solidFill>
-                  <a:schemeClr val="tx1">
-                    <a:lumMod val="75000"/>
-                    <a:lumOff val="25000"/>
-                  </a:schemeClr>
-                </a:solidFill>
-              </a:rPr>
-              <a:t>Monday: Project Update 3</a:t>
-            </a:r>
-          </a:p>
-          <a:p>
-            <a:r>
-              <a:rPr lang="en-US" dirty="0">
-                <a:solidFill>
-                  <a:schemeClr val="tx1">
-                    <a:lumMod val="75000"/>
-                    <a:lumOff val="25000"/>
-                  </a:schemeClr>
-                </a:solidFill>
-              </a:rPr>
-              <a:t>Tuesday: Weekly Feedback Form</a:t>
-            </a:r>
-          </a:p>
-          <a:p>
-            <a:r>
-              <a:rPr lang="en-US" dirty="0">
-                <a:solidFill>
-                  <a:schemeClr val="tx1">
-                    <a:lumMod val="75000"/>
-                    <a:lumOff val="25000"/>
-                  </a:schemeClr>
-                </a:solidFill>
-              </a:rPr>
-              <a:t>Tuesday: Building Features in Triage</a:t>
-            </a:r>
-          </a:p>
-        </p:txBody>
-      </p:sp>
-    </p:spTree>
-    <p:extLst>
-      <p:ext uri="{BB962C8B-B14F-4D97-AF65-F5344CB8AC3E}">
-        <p14:creationId xmlns:p14="http://schemas.microsoft.com/office/powerpoint/2010/main" val="186046226"/>
-      </p:ext>
-    </p:extLst>
-  </p:cSld>
-  <p:clrMapOvr>
-    <a:masterClrMapping/>
-  </p:clrMapOvr>
-</p:sld>
-</file>
-
-<file path=ppt/slides/slide30.xml><?xml version="1.0" encoding="utf-8"?>
+<file path=ppt/slides/slide32.xml><?xml version="1.0" encoding="utf-8"?>
 <p:sld xmlns:a="http://schemas.openxmlformats.org/drawingml/2006/main" xmlns:r="http://schemas.openxmlformats.org/officeDocument/2006/relationships" xmlns:p="http://schemas.openxmlformats.org/presentationml/2006/main">
   <p:cSld>
     <p:spTree>
@@ -21278,7 +21469,7 @@
 </p:sld>
 </file>
 
-<file path=ppt/slides/slide31.xml><?xml version="1.0" encoding="utf-8"?>
+<file path=ppt/slides/slide33.xml><?xml version="1.0" encoding="utf-8"?>
 <p:sld xmlns:a="http://schemas.openxmlformats.org/drawingml/2006/main" xmlns:r="http://schemas.openxmlformats.org/officeDocument/2006/relationships" xmlns:p="http://schemas.openxmlformats.org/presentationml/2006/main">
   <p:cSld>
     <p:spTree>
@@ -21422,207 +21613,6 @@
     <p:extLst>
       <p:ext uri="{BB962C8B-B14F-4D97-AF65-F5344CB8AC3E}">
         <p14:creationId xmlns:p14="http://schemas.microsoft.com/office/powerpoint/2010/main" val="3227679789"/>
-      </p:ext>
-    </p:extLst>
-  </p:cSld>
-  <p:clrMapOvr>
-    <a:masterClrMapping/>
-  </p:clrMapOvr>
-</p:sld>
-</file>
-
-<file path=ppt/slides/slide32.xml><?xml version="1.0" encoding="utf-8"?>
-<p:sld xmlns:a="http://schemas.openxmlformats.org/drawingml/2006/main" xmlns:r="http://schemas.openxmlformats.org/officeDocument/2006/relationships" xmlns:p="http://schemas.openxmlformats.org/presentationml/2006/main">
-  <p:cSld>
-    <p:spTree>
-      <p:nvGrpSpPr>
-        <p:cNvPr id="1" name=""/>
-        <p:cNvGrpSpPr/>
-        <p:nvPr/>
-      </p:nvGrpSpPr>
-      <p:grpSpPr>
-        <a:xfrm>
-          <a:off x="0" y="0"/>
-          <a:ext cx="0" cy="0"/>
-          <a:chOff x="0" y="0"/>
-          <a:chExt cx="0" cy="0"/>
-        </a:xfrm>
-      </p:grpSpPr>
-      <p:sp>
-        <p:nvSpPr>
-          <p:cNvPr id="3" name="Title 2"/>
-          <p:cNvSpPr>
-            <a:spLocks noGrp="1"/>
-          </p:cNvSpPr>
-          <p:nvPr>
-            <p:ph type="title"/>
-          </p:nvPr>
-        </p:nvSpPr>
-        <p:spPr/>
-        <p:txBody>
-          <a:bodyPr/>
-          <a:lstStyle/>
-          <a:p>
-            <a:r>
-              <a:rPr lang="en-US" dirty="0"/>
-              <a:t>Feature Interactions</a:t>
-            </a:r>
-          </a:p>
-        </p:txBody>
-      </p:sp>
-      <p:sp>
-        <p:nvSpPr>
-          <p:cNvPr id="2" name="Content Placeholder 1"/>
-          <p:cNvSpPr>
-            <a:spLocks noGrp="1"/>
-          </p:cNvSpPr>
-          <p:nvPr>
-            <p:ph type="body" idx="1"/>
-          </p:nvPr>
-        </p:nvSpPr>
-        <p:spPr/>
-        <p:txBody>
-          <a:bodyPr/>
-          <a:lstStyle/>
-          <a:p>
-            <a:r>
-              <a:rPr lang="en-US" dirty="0"/>
-              <a:t>Generate features for combination of features</a:t>
-            </a:r>
-          </a:p>
-          <a:p>
-            <a:pPr lvl="1"/>
-            <a:r>
-              <a:rPr lang="en-US" dirty="0"/>
-              <a:t>Age x gender</a:t>
-            </a:r>
-          </a:p>
-          <a:p>
-            <a:pPr lvl="1"/>
-            <a:endParaRPr lang="en-US" dirty="0"/>
-          </a:p>
-          <a:p>
-            <a:r>
-              <a:rPr lang="en-US" dirty="0"/>
-              <a:t>Allows you to use linear models but still model non linear relationships</a:t>
-            </a:r>
-          </a:p>
-          <a:p>
-            <a:endParaRPr lang="en-US" dirty="0"/>
-          </a:p>
-          <a:p>
-            <a:r>
-              <a:rPr lang="en-US" dirty="0"/>
-              <a:t>Random Forests are one way of discovering useful interactions</a:t>
-            </a:r>
-          </a:p>
-        </p:txBody>
-      </p:sp>
-    </p:spTree>
-    <p:extLst>
-      <p:ext uri="{BB962C8B-B14F-4D97-AF65-F5344CB8AC3E}">
-        <p14:creationId xmlns:p14="http://schemas.microsoft.com/office/powerpoint/2010/main" val="2835794600"/>
-      </p:ext>
-    </p:extLst>
-  </p:cSld>
-  <p:clrMapOvr>
-    <a:masterClrMapping/>
-  </p:clrMapOvr>
-</p:sld>
-</file>
-
-<file path=ppt/slides/slide33.xml><?xml version="1.0" encoding="utf-8"?>
-<p:sld xmlns:a="http://schemas.openxmlformats.org/drawingml/2006/main" xmlns:r="http://schemas.openxmlformats.org/officeDocument/2006/relationships" xmlns:p="http://schemas.openxmlformats.org/presentationml/2006/main">
-  <p:cSld>
-    <p:spTree>
-      <p:nvGrpSpPr>
-        <p:cNvPr id="1" name=""/>
-        <p:cNvGrpSpPr/>
-        <p:nvPr/>
-      </p:nvGrpSpPr>
-      <p:grpSpPr>
-        <a:xfrm>
-          <a:off x="0" y="0"/>
-          <a:ext cx="0" cy="0"/>
-          <a:chOff x="0" y="0"/>
-          <a:chExt cx="0" cy="0"/>
-        </a:xfrm>
-      </p:grpSpPr>
-      <p:sp>
-        <p:nvSpPr>
-          <p:cNvPr id="3" name="Title 2"/>
-          <p:cNvSpPr>
-            <a:spLocks noGrp="1"/>
-          </p:cNvSpPr>
-          <p:nvPr>
-            <p:ph type="title"/>
-          </p:nvPr>
-        </p:nvSpPr>
-        <p:spPr>
-          <a:xfrm>
-            <a:off x="180821" y="293023"/>
-            <a:ext cx="11360700" cy="763500"/>
-          </a:xfrm>
-        </p:spPr>
-        <p:txBody>
-          <a:bodyPr/>
-          <a:lstStyle/>
-          <a:p>
-            <a:r>
-              <a:rPr lang="en-US" dirty="0"/>
-              <a:t>Features are also model-dependent</a:t>
-            </a:r>
-          </a:p>
-        </p:txBody>
-      </p:sp>
-      <p:sp>
-        <p:nvSpPr>
-          <p:cNvPr id="2" name="Content Placeholder 1"/>
-          <p:cNvSpPr>
-            <a:spLocks noGrp="1"/>
-          </p:cNvSpPr>
-          <p:nvPr>
-            <p:ph type="body" idx="1"/>
-          </p:nvPr>
-        </p:nvSpPr>
-        <p:spPr/>
-        <p:txBody>
-          <a:bodyPr/>
-          <a:lstStyle/>
-          <a:p>
-            <a:endParaRPr lang="en-US" dirty="0"/>
-          </a:p>
-          <a:p>
-            <a:pPr marL="76200" indent="0">
-              <a:buNone/>
-            </a:pPr>
-            <a:endParaRPr lang="en-US" dirty="0"/>
-          </a:p>
-          <a:p>
-            <a:r>
-              <a:rPr lang="en-US" dirty="0"/>
-              <a:t>Linear models may need … ?</a:t>
-            </a:r>
-            <a:br>
-              <a:rPr lang="en-US" dirty="0"/>
-            </a:br>
-            <a:endParaRPr lang="en-US" dirty="0"/>
-          </a:p>
-          <a:p>
-            <a:r>
-              <a:rPr lang="en-US" dirty="0"/>
-              <a:t>Non-linear models may need …?</a:t>
-            </a:r>
-          </a:p>
-          <a:p>
-            <a:endParaRPr lang="en-US" dirty="0"/>
-          </a:p>
-        </p:txBody>
-      </p:sp>
-    </p:spTree>
-    <p:extLst>
-      <p:ext uri="{BB962C8B-B14F-4D97-AF65-F5344CB8AC3E}">
-        <p14:creationId xmlns:p14="http://schemas.microsoft.com/office/powerpoint/2010/main" val="466559840"/>
       </p:ext>
     </p:extLst>
   </p:cSld>
@@ -21666,7 +21656,7 @@
           <a:p>
             <a:r>
               <a:rPr lang="en-US" dirty="0"/>
-              <a:t>Missing Values</a:t>
+              <a:t>Feature Interactions</a:t>
             </a:r>
           </a:p>
         </p:txBody>
@@ -21688,28 +21678,14 @@
           <a:p>
             <a:r>
               <a:rPr lang="en-US" dirty="0"/>
-              <a:t>Impute (Fill in) missing values based on why you think they may be missing and what you want the model to do with those missing values</a:t>
+              <a:t>Generate features for combination of features</a:t>
             </a:r>
           </a:p>
           <a:p>
             <a:pPr lvl="1"/>
             <a:r>
               <a:rPr lang="en-US" dirty="0"/>
-              <a:t>Missing Completely at Random</a:t>
-            </a:r>
-          </a:p>
-          <a:p>
-            <a:pPr lvl="1"/>
-            <a:r>
-              <a:rPr lang="en-US" dirty="0"/>
-              <a:t>Missing at Random</a:t>
-            </a:r>
-          </a:p>
-          <a:p>
-            <a:pPr lvl="1"/>
-            <a:r>
-              <a:rPr lang="en-US" dirty="0"/>
-              <a:t>Missing Not at Random</a:t>
+              <a:t>Age x gender</a:t>
             </a:r>
           </a:p>
           <a:p>
@@ -21719,15 +21695,16 @@
           <a:p>
             <a:r>
               <a:rPr lang="en-US" dirty="0"/>
-              <a:t>Typically, also add binary feature (dummy) for missing vs not missing in case “</a:t>
-            </a:r>
-            <a:r>
-              <a:rPr lang="en-US" dirty="0" err="1"/>
-              <a:t>missingness</a:t>
-            </a:r>
+              <a:t>Allows you to use linear models but still model non linear relationships</a:t>
+            </a:r>
+          </a:p>
+          <a:p>
+            <a:endParaRPr lang="en-US" dirty="0"/>
+          </a:p>
+          <a:p>
             <a:r>
               <a:rPr lang="en-US" dirty="0"/>
-              <a:t>” is predictive of the outcome</a:t>
+              <a:t>Random Forests are one way of discovering useful interactions</a:t>
             </a:r>
           </a:p>
         </p:txBody>
@@ -21735,7 +21712,7 @@
     </p:spTree>
     <p:extLst>
       <p:ext uri="{BB962C8B-B14F-4D97-AF65-F5344CB8AC3E}">
-        <p14:creationId xmlns:p14="http://schemas.microsoft.com/office/powerpoint/2010/main" val="3357099955"/>
+        <p14:creationId xmlns:p14="http://schemas.microsoft.com/office/powerpoint/2010/main" val="2835794600"/>
       </p:ext>
     </p:extLst>
   </p:cSld>
@@ -21772,14 +21749,19 @@
             <p:ph type="title"/>
           </p:nvPr>
         </p:nvSpPr>
-        <p:spPr/>
+        <p:spPr>
+          <a:xfrm>
+            <a:off x="180821" y="293023"/>
+            <a:ext cx="11360700" cy="763500"/>
+          </a:xfrm>
+        </p:spPr>
         <p:txBody>
           <a:bodyPr/>
           <a:lstStyle/>
           <a:p>
             <a:r>
               <a:rPr lang="en-US" dirty="0"/>
-              <a:t>Imputing Missing Values: Some Options</a:t>
+              <a:t>Features are also model-dependent</a:t>
             </a:r>
           </a:p>
         </p:txBody>
@@ -21794,28 +21776,23 @@
             <p:ph type="body" idx="1"/>
           </p:nvPr>
         </p:nvSpPr>
-        <p:spPr>
-          <a:xfrm>
-            <a:off x="415600" y="1601179"/>
-            <a:ext cx="11360700" cy="4555200"/>
-          </a:xfrm>
-        </p:spPr>
+        <p:spPr/>
         <p:txBody>
           <a:bodyPr/>
           <a:lstStyle/>
           <a:p>
+            <a:endParaRPr lang="en-US" dirty="0"/>
+          </a:p>
+          <a:p>
+            <a:pPr marL="76200" indent="0">
+              <a:buNone/>
+            </a:pPr>
+            <a:endParaRPr lang="en-US" dirty="0"/>
+          </a:p>
+          <a:p>
             <a:r>
               <a:rPr lang="en-US" dirty="0"/>
-              <a:t>Nothing?</a:t>
-            </a:r>
-          </a:p>
-          <a:p>
-            <a:endParaRPr lang="en-US" dirty="0"/>
-          </a:p>
-          <a:p>
-            <a:r>
-              <a:rPr lang="en-US" dirty="0"/>
-              <a:t>Central Tendency: Mean / Median / Mode</a:t>
+              <a:t>Linear models may need … ?</a:t>
             </a:r>
             <a:br>
               <a:rPr lang="en-US" dirty="0"/>
@@ -21825,49 +21802,10 @@
           <a:p>
             <a:r>
               <a:rPr lang="en-US" dirty="0"/>
-              <a:t>ML methods that handle missing data (e.g., </a:t>
-            </a:r>
-            <a:r>
-              <a:rPr lang="en-US" dirty="0" err="1"/>
-              <a:t>xgboost</a:t>
-            </a:r>
-            <a:r>
-              <a:rPr lang="en-US" dirty="0"/>
-              <a:t>)</a:t>
-            </a:r>
-          </a:p>
-          <a:p>
-            <a:endParaRPr lang="en-US" dirty="0"/>
-          </a:p>
-          <a:p>
-            <a:r>
-              <a:rPr lang="en-US" dirty="0"/>
-              <a:t>Others</a:t>
-            </a:r>
-          </a:p>
-          <a:p>
-            <a:pPr lvl="1"/>
-            <a:r>
-              <a:rPr lang="en-US" dirty="0"/>
-              <a:t>Regression</a:t>
-            </a:r>
-          </a:p>
-          <a:p>
-            <a:pPr lvl="1"/>
-            <a:r>
-              <a:rPr lang="en-US" dirty="0"/>
-              <a:t>k-Nearest Neighbor</a:t>
-            </a:r>
-          </a:p>
-          <a:p>
-            <a:pPr lvl="1"/>
-            <a:r>
-              <a:rPr lang="en-US" dirty="0"/>
-              <a:t>Multiple Imputation</a:t>
-            </a:r>
-            <a:br>
-              <a:rPr lang="en-US" dirty="0"/>
-            </a:br>
+              <a:t>Non-linear models may need …?</a:t>
+            </a:r>
+          </a:p>
+          <a:p>
             <a:endParaRPr lang="en-US" dirty="0"/>
           </a:p>
         </p:txBody>
@@ -21875,7 +21813,7 @@
     </p:spTree>
     <p:extLst>
       <p:ext uri="{BB962C8B-B14F-4D97-AF65-F5344CB8AC3E}">
-        <p14:creationId xmlns:p14="http://schemas.microsoft.com/office/powerpoint/2010/main" val="1168414506"/>
+        <p14:creationId xmlns:p14="http://schemas.microsoft.com/office/powerpoint/2010/main" val="466559840"/>
       </p:ext>
     </p:extLst>
   </p:cSld>
@@ -21904,7 +21842,13 @@
       </p:grpSpPr>
       <p:sp>
         <p:nvSpPr>
-          <p:cNvPr id="3" name="Title 2"/>
+          <p:cNvPr id="2" name="Title 1">
+            <a:extLst>
+              <a:ext uri="{FF2B5EF4-FFF2-40B4-BE49-F238E27FC236}">
+                <a16:creationId xmlns:a16="http://schemas.microsoft.com/office/drawing/2014/main" id="{938AA165-5DCB-7DB9-AC5A-D4F918B14CB0}"/>
+              </a:ext>
+            </a:extLst>
+          </p:cNvPr>
           <p:cNvSpPr>
             <a:spLocks noGrp="1"/>
           </p:cNvSpPr>
@@ -21919,14 +21863,20 @@
           <a:p>
             <a:r>
               <a:rPr lang="en-US" dirty="0"/>
-              <a:t>Imputing – Central Tendency</a:t>
+              <a:t>Dealing with missing values</a:t>
             </a:r>
           </a:p>
         </p:txBody>
       </p:sp>
       <p:sp>
         <p:nvSpPr>
-          <p:cNvPr id="2" name="Content Placeholder 1"/>
+          <p:cNvPr id="3" name="Text Placeholder 2">
+            <a:extLst>
+              <a:ext uri="{FF2B5EF4-FFF2-40B4-BE49-F238E27FC236}">
+                <a16:creationId xmlns:a16="http://schemas.microsoft.com/office/drawing/2014/main" id="{8092796F-F84B-DA4C-F705-D72C51848CBA}"/>
+              </a:ext>
+            </a:extLst>
+          </p:cNvPr>
           <p:cNvSpPr>
             <a:spLocks noGrp="1"/>
           </p:cNvSpPr>
@@ -21939,131 +21889,20 @@
           <a:bodyPr/>
           <a:lstStyle/>
           <a:p>
-            <a:r>
-              <a:rPr lang="en-US" dirty="0"/>
-              <a:t>Simple to calculate and computationally fast</a:t>
-            </a:r>
-            <a:br>
-              <a:rPr lang="en-US" dirty="0"/>
-            </a:br>
-            <a:endParaRPr lang="en-US" dirty="0"/>
-          </a:p>
-          <a:p>
-            <a:r>
-              <a:rPr lang="en-US" dirty="0"/>
-              <a:t>Often a reasonable starting point</a:t>
-            </a:r>
-            <a:br>
-              <a:rPr lang="en-US" dirty="0"/>
-            </a:br>
-            <a:endParaRPr lang="en-US" dirty="0"/>
-          </a:p>
-          <a:p>
-            <a:r>
-              <a:rPr lang="en-US" dirty="0"/>
-              <a:t>May be able to capture more nuance by using other, correlated data to help fill in missing values</a:t>
-            </a:r>
-            <a:br>
-              <a:rPr lang="en-US" dirty="0"/>
-            </a:br>
-            <a:endParaRPr lang="en-US" dirty="0"/>
-          </a:p>
-          <a:p>
-            <a:r>
-              <a:rPr lang="en-US" dirty="0"/>
-              <a:t>Under-represents variance/covariance of data</a:t>
-            </a:r>
+            <a:endParaRPr lang="en-US"/>
           </a:p>
         </p:txBody>
       </p:sp>
     </p:spTree>
     <p:extLst>
       <p:ext uri="{BB962C8B-B14F-4D97-AF65-F5344CB8AC3E}">
-        <p14:creationId xmlns:p14="http://schemas.microsoft.com/office/powerpoint/2010/main" val="2396215195"/>
+        <p14:creationId xmlns:p14="http://schemas.microsoft.com/office/powerpoint/2010/main" val="2703396273"/>
       </p:ext>
     </p:extLst>
   </p:cSld>
   <p:clrMapOvr>
     <a:masterClrMapping/>
   </p:clrMapOvr>
-  <p:timing>
-    <p:tnLst>
-      <p:par>
-        <p:cTn id="1" dur="indefinite" restart="never" nodeType="tmRoot">
-          <p:childTnLst>
-            <p:seq concurrent="1" nextAc="seek">
-              <p:cTn id="2" dur="indefinite" nodeType="mainSeq">
-                <p:childTnLst>
-                  <p:par>
-                    <p:cTn id="3" fill="hold">
-                      <p:stCondLst>
-                        <p:cond delay="indefinite"/>
-                      </p:stCondLst>
-                      <p:childTnLst>
-                        <p:par>
-                          <p:cTn id="4" fill="hold">
-                            <p:stCondLst>
-                              <p:cond delay="0"/>
-                            </p:stCondLst>
-                            <p:childTnLst>
-                              <p:par>
-                                <p:cTn id="5" presetID="1" presetClass="entr" presetSubtype="0" fill="hold" grpId="0" nodeType="clickEffect">
-                                  <p:stCondLst>
-                                    <p:cond delay="0"/>
-                                  </p:stCondLst>
-                                  <p:childTnLst>
-                                    <p:set>
-                                      <p:cBhvr>
-                                        <p:cTn id="6" dur="1" fill="hold">
-                                          <p:stCondLst>
-                                            <p:cond delay="0"/>
-                                          </p:stCondLst>
-                                        </p:cTn>
-                                        <p:tgtEl>
-                                          <p:spTgt spid="2"/>
-                                        </p:tgtEl>
-                                        <p:attrNameLst>
-                                          <p:attrName>style.visibility</p:attrName>
-                                        </p:attrNameLst>
-                                      </p:cBhvr>
-                                      <p:to>
-                                        <p:strVal val="visible"/>
-                                      </p:to>
-                                    </p:set>
-                                  </p:childTnLst>
-                                </p:cTn>
-                              </p:par>
-                            </p:childTnLst>
-                          </p:cTn>
-                        </p:par>
-                      </p:childTnLst>
-                    </p:cTn>
-                  </p:par>
-                </p:childTnLst>
-              </p:cTn>
-              <p:prevCondLst>
-                <p:cond evt="onPrev" delay="0">
-                  <p:tgtEl>
-                    <p:sldTgt/>
-                  </p:tgtEl>
-                </p:cond>
-              </p:prevCondLst>
-              <p:nextCondLst>
-                <p:cond evt="onNext" delay="0">
-                  <p:tgtEl>
-                    <p:sldTgt/>
-                  </p:tgtEl>
-                </p:cond>
-              </p:nextCondLst>
-            </p:seq>
-          </p:childTnLst>
-        </p:cTn>
-      </p:par>
-    </p:tnLst>
-    <p:bldLst>
-      <p:bldP spid="2" grpId="0"/>
-    </p:bldLst>
-  </p:timing>
 </p:sld>
 </file>
 
@@ -22101,7 +21940,7 @@
           <a:p>
             <a:r>
               <a:rPr lang="en-US" dirty="0"/>
-              <a:t>Imputing – ML Methods with Missing Data Handling</a:t>
+              <a:t>Missing Values</a:t>
             </a:r>
           </a:p>
         </p:txBody>
@@ -22123,35 +21962,46 @@
           <a:p>
             <a:r>
               <a:rPr lang="en-US" dirty="0"/>
-              <a:t>Some models have built-in handling of missing data, such as </a:t>
+              <a:t>Impute (Fill in) missing values based on why you think they may be missing and what you want the model to do with those missing values</a:t>
+            </a:r>
+          </a:p>
+          <a:p>
+            <a:pPr lvl="1"/>
+            <a:r>
+              <a:rPr lang="en-US" dirty="0"/>
+              <a:t>Missing Completely at Random</a:t>
+            </a:r>
+          </a:p>
+          <a:p>
+            <a:pPr lvl="1"/>
+            <a:r>
+              <a:rPr lang="en-US" dirty="0"/>
+              <a:t>Missing at Random</a:t>
+            </a:r>
+          </a:p>
+          <a:p>
+            <a:pPr lvl="1"/>
+            <a:r>
+              <a:rPr lang="en-US" dirty="0"/>
+              <a:t>Missing Not at Random</a:t>
+            </a:r>
+          </a:p>
+          <a:p>
+            <a:pPr lvl="1"/>
+            <a:endParaRPr lang="en-US" dirty="0"/>
+          </a:p>
+          <a:p>
+            <a:r>
+              <a:rPr lang="en-US" dirty="0"/>
+              <a:t>Typically, also add binary feature (dummy) for missing vs not missing in case “</a:t>
             </a:r>
             <a:r>
               <a:rPr lang="en-US" dirty="0" err="1"/>
-              <a:t>xgboost</a:t>
+              <a:t>missingness</a:t>
             </a:r>
             <a:r>
               <a:rPr lang="en-US" dirty="0"/>
-              <a:t> (which decides which direction to send missing values at each split)</a:t>
-            </a:r>
-            <a:br>
-              <a:rPr lang="en-US" dirty="0"/>
-            </a:br>
-            <a:endParaRPr lang="en-US" dirty="0"/>
-          </a:p>
-          <a:p>
-            <a:r>
-              <a:rPr lang="en-US" dirty="0"/>
-              <a:t>May not be the best modeling method for your problem, don’t want to be locked into certain type of model</a:t>
-            </a:r>
-            <a:br>
-              <a:rPr lang="en-US" dirty="0"/>
-            </a:br>
-            <a:endParaRPr lang="en-US" dirty="0"/>
-          </a:p>
-          <a:p>
-            <a:r>
-              <a:rPr lang="en-US" dirty="0"/>
-              <a:t>Nevertheless, worth exploring performance of other imputation methods even when using these models as well</a:t>
+              <a:t>” is predictive of the outcome</a:t>
             </a:r>
           </a:p>
         </p:txBody>
@@ -22159,91 +22009,13 @@
     </p:spTree>
     <p:extLst>
       <p:ext uri="{BB962C8B-B14F-4D97-AF65-F5344CB8AC3E}">
-        <p14:creationId xmlns:p14="http://schemas.microsoft.com/office/powerpoint/2010/main" val="2521997284"/>
+        <p14:creationId xmlns:p14="http://schemas.microsoft.com/office/powerpoint/2010/main" val="3357099955"/>
       </p:ext>
     </p:extLst>
   </p:cSld>
   <p:clrMapOvr>
     <a:masterClrMapping/>
   </p:clrMapOvr>
-  <p:timing>
-    <p:tnLst>
-      <p:par>
-        <p:cTn id="1" dur="indefinite" restart="never" nodeType="tmRoot">
-          <p:childTnLst>
-            <p:seq concurrent="1" nextAc="seek">
-              <p:cTn id="2" dur="indefinite" nodeType="mainSeq">
-                <p:childTnLst>
-                  <p:par>
-                    <p:cTn id="3" fill="hold">
-                      <p:stCondLst>
-                        <p:cond delay="indefinite"/>
-                      </p:stCondLst>
-                      <p:childTnLst>
-                        <p:par>
-                          <p:cTn id="4" fill="hold">
-                            <p:stCondLst>
-                              <p:cond delay="0"/>
-                            </p:stCondLst>
-                            <p:childTnLst>
-                              <p:par>
-                                <p:cTn id="5" presetID="1" presetClass="entr" presetSubtype="0" fill="hold" grpId="0" nodeType="clickEffect">
-                                  <p:stCondLst>
-                                    <p:cond delay="0"/>
-                                  </p:stCondLst>
-                                  <p:childTnLst>
-                                    <p:set>
-                                      <p:cBhvr>
-                                        <p:cTn id="6" dur="1" fill="hold">
-                                          <p:stCondLst>
-                                            <p:cond delay="0"/>
-                                          </p:stCondLst>
-                                        </p:cTn>
-                                        <p:tgtEl>
-                                          <p:spTgt spid="2"/>
-                                        </p:tgtEl>
-                                        <p:attrNameLst>
-                                          <p:attrName>style.visibility</p:attrName>
-                                        </p:attrNameLst>
-                                      </p:cBhvr>
-                                      <p:to>
-                                        <p:strVal val="visible"/>
-                                      </p:to>
-                                    </p:set>
-                                  </p:childTnLst>
-                                </p:cTn>
-                              </p:par>
-                            </p:childTnLst>
-                          </p:cTn>
-                        </p:par>
-                      </p:childTnLst>
-                    </p:cTn>
-                  </p:par>
-                </p:childTnLst>
-              </p:cTn>
-              <p:prevCondLst>
-                <p:cond evt="onPrev" delay="0">
-                  <p:tgtEl>
-                    <p:sldTgt/>
-                  </p:tgtEl>
-                </p:cond>
-              </p:prevCondLst>
-              <p:nextCondLst>
-                <p:cond evt="onNext" delay="0">
-                  <p:tgtEl>
-                    <p:sldTgt/>
-                  </p:tgtEl>
-                </p:cond>
-              </p:nextCondLst>
-            </p:seq>
-          </p:childTnLst>
-        </p:cTn>
-      </p:par>
-    </p:tnLst>
-    <p:bldLst>
-      <p:bldP spid="2" grpId="0"/>
-    </p:bldLst>
-  </p:timing>
 </p:sld>
 </file>
 
@@ -22281,7 +22053,7 @@
           <a:p>
             <a:r>
               <a:rPr lang="en-US" dirty="0"/>
-              <a:t>Imputing – Regression</a:t>
+              <a:t>Imputing Missing Values: Some Options</a:t>
             </a:r>
           </a:p>
         </p:txBody>
@@ -22296,14 +22068,28 @@
             <p:ph type="body" idx="1"/>
           </p:nvPr>
         </p:nvSpPr>
-        <p:spPr/>
+        <p:spPr>
+          <a:xfrm>
+            <a:off x="415600" y="1601179"/>
+            <a:ext cx="11360700" cy="4555200"/>
+          </a:xfrm>
+        </p:spPr>
         <p:txBody>
           <a:bodyPr/>
           <a:lstStyle/>
           <a:p>
             <a:r>
               <a:rPr lang="en-US" dirty="0"/>
-              <a:t>Make use of information in correlated features, more flexible than central tendency</a:t>
+              <a:t>Nothing?</a:t>
+            </a:r>
+          </a:p>
+          <a:p>
+            <a:endParaRPr lang="en-US" dirty="0"/>
+          </a:p>
+          <a:p>
+            <a:r>
+              <a:rPr lang="en-US" dirty="0"/>
+              <a:t>Central Tendency: Mean / Median / Mode</a:t>
             </a:r>
             <a:br>
               <a:rPr lang="en-US" dirty="0"/>
@@ -22313,119 +22099,63 @@
           <a:p>
             <a:r>
               <a:rPr lang="en-US" dirty="0"/>
-              <a:t>However, may not be flexible enough to capture complex relationships or interactions</a:t>
+              <a:t>ML methods that handle missing data (e.g., </a:t>
+            </a:r>
+            <a:r>
+              <a:rPr lang="en-US" dirty="0" err="1"/>
+              <a:t>xgboost</a:t>
+            </a:r>
+            <a:r>
+              <a:rPr lang="en-US" dirty="0"/>
+              <a:t>)</a:t>
+            </a:r>
+          </a:p>
+          <a:p>
+            <a:endParaRPr lang="en-US" dirty="0"/>
+          </a:p>
+          <a:p>
+            <a:r>
+              <a:rPr lang="en-US" dirty="0"/>
+              <a:t>Others</a:t>
+            </a:r>
+          </a:p>
+          <a:p>
+            <a:pPr lvl="1"/>
+            <a:r>
+              <a:rPr lang="en-US" dirty="0"/>
+              <a:t>Regression</a:t>
+            </a:r>
+          </a:p>
+          <a:p>
+            <a:pPr lvl="1"/>
+            <a:r>
+              <a:rPr lang="en-US" dirty="0"/>
+              <a:t>k-Nearest Neighbor</a:t>
+            </a:r>
+          </a:p>
+          <a:p>
+            <a:pPr lvl="1"/>
+            <a:r>
+              <a:rPr lang="en-US" dirty="0"/>
+              <a:t>Multiple Imputation</a:t>
             </a:r>
             <a:br>
               <a:rPr lang="en-US" dirty="0"/>
             </a:br>
             <a:endParaRPr lang="en-US" dirty="0"/>
-          </a:p>
-          <a:p>
-            <a:r>
-              <a:rPr lang="en-US" dirty="0"/>
-              <a:t>May be somewhat more computationally expensive </a:t>
-            </a:r>
-            <a:br>
-              <a:rPr lang="en-US" dirty="0"/>
-            </a:br>
-            <a:endParaRPr lang="en-US" dirty="0"/>
-          </a:p>
-          <a:p>
-            <a:r>
-              <a:rPr lang="en-US" dirty="0"/>
-              <a:t>Generally will still underestimate variation in data</a:t>
-            </a:r>
           </a:p>
         </p:txBody>
       </p:sp>
     </p:spTree>
     <p:extLst>
       <p:ext uri="{BB962C8B-B14F-4D97-AF65-F5344CB8AC3E}">
-        <p14:creationId xmlns:p14="http://schemas.microsoft.com/office/powerpoint/2010/main" val="3808227576"/>
+        <p14:creationId xmlns:p14="http://schemas.microsoft.com/office/powerpoint/2010/main" val="1168414506"/>
       </p:ext>
     </p:extLst>
   </p:cSld>
   <p:clrMapOvr>
     <a:masterClrMapping/>
   </p:clrMapOvr>
-  <p:timing>
-    <p:tnLst>
-      <p:par>
-        <p:cTn id="1" dur="indefinite" restart="never" nodeType="tmRoot">
-          <p:childTnLst>
-            <p:seq concurrent="1" nextAc="seek">
-              <p:cTn id="2" dur="indefinite" nodeType="mainSeq">
-                <p:childTnLst>
-                  <p:par>
-                    <p:cTn id="3" fill="hold">
-                      <p:stCondLst>
-                        <p:cond delay="indefinite"/>
-                      </p:stCondLst>
-                      <p:childTnLst>
-                        <p:par>
-                          <p:cTn id="4" fill="hold">
-                            <p:stCondLst>
-                              <p:cond delay="0"/>
-                            </p:stCondLst>
-                            <p:childTnLst>
-                              <p:par>
-                                <p:cTn id="5" presetID="1" presetClass="entr" presetSubtype="0" fill="hold" grpId="0" nodeType="clickEffect">
-                                  <p:stCondLst>
-                                    <p:cond delay="0"/>
-                                  </p:stCondLst>
-                                  <p:childTnLst>
-                                    <p:set>
-                                      <p:cBhvr>
-                                        <p:cTn id="6" dur="1" fill="hold">
-                                          <p:stCondLst>
-                                            <p:cond delay="0"/>
-                                          </p:stCondLst>
-                                        </p:cTn>
-                                        <p:tgtEl>
-                                          <p:spTgt spid="2"/>
-                                        </p:tgtEl>
-                                        <p:attrNameLst>
-                                          <p:attrName>style.visibility</p:attrName>
-                                        </p:attrNameLst>
-                                      </p:cBhvr>
-                                      <p:to>
-                                        <p:strVal val="visible"/>
-                                      </p:to>
-                                    </p:set>
-                                  </p:childTnLst>
-                                </p:cTn>
-                              </p:par>
-                            </p:childTnLst>
-                          </p:cTn>
-                        </p:par>
-                      </p:childTnLst>
-                    </p:cTn>
-                  </p:par>
-                </p:childTnLst>
-              </p:cTn>
-              <p:prevCondLst>
-                <p:cond evt="onPrev" delay="0">
-                  <p:tgtEl>
-                    <p:sldTgt/>
-                  </p:tgtEl>
-                </p:cond>
-              </p:prevCondLst>
-              <p:nextCondLst>
-                <p:cond evt="onNext" delay="0">
-                  <p:tgtEl>
-                    <p:sldTgt/>
-                  </p:tgtEl>
-                </p:cond>
-              </p:nextCondLst>
-            </p:seq>
-          </p:childTnLst>
-        </p:cTn>
-      </p:par>
-    </p:tnLst>
-    <p:bldLst>
-      <p:bldP spid="2" grpId="0"/>
-    </p:bldLst>
-  </p:timing>
 </p:sld>
 </file>
 
@@ -22463,7 +22193,7 @@
           <a:p>
             <a:r>
               <a:rPr lang="en-US" dirty="0"/>
-              <a:t>Imputing – k-Nearest Neighbor</a:t>
+              <a:t>Imputing – Central Tendency</a:t>
             </a:r>
           </a:p>
         </p:txBody>
@@ -22485,7 +22215,7 @@
           <a:p>
             <a:r>
               <a:rPr lang="en-US" dirty="0"/>
-              <a:t>More flexible option, capture more complexity in relationships in data</a:t>
+              <a:t>Simple to calculate and computationally fast</a:t>
             </a:r>
             <a:br>
               <a:rPr lang="en-US" dirty="0"/>
@@ -22495,7 +22225,7 @@
           <a:p>
             <a:r>
               <a:rPr lang="en-US" dirty="0"/>
-              <a:t>Difficult to choose appropriate distance metric, value of k</a:t>
+              <a:t>Often a reasonable starting point</a:t>
             </a:r>
             <a:br>
               <a:rPr lang="en-US" dirty="0"/>
@@ -22505,7 +22235,7 @@
           <a:p>
             <a:r>
               <a:rPr lang="en-US" dirty="0"/>
-              <a:t>More computationally expensive than other methods of imputation</a:t>
+              <a:t>May be able to capture more nuance by using other, correlated data to help fill in missing values</a:t>
             </a:r>
             <a:br>
               <a:rPr lang="en-US" dirty="0"/>
@@ -22515,7 +22245,7 @@
           <a:p>
             <a:r>
               <a:rPr lang="en-US" dirty="0"/>
-              <a:t>Requires entire training set to calculate imputed values for new examples</a:t>
+              <a:t>Under-represents variance/covariance of data</a:t>
             </a:r>
           </a:p>
         </p:txBody>
@@ -22523,7 +22253,7 @@
     </p:spTree>
     <p:extLst>
       <p:ext uri="{BB962C8B-B14F-4D97-AF65-F5344CB8AC3E}">
-        <p14:creationId xmlns:p14="http://schemas.microsoft.com/office/powerpoint/2010/main" val="3729575760"/>
+        <p14:creationId xmlns:p14="http://schemas.microsoft.com/office/powerpoint/2010/main" val="2396215195"/>
       </p:ext>
     </p:extLst>
   </p:cSld>
@@ -22776,7 +22506,7 @@
           <a:p>
             <a:r>
               <a:rPr lang="en-US" dirty="0"/>
-              <a:t>Imputing – Multiple Imputation</a:t>
+              <a:t>Imputing – ML Methods with Missing Data Handling</a:t>
             </a:r>
           </a:p>
         </p:txBody>
@@ -22798,7 +22528,15 @@
           <a:p>
             <a:r>
               <a:rPr lang="en-US" dirty="0"/>
-              <a:t>Create multiple “complete” datasets with different values using different regression models</a:t>
+              <a:t>Some models have built-in handling of missing data, such as </a:t>
+            </a:r>
+            <a:r>
+              <a:rPr lang="en-US" dirty="0" err="1"/>
+              <a:t>xgboost</a:t>
+            </a:r>
+            <a:r>
+              <a:rPr lang="en-US" dirty="0"/>
+              <a:t> (which decides which direction to send missing values at each split)</a:t>
             </a:r>
             <a:br>
               <a:rPr lang="en-US" dirty="0"/>
@@ -22808,7 +22546,7 @@
           <a:p>
             <a:r>
               <a:rPr lang="en-US" dirty="0"/>
-              <a:t>Helps analyze sensitivity to handling of missing values</a:t>
+              <a:t>May not be the best modeling method for your problem, don’t want to be locked into certain type of model</a:t>
             </a:r>
             <a:br>
               <a:rPr lang="en-US" dirty="0"/>
@@ -22818,17 +22556,7 @@
           <a:p>
             <a:r>
               <a:rPr lang="en-US" dirty="0"/>
-              <a:t>Much more computationally expensive, both for imputation and downstream modeling</a:t>
-            </a:r>
-            <a:br>
-              <a:rPr lang="en-US" dirty="0"/>
-            </a:br>
-            <a:endParaRPr lang="en-US" dirty="0"/>
-          </a:p>
-          <a:p>
-            <a:r>
-              <a:rPr lang="en-US" dirty="0"/>
-              <a:t>Can provide better representation of variability in data</a:t>
+              <a:t>Nevertheless, worth exploring performance of other imputation methods even when using these models as well</a:t>
             </a:r>
           </a:p>
         </p:txBody>
@@ -22836,7 +22564,7 @@
     </p:spTree>
     <p:extLst>
       <p:ext uri="{BB962C8B-B14F-4D97-AF65-F5344CB8AC3E}">
-        <p14:creationId xmlns:p14="http://schemas.microsoft.com/office/powerpoint/2010/main" val="2069799902"/>
+        <p14:creationId xmlns:p14="http://schemas.microsoft.com/office/powerpoint/2010/main" val="2521997284"/>
       </p:ext>
     </p:extLst>
   </p:cSld>
@@ -22943,6 +22671,552 @@
       </p:grpSpPr>
       <p:sp>
         <p:nvSpPr>
+          <p:cNvPr id="3" name="Title 2"/>
+          <p:cNvSpPr>
+            <a:spLocks noGrp="1"/>
+          </p:cNvSpPr>
+          <p:nvPr>
+            <p:ph type="title"/>
+          </p:nvPr>
+        </p:nvSpPr>
+        <p:spPr/>
+        <p:txBody>
+          <a:bodyPr/>
+          <a:lstStyle/>
+          <a:p>
+            <a:r>
+              <a:rPr lang="en-US" dirty="0"/>
+              <a:t>Imputing – Regression</a:t>
+            </a:r>
+          </a:p>
+        </p:txBody>
+      </p:sp>
+      <p:sp>
+        <p:nvSpPr>
+          <p:cNvPr id="2" name="Content Placeholder 1"/>
+          <p:cNvSpPr>
+            <a:spLocks noGrp="1"/>
+          </p:cNvSpPr>
+          <p:nvPr>
+            <p:ph type="body" idx="1"/>
+          </p:nvPr>
+        </p:nvSpPr>
+        <p:spPr/>
+        <p:txBody>
+          <a:bodyPr/>
+          <a:lstStyle/>
+          <a:p>
+            <a:r>
+              <a:rPr lang="en-US" dirty="0"/>
+              <a:t>Make use of information in correlated features, more flexible than central tendency</a:t>
+            </a:r>
+            <a:br>
+              <a:rPr lang="en-US" dirty="0"/>
+            </a:br>
+            <a:endParaRPr lang="en-US" dirty="0"/>
+          </a:p>
+          <a:p>
+            <a:r>
+              <a:rPr lang="en-US" dirty="0"/>
+              <a:t>However, may not be flexible enough to capture complex relationships or interactions</a:t>
+            </a:r>
+            <a:br>
+              <a:rPr lang="en-US" dirty="0"/>
+            </a:br>
+            <a:endParaRPr lang="en-US" dirty="0"/>
+          </a:p>
+          <a:p>
+            <a:r>
+              <a:rPr lang="en-US" dirty="0"/>
+              <a:t>May be somewhat more computationally expensive </a:t>
+            </a:r>
+            <a:br>
+              <a:rPr lang="en-US" dirty="0"/>
+            </a:br>
+            <a:endParaRPr lang="en-US" dirty="0"/>
+          </a:p>
+          <a:p>
+            <a:r>
+              <a:rPr lang="en-US" dirty="0"/>
+              <a:t>Generally will still underestimate variation in data</a:t>
+            </a:r>
+          </a:p>
+        </p:txBody>
+      </p:sp>
+    </p:spTree>
+    <p:extLst>
+      <p:ext uri="{BB962C8B-B14F-4D97-AF65-F5344CB8AC3E}">
+        <p14:creationId xmlns:p14="http://schemas.microsoft.com/office/powerpoint/2010/main" val="3808227576"/>
+      </p:ext>
+    </p:extLst>
+  </p:cSld>
+  <p:clrMapOvr>
+    <a:masterClrMapping/>
+  </p:clrMapOvr>
+  <p:timing>
+    <p:tnLst>
+      <p:par>
+        <p:cTn id="1" dur="indefinite" restart="never" nodeType="tmRoot">
+          <p:childTnLst>
+            <p:seq concurrent="1" nextAc="seek">
+              <p:cTn id="2" dur="indefinite" nodeType="mainSeq">
+                <p:childTnLst>
+                  <p:par>
+                    <p:cTn id="3" fill="hold">
+                      <p:stCondLst>
+                        <p:cond delay="indefinite"/>
+                      </p:stCondLst>
+                      <p:childTnLst>
+                        <p:par>
+                          <p:cTn id="4" fill="hold">
+                            <p:stCondLst>
+                              <p:cond delay="0"/>
+                            </p:stCondLst>
+                            <p:childTnLst>
+                              <p:par>
+                                <p:cTn id="5" presetID="1" presetClass="entr" presetSubtype="0" fill="hold" grpId="0" nodeType="clickEffect">
+                                  <p:stCondLst>
+                                    <p:cond delay="0"/>
+                                  </p:stCondLst>
+                                  <p:childTnLst>
+                                    <p:set>
+                                      <p:cBhvr>
+                                        <p:cTn id="6" dur="1" fill="hold">
+                                          <p:stCondLst>
+                                            <p:cond delay="0"/>
+                                          </p:stCondLst>
+                                        </p:cTn>
+                                        <p:tgtEl>
+                                          <p:spTgt spid="2"/>
+                                        </p:tgtEl>
+                                        <p:attrNameLst>
+                                          <p:attrName>style.visibility</p:attrName>
+                                        </p:attrNameLst>
+                                      </p:cBhvr>
+                                      <p:to>
+                                        <p:strVal val="visible"/>
+                                      </p:to>
+                                    </p:set>
+                                  </p:childTnLst>
+                                </p:cTn>
+                              </p:par>
+                            </p:childTnLst>
+                          </p:cTn>
+                        </p:par>
+                      </p:childTnLst>
+                    </p:cTn>
+                  </p:par>
+                </p:childTnLst>
+              </p:cTn>
+              <p:prevCondLst>
+                <p:cond evt="onPrev" delay="0">
+                  <p:tgtEl>
+                    <p:sldTgt/>
+                  </p:tgtEl>
+                </p:cond>
+              </p:prevCondLst>
+              <p:nextCondLst>
+                <p:cond evt="onNext" delay="0">
+                  <p:tgtEl>
+                    <p:sldTgt/>
+                  </p:tgtEl>
+                </p:cond>
+              </p:nextCondLst>
+            </p:seq>
+          </p:childTnLst>
+        </p:cTn>
+      </p:par>
+    </p:tnLst>
+    <p:bldLst>
+      <p:bldP spid="2" grpId="0"/>
+    </p:bldLst>
+  </p:timing>
+</p:sld>
+</file>
+
+<file path=ppt/slides/slide42.xml><?xml version="1.0" encoding="utf-8"?>
+<p:sld xmlns:a="http://schemas.openxmlformats.org/drawingml/2006/main" xmlns:r="http://schemas.openxmlformats.org/officeDocument/2006/relationships" xmlns:p="http://schemas.openxmlformats.org/presentationml/2006/main">
+  <p:cSld>
+    <p:spTree>
+      <p:nvGrpSpPr>
+        <p:cNvPr id="1" name=""/>
+        <p:cNvGrpSpPr/>
+        <p:nvPr/>
+      </p:nvGrpSpPr>
+      <p:grpSpPr>
+        <a:xfrm>
+          <a:off x="0" y="0"/>
+          <a:ext cx="0" cy="0"/>
+          <a:chOff x="0" y="0"/>
+          <a:chExt cx="0" cy="0"/>
+        </a:xfrm>
+      </p:grpSpPr>
+      <p:sp>
+        <p:nvSpPr>
+          <p:cNvPr id="3" name="Title 2"/>
+          <p:cNvSpPr>
+            <a:spLocks noGrp="1"/>
+          </p:cNvSpPr>
+          <p:nvPr>
+            <p:ph type="title"/>
+          </p:nvPr>
+        </p:nvSpPr>
+        <p:spPr/>
+        <p:txBody>
+          <a:bodyPr/>
+          <a:lstStyle/>
+          <a:p>
+            <a:r>
+              <a:rPr lang="en-US" dirty="0"/>
+              <a:t>Imputing – k-Nearest Neighbor</a:t>
+            </a:r>
+          </a:p>
+        </p:txBody>
+      </p:sp>
+      <p:sp>
+        <p:nvSpPr>
+          <p:cNvPr id="2" name="Content Placeholder 1"/>
+          <p:cNvSpPr>
+            <a:spLocks noGrp="1"/>
+          </p:cNvSpPr>
+          <p:nvPr>
+            <p:ph type="body" idx="1"/>
+          </p:nvPr>
+        </p:nvSpPr>
+        <p:spPr/>
+        <p:txBody>
+          <a:bodyPr/>
+          <a:lstStyle/>
+          <a:p>
+            <a:r>
+              <a:rPr lang="en-US" dirty="0"/>
+              <a:t>More flexible option, capture more complexity in relationships in data</a:t>
+            </a:r>
+            <a:br>
+              <a:rPr lang="en-US" dirty="0"/>
+            </a:br>
+            <a:endParaRPr lang="en-US" dirty="0"/>
+          </a:p>
+          <a:p>
+            <a:r>
+              <a:rPr lang="en-US" dirty="0"/>
+              <a:t>Difficult to choose appropriate distance metric, value of k</a:t>
+            </a:r>
+            <a:br>
+              <a:rPr lang="en-US" dirty="0"/>
+            </a:br>
+            <a:endParaRPr lang="en-US" dirty="0"/>
+          </a:p>
+          <a:p>
+            <a:r>
+              <a:rPr lang="en-US" dirty="0"/>
+              <a:t>More computationally expensive than other methods of imputation</a:t>
+            </a:r>
+            <a:br>
+              <a:rPr lang="en-US" dirty="0"/>
+            </a:br>
+            <a:endParaRPr lang="en-US" dirty="0"/>
+          </a:p>
+          <a:p>
+            <a:r>
+              <a:rPr lang="en-US" dirty="0"/>
+              <a:t>Requires entire training set to calculate imputed values for new examples</a:t>
+            </a:r>
+          </a:p>
+        </p:txBody>
+      </p:sp>
+    </p:spTree>
+    <p:extLst>
+      <p:ext uri="{BB962C8B-B14F-4D97-AF65-F5344CB8AC3E}">
+        <p14:creationId xmlns:p14="http://schemas.microsoft.com/office/powerpoint/2010/main" val="3729575760"/>
+      </p:ext>
+    </p:extLst>
+  </p:cSld>
+  <p:clrMapOvr>
+    <a:masterClrMapping/>
+  </p:clrMapOvr>
+  <p:timing>
+    <p:tnLst>
+      <p:par>
+        <p:cTn id="1" dur="indefinite" restart="never" nodeType="tmRoot">
+          <p:childTnLst>
+            <p:seq concurrent="1" nextAc="seek">
+              <p:cTn id="2" dur="indefinite" nodeType="mainSeq">
+                <p:childTnLst>
+                  <p:par>
+                    <p:cTn id="3" fill="hold">
+                      <p:stCondLst>
+                        <p:cond delay="indefinite"/>
+                      </p:stCondLst>
+                      <p:childTnLst>
+                        <p:par>
+                          <p:cTn id="4" fill="hold">
+                            <p:stCondLst>
+                              <p:cond delay="0"/>
+                            </p:stCondLst>
+                            <p:childTnLst>
+                              <p:par>
+                                <p:cTn id="5" presetID="1" presetClass="entr" presetSubtype="0" fill="hold" grpId="0" nodeType="clickEffect">
+                                  <p:stCondLst>
+                                    <p:cond delay="0"/>
+                                  </p:stCondLst>
+                                  <p:childTnLst>
+                                    <p:set>
+                                      <p:cBhvr>
+                                        <p:cTn id="6" dur="1" fill="hold">
+                                          <p:stCondLst>
+                                            <p:cond delay="0"/>
+                                          </p:stCondLst>
+                                        </p:cTn>
+                                        <p:tgtEl>
+                                          <p:spTgt spid="2"/>
+                                        </p:tgtEl>
+                                        <p:attrNameLst>
+                                          <p:attrName>style.visibility</p:attrName>
+                                        </p:attrNameLst>
+                                      </p:cBhvr>
+                                      <p:to>
+                                        <p:strVal val="visible"/>
+                                      </p:to>
+                                    </p:set>
+                                  </p:childTnLst>
+                                </p:cTn>
+                              </p:par>
+                            </p:childTnLst>
+                          </p:cTn>
+                        </p:par>
+                      </p:childTnLst>
+                    </p:cTn>
+                  </p:par>
+                </p:childTnLst>
+              </p:cTn>
+              <p:prevCondLst>
+                <p:cond evt="onPrev" delay="0">
+                  <p:tgtEl>
+                    <p:sldTgt/>
+                  </p:tgtEl>
+                </p:cond>
+              </p:prevCondLst>
+              <p:nextCondLst>
+                <p:cond evt="onNext" delay="0">
+                  <p:tgtEl>
+                    <p:sldTgt/>
+                  </p:tgtEl>
+                </p:cond>
+              </p:nextCondLst>
+            </p:seq>
+          </p:childTnLst>
+        </p:cTn>
+      </p:par>
+    </p:tnLst>
+    <p:bldLst>
+      <p:bldP spid="2" grpId="0"/>
+    </p:bldLst>
+  </p:timing>
+</p:sld>
+</file>
+
+<file path=ppt/slides/slide43.xml><?xml version="1.0" encoding="utf-8"?>
+<p:sld xmlns:a="http://schemas.openxmlformats.org/drawingml/2006/main" xmlns:r="http://schemas.openxmlformats.org/officeDocument/2006/relationships" xmlns:p="http://schemas.openxmlformats.org/presentationml/2006/main">
+  <p:cSld>
+    <p:spTree>
+      <p:nvGrpSpPr>
+        <p:cNvPr id="1" name=""/>
+        <p:cNvGrpSpPr/>
+        <p:nvPr/>
+      </p:nvGrpSpPr>
+      <p:grpSpPr>
+        <a:xfrm>
+          <a:off x="0" y="0"/>
+          <a:ext cx="0" cy="0"/>
+          <a:chOff x="0" y="0"/>
+          <a:chExt cx="0" cy="0"/>
+        </a:xfrm>
+      </p:grpSpPr>
+      <p:sp>
+        <p:nvSpPr>
+          <p:cNvPr id="3" name="Title 2"/>
+          <p:cNvSpPr>
+            <a:spLocks noGrp="1"/>
+          </p:cNvSpPr>
+          <p:nvPr>
+            <p:ph type="title"/>
+          </p:nvPr>
+        </p:nvSpPr>
+        <p:spPr/>
+        <p:txBody>
+          <a:bodyPr/>
+          <a:lstStyle/>
+          <a:p>
+            <a:r>
+              <a:rPr lang="en-US" dirty="0"/>
+              <a:t>Imputing – Multiple Imputation</a:t>
+            </a:r>
+          </a:p>
+        </p:txBody>
+      </p:sp>
+      <p:sp>
+        <p:nvSpPr>
+          <p:cNvPr id="2" name="Content Placeholder 1"/>
+          <p:cNvSpPr>
+            <a:spLocks noGrp="1"/>
+          </p:cNvSpPr>
+          <p:nvPr>
+            <p:ph type="body" idx="1"/>
+          </p:nvPr>
+        </p:nvSpPr>
+        <p:spPr/>
+        <p:txBody>
+          <a:bodyPr/>
+          <a:lstStyle/>
+          <a:p>
+            <a:r>
+              <a:rPr lang="en-US" dirty="0"/>
+              <a:t>Create multiple “complete” datasets with different values using different regression models</a:t>
+            </a:r>
+            <a:br>
+              <a:rPr lang="en-US" dirty="0"/>
+            </a:br>
+            <a:endParaRPr lang="en-US" dirty="0"/>
+          </a:p>
+          <a:p>
+            <a:r>
+              <a:rPr lang="en-US" dirty="0"/>
+              <a:t>Helps analyze sensitivity to handling of missing values</a:t>
+            </a:r>
+            <a:br>
+              <a:rPr lang="en-US" dirty="0"/>
+            </a:br>
+            <a:endParaRPr lang="en-US" dirty="0"/>
+          </a:p>
+          <a:p>
+            <a:r>
+              <a:rPr lang="en-US" dirty="0"/>
+              <a:t>Much more computationally expensive, both for imputation and downstream modeling</a:t>
+            </a:r>
+            <a:br>
+              <a:rPr lang="en-US" dirty="0"/>
+            </a:br>
+            <a:endParaRPr lang="en-US" dirty="0"/>
+          </a:p>
+          <a:p>
+            <a:r>
+              <a:rPr lang="en-US" dirty="0"/>
+              <a:t>Can provide better representation of variability in data</a:t>
+            </a:r>
+          </a:p>
+        </p:txBody>
+      </p:sp>
+    </p:spTree>
+    <p:extLst>
+      <p:ext uri="{BB962C8B-B14F-4D97-AF65-F5344CB8AC3E}">
+        <p14:creationId xmlns:p14="http://schemas.microsoft.com/office/powerpoint/2010/main" val="2069799902"/>
+      </p:ext>
+    </p:extLst>
+  </p:cSld>
+  <p:clrMapOvr>
+    <a:masterClrMapping/>
+  </p:clrMapOvr>
+  <p:timing>
+    <p:tnLst>
+      <p:par>
+        <p:cTn id="1" dur="indefinite" restart="never" nodeType="tmRoot">
+          <p:childTnLst>
+            <p:seq concurrent="1" nextAc="seek">
+              <p:cTn id="2" dur="indefinite" nodeType="mainSeq">
+                <p:childTnLst>
+                  <p:par>
+                    <p:cTn id="3" fill="hold">
+                      <p:stCondLst>
+                        <p:cond delay="indefinite"/>
+                      </p:stCondLst>
+                      <p:childTnLst>
+                        <p:par>
+                          <p:cTn id="4" fill="hold">
+                            <p:stCondLst>
+                              <p:cond delay="0"/>
+                            </p:stCondLst>
+                            <p:childTnLst>
+                              <p:par>
+                                <p:cTn id="5" presetID="1" presetClass="entr" presetSubtype="0" fill="hold" grpId="0" nodeType="clickEffect">
+                                  <p:stCondLst>
+                                    <p:cond delay="0"/>
+                                  </p:stCondLst>
+                                  <p:childTnLst>
+                                    <p:set>
+                                      <p:cBhvr>
+                                        <p:cTn id="6" dur="1" fill="hold">
+                                          <p:stCondLst>
+                                            <p:cond delay="0"/>
+                                          </p:stCondLst>
+                                        </p:cTn>
+                                        <p:tgtEl>
+                                          <p:spTgt spid="2"/>
+                                        </p:tgtEl>
+                                        <p:attrNameLst>
+                                          <p:attrName>style.visibility</p:attrName>
+                                        </p:attrNameLst>
+                                      </p:cBhvr>
+                                      <p:to>
+                                        <p:strVal val="visible"/>
+                                      </p:to>
+                                    </p:set>
+                                  </p:childTnLst>
+                                </p:cTn>
+                              </p:par>
+                            </p:childTnLst>
+                          </p:cTn>
+                        </p:par>
+                      </p:childTnLst>
+                    </p:cTn>
+                  </p:par>
+                </p:childTnLst>
+              </p:cTn>
+              <p:prevCondLst>
+                <p:cond evt="onPrev" delay="0">
+                  <p:tgtEl>
+                    <p:sldTgt/>
+                  </p:tgtEl>
+                </p:cond>
+              </p:prevCondLst>
+              <p:nextCondLst>
+                <p:cond evt="onNext" delay="0">
+                  <p:tgtEl>
+                    <p:sldTgt/>
+                  </p:tgtEl>
+                </p:cond>
+              </p:nextCondLst>
+            </p:seq>
+          </p:childTnLst>
+        </p:cTn>
+      </p:par>
+    </p:tnLst>
+    <p:bldLst>
+      <p:bldP spid="2" grpId="0"/>
+    </p:bldLst>
+  </p:timing>
+</p:sld>
+</file>
+
+<file path=ppt/slides/slide44.xml><?xml version="1.0" encoding="utf-8"?>
+<p:sld xmlns:a="http://schemas.openxmlformats.org/drawingml/2006/main" xmlns:r="http://schemas.openxmlformats.org/officeDocument/2006/relationships" xmlns:p="http://schemas.openxmlformats.org/presentationml/2006/main">
+  <p:cSld>
+    <p:spTree>
+      <p:nvGrpSpPr>
+        <p:cNvPr id="1" name=""/>
+        <p:cNvGrpSpPr/>
+        <p:nvPr/>
+      </p:nvGrpSpPr>
+      <p:grpSpPr>
+        <a:xfrm>
+          <a:off x="0" y="0"/>
+          <a:ext cx="0" cy="0"/>
+          <a:chOff x="0" y="0"/>
+          <a:chExt cx="0" cy="0"/>
+        </a:xfrm>
+      </p:grpSpPr>
+      <p:sp>
+        <p:nvSpPr>
           <p:cNvPr id="2" name="Title 1">
             <a:extLst>
               <a:ext uri="{FF2B5EF4-FFF2-40B4-BE49-F238E27FC236}">
@@ -23037,7 +23311,7 @@
 </p:sld>
 </file>
 
-<file path=ppt/slides/slide42.xml><?xml version="1.0" encoding="utf-8"?>
+<file path=ppt/slides/slide45.xml><?xml version="1.0" encoding="utf-8"?>
 <p:sld xmlns:a="http://schemas.openxmlformats.org/drawingml/2006/main" xmlns:r="http://schemas.openxmlformats.org/officeDocument/2006/relationships" xmlns:p="http://schemas.openxmlformats.org/presentationml/2006/main">
   <p:cSld>
     <p:spTree>
@@ -23139,7 +23413,7 @@
 </p:sld>
 </file>
 
-<file path=ppt/slides/slide43.xml><?xml version="1.0" encoding="utf-8"?>
+<file path=ppt/slides/slide46.xml><?xml version="1.0" encoding="utf-8"?>
 <p:sld xmlns:a="http://schemas.openxmlformats.org/drawingml/2006/main" xmlns:r="http://schemas.openxmlformats.org/officeDocument/2006/relationships" xmlns:p="http://schemas.openxmlformats.org/presentationml/2006/main">
   <p:cSld>
     <p:spTree>
@@ -24164,6 +24438,36 @@
           </a:prstGeom>
         </p:spPr>
       </p:pic>
+      <p:pic>
+        <p:nvPicPr>
+          <p:cNvPr id="5" name="Picture 4">
+            <a:extLst>
+              <a:ext uri="{FF2B5EF4-FFF2-40B4-BE49-F238E27FC236}">
+                <a16:creationId xmlns:a16="http://schemas.microsoft.com/office/drawing/2014/main" id="{791FB6CB-4E06-4853-9467-61A6B4E8C10C}"/>
+              </a:ext>
+            </a:extLst>
+          </p:cNvPr>
+          <p:cNvPicPr>
+            <a:picLocks noChangeAspect="1"/>
+          </p:cNvPicPr>
+          <p:nvPr/>
+        </p:nvPicPr>
+        <p:blipFill>
+          <a:blip r:embed="rId12"/>
+          <a:stretch>
+            <a:fillRect/>
+          </a:stretch>
+        </p:blipFill>
+        <p:spPr>
+          <a:xfrm>
+            <a:off x="2626024" y="1460875"/>
+            <a:ext cx="8661946" cy="3936250"/>
+          </a:xfrm>
+          <a:prstGeom prst="rect">
+            <a:avLst/>
+          </a:prstGeom>
+        </p:spPr>
+      </p:pic>
     </p:spTree>
     <p:custDataLst>
       <p:tags r:id="rId1"/>
@@ -24336,6 +24640,15 @@
             <a:r>
               <a:rPr lang="en-US" dirty="0"/>
               <a:t>Dealing with Missing Data</a:t>
+            </a:r>
+          </a:p>
+          <a:p>
+            <a:endParaRPr lang="en-US" dirty="0"/>
+          </a:p>
+          <a:p>
+            <a:r>
+              <a:rPr lang="en-US" dirty="0"/>
+              <a:t>How to do features and imputation in Triage</a:t>
             </a:r>
           </a:p>
           <a:p>
